--- a/gaydos-law/Gaydos Law_September 15, 2026_Proposal.pptx
+++ b/gaydos-law/Gaydos Law_September 15, 2026_Proposal.pptx
@@ -6418,7 +6418,7 @@
                 </a:solidFill>
                 <a:latin typeface="Poppins"/>
               </a:rPr>
-              <a:t>Relaunch tracked Google Ads for PI and estate cases</a:t>
+              <a:t>Launch LSA for Family Law and Probate leads</a:t>
             </a:r>
           </a:p>
         </p:txBody>
@@ -6664,7 +6664,7 @@
                 </a:solidFill>
                 <a:latin typeface="Poppins"/>
               </a:rPr>
-              <a:t>Build geo pages for all 7 counties served</a:t>
+              <a:t>Build dedicated Family Law and Probate pages</a:t>
             </a:r>
           </a:p>
         </p:txBody>
@@ -6787,7 +6787,7 @@
                 </a:solidFill>
                 <a:latin typeface="Poppins"/>
               </a:rPr>
-              <a:t>Add estate planning and probate landing pages</a:t>
+              <a:t>Add PPC at month 3 to scale to $7,500/mo</a:t>
             </a:r>
           </a:p>
         </p:txBody>
@@ -8182,7 +8182,7 @@
                 </a:solidFill>
                 <a:latin typeface="Poppins"/>
               </a:rPr>
-              <a:t>Launch Elite Coach Plus accountability framework</a:t>
+              <a:t>Prove the LSA channel before scaling ad spend</a:t>
             </a:r>
           </a:p>
         </p:txBody>
@@ -8815,7 +8815,7 @@
                 </a:solidFill>
                 <a:latin typeface="Poppins"/>
               </a:rPr>
-              <a:t>FULL SERVICE MARKETING — STARTER</a:t>
+              <a:t>FULL SERVICE MARKETING — ESSENTIALS</a:t>
             </a:r>
           </a:p>
         </p:txBody>
@@ -8848,7 +8848,7 @@
                 </a:solidFill>
                 <a:latin typeface="Poppins"/>
               </a:rPr>
-              <a:t>$4,997</a:t>
+              <a:t>$3,797</a:t>
             </a:r>
           </a:p>
         </p:txBody>
@@ -8914,7 +8914,7 @@
                 </a:solidFill>
                 <a:latin typeface="Poppins"/>
               </a:rPr>
-              <a:t>$5,697/mo</a:t>
+              <a:t>$3,797/mo</a:t>
             </a:r>
           </a:p>
         </p:txBody>
@@ -8992,7 +8992,7 @@
                 </a:solidFill>
                 <a:latin typeface="Poppins"/>
               </a:rPr>
-              <a:t>Google Ads · SEO fixes · Geo/practice pages · GBP management</a:t>
+              <a:t>LSA for Family Law &amp; Probate · SEO fixes · Landing pages</a:t>
             </a:r>
           </a:p>
         </p:txBody>
@@ -9005,53 +9005,8 @@
         </p:nvSpPr>
         <p:spPr>
           <a:xfrm>
-            <a:off x="201168" y="2139696"/>
-            <a:ext cx="4133087" cy="1024128"/>
-          </a:xfrm>
-          <a:prstGeom prst="rect">
-            <a:avLst/>
-          </a:prstGeom>
-          <a:solidFill>
-            <a:srgbClr val="FFFFFF"/>
-          </a:solidFill>
-          <a:ln>
-            <a:solidFill>
-              <a:srgbClr val="FFFFFF"/>
-            </a:solidFill>
-          </a:ln>
-        </p:spPr>
-        <p:style>
-          <a:lnRef idx="1">
-            <a:schemeClr val="accent1"/>
-          </a:lnRef>
-          <a:fillRef idx="3">
-            <a:schemeClr val="accent1"/>
-          </a:fillRef>
-          <a:effectRef idx="2">
-            <a:schemeClr val="accent1"/>
-          </a:effectRef>
-          <a:fontRef idx="minor">
-            <a:schemeClr val="lt1"/>
-          </a:fontRef>
-        </p:style>
-        <p:txBody>
-          <a:bodyPr rtlCol="0" anchor="ctr"/>
-          <a:lstStyle/>
-          <a:p>
-            <a:pPr algn="ctr"/>
-          </a:p>
-        </p:txBody>
-      </p:sp>
-      <p:sp>
-        <p:nvSpPr>
-          <p:cNvPr id="14" name="Rectangle 13"/>
-          <p:cNvSpPr/>
-          <p:nvPr/>
-        </p:nvSpPr>
-        <p:spPr>
-          <a:xfrm>
-            <a:off x="201168" y="2139696"/>
-            <a:ext cx="182880" cy="1024128"/>
+            <a:off x="201168" y="3255264"/>
+            <a:ext cx="4133087" cy="658368"/>
           </a:xfrm>
           <a:prstGeom prst="rect">
             <a:avLst/>
@@ -9089,14 +9044,47 @@
       </p:sp>
       <p:sp>
         <p:nvSpPr>
+          <p:cNvPr id="14" name="TextBox 13"/>
+          <p:cNvSpPr txBox="1"/>
+          <p:nvPr/>
+        </p:nvSpPr>
+        <p:spPr>
+          <a:xfrm>
+            <a:off x="384048" y="3291840"/>
+            <a:ext cx="1645920" cy="237744"/>
+          </a:xfrm>
+          <a:prstGeom prst="rect">
+            <a:avLst/>
+          </a:prstGeom>
+          <a:noFill/>
+        </p:spPr>
+        <p:txBody>
+          <a:bodyPr wrap="square"/>
+          <a:lstStyle/>
+          <a:p>
+            <a:pPr algn="l"/>
+            <a:r>
+              <a:rPr sz="800" b="1" i="0">
+                <a:solidFill>
+                  <a:srgbClr val="7CA0C0"/>
+                </a:solidFill>
+                <a:latin typeface="Poppins"/>
+              </a:rPr>
+              <a:t>BUNDLE TOTAL</a:t>
+            </a:r>
+          </a:p>
+        </p:txBody>
+      </p:sp>
+      <p:sp>
+        <p:nvSpPr>
           <p:cNvPr id="15" name="TextBox 14"/>
           <p:cNvSpPr txBox="1"/>
           <p:nvPr/>
         </p:nvSpPr>
         <p:spPr>
           <a:xfrm>
-            <a:off x="475488" y="2231136"/>
-            <a:ext cx="3803904" cy="201168"/>
+            <a:off x="384048" y="3493008"/>
+            <a:ext cx="2194560" cy="347472"/>
           </a:xfrm>
           <a:prstGeom prst="rect">
             <a:avLst/>
@@ -9109,13 +9097,13 @@
           <a:p>
             <a:pPr algn="l"/>
             <a:r>
-              <a:rPr sz="800" b="1" i="0">
-                <a:solidFill>
-                  <a:srgbClr val="003A59"/>
+              <a:rPr sz="2200" b="1" i="0">
+                <a:solidFill>
+                  <a:srgbClr val="0091C9"/>
                 </a:solidFill>
                 <a:latin typeface="Poppins"/>
               </a:rPr>
-              <a:t>ELITE COACH PLUS</a:t>
+              <a:t>$3,797 / mo</a:t>
             </a:r>
           </a:p>
         </p:txBody>
@@ -9128,8 +9116,8 @@
         </p:nvSpPr>
         <p:spPr>
           <a:xfrm>
-            <a:off x="475488" y="2414015"/>
-            <a:ext cx="1828800" cy="438912"/>
+            <a:off x="2670048" y="3493008"/>
+            <a:ext cx="1737360" cy="347472"/>
           </a:xfrm>
           <a:prstGeom prst="rect">
             <a:avLst/>
@@ -9142,99 +9130,33 @@
           <a:p>
             <a:pPr algn="l"/>
             <a:r>
-              <a:rPr sz="3200" b="1" i="0">
-                <a:solidFill>
-                  <a:srgbClr val="003A59"/>
+              <a:rPr sz="800" b="0" i="0">
+                <a:solidFill>
+                  <a:srgbClr val="7CA0C0"/>
                 </a:solidFill>
                 <a:latin typeface="Poppins"/>
               </a:rPr>
-              <a:t>$3,200</a:t>
-            </a:r>
-          </a:p>
-        </p:txBody>
-      </p:sp>
-      <p:sp>
-        <p:nvSpPr>
-          <p:cNvPr id="17" name="TextBox 16"/>
-          <p:cNvSpPr txBox="1"/>
-          <p:nvPr/>
-        </p:nvSpPr>
-        <p:spPr>
-          <a:xfrm>
-            <a:off x="1865376" y="2523744"/>
-            <a:ext cx="420624" cy="256032"/>
-          </a:xfrm>
-          <a:prstGeom prst="rect">
-            <a:avLst/>
-          </a:prstGeom>
-          <a:noFill/>
-        </p:spPr>
-        <p:txBody>
-          <a:bodyPr wrap="square"/>
-          <a:lstStyle/>
-          <a:p>
-            <a:pPr algn="l"/>
-            <a:r>
-              <a:rPr sz="1100" b="0" i="0">
-                <a:solidFill>
-                  <a:srgbClr val="64748B"/>
-                </a:solidFill>
-                <a:latin typeface="Poppins"/>
-              </a:rPr>
-              <a:t>/mo</a:t>
-            </a:r>
-          </a:p>
-        </p:txBody>
-      </p:sp>
-      <p:sp>
-        <p:nvSpPr>
-          <p:cNvPr id="18" name="TextBox 17"/>
-          <p:cNvSpPr txBox="1"/>
-          <p:nvPr/>
-        </p:nvSpPr>
-        <p:spPr>
-          <a:xfrm>
-            <a:off x="2322576" y="2542032"/>
-            <a:ext cx="914400" cy="237744"/>
-          </a:xfrm>
-          <a:prstGeom prst="rect">
-            <a:avLst/>
-          </a:prstGeom>
-          <a:noFill/>
-        </p:spPr>
-        <p:txBody>
-          <a:bodyPr wrap="square"/>
-          <a:lstStyle/>
-          <a:p>
-            <a:pPr algn="l"/>
-            <a:r>
-              <a:rPr sz="1100" b="0" i="0">
-                <a:solidFill>
-                  <a:srgbClr val="334155"/>
-                </a:solidFill>
-                <a:latin typeface="Poppins"/>
-              </a:rPr>
-              <a:t>$3,497/mo</a:t>
-            </a:r>
-          </a:p>
-        </p:txBody>
-      </p:sp>
-      <p:sp>
-        <p:nvSpPr>
-          <p:cNvPr id="19" name="Rectangle 18"/>
+              <a:t>Stand-alone — no bundle discount</a:t>
+            </a:r>
+          </a:p>
+        </p:txBody>
+      </p:sp>
+      <p:sp>
+        <p:nvSpPr>
+          <p:cNvPr id="17" name="Rectangle 16"/>
           <p:cNvSpPr/>
           <p:nvPr/>
         </p:nvSpPr>
         <p:spPr>
           <a:xfrm>
-            <a:off x="2322576" y="2642615"/>
-            <a:ext cx="804672" cy="9144"/>
+            <a:off x="201168" y="3968496"/>
+            <a:ext cx="4133087" cy="402336"/>
           </a:xfrm>
           <a:prstGeom prst="rect">
             <a:avLst/>
           </a:prstGeom>
           <a:solidFill>
-            <a:srgbClr val="334155"/>
+            <a:srgbClr val="EEF2F8"/>
           </a:solidFill>
           <a:ln>
             <a:solidFill>
@@ -9266,14 +9188,92 @@
       </p:sp>
       <p:sp>
         <p:nvSpPr>
+          <p:cNvPr id="18" name="TextBox 17"/>
+          <p:cNvSpPr txBox="1"/>
+          <p:nvPr/>
+        </p:nvSpPr>
+        <p:spPr>
+          <a:xfrm>
+            <a:off x="329184" y="3995928"/>
+            <a:ext cx="3931920" cy="347472"/>
+          </a:xfrm>
+          <a:prstGeom prst="rect">
+            <a:avLst/>
+          </a:prstGeom>
+          <a:noFill/>
+        </p:spPr>
+        <p:txBody>
+          <a:bodyPr wrap="square"/>
+          <a:lstStyle/>
+          <a:p>
+            <a:pPr algn="l"/>
+            <a:r>
+              <a:rPr sz="800" b="0" i="0">
+                <a:solidFill>
+                  <a:srgbClr val="64748B"/>
+                </a:solidFill>
+                <a:latin typeface="Poppins"/>
+              </a:rPr>
+              <a:t>+ Recommended ad spend: $3,000–$5,000/mo, ramping to $7,500/mo at month 3</a:t>
+            </a:r>
+          </a:p>
+        </p:txBody>
+      </p:sp>
+      <p:sp>
+        <p:nvSpPr>
+          <p:cNvPr id="19" name="Rectangle 18"/>
+          <p:cNvSpPr/>
+          <p:nvPr/>
+        </p:nvSpPr>
+        <p:spPr>
+          <a:xfrm>
+            <a:off x="4535424" y="1024128"/>
+            <a:ext cx="4407408" cy="1316736"/>
+          </a:xfrm>
+          <a:prstGeom prst="rect">
+            <a:avLst/>
+          </a:prstGeom>
+          <a:solidFill>
+            <a:srgbClr val="ECFDF5"/>
+          </a:solidFill>
+          <a:ln>
+            <a:solidFill>
+              <a:srgbClr val="FFFFFF"/>
+            </a:solidFill>
+          </a:ln>
+        </p:spPr>
+        <p:style>
+          <a:lnRef idx="1">
+            <a:schemeClr val="accent1"/>
+          </a:lnRef>
+          <a:fillRef idx="3">
+            <a:schemeClr val="accent1"/>
+          </a:fillRef>
+          <a:effectRef idx="2">
+            <a:schemeClr val="accent1"/>
+          </a:effectRef>
+          <a:fontRef idx="minor">
+            <a:schemeClr val="lt1"/>
+          </a:fontRef>
+        </p:style>
+        <p:txBody>
+          <a:bodyPr rtlCol="0" anchor="ctr"/>
+          <a:lstStyle/>
+          <a:p>
+            <a:pPr algn="ctr"/>
+          </a:p>
+        </p:txBody>
+      </p:sp>
+      <p:sp>
+        <p:nvSpPr>
           <p:cNvPr id="20" name="TextBox 19"/>
           <p:cNvSpPr txBox="1"/>
           <p:nvPr/>
         </p:nvSpPr>
         <p:spPr>
           <a:xfrm>
-            <a:off x="475488" y="2907791"/>
-            <a:ext cx="3803904" cy="201168"/>
+            <a:off x="4700016" y="1078992"/>
+            <a:ext cx="4133087" cy="219456"/>
           </a:xfrm>
           <a:prstGeom prst="rect">
             <a:avLst/>
@@ -9286,27 +9286,303 @@
           <a:p>
             <a:pPr algn="l"/>
             <a:r>
-              <a:rPr sz="800" b="0" i="0">
-                <a:solidFill>
-                  <a:srgbClr val="64748B"/>
+              <a:rPr sz="800" b="1" i="0">
+                <a:solidFill>
+                  <a:srgbClr val="065F46"/>
                 </a:solidFill>
                 <a:latin typeface="Poppins"/>
               </a:rPr>
-              <a:t>1:1 coaching · Group masterminds · Accountability framework</a:t>
-            </a:r>
-          </a:p>
-        </p:txBody>
-      </p:sp>
-      <p:sp>
-        <p:nvSpPr>
-          <p:cNvPr id="21" name="Rectangle 20"/>
+              <a:t>PROJECTED RETURN ON AD SPEND</a:t>
+            </a:r>
+          </a:p>
+        </p:txBody>
+      </p:sp>
+      <p:sp>
+        <p:nvSpPr>
+          <p:cNvPr id="21" name="TextBox 20"/>
+          <p:cNvSpPr txBox="1"/>
+          <p:nvPr/>
+        </p:nvSpPr>
+        <p:spPr>
+          <a:xfrm>
+            <a:off x="4700016" y="1335024"/>
+            <a:ext cx="1920240" cy="256032"/>
+          </a:xfrm>
+          <a:prstGeom prst="rect">
+            <a:avLst/>
+          </a:prstGeom>
+          <a:noFill/>
+        </p:spPr>
+        <p:txBody>
+          <a:bodyPr wrap="square"/>
+          <a:lstStyle/>
+          <a:p>
+            <a:pPr algn="l"/>
+            <a:r>
+              <a:rPr sz="900" b="1" i="0">
+                <a:solidFill>
+                  <a:srgbClr val="1E293B"/>
+                </a:solidFill>
+                <a:latin typeface="Poppins"/>
+              </a:rPr>
+              <a:t>Average case value:</a:t>
+            </a:r>
+          </a:p>
+        </p:txBody>
+      </p:sp>
+      <p:sp>
+        <p:nvSpPr>
+          <p:cNvPr id="22" name="TextBox 21"/>
+          <p:cNvSpPr txBox="1"/>
+          <p:nvPr/>
+        </p:nvSpPr>
+        <p:spPr>
+          <a:xfrm>
+            <a:off x="6729984" y="1335024"/>
+            <a:ext cx="2103120" cy="256032"/>
+          </a:xfrm>
+          <a:prstGeom prst="rect">
+            <a:avLst/>
+          </a:prstGeom>
+          <a:noFill/>
+        </p:spPr>
+        <p:txBody>
+          <a:bodyPr wrap="square"/>
+          <a:lstStyle/>
+          <a:p>
+            <a:pPr algn="l"/>
+            <a:r>
+              <a:rPr sz="900" b="0" i="0">
+                <a:solidFill>
+                  <a:srgbClr val="065F46"/>
+                </a:solidFill>
+                <a:latin typeface="Poppins"/>
+              </a:rPr>
+              <a:t>FL $5K · Probate $20K</a:t>
+            </a:r>
+          </a:p>
+        </p:txBody>
+      </p:sp>
+      <p:sp>
+        <p:nvSpPr>
+          <p:cNvPr id="23" name="Rectangle 22"/>
           <p:cNvSpPr/>
           <p:nvPr/>
         </p:nvSpPr>
         <p:spPr>
           <a:xfrm>
-            <a:off x="201168" y="3255264"/>
-            <a:ext cx="4133087" cy="658368"/>
+            <a:off x="4645152" y="1609344"/>
+            <a:ext cx="4187952" cy="310896"/>
+          </a:xfrm>
+          <a:prstGeom prst="rect">
+            <a:avLst/>
+          </a:prstGeom>
+          <a:solidFill>
+            <a:srgbClr val="D1FAE5"/>
+          </a:solidFill>
+          <a:ln>
+            <a:solidFill>
+              <a:srgbClr val="FFFFFF"/>
+            </a:solidFill>
+          </a:ln>
+        </p:spPr>
+        <p:style>
+          <a:lnRef idx="1">
+            <a:schemeClr val="accent1"/>
+          </a:lnRef>
+          <a:fillRef idx="3">
+            <a:schemeClr val="accent1"/>
+          </a:fillRef>
+          <a:effectRef idx="2">
+            <a:schemeClr val="accent1"/>
+          </a:effectRef>
+          <a:fontRef idx="minor">
+            <a:schemeClr val="lt1"/>
+          </a:fontRef>
+        </p:style>
+        <p:txBody>
+          <a:bodyPr rtlCol="0" anchor="ctr"/>
+          <a:lstStyle/>
+          <a:p>
+            <a:pPr algn="ctr"/>
+          </a:p>
+        </p:txBody>
+      </p:sp>
+      <p:sp>
+        <p:nvSpPr>
+          <p:cNvPr id="24" name="TextBox 23"/>
+          <p:cNvSpPr txBox="1"/>
+          <p:nvPr/>
+        </p:nvSpPr>
+        <p:spPr>
+          <a:xfrm>
+            <a:off x="4700016" y="1645920"/>
+            <a:ext cx="1920240" cy="256032"/>
+          </a:xfrm>
+          <a:prstGeom prst="rect">
+            <a:avLst/>
+          </a:prstGeom>
+          <a:noFill/>
+        </p:spPr>
+        <p:txBody>
+          <a:bodyPr wrap="square"/>
+          <a:lstStyle/>
+          <a:p>
+            <a:pPr algn="l"/>
+            <a:r>
+              <a:rPr sz="900" b="1" i="0">
+                <a:solidFill>
+                  <a:srgbClr val="1E293B"/>
+                </a:solidFill>
+                <a:latin typeface="Poppins"/>
+              </a:rPr>
+              <a:t>Phase 1 — LSA  (~7 cases/mo):</a:t>
+            </a:r>
+          </a:p>
+        </p:txBody>
+      </p:sp>
+      <p:sp>
+        <p:nvSpPr>
+          <p:cNvPr id="25" name="TextBox 24"/>
+          <p:cNvSpPr txBox="1"/>
+          <p:nvPr/>
+        </p:nvSpPr>
+        <p:spPr>
+          <a:xfrm>
+            <a:off x="6729984" y="1645920"/>
+            <a:ext cx="2103120" cy="256032"/>
+          </a:xfrm>
+          <a:prstGeom prst="rect">
+            <a:avLst/>
+          </a:prstGeom>
+          <a:noFill/>
+        </p:spPr>
+        <p:txBody>
+          <a:bodyPr wrap="square"/>
+          <a:lstStyle/>
+          <a:p>
+            <a:pPr algn="l"/>
+            <a:r>
+              <a:rPr sz="900" b="1" i="0">
+                <a:solidFill>
+                  <a:srgbClr val="065F46"/>
+                </a:solidFill>
+                <a:latin typeface="Poppins"/>
+              </a:rPr>
+              <a:t>~$95,000 value · 23.8× return</a:t>
+            </a:r>
+          </a:p>
+        </p:txBody>
+      </p:sp>
+      <p:sp>
+        <p:nvSpPr>
+          <p:cNvPr id="26" name="TextBox 25"/>
+          <p:cNvSpPr txBox="1"/>
+          <p:nvPr/>
+        </p:nvSpPr>
+        <p:spPr>
+          <a:xfrm>
+            <a:off x="4700016" y="1956816"/>
+            <a:ext cx="1920240" cy="256032"/>
+          </a:xfrm>
+          <a:prstGeom prst="rect">
+            <a:avLst/>
+          </a:prstGeom>
+          <a:noFill/>
+        </p:spPr>
+        <p:txBody>
+          <a:bodyPr wrap="square"/>
+          <a:lstStyle/>
+          <a:p>
+            <a:pPr algn="l"/>
+            <a:r>
+              <a:rPr sz="900" b="1" i="0">
+                <a:solidFill>
+                  <a:srgbClr val="1E293B"/>
+                </a:solidFill>
+                <a:latin typeface="Poppins"/>
+              </a:rPr>
+              <a:t>Phase 2 — LSA+PPC  (~13 cases/mo):</a:t>
+            </a:r>
+          </a:p>
+        </p:txBody>
+      </p:sp>
+      <p:sp>
+        <p:nvSpPr>
+          <p:cNvPr id="27" name="TextBox 26"/>
+          <p:cNvSpPr txBox="1"/>
+          <p:nvPr/>
+        </p:nvSpPr>
+        <p:spPr>
+          <a:xfrm>
+            <a:off x="6729984" y="1956816"/>
+            <a:ext cx="2103120" cy="256032"/>
+          </a:xfrm>
+          <a:prstGeom prst="rect">
+            <a:avLst/>
+          </a:prstGeom>
+          <a:noFill/>
+        </p:spPr>
+        <p:txBody>
+          <a:bodyPr wrap="square"/>
+          <a:lstStyle/>
+          <a:p>
+            <a:pPr algn="l"/>
+            <a:r>
+              <a:rPr sz="900" b="1" i="0">
+                <a:solidFill>
+                  <a:srgbClr val="065F46"/>
+                </a:solidFill>
+                <a:latin typeface="Poppins"/>
+              </a:rPr>
+              <a:t>~$170,000 value · 22.7× return</a:t>
+            </a:r>
+          </a:p>
+        </p:txBody>
+      </p:sp>
+      <p:sp>
+        <p:nvSpPr>
+          <p:cNvPr id="28" name="TextBox 27"/>
+          <p:cNvSpPr txBox="1"/>
+          <p:nvPr/>
+        </p:nvSpPr>
+        <p:spPr>
+          <a:xfrm>
+            <a:off x="4535424" y="2468880"/>
+            <a:ext cx="4407408" cy="237744"/>
+          </a:xfrm>
+          <a:prstGeom prst="rect">
+            <a:avLst/>
+          </a:prstGeom>
+          <a:noFill/>
+        </p:spPr>
+        <p:txBody>
+          <a:bodyPr wrap="square"/>
+          <a:lstStyle/>
+          <a:p>
+            <a:pPr algn="l"/>
+            <a:r>
+              <a:rPr sz="800" b="1" i="0">
+                <a:solidFill>
+                  <a:srgbClr val="003A59"/>
+                </a:solidFill>
+                <a:latin typeface="Poppins"/>
+              </a:rPr>
+              <a:t>WHAT HAPPENS IN THE FIRST 90 DAYS</a:t>
+            </a:r>
+          </a:p>
+        </p:txBody>
+      </p:sp>
+      <p:sp>
+        <p:nvSpPr>
+          <p:cNvPr id="29" name="Rectangle 28"/>
+          <p:cNvSpPr/>
+          <p:nvPr/>
+        </p:nvSpPr>
+        <p:spPr>
+          <a:xfrm>
+            <a:off x="4590288" y="2724912"/>
+            <a:ext cx="256032" cy="256032"/>
           </a:xfrm>
           <a:prstGeom prst="rect">
             <a:avLst/>
@@ -9344,14 +9620,14 @@
       </p:sp>
       <p:sp>
         <p:nvSpPr>
-          <p:cNvPr id="22" name="TextBox 21"/>
+          <p:cNvPr id="30" name="TextBox 29"/>
           <p:cNvSpPr txBox="1"/>
           <p:nvPr/>
         </p:nvSpPr>
         <p:spPr>
           <a:xfrm>
-            <a:off x="384048" y="3291840"/>
-            <a:ext cx="1645920" cy="237744"/>
+            <a:off x="4937760" y="2734056"/>
+            <a:ext cx="804672" cy="256032"/>
           </a:xfrm>
           <a:prstGeom prst="rect">
             <a:avLst/>
@@ -9366,25 +9642,25 @@
             <a:r>
               <a:rPr sz="800" b="1" i="0">
                 <a:solidFill>
-                  <a:srgbClr val="7CA0C0"/>
+                  <a:srgbClr val="003A59"/>
                 </a:solidFill>
                 <a:latin typeface="Poppins"/>
               </a:rPr>
-              <a:t>BUNDLE TOTAL</a:t>
-            </a:r>
-          </a:p>
-        </p:txBody>
-      </p:sp>
-      <p:sp>
-        <p:nvSpPr>
-          <p:cNvPr id="23" name="TextBox 22"/>
+              <a:t>Day 1</a:t>
+            </a:r>
+          </a:p>
+        </p:txBody>
+      </p:sp>
+      <p:sp>
+        <p:nvSpPr>
+          <p:cNvPr id="31" name="TextBox 30"/>
           <p:cNvSpPr txBox="1"/>
           <p:nvPr/>
         </p:nvSpPr>
         <p:spPr>
           <a:xfrm>
-            <a:off x="384048" y="3493008"/>
-            <a:ext cx="2194560" cy="347472"/>
+            <a:off x="5815584" y="2734056"/>
+            <a:ext cx="3054096" cy="256032"/>
           </a:xfrm>
           <a:prstGeom prst="rect">
             <a:avLst/>
@@ -9397,491 +9673,26 @@
           <a:p>
             <a:pPr algn="l"/>
             <a:r>
-              <a:rPr sz="2200" b="1" i="0">
-                <a:solidFill>
-                  <a:srgbClr val="0091C9"/>
+              <a:rPr sz="800" b="0" i="0">
+                <a:solidFill>
+                  <a:srgbClr val="1E293B"/>
                 </a:solidFill>
                 <a:latin typeface="Poppins"/>
               </a:rPr>
-              <a:t>$8,197 / mo</a:t>
-            </a:r>
-          </a:p>
-        </p:txBody>
-      </p:sp>
-      <p:sp>
-        <p:nvSpPr>
-          <p:cNvPr id="24" name="TextBox 23"/>
-          <p:cNvSpPr txBox="1"/>
-          <p:nvPr/>
-        </p:nvSpPr>
-        <p:spPr>
-          <a:xfrm>
-            <a:off x="2670048" y="3493008"/>
-            <a:ext cx="1737360" cy="347472"/>
-          </a:xfrm>
-          <a:prstGeom prst="rect">
-            <a:avLst/>
-          </a:prstGeom>
-          <a:noFill/>
-        </p:spPr>
-        <p:txBody>
-          <a:bodyPr wrap="square"/>
-          <a:lstStyle/>
-          <a:p>
-            <a:pPr algn="l"/>
-            <a:r>
-              <a:rPr sz="800" b="0" i="0">
-                <a:solidFill>
-                  <a:srgbClr val="7CA0C0"/>
-                </a:solidFill>
-                <a:latin typeface="Poppins"/>
-              </a:rPr>
-              <a:t>Save $997/mo by bundling</a:t>
-            </a:r>
-          </a:p>
-        </p:txBody>
-      </p:sp>
-      <p:sp>
-        <p:nvSpPr>
-          <p:cNvPr id="25" name="Rectangle 24"/>
+              <a:t>Launch LSA for Family Law and Probate</a:t>
+            </a:r>
+          </a:p>
+        </p:txBody>
+      </p:sp>
+      <p:sp>
+        <p:nvSpPr>
+          <p:cNvPr id="32" name="Rectangle 31"/>
           <p:cNvSpPr/>
           <p:nvPr/>
         </p:nvSpPr>
         <p:spPr>
           <a:xfrm>
-            <a:off x="201168" y="3968496"/>
-            <a:ext cx="4133087" cy="402336"/>
-          </a:xfrm>
-          <a:prstGeom prst="rect">
-            <a:avLst/>
-          </a:prstGeom>
-          <a:solidFill>
-            <a:srgbClr val="EEF2F8"/>
-          </a:solidFill>
-          <a:ln>
-            <a:solidFill>
-              <a:srgbClr val="FFFFFF"/>
-            </a:solidFill>
-          </a:ln>
-        </p:spPr>
-        <p:style>
-          <a:lnRef idx="1">
-            <a:schemeClr val="accent1"/>
-          </a:lnRef>
-          <a:fillRef idx="3">
-            <a:schemeClr val="accent1"/>
-          </a:fillRef>
-          <a:effectRef idx="2">
-            <a:schemeClr val="accent1"/>
-          </a:effectRef>
-          <a:fontRef idx="minor">
-            <a:schemeClr val="lt1"/>
-          </a:fontRef>
-        </p:style>
-        <p:txBody>
-          <a:bodyPr rtlCol="0" anchor="ctr"/>
-          <a:lstStyle/>
-          <a:p>
-            <a:pPr algn="ctr"/>
-          </a:p>
-        </p:txBody>
-      </p:sp>
-      <p:sp>
-        <p:nvSpPr>
-          <p:cNvPr id="26" name="TextBox 25"/>
-          <p:cNvSpPr txBox="1"/>
-          <p:nvPr/>
-        </p:nvSpPr>
-        <p:spPr>
-          <a:xfrm>
-            <a:off x="329184" y="3995928"/>
-            <a:ext cx="3931920" cy="347472"/>
-          </a:xfrm>
-          <a:prstGeom prst="rect">
-            <a:avLst/>
-          </a:prstGeom>
-          <a:noFill/>
-        </p:spPr>
-        <p:txBody>
-          <a:bodyPr wrap="square"/>
-          <a:lstStyle/>
-          <a:p>
-            <a:pPr algn="l"/>
-            <a:r>
-              <a:rPr sz="800" b="0" i="0">
-                <a:solidFill>
-                  <a:srgbClr val="64748B"/>
-                </a:solidFill>
-                <a:latin typeface="Poppins"/>
-              </a:rPr>
-              <a:t>+ Recommended ad spend: $7,500–$20,000/mo paid directly to Google/Meta</a:t>
-            </a:r>
-          </a:p>
-        </p:txBody>
-      </p:sp>
-      <p:sp>
-        <p:nvSpPr>
-          <p:cNvPr id="27" name="Rectangle 26"/>
-          <p:cNvSpPr/>
-          <p:nvPr/>
-        </p:nvSpPr>
-        <p:spPr>
-          <a:xfrm>
-            <a:off x="4535424" y="1024128"/>
-            <a:ext cx="4407408" cy="1316736"/>
-          </a:xfrm>
-          <a:prstGeom prst="rect">
-            <a:avLst/>
-          </a:prstGeom>
-          <a:solidFill>
-            <a:srgbClr val="ECFDF5"/>
-          </a:solidFill>
-          <a:ln>
-            <a:solidFill>
-              <a:srgbClr val="FFFFFF"/>
-            </a:solidFill>
-          </a:ln>
-        </p:spPr>
-        <p:style>
-          <a:lnRef idx="1">
-            <a:schemeClr val="accent1"/>
-          </a:lnRef>
-          <a:fillRef idx="3">
-            <a:schemeClr val="accent1"/>
-          </a:fillRef>
-          <a:effectRef idx="2">
-            <a:schemeClr val="accent1"/>
-          </a:effectRef>
-          <a:fontRef idx="minor">
-            <a:schemeClr val="lt1"/>
-          </a:fontRef>
-        </p:style>
-        <p:txBody>
-          <a:bodyPr rtlCol="0" anchor="ctr"/>
-          <a:lstStyle/>
-          <a:p>
-            <a:pPr algn="ctr"/>
-          </a:p>
-        </p:txBody>
-      </p:sp>
-      <p:sp>
-        <p:nvSpPr>
-          <p:cNvPr id="28" name="TextBox 27"/>
-          <p:cNvSpPr txBox="1"/>
-          <p:nvPr/>
-        </p:nvSpPr>
-        <p:spPr>
-          <a:xfrm>
-            <a:off x="4700016" y="1078992"/>
-            <a:ext cx="4133087" cy="219456"/>
-          </a:xfrm>
-          <a:prstGeom prst="rect">
-            <a:avLst/>
-          </a:prstGeom>
-          <a:noFill/>
-        </p:spPr>
-        <p:txBody>
-          <a:bodyPr wrap="square"/>
-          <a:lstStyle/>
-          <a:p>
-            <a:pPr algn="l"/>
-            <a:r>
-              <a:rPr sz="800" b="1" i="0">
-                <a:solidFill>
-                  <a:srgbClr val="065F46"/>
-                </a:solidFill>
-                <a:latin typeface="Poppins"/>
-              </a:rPr>
-              <a:t>PROJECTED RETURN ON AD SPEND</a:t>
-            </a:r>
-          </a:p>
-        </p:txBody>
-      </p:sp>
-      <p:sp>
-        <p:nvSpPr>
-          <p:cNvPr id="29" name="TextBox 28"/>
-          <p:cNvSpPr txBox="1"/>
-          <p:nvPr/>
-        </p:nvSpPr>
-        <p:spPr>
-          <a:xfrm>
-            <a:off x="4700016" y="1335024"/>
-            <a:ext cx="1920240" cy="256032"/>
-          </a:xfrm>
-          <a:prstGeom prst="rect">
-            <a:avLst/>
-          </a:prstGeom>
-          <a:noFill/>
-        </p:spPr>
-        <p:txBody>
-          <a:bodyPr wrap="square"/>
-          <a:lstStyle/>
-          <a:p>
-            <a:pPr algn="l"/>
-            <a:r>
-              <a:rPr sz="900" b="1" i="0">
-                <a:solidFill>
-                  <a:srgbClr val="1E293B"/>
-                </a:solidFill>
-                <a:latin typeface="Poppins"/>
-              </a:rPr>
-              <a:t>Average case value:</a:t>
-            </a:r>
-          </a:p>
-        </p:txBody>
-      </p:sp>
-      <p:sp>
-        <p:nvSpPr>
-          <p:cNvPr id="30" name="TextBox 29"/>
-          <p:cNvSpPr txBox="1"/>
-          <p:nvPr/>
-        </p:nvSpPr>
-        <p:spPr>
-          <a:xfrm>
-            <a:off x="6729984" y="1335024"/>
-            <a:ext cx="2103120" cy="256032"/>
-          </a:xfrm>
-          <a:prstGeom prst="rect">
-            <a:avLst/>
-          </a:prstGeom>
-          <a:noFill/>
-        </p:spPr>
-        <p:txBody>
-          <a:bodyPr wrap="square"/>
-          <a:lstStyle/>
-          <a:p>
-            <a:pPr algn="l"/>
-            <a:r>
-              <a:rPr sz="900" b="0" i="0">
-                <a:solidFill>
-                  <a:srgbClr val="065F46"/>
-                </a:solidFill>
-                <a:latin typeface="Poppins"/>
-              </a:rPr>
-              <a:t>$4,800</a:t>
-            </a:r>
-          </a:p>
-        </p:txBody>
-      </p:sp>
-      <p:sp>
-        <p:nvSpPr>
-          <p:cNvPr id="31" name="Rectangle 30"/>
-          <p:cNvSpPr/>
-          <p:nvPr/>
-        </p:nvSpPr>
-        <p:spPr>
-          <a:xfrm>
-            <a:off x="4645152" y="1609344"/>
-            <a:ext cx="4187952" cy="310896"/>
-          </a:xfrm>
-          <a:prstGeom prst="rect">
-            <a:avLst/>
-          </a:prstGeom>
-          <a:solidFill>
-            <a:srgbClr val="D1FAE5"/>
-          </a:solidFill>
-          <a:ln>
-            <a:solidFill>
-              <a:srgbClr val="FFFFFF"/>
-            </a:solidFill>
-          </a:ln>
-        </p:spPr>
-        <p:style>
-          <a:lnRef idx="1">
-            <a:schemeClr val="accent1"/>
-          </a:lnRef>
-          <a:fillRef idx="3">
-            <a:schemeClr val="accent1"/>
-          </a:fillRef>
-          <a:effectRef idx="2">
-            <a:schemeClr val="accent1"/>
-          </a:effectRef>
-          <a:fontRef idx="minor">
-            <a:schemeClr val="lt1"/>
-          </a:fontRef>
-        </p:style>
-        <p:txBody>
-          <a:bodyPr rtlCol="0" anchor="ctr"/>
-          <a:lstStyle/>
-          <a:p>
-            <a:pPr algn="ctr"/>
-          </a:p>
-        </p:txBody>
-      </p:sp>
-      <p:sp>
-        <p:nvSpPr>
-          <p:cNvPr id="32" name="TextBox 31"/>
-          <p:cNvSpPr txBox="1"/>
-          <p:nvPr/>
-        </p:nvSpPr>
-        <p:spPr>
-          <a:xfrm>
-            <a:off x="4700016" y="1645920"/>
-            <a:ext cx="1920240" cy="256032"/>
-          </a:xfrm>
-          <a:prstGeom prst="rect">
-            <a:avLst/>
-          </a:prstGeom>
-          <a:noFill/>
-        </p:spPr>
-        <p:txBody>
-          <a:bodyPr wrap="square"/>
-          <a:lstStyle/>
-          <a:p>
-            <a:pPr algn="l"/>
-            <a:r>
-              <a:rPr sz="900" b="1" i="0">
-                <a:solidFill>
-                  <a:srgbClr val="1E293B"/>
-                </a:solidFill>
-                <a:latin typeface="Poppins"/>
-              </a:rPr>
-              <a:t>Conservative  (~3 cases/mo):</a:t>
-            </a:r>
-          </a:p>
-        </p:txBody>
-      </p:sp>
-      <p:sp>
-        <p:nvSpPr>
-          <p:cNvPr id="33" name="TextBox 32"/>
-          <p:cNvSpPr txBox="1"/>
-          <p:nvPr/>
-        </p:nvSpPr>
-        <p:spPr>
-          <a:xfrm>
-            <a:off x="6729984" y="1645920"/>
-            <a:ext cx="2103120" cy="256032"/>
-          </a:xfrm>
-          <a:prstGeom prst="rect">
-            <a:avLst/>
-          </a:prstGeom>
-          <a:noFill/>
-        </p:spPr>
-        <p:txBody>
-          <a:bodyPr wrap="square"/>
-          <a:lstStyle/>
-          <a:p>
-            <a:pPr algn="l"/>
-            <a:r>
-              <a:rPr sz="900" b="1" i="0">
-                <a:solidFill>
-                  <a:srgbClr val="065F46"/>
-                </a:solidFill>
-                <a:latin typeface="Poppins"/>
-              </a:rPr>
-              <a:t>~$14,400 revenue · 1.9× return</a:t>
-            </a:r>
-          </a:p>
-        </p:txBody>
-      </p:sp>
-      <p:sp>
-        <p:nvSpPr>
-          <p:cNvPr id="34" name="TextBox 33"/>
-          <p:cNvSpPr txBox="1"/>
-          <p:nvPr/>
-        </p:nvSpPr>
-        <p:spPr>
-          <a:xfrm>
-            <a:off x="4700016" y="1956816"/>
-            <a:ext cx="1920240" cy="256032"/>
-          </a:xfrm>
-          <a:prstGeom prst="rect">
-            <a:avLst/>
-          </a:prstGeom>
-          <a:noFill/>
-        </p:spPr>
-        <p:txBody>
-          <a:bodyPr wrap="square"/>
-          <a:lstStyle/>
-          <a:p>
-            <a:pPr algn="l"/>
-            <a:r>
-              <a:rPr sz="900" b="1" i="0">
-                <a:solidFill>
-                  <a:srgbClr val="1E293B"/>
-                </a:solidFill>
-                <a:latin typeface="Poppins"/>
-              </a:rPr>
-              <a:t>Aggressive  (~9 cases/mo):</a:t>
-            </a:r>
-          </a:p>
-        </p:txBody>
-      </p:sp>
-      <p:sp>
-        <p:nvSpPr>
-          <p:cNvPr id="35" name="TextBox 34"/>
-          <p:cNvSpPr txBox="1"/>
-          <p:nvPr/>
-        </p:nvSpPr>
-        <p:spPr>
-          <a:xfrm>
-            <a:off x="6729984" y="1956816"/>
-            <a:ext cx="2103120" cy="256032"/>
-          </a:xfrm>
-          <a:prstGeom prst="rect">
-            <a:avLst/>
-          </a:prstGeom>
-          <a:noFill/>
-        </p:spPr>
-        <p:txBody>
-          <a:bodyPr wrap="square"/>
-          <a:lstStyle/>
-          <a:p>
-            <a:pPr algn="l"/>
-            <a:r>
-              <a:rPr sz="900" b="1" i="0">
-                <a:solidFill>
-                  <a:srgbClr val="065F46"/>
-                </a:solidFill>
-                <a:latin typeface="Poppins"/>
-              </a:rPr>
-              <a:t>~$43,200 revenue · 2.2× return</a:t>
-            </a:r>
-          </a:p>
-        </p:txBody>
-      </p:sp>
-      <p:sp>
-        <p:nvSpPr>
-          <p:cNvPr id="36" name="TextBox 35"/>
-          <p:cNvSpPr txBox="1"/>
-          <p:nvPr/>
-        </p:nvSpPr>
-        <p:spPr>
-          <a:xfrm>
-            <a:off x="4535424" y="2468880"/>
-            <a:ext cx="4407408" cy="237744"/>
-          </a:xfrm>
-          <a:prstGeom prst="rect">
-            <a:avLst/>
-          </a:prstGeom>
-          <a:noFill/>
-        </p:spPr>
-        <p:txBody>
-          <a:bodyPr wrap="square"/>
-          <a:lstStyle/>
-          <a:p>
-            <a:pPr algn="l"/>
-            <a:r>
-              <a:rPr sz="800" b="1" i="0">
-                <a:solidFill>
-                  <a:srgbClr val="003A59"/>
-                </a:solidFill>
-                <a:latin typeface="Poppins"/>
-              </a:rPr>
-              <a:t>WHAT HAPPENS IN THE FIRST 90 DAYS</a:t>
-            </a:r>
-          </a:p>
-        </p:txBody>
-      </p:sp>
-      <p:sp>
-        <p:nvSpPr>
-          <p:cNvPr id="37" name="Rectangle 36"/>
-          <p:cNvSpPr/>
-          <p:nvPr/>
-        </p:nvSpPr>
-        <p:spPr>
-          <a:xfrm>
-            <a:off x="4590288" y="2724912"/>
+            <a:off x="4590288" y="3081528"/>
             <a:ext cx="256032" cy="256032"/>
           </a:xfrm>
           <a:prstGeom prst="rect">
@@ -9920,13 +9731,13 @@
       </p:sp>
       <p:sp>
         <p:nvSpPr>
-          <p:cNvPr id="38" name="TextBox 37"/>
+          <p:cNvPr id="33" name="TextBox 32"/>
           <p:cNvSpPr txBox="1"/>
           <p:nvPr/>
         </p:nvSpPr>
         <p:spPr>
           <a:xfrm>
-            <a:off x="4937760" y="2734056"/>
+            <a:off x="4937760" y="3090672"/>
             <a:ext cx="804672" cy="256032"/>
           </a:xfrm>
           <a:prstGeom prst="rect">
@@ -9946,20 +9757,20 @@
                 </a:solidFill>
                 <a:latin typeface="Poppins"/>
               </a:rPr>
-              <a:t>Day 1</a:t>
-            </a:r>
-          </a:p>
-        </p:txBody>
-      </p:sp>
-      <p:sp>
-        <p:nvSpPr>
-          <p:cNvPr id="39" name="TextBox 38"/>
+              <a:t>Day 14</a:t>
+            </a:r>
+          </a:p>
+        </p:txBody>
+      </p:sp>
+      <p:sp>
+        <p:nvSpPr>
+          <p:cNvPr id="34" name="TextBox 33"/>
           <p:cNvSpPr txBox="1"/>
           <p:nvPr/>
         </p:nvSpPr>
         <p:spPr>
           <a:xfrm>
-            <a:off x="5815584" y="2734056"/>
+            <a:off x="5815584" y="3090672"/>
             <a:ext cx="3054096" cy="256032"/>
           </a:xfrm>
           <a:prstGeom prst="rect">
@@ -9979,20 +9790,20 @@
                 </a:solidFill>
                 <a:latin typeface="Poppins"/>
               </a:rPr>
-              <a:t>Launch tracked paid search for PI and estate terms</a:t>
-            </a:r>
-          </a:p>
-        </p:txBody>
-      </p:sp>
-      <p:sp>
-        <p:nvSpPr>
-          <p:cNvPr id="40" name="Rectangle 39"/>
+              <a:t>Fix on-page SEO title tag and H1 issues</a:t>
+            </a:r>
+          </a:p>
+        </p:txBody>
+      </p:sp>
+      <p:sp>
+        <p:nvSpPr>
+          <p:cNvPr id="35" name="Rectangle 34"/>
           <p:cNvSpPr/>
           <p:nvPr/>
         </p:nvSpPr>
         <p:spPr>
           <a:xfrm>
-            <a:off x="4590288" y="3081528"/>
+            <a:off x="4590288" y="3438144"/>
             <a:ext cx="256032" cy="256032"/>
           </a:xfrm>
           <a:prstGeom prst="rect">
@@ -10031,13 +9842,13 @@
       </p:sp>
       <p:sp>
         <p:nvSpPr>
-          <p:cNvPr id="41" name="TextBox 40"/>
+          <p:cNvPr id="36" name="TextBox 35"/>
           <p:cNvSpPr txBox="1"/>
           <p:nvPr/>
         </p:nvSpPr>
         <p:spPr>
           <a:xfrm>
-            <a:off x="4937760" y="3090672"/>
+            <a:off x="4937760" y="3447287"/>
             <a:ext cx="804672" cy="256032"/>
           </a:xfrm>
           <a:prstGeom prst="rect">
@@ -10057,20 +9868,20 @@
                 </a:solidFill>
                 <a:latin typeface="Poppins"/>
               </a:rPr>
-              <a:t>Day 14</a:t>
-            </a:r>
-          </a:p>
-        </p:txBody>
-      </p:sp>
-      <p:sp>
-        <p:nvSpPr>
-          <p:cNvPr id="42" name="TextBox 41"/>
+              <a:t>Week 2</a:t>
+            </a:r>
+          </a:p>
+        </p:txBody>
+      </p:sp>
+      <p:sp>
+        <p:nvSpPr>
+          <p:cNvPr id="37" name="TextBox 36"/>
           <p:cNvSpPr txBox="1"/>
           <p:nvPr/>
         </p:nvSpPr>
         <p:spPr>
           <a:xfrm>
-            <a:off x="5815584" y="3090672"/>
+            <a:off x="5815584" y="3447287"/>
             <a:ext cx="3054096" cy="256032"/>
           </a:xfrm>
           <a:prstGeom prst="rect">
@@ -10090,20 +9901,20 @@
                 </a:solidFill>
                 <a:latin typeface="Poppins"/>
               </a:rPr>
-              <a:t>Fix on-page SEO title tag and H1 issues</a:t>
-            </a:r>
-          </a:p>
-        </p:txBody>
-      </p:sp>
-      <p:sp>
-        <p:nvSpPr>
-          <p:cNvPr id="43" name="Rectangle 42"/>
+              <a:t>Begin Family Law and Probate landing pages</a:t>
+            </a:r>
+          </a:p>
+        </p:txBody>
+      </p:sp>
+      <p:sp>
+        <p:nvSpPr>
+          <p:cNvPr id="38" name="Rectangle 37"/>
           <p:cNvSpPr/>
           <p:nvPr/>
         </p:nvSpPr>
         <p:spPr>
           <a:xfrm>
-            <a:off x="4590288" y="3438144"/>
+            <a:off x="4590288" y="3794760"/>
             <a:ext cx="256032" cy="256032"/>
           </a:xfrm>
           <a:prstGeom prst="rect">
@@ -10142,13 +9953,13 @@
       </p:sp>
       <p:sp>
         <p:nvSpPr>
-          <p:cNvPr id="44" name="TextBox 43"/>
+          <p:cNvPr id="39" name="TextBox 38"/>
           <p:cNvSpPr txBox="1"/>
           <p:nvPr/>
         </p:nvSpPr>
         <p:spPr>
           <a:xfrm>
-            <a:off x="4937760" y="3447287"/>
+            <a:off x="4937760" y="3803904"/>
             <a:ext cx="804672" cy="256032"/>
           </a:xfrm>
           <a:prstGeom prst="rect">
@@ -10168,20 +9979,20 @@
                 </a:solidFill>
                 <a:latin typeface="Poppins"/>
               </a:rPr>
-              <a:t>Week 2</a:t>
-            </a:r>
-          </a:p>
-        </p:txBody>
-      </p:sp>
-      <p:sp>
-        <p:nvSpPr>
-          <p:cNvPr id="45" name="TextBox 44"/>
+              <a:t>Week 3</a:t>
+            </a:r>
+          </a:p>
+        </p:txBody>
+      </p:sp>
+      <p:sp>
+        <p:nvSpPr>
+          <p:cNvPr id="40" name="TextBox 39"/>
           <p:cNvSpPr txBox="1"/>
           <p:nvPr/>
         </p:nvSpPr>
         <p:spPr>
           <a:xfrm>
-            <a:off x="5815584" y="3447287"/>
+            <a:off x="5815584" y="3803904"/>
             <a:ext cx="3054096" cy="256032"/>
           </a:xfrm>
           <a:prstGeom prst="rect">
@@ -10201,20 +10012,20 @@
                 </a:solidFill>
                 <a:latin typeface="Poppins"/>
               </a:rPr>
-              <a:t>Begin geo and practice-area landing pages</a:t>
-            </a:r>
-          </a:p>
-        </p:txBody>
-      </p:sp>
-      <p:sp>
-        <p:nvSpPr>
-          <p:cNvPr id="46" name="Rectangle 45"/>
+              <a:t>Stand up lead tracking across referrals and ads</a:t>
+            </a:r>
+          </a:p>
+        </p:txBody>
+      </p:sp>
+      <p:sp>
+        <p:nvSpPr>
+          <p:cNvPr id="41" name="Rectangle 40"/>
           <p:cNvSpPr/>
           <p:nvPr/>
         </p:nvSpPr>
         <p:spPr>
           <a:xfrm>
-            <a:off x="4590288" y="3794760"/>
+            <a:off x="4590288" y="4151376"/>
             <a:ext cx="256032" cy="256032"/>
           </a:xfrm>
           <a:prstGeom prst="rect">
@@ -10253,13 +10064,13 @@
       </p:sp>
       <p:sp>
         <p:nvSpPr>
-          <p:cNvPr id="47" name="TextBox 46"/>
+          <p:cNvPr id="42" name="TextBox 41"/>
           <p:cNvSpPr txBox="1"/>
           <p:nvPr/>
         </p:nvSpPr>
         <p:spPr>
           <a:xfrm>
-            <a:off x="4937760" y="3803904"/>
+            <a:off x="4937760" y="4160520"/>
             <a:ext cx="804672" cy="256032"/>
           </a:xfrm>
           <a:prstGeom prst="rect">
@@ -10279,20 +10090,20 @@
                 </a:solidFill>
                 <a:latin typeface="Poppins"/>
               </a:rPr>
-              <a:t>Week 3</a:t>
-            </a:r>
-          </a:p>
-        </p:txBody>
-      </p:sp>
-      <p:sp>
-        <p:nvSpPr>
-          <p:cNvPr id="48" name="TextBox 47"/>
+              <a:t>Month 3</a:t>
+            </a:r>
+          </a:p>
+        </p:txBody>
+      </p:sp>
+      <p:sp>
+        <p:nvSpPr>
+          <p:cNvPr id="43" name="TextBox 42"/>
           <p:cNvSpPr txBox="1"/>
           <p:nvPr/>
         </p:nvSpPr>
         <p:spPr>
           <a:xfrm>
-            <a:off x="5815584" y="3803904"/>
+            <a:off x="5815584" y="4160520"/>
             <a:ext cx="3054096" cy="256032"/>
           </a:xfrm>
           <a:prstGeom prst="rect">
@@ -10312,21 +10123,21 @@
                 </a:solidFill>
                 <a:latin typeface="Poppins"/>
               </a:rPr>
-              <a:t>Stand up lead tracking and Elite Coach Plus kickoff</a:t>
-            </a:r>
-          </a:p>
-        </p:txBody>
-      </p:sp>
-      <p:sp>
-        <p:nvSpPr>
-          <p:cNvPr id="49" name="Rectangle 48"/>
+              <a:t>Add PPC, scaling total ad spend to $7,500/mo</a:t>
+            </a:r>
+          </a:p>
+        </p:txBody>
+      </p:sp>
+      <p:sp>
+        <p:nvSpPr>
+          <p:cNvPr id="44" name="Rectangle 43"/>
           <p:cNvSpPr/>
           <p:nvPr/>
         </p:nvSpPr>
         <p:spPr>
           <a:xfrm>
-            <a:off x="4590288" y="4151376"/>
-            <a:ext cx="256032" cy="256032"/>
+            <a:off x="0" y="4425696"/>
+            <a:ext cx="9144000" cy="402336"/>
           </a:xfrm>
           <a:prstGeom prst="rect">
             <a:avLst/>
@@ -10364,14 +10175,14 @@
       </p:sp>
       <p:sp>
         <p:nvSpPr>
-          <p:cNvPr id="50" name="TextBox 49"/>
+          <p:cNvPr id="45" name="TextBox 44"/>
           <p:cNvSpPr txBox="1"/>
           <p:nvPr/>
         </p:nvSpPr>
         <p:spPr>
           <a:xfrm>
-            <a:off x="4937760" y="4160520"/>
-            <a:ext cx="804672" cy="256032"/>
+            <a:off x="274320" y="4425696"/>
+            <a:ext cx="8595360" cy="402336"/>
           </a:xfrm>
           <a:prstGeom prst="rect">
             <a:avLst/>
@@ -10382,62 +10193,29 @@
           <a:bodyPr wrap="square"/>
           <a:lstStyle/>
           <a:p>
-            <a:pPr algn="l"/>
-            <a:r>
-              <a:rPr sz="800" b="1" i="0">
-                <a:solidFill>
-                  <a:srgbClr val="003A59"/>
+            <a:pPr algn="ctr"/>
+            <a:r>
+              <a:rPr sz="900" b="0" i="1">
+                <a:solidFill>
+                  <a:srgbClr val="8BADD0"/>
                 </a:solidFill>
                 <a:latin typeface="Poppins"/>
               </a:rPr>
-              <a:t>Month 3</a:t>
-            </a:r>
-          </a:p>
-        </p:txBody>
-      </p:sp>
-      <p:sp>
-        <p:nvSpPr>
-          <p:cNvPr id="51" name="TextBox 50"/>
-          <p:cNvSpPr txBox="1"/>
-          <p:nvPr/>
-        </p:nvSpPr>
-        <p:spPr>
-          <a:xfrm>
-            <a:off x="5815584" y="4160520"/>
-            <a:ext cx="3054096" cy="256032"/>
-          </a:xfrm>
-          <a:prstGeom prst="rect">
-            <a:avLst/>
-          </a:prstGeom>
-          <a:noFill/>
-        </p:spPr>
-        <p:txBody>
-          <a:bodyPr wrap="square"/>
-          <a:lstStyle/>
-          <a:p>
-            <a:pPr algn="l"/>
-            <a:r>
-              <a:rPr sz="800" b="0" i="0">
-                <a:solidFill>
-                  <a:srgbClr val="1E293B"/>
-                </a:solidFill>
-                <a:latin typeface="Poppins"/>
-              </a:rPr>
-              <a:t>Baseline financial visibility by practice area live</a:t>
-            </a:r>
-          </a:p>
-        </p:txBody>
-      </p:sp>
-      <p:sp>
-        <p:nvSpPr>
-          <p:cNvPr id="52" name="Rectangle 51"/>
+              <a:t>"Your father built a name that has carried this firm for 35 years — now build the system that lets it carry the next generation, too."</a:t>
+            </a:r>
+          </a:p>
+        </p:txBody>
+      </p:sp>
+      <p:sp>
+        <p:nvSpPr>
+          <p:cNvPr id="46" name="Rectangle 45"/>
           <p:cNvSpPr/>
           <p:nvPr/>
         </p:nvSpPr>
         <p:spPr>
           <a:xfrm>
-            <a:off x="0" y="4425696"/>
-            <a:ext cx="9144000" cy="402336"/>
+            <a:off x="0" y="4828032"/>
+            <a:ext cx="9144000" cy="320040"/>
           </a:xfrm>
           <a:prstGeom prst="rect">
             <a:avLst/>
@@ -10473,87 +10251,9 @@
           </a:p>
         </p:txBody>
       </p:sp>
-      <p:sp>
-        <p:nvSpPr>
-          <p:cNvPr id="53" name="TextBox 52"/>
-          <p:cNvSpPr txBox="1"/>
-          <p:nvPr/>
-        </p:nvSpPr>
-        <p:spPr>
-          <a:xfrm>
-            <a:off x="274320" y="4425696"/>
-            <a:ext cx="8595360" cy="402336"/>
-          </a:xfrm>
-          <a:prstGeom prst="rect">
-            <a:avLst/>
-          </a:prstGeom>
-          <a:noFill/>
-        </p:spPr>
-        <p:txBody>
-          <a:bodyPr wrap="square"/>
-          <a:lstStyle/>
-          <a:p>
-            <a:pPr algn="ctr"/>
-            <a:r>
-              <a:rPr sz="900" b="0" i="1">
-                <a:solidFill>
-                  <a:srgbClr val="8BADD0"/>
-                </a:solidFill>
-                <a:latin typeface="Poppins"/>
-              </a:rPr>
-              <a:t>"Your father built a name that has carried this firm for 35 years — now build the system that lets it carry the next generation, too."</a:t>
-            </a:r>
-          </a:p>
-        </p:txBody>
-      </p:sp>
-      <p:sp>
-        <p:nvSpPr>
-          <p:cNvPr id="54" name="Rectangle 53"/>
-          <p:cNvSpPr/>
-          <p:nvPr/>
-        </p:nvSpPr>
-        <p:spPr>
-          <a:xfrm>
-            <a:off x="0" y="4828032"/>
-            <a:ext cx="9144000" cy="320040"/>
-          </a:xfrm>
-          <a:prstGeom prst="rect">
-            <a:avLst/>
-          </a:prstGeom>
-          <a:solidFill>
-            <a:srgbClr val="003A59"/>
-          </a:solidFill>
-          <a:ln>
-            <a:solidFill>
-              <a:srgbClr val="FFFFFF"/>
-            </a:solidFill>
-          </a:ln>
-        </p:spPr>
-        <p:style>
-          <a:lnRef idx="1">
-            <a:schemeClr val="accent1"/>
-          </a:lnRef>
-          <a:fillRef idx="3">
-            <a:schemeClr val="accent1"/>
-          </a:fillRef>
-          <a:effectRef idx="2">
-            <a:schemeClr val="accent1"/>
-          </a:effectRef>
-          <a:fontRef idx="minor">
-            <a:schemeClr val="lt1"/>
-          </a:fontRef>
-        </p:style>
-        <p:txBody>
-          <a:bodyPr rtlCol="0" anchor="ctr"/>
-          <a:lstStyle/>
-          <a:p>
-            <a:pPr algn="ctr"/>
-          </a:p>
-        </p:txBody>
-      </p:sp>
       <p:pic>
         <p:nvPicPr>
-          <p:cNvPr id="55" name="Picture 54" descr="smb_team_logo.png"/>
+          <p:cNvPr id="47" name="Picture 46" descr="smb_team_logo.png"/>
           <p:cNvPicPr>
             <a:picLocks noChangeAspect="1"/>
           </p:cNvPicPr>
@@ -10577,7 +10277,7 @@
       </p:pic>
       <p:sp>
         <p:nvSpPr>
-          <p:cNvPr id="56" name="TextBox 55"/>
+          <p:cNvPr id="48" name="TextBox 47"/>
           <p:cNvSpPr txBox="1"/>
           <p:nvPr/>
         </p:nvSpPr>
@@ -10610,7 +10310,7 @@
       </p:sp>
       <p:sp>
         <p:nvSpPr>
-          <p:cNvPr id="57" name="TextBox 56"/>
+          <p:cNvPr id="49" name="TextBox 48"/>
           <p:cNvSpPr txBox="1"/>
           <p:nvPr/>
         </p:nvSpPr>

--- a/gaydos-law/Gaydos Law_September 15, 2026_Proposal.pptx
+++ b/gaydos-law/Gaydos Law_September 15, 2026_Proposal.pptx
@@ -8182,7 +8182,7 @@
                 </a:solidFill>
                 <a:latin typeface="Poppins"/>
               </a:rPr>
-              <a:t>Prove the LSA channel before scaling ad spend</a:t>
+              <a:t>Kick off Elite Coach to build that leadership structure</a:t>
             </a:r>
           </a:p>
         </p:txBody>
@@ -8815,7 +8815,7 @@
                 </a:solidFill>
                 <a:latin typeface="Poppins"/>
               </a:rPr>
-              <a:t>FULL SERVICE MARKETING — ESSENTIALS</a:t>
+              <a:t>FULL SERVICE MARKETING — STARTER</a:t>
             </a:r>
           </a:p>
         </p:txBody>
@@ -8848,7 +8848,7 @@
                 </a:solidFill>
                 <a:latin typeface="Poppins"/>
               </a:rPr>
-              <a:t>$3,797</a:t>
+              <a:t>$4,997</a:t>
             </a:r>
           </a:p>
         </p:txBody>
@@ -8914,7 +8914,7 @@
                 </a:solidFill>
                 <a:latin typeface="Poppins"/>
               </a:rPr>
-              <a:t>$3,797/mo</a:t>
+              <a:t>$5,697/mo</a:t>
             </a:r>
           </a:p>
         </p:txBody>
@@ -9005,6 +9005,306 @@
         </p:nvSpPr>
         <p:spPr>
           <a:xfrm>
+            <a:off x="201168" y="2139696"/>
+            <a:ext cx="4133087" cy="1024128"/>
+          </a:xfrm>
+          <a:prstGeom prst="rect">
+            <a:avLst/>
+          </a:prstGeom>
+          <a:solidFill>
+            <a:srgbClr val="FFFFFF"/>
+          </a:solidFill>
+          <a:ln>
+            <a:solidFill>
+              <a:srgbClr val="FFFFFF"/>
+            </a:solidFill>
+          </a:ln>
+        </p:spPr>
+        <p:style>
+          <a:lnRef idx="1">
+            <a:schemeClr val="accent1"/>
+          </a:lnRef>
+          <a:fillRef idx="3">
+            <a:schemeClr val="accent1"/>
+          </a:fillRef>
+          <a:effectRef idx="2">
+            <a:schemeClr val="accent1"/>
+          </a:effectRef>
+          <a:fontRef idx="minor">
+            <a:schemeClr val="lt1"/>
+          </a:fontRef>
+        </p:style>
+        <p:txBody>
+          <a:bodyPr rtlCol="0" anchor="ctr"/>
+          <a:lstStyle/>
+          <a:p>
+            <a:pPr algn="ctr"/>
+          </a:p>
+        </p:txBody>
+      </p:sp>
+      <p:sp>
+        <p:nvSpPr>
+          <p:cNvPr id="14" name="Rectangle 13"/>
+          <p:cNvSpPr/>
+          <p:nvPr/>
+        </p:nvSpPr>
+        <p:spPr>
+          <a:xfrm>
+            <a:off x="201168" y="2139696"/>
+            <a:ext cx="182880" cy="1024128"/>
+          </a:xfrm>
+          <a:prstGeom prst="rect">
+            <a:avLst/>
+          </a:prstGeom>
+          <a:solidFill>
+            <a:srgbClr val="69CD2B"/>
+          </a:solidFill>
+          <a:ln>
+            <a:solidFill>
+              <a:srgbClr val="FFFFFF"/>
+            </a:solidFill>
+          </a:ln>
+        </p:spPr>
+        <p:style>
+          <a:lnRef idx="1">
+            <a:schemeClr val="accent1"/>
+          </a:lnRef>
+          <a:fillRef idx="3">
+            <a:schemeClr val="accent1"/>
+          </a:fillRef>
+          <a:effectRef idx="2">
+            <a:schemeClr val="accent1"/>
+          </a:effectRef>
+          <a:fontRef idx="minor">
+            <a:schemeClr val="lt1"/>
+          </a:fontRef>
+        </p:style>
+        <p:txBody>
+          <a:bodyPr rtlCol="0" anchor="ctr"/>
+          <a:lstStyle/>
+          <a:p>
+            <a:pPr algn="ctr"/>
+          </a:p>
+        </p:txBody>
+      </p:sp>
+      <p:sp>
+        <p:nvSpPr>
+          <p:cNvPr id="15" name="TextBox 14"/>
+          <p:cNvSpPr txBox="1"/>
+          <p:nvPr/>
+        </p:nvSpPr>
+        <p:spPr>
+          <a:xfrm>
+            <a:off x="475488" y="2231136"/>
+            <a:ext cx="3803904" cy="201168"/>
+          </a:xfrm>
+          <a:prstGeom prst="rect">
+            <a:avLst/>
+          </a:prstGeom>
+          <a:noFill/>
+        </p:spPr>
+        <p:txBody>
+          <a:bodyPr wrap="square"/>
+          <a:lstStyle/>
+          <a:p>
+            <a:pPr algn="l"/>
+            <a:r>
+              <a:rPr sz="800" b="1" i="0">
+                <a:solidFill>
+                  <a:srgbClr val="69CD2B"/>
+                </a:solidFill>
+                <a:latin typeface="Poppins"/>
+              </a:rPr>
+              <a:t>ELITE COACH</a:t>
+            </a:r>
+          </a:p>
+        </p:txBody>
+      </p:sp>
+      <p:sp>
+        <p:nvSpPr>
+          <p:cNvPr id="16" name="TextBox 15"/>
+          <p:cNvSpPr txBox="1"/>
+          <p:nvPr/>
+        </p:nvSpPr>
+        <p:spPr>
+          <a:xfrm>
+            <a:off x="475488" y="2414015"/>
+            <a:ext cx="1828800" cy="438912"/>
+          </a:xfrm>
+          <a:prstGeom prst="rect">
+            <a:avLst/>
+          </a:prstGeom>
+          <a:noFill/>
+        </p:spPr>
+        <p:txBody>
+          <a:bodyPr wrap="square"/>
+          <a:lstStyle/>
+          <a:p>
+            <a:pPr algn="l"/>
+            <a:r>
+              <a:rPr sz="3200" b="1" i="0">
+                <a:solidFill>
+                  <a:srgbClr val="003A59"/>
+                </a:solidFill>
+                <a:latin typeface="Poppins"/>
+              </a:rPr>
+              <a:t>$2,600</a:t>
+            </a:r>
+          </a:p>
+        </p:txBody>
+      </p:sp>
+      <p:sp>
+        <p:nvSpPr>
+          <p:cNvPr id="17" name="TextBox 16"/>
+          <p:cNvSpPr txBox="1"/>
+          <p:nvPr/>
+        </p:nvSpPr>
+        <p:spPr>
+          <a:xfrm>
+            <a:off x="1865376" y="2523744"/>
+            <a:ext cx="420624" cy="256032"/>
+          </a:xfrm>
+          <a:prstGeom prst="rect">
+            <a:avLst/>
+          </a:prstGeom>
+          <a:noFill/>
+        </p:spPr>
+        <p:txBody>
+          <a:bodyPr wrap="square"/>
+          <a:lstStyle/>
+          <a:p>
+            <a:pPr algn="l"/>
+            <a:r>
+              <a:rPr sz="1100" b="0" i="0">
+                <a:solidFill>
+                  <a:srgbClr val="64748B"/>
+                </a:solidFill>
+                <a:latin typeface="Poppins"/>
+              </a:rPr>
+              <a:t>/mo</a:t>
+            </a:r>
+          </a:p>
+        </p:txBody>
+      </p:sp>
+      <p:sp>
+        <p:nvSpPr>
+          <p:cNvPr id="18" name="TextBox 17"/>
+          <p:cNvSpPr txBox="1"/>
+          <p:nvPr/>
+        </p:nvSpPr>
+        <p:spPr>
+          <a:xfrm>
+            <a:off x="2322576" y="2542032"/>
+            <a:ext cx="914400" cy="237744"/>
+          </a:xfrm>
+          <a:prstGeom prst="rect">
+            <a:avLst/>
+          </a:prstGeom>
+          <a:noFill/>
+        </p:spPr>
+        <p:txBody>
+          <a:bodyPr wrap="square"/>
+          <a:lstStyle/>
+          <a:p>
+            <a:pPr algn="l"/>
+            <a:r>
+              <a:rPr sz="1100" b="0" i="0">
+                <a:solidFill>
+                  <a:srgbClr val="334155"/>
+                </a:solidFill>
+                <a:latin typeface="Poppins"/>
+              </a:rPr>
+              <a:t>$3,497/mo</a:t>
+            </a:r>
+          </a:p>
+        </p:txBody>
+      </p:sp>
+      <p:sp>
+        <p:nvSpPr>
+          <p:cNvPr id="19" name="Rectangle 18"/>
+          <p:cNvSpPr/>
+          <p:nvPr/>
+        </p:nvSpPr>
+        <p:spPr>
+          <a:xfrm>
+            <a:off x="2322576" y="2642615"/>
+            <a:ext cx="804672" cy="9144"/>
+          </a:xfrm>
+          <a:prstGeom prst="rect">
+            <a:avLst/>
+          </a:prstGeom>
+          <a:solidFill>
+            <a:srgbClr val="334155"/>
+          </a:solidFill>
+          <a:ln>
+            <a:solidFill>
+              <a:srgbClr val="FFFFFF"/>
+            </a:solidFill>
+          </a:ln>
+        </p:spPr>
+        <p:style>
+          <a:lnRef idx="1">
+            <a:schemeClr val="accent1"/>
+          </a:lnRef>
+          <a:fillRef idx="3">
+            <a:schemeClr val="accent1"/>
+          </a:fillRef>
+          <a:effectRef idx="2">
+            <a:schemeClr val="accent1"/>
+          </a:effectRef>
+          <a:fontRef idx="minor">
+            <a:schemeClr val="lt1"/>
+          </a:fontRef>
+        </p:style>
+        <p:txBody>
+          <a:bodyPr rtlCol="0" anchor="ctr"/>
+          <a:lstStyle/>
+          <a:p>
+            <a:pPr algn="ctr"/>
+          </a:p>
+        </p:txBody>
+      </p:sp>
+      <p:sp>
+        <p:nvSpPr>
+          <p:cNvPr id="20" name="TextBox 19"/>
+          <p:cNvSpPr txBox="1"/>
+          <p:nvPr/>
+        </p:nvSpPr>
+        <p:spPr>
+          <a:xfrm>
+            <a:off x="475488" y="2907791"/>
+            <a:ext cx="3803904" cy="201168"/>
+          </a:xfrm>
+          <a:prstGeom prst="rect">
+            <a:avLst/>
+          </a:prstGeom>
+          <a:noFill/>
+        </p:spPr>
+        <p:txBody>
+          <a:bodyPr wrap="square"/>
+          <a:lstStyle/>
+          <a:p>
+            <a:pPr algn="l"/>
+            <a:r>
+              <a:rPr sz="800" b="0" i="0">
+                <a:solidFill>
+                  <a:srgbClr val="64748B"/>
+                </a:solidFill>
+                <a:latin typeface="Poppins"/>
+              </a:rPr>
+              <a:t>Weekly group coaching · Masterminds · Quarterly workshops</a:t>
+            </a:r>
+          </a:p>
+        </p:txBody>
+      </p:sp>
+      <p:sp>
+        <p:nvSpPr>
+          <p:cNvPr id="21" name="Rectangle 20"/>
+          <p:cNvSpPr/>
+          <p:nvPr/>
+        </p:nvSpPr>
+        <p:spPr>
+          <a:xfrm>
             <a:off x="201168" y="3255264"/>
             <a:ext cx="4133087" cy="658368"/>
           </a:xfrm>
@@ -9044,7 +9344,7 @@
       </p:sp>
       <p:sp>
         <p:nvSpPr>
-          <p:cNvPr id="14" name="TextBox 13"/>
+          <p:cNvPr id="22" name="TextBox 21"/>
           <p:cNvSpPr txBox="1"/>
           <p:nvPr/>
         </p:nvSpPr>
@@ -9077,7 +9377,7 @@
       </p:sp>
       <p:sp>
         <p:nvSpPr>
-          <p:cNvPr id="15" name="TextBox 14"/>
+          <p:cNvPr id="23" name="TextBox 22"/>
           <p:cNvSpPr txBox="1"/>
           <p:nvPr/>
         </p:nvSpPr>
@@ -9103,14 +9403,14 @@
                 </a:solidFill>
                 <a:latin typeface="Poppins"/>
               </a:rPr>
-              <a:t>$3,797 / mo</a:t>
-            </a:r>
-          </a:p>
-        </p:txBody>
-      </p:sp>
-      <p:sp>
-        <p:nvSpPr>
-          <p:cNvPr id="16" name="TextBox 15"/>
+              <a:t>$7,597 / mo</a:t>
+            </a:r>
+          </a:p>
+        </p:txBody>
+      </p:sp>
+      <p:sp>
+        <p:nvSpPr>
+          <p:cNvPr id="24" name="TextBox 23"/>
           <p:cNvSpPr txBox="1"/>
           <p:nvPr/>
         </p:nvSpPr>
@@ -9136,14 +9436,14 @@
                 </a:solidFill>
                 <a:latin typeface="Poppins"/>
               </a:rPr>
-              <a:t>Stand-alone — no bundle discount</a:t>
-            </a:r>
-          </a:p>
-        </p:txBody>
-      </p:sp>
-      <p:sp>
-        <p:nvSpPr>
-          <p:cNvPr id="17" name="Rectangle 16"/>
+              <a:t>You save $1,597/month by bundling</a:t>
+            </a:r>
+          </a:p>
+        </p:txBody>
+      </p:sp>
+      <p:sp>
+        <p:nvSpPr>
+          <p:cNvPr id="25" name="Rectangle 24"/>
           <p:cNvSpPr/>
           <p:nvPr/>
         </p:nvSpPr>
@@ -9188,7 +9488,7 @@
       </p:sp>
       <p:sp>
         <p:nvSpPr>
-          <p:cNvPr id="18" name="TextBox 17"/>
+          <p:cNvPr id="26" name="TextBox 25"/>
           <p:cNvSpPr txBox="1"/>
           <p:nvPr/>
         </p:nvSpPr>
@@ -9221,7 +9521,7 @@
       </p:sp>
       <p:sp>
         <p:nvSpPr>
-          <p:cNvPr id="19" name="Rectangle 18"/>
+          <p:cNvPr id="27" name="Rectangle 26"/>
           <p:cNvSpPr/>
           <p:nvPr/>
         </p:nvSpPr>
@@ -9266,7 +9566,7 @@
       </p:sp>
       <p:sp>
         <p:nvSpPr>
-          <p:cNvPr id="20" name="TextBox 19"/>
+          <p:cNvPr id="28" name="TextBox 27"/>
           <p:cNvSpPr txBox="1"/>
           <p:nvPr/>
         </p:nvSpPr>
@@ -9299,7 +9599,7 @@
       </p:sp>
       <p:sp>
         <p:nvSpPr>
-          <p:cNvPr id="21" name="TextBox 20"/>
+          <p:cNvPr id="29" name="TextBox 28"/>
           <p:cNvSpPr txBox="1"/>
           <p:nvPr/>
         </p:nvSpPr>
@@ -9332,7 +9632,7 @@
       </p:sp>
       <p:sp>
         <p:nvSpPr>
-          <p:cNvPr id="22" name="TextBox 21"/>
+          <p:cNvPr id="30" name="TextBox 29"/>
           <p:cNvSpPr txBox="1"/>
           <p:nvPr/>
         </p:nvSpPr>
@@ -9365,7 +9665,7 @@
       </p:sp>
       <p:sp>
         <p:nvSpPr>
-          <p:cNvPr id="23" name="Rectangle 22"/>
+          <p:cNvPr id="31" name="Rectangle 30"/>
           <p:cNvSpPr/>
           <p:nvPr/>
         </p:nvSpPr>
@@ -9410,7 +9710,7 @@
       </p:sp>
       <p:sp>
         <p:nvSpPr>
-          <p:cNvPr id="24" name="TextBox 23"/>
+          <p:cNvPr id="32" name="TextBox 31"/>
           <p:cNvSpPr txBox="1"/>
           <p:nvPr/>
         </p:nvSpPr>
@@ -9443,7 +9743,7 @@
       </p:sp>
       <p:sp>
         <p:nvSpPr>
-          <p:cNvPr id="25" name="TextBox 24"/>
+          <p:cNvPr id="33" name="TextBox 32"/>
           <p:cNvSpPr txBox="1"/>
           <p:nvPr/>
         </p:nvSpPr>
@@ -9476,7 +9776,7 @@
       </p:sp>
       <p:sp>
         <p:nvSpPr>
-          <p:cNvPr id="26" name="TextBox 25"/>
+          <p:cNvPr id="34" name="TextBox 33"/>
           <p:cNvSpPr txBox="1"/>
           <p:nvPr/>
         </p:nvSpPr>
@@ -9509,7 +9809,7 @@
       </p:sp>
       <p:sp>
         <p:nvSpPr>
-          <p:cNvPr id="27" name="TextBox 26"/>
+          <p:cNvPr id="35" name="TextBox 34"/>
           <p:cNvSpPr txBox="1"/>
           <p:nvPr/>
         </p:nvSpPr>
@@ -9542,7 +9842,7 @@
       </p:sp>
       <p:sp>
         <p:nvSpPr>
-          <p:cNvPr id="28" name="TextBox 27"/>
+          <p:cNvPr id="36" name="TextBox 35"/>
           <p:cNvSpPr txBox="1"/>
           <p:nvPr/>
         </p:nvSpPr>
@@ -9575,7 +9875,7 @@
       </p:sp>
       <p:sp>
         <p:nvSpPr>
-          <p:cNvPr id="29" name="Rectangle 28"/>
+          <p:cNvPr id="37" name="Rectangle 36"/>
           <p:cNvSpPr/>
           <p:nvPr/>
         </p:nvSpPr>
@@ -9620,7 +9920,7 @@
       </p:sp>
       <p:sp>
         <p:nvSpPr>
-          <p:cNvPr id="30" name="TextBox 29"/>
+          <p:cNvPr id="38" name="TextBox 37"/>
           <p:cNvSpPr txBox="1"/>
           <p:nvPr/>
         </p:nvSpPr>
@@ -9653,7 +9953,7 @@
       </p:sp>
       <p:sp>
         <p:nvSpPr>
-          <p:cNvPr id="31" name="TextBox 30"/>
+          <p:cNvPr id="39" name="TextBox 38"/>
           <p:cNvSpPr txBox="1"/>
           <p:nvPr/>
         </p:nvSpPr>
@@ -9686,7 +9986,7 @@
       </p:sp>
       <p:sp>
         <p:nvSpPr>
-          <p:cNvPr id="32" name="Rectangle 31"/>
+          <p:cNvPr id="40" name="Rectangle 39"/>
           <p:cNvSpPr/>
           <p:nvPr/>
         </p:nvSpPr>
@@ -9731,7 +10031,7 @@
       </p:sp>
       <p:sp>
         <p:nvSpPr>
-          <p:cNvPr id="33" name="TextBox 32"/>
+          <p:cNvPr id="41" name="TextBox 40"/>
           <p:cNvSpPr txBox="1"/>
           <p:nvPr/>
         </p:nvSpPr>
@@ -9764,7 +10064,7 @@
       </p:sp>
       <p:sp>
         <p:nvSpPr>
-          <p:cNvPr id="34" name="TextBox 33"/>
+          <p:cNvPr id="42" name="TextBox 41"/>
           <p:cNvSpPr txBox="1"/>
           <p:nvPr/>
         </p:nvSpPr>
@@ -9797,7 +10097,7 @@
       </p:sp>
       <p:sp>
         <p:nvSpPr>
-          <p:cNvPr id="35" name="Rectangle 34"/>
+          <p:cNvPr id="43" name="Rectangle 42"/>
           <p:cNvSpPr/>
           <p:nvPr/>
         </p:nvSpPr>
@@ -9842,7 +10142,7 @@
       </p:sp>
       <p:sp>
         <p:nvSpPr>
-          <p:cNvPr id="36" name="TextBox 35"/>
+          <p:cNvPr id="44" name="TextBox 43"/>
           <p:cNvSpPr txBox="1"/>
           <p:nvPr/>
         </p:nvSpPr>
@@ -9875,7 +10175,7 @@
       </p:sp>
       <p:sp>
         <p:nvSpPr>
-          <p:cNvPr id="37" name="TextBox 36"/>
+          <p:cNvPr id="45" name="TextBox 44"/>
           <p:cNvSpPr txBox="1"/>
           <p:nvPr/>
         </p:nvSpPr>
@@ -9908,7 +10208,7 @@
       </p:sp>
       <p:sp>
         <p:nvSpPr>
-          <p:cNvPr id="38" name="Rectangle 37"/>
+          <p:cNvPr id="46" name="Rectangle 45"/>
           <p:cNvSpPr/>
           <p:nvPr/>
         </p:nvSpPr>
@@ -9953,7 +10253,7 @@
       </p:sp>
       <p:sp>
         <p:nvSpPr>
-          <p:cNvPr id="39" name="TextBox 38"/>
+          <p:cNvPr id="47" name="TextBox 46"/>
           <p:cNvSpPr txBox="1"/>
           <p:nvPr/>
         </p:nvSpPr>
@@ -9986,7 +10286,7 @@
       </p:sp>
       <p:sp>
         <p:nvSpPr>
-          <p:cNvPr id="40" name="TextBox 39"/>
+          <p:cNvPr id="48" name="TextBox 47"/>
           <p:cNvSpPr txBox="1"/>
           <p:nvPr/>
         </p:nvSpPr>
@@ -10019,7 +10319,7 @@
       </p:sp>
       <p:sp>
         <p:nvSpPr>
-          <p:cNvPr id="41" name="Rectangle 40"/>
+          <p:cNvPr id="49" name="Rectangle 48"/>
           <p:cNvSpPr/>
           <p:nvPr/>
         </p:nvSpPr>
@@ -10064,7 +10364,7 @@
       </p:sp>
       <p:sp>
         <p:nvSpPr>
-          <p:cNvPr id="42" name="TextBox 41"/>
+          <p:cNvPr id="50" name="TextBox 49"/>
           <p:cNvSpPr txBox="1"/>
           <p:nvPr/>
         </p:nvSpPr>
@@ -10097,7 +10397,7 @@
       </p:sp>
       <p:sp>
         <p:nvSpPr>
-          <p:cNvPr id="43" name="TextBox 42"/>
+          <p:cNvPr id="51" name="TextBox 50"/>
           <p:cNvSpPr txBox="1"/>
           <p:nvPr/>
         </p:nvSpPr>
@@ -10130,7 +10430,7 @@
       </p:sp>
       <p:sp>
         <p:nvSpPr>
-          <p:cNvPr id="44" name="Rectangle 43"/>
+          <p:cNvPr id="52" name="Rectangle 51"/>
           <p:cNvSpPr/>
           <p:nvPr/>
         </p:nvSpPr>
@@ -10175,7 +10475,7 @@
       </p:sp>
       <p:sp>
         <p:nvSpPr>
-          <p:cNvPr id="45" name="TextBox 44"/>
+          <p:cNvPr id="53" name="TextBox 52"/>
           <p:cNvSpPr txBox="1"/>
           <p:nvPr/>
         </p:nvSpPr>
@@ -10208,7 +10508,7 @@
       </p:sp>
       <p:sp>
         <p:nvSpPr>
-          <p:cNvPr id="46" name="Rectangle 45"/>
+          <p:cNvPr id="54" name="Rectangle 53"/>
           <p:cNvSpPr/>
           <p:nvPr/>
         </p:nvSpPr>
@@ -10253,7 +10553,7 @@
       </p:sp>
       <p:pic>
         <p:nvPicPr>
-          <p:cNvPr id="47" name="Picture 46" descr="smb_team_logo.png"/>
+          <p:cNvPr id="55" name="Picture 54" descr="smb_team_logo.png"/>
           <p:cNvPicPr>
             <a:picLocks noChangeAspect="1"/>
           </p:cNvPicPr>
@@ -10277,7 +10577,7 @@
       </p:pic>
       <p:sp>
         <p:nvSpPr>
-          <p:cNvPr id="48" name="TextBox 47"/>
+          <p:cNvPr id="56" name="TextBox 55"/>
           <p:cNvSpPr txBox="1"/>
           <p:nvPr/>
         </p:nvSpPr>
@@ -10310,7 +10610,7 @@
       </p:sp>
       <p:sp>
         <p:nvSpPr>
-          <p:cNvPr id="49" name="TextBox 48"/>
+          <p:cNvPr id="57" name="TextBox 56"/>
           <p:cNvSpPr txBox="1"/>
           <p:nvPr/>
         </p:nvSpPr>

--- a/gaydos-law/Gaydos Law_September 15, 2026_Proposal.pptx
+++ b/gaydos-law/Gaydos Law_September 15, 2026_Proposal.pptx
@@ -1,6 +1,6 @@
 
 <file path=ppt/presentation.xml><?xml version="1.0" encoding="utf-8"?>
-<p:presentation xmlns:a="http://schemas.openxmlformats.org/drawingml/2006/main" xmlns:r="http://schemas.openxmlformats.org/officeDocument/2006/relationships" xmlns:p="http://schemas.openxmlformats.org/presentationml/2006/main" saveSubsetFonts="1" autoCompressPictures="0">
+<p:presentation xmlns:a="http://schemas.openxmlformats.org/drawingml/2006/main" xmlns:r="http://schemas.openxmlformats.org/officeDocument/2006/relationships" xmlns:p="http://schemas.openxmlformats.org/presentationml/2006/main" saveSubsetFonts="1" autoCompressPictures="0" embedTrueTypeFonts="1">
   <p:sldMasterIdLst>
     <p:sldMasterId id="2147483648" r:id="rId1"/>
   </p:sldMasterIdLst>
@@ -11,6 +11,14 @@
   </p:sldIdLst>
   <p:sldSz cx="9144000" cy="5143500" type="screen4x3"/>
   <p:notesSz cx="6858000" cy="9144000"/>
+  <p:embeddedFontLst>
+    <p:embeddedFont>
+      <p:font typeface="Poppins"/>
+      <p:regular r:id="rIdEmbedFont1"/>
+      <p:bold r:id="rIdEmbedFont2"/>
+      <p:italic r:id="rIdEmbedFont3"/>
+    </p:embeddedFont>
+  </p:embeddedFontLst>
   <p:defaultTextStyle>
     <a:defPPr>
       <a:defRPr lang="en-US"/>
@@ -3099,13 +3107,13 @@
         <p:spPr>
           <a:xfrm>
             <a:off x="0" y="0"/>
-            <a:ext cx="9144000" cy="960120"/>
-          </a:xfrm>
-          <a:prstGeom prst="rect">
-            <a:avLst/>
-          </a:prstGeom>
-          <a:solidFill>
-            <a:srgbClr val="003A59"/>
+            <a:ext cx="9144000" cy="5143500"/>
+          </a:xfrm>
+          <a:prstGeom prst="rect">
+            <a:avLst/>
+          </a:prstGeom>
+          <a:solidFill>
+            <a:srgbClr val="F4F7F9"/>
           </a:solidFill>
           <a:ln>
             <a:solidFill>
@@ -3137,86 +3145,20 @@
       </p:sp>
       <p:sp>
         <p:nvSpPr>
-          <p:cNvPr id="3" name="TextBox 2"/>
-          <p:cNvSpPr txBox="1"/>
-          <p:nvPr/>
-        </p:nvSpPr>
-        <p:spPr>
-          <a:xfrm>
-            <a:off x="292608" y="91440"/>
-            <a:ext cx="8595360" cy="201168"/>
-          </a:xfrm>
-          <a:prstGeom prst="rect">
-            <a:avLst/>
-          </a:prstGeom>
-          <a:noFill/>
-        </p:spPr>
-        <p:txBody>
-          <a:bodyPr wrap="square"/>
-          <a:lstStyle/>
-          <a:p>
-            <a:pPr algn="l"/>
-            <a:r>
-              <a:rPr sz="800" b="1" i="0">
-                <a:solidFill>
-                  <a:srgbClr val="69CD2B"/>
-                </a:solidFill>
-                <a:latin typeface="Poppins"/>
-              </a:rPr>
-              <a:t>LAW FIRM GROWTH AUDIT  ·  GAYDOS LAW, P.C.</a:t>
-            </a:r>
-          </a:p>
-        </p:txBody>
-      </p:sp>
-      <p:sp>
-        <p:nvSpPr>
-          <p:cNvPr id="4" name="TextBox 3"/>
-          <p:cNvSpPr txBox="1"/>
-          <p:nvPr/>
-        </p:nvSpPr>
-        <p:spPr>
-          <a:xfrm>
-            <a:off x="292608" y="310896"/>
-            <a:ext cx="8595360" cy="548640"/>
-          </a:xfrm>
-          <a:prstGeom prst="rect">
-            <a:avLst/>
-          </a:prstGeom>
-          <a:noFill/>
-        </p:spPr>
-        <p:txBody>
-          <a:bodyPr wrap="square"/>
-          <a:lstStyle/>
-          <a:p>
-            <a:pPr algn="l"/>
-            <a:r>
-              <a:rPr sz="2400" b="1" i="0">
-                <a:solidFill>
-                  <a:srgbClr val="FFFFFF"/>
-                </a:solidFill>
-                <a:latin typeface="Poppins"/>
-              </a:rPr>
-              <a:t>Where Gaydos Law, P.C. Stands Today</a:t>
-            </a:r>
-          </a:p>
-        </p:txBody>
-      </p:sp>
-      <p:sp>
-        <p:nvSpPr>
-          <p:cNvPr id="5" name="Rectangle 4"/>
+          <p:cNvPr id="3" name="Rectangle 2"/>
           <p:cNvSpPr/>
           <p:nvPr/>
         </p:nvSpPr>
         <p:spPr>
           <a:xfrm>
-            <a:off x="0" y="960120"/>
-            <a:ext cx="146304" cy="3867912"/>
-          </a:xfrm>
-          <a:prstGeom prst="rect">
-            <a:avLst/>
-          </a:prstGeom>
-          <a:solidFill>
-            <a:srgbClr val="0091C9"/>
+            <a:off x="0" y="0"/>
+            <a:ext cx="9144000" cy="841248"/>
+          </a:xfrm>
+          <a:prstGeom prst="rect">
+            <a:avLst/>
+          </a:prstGeom>
+          <a:solidFill>
+            <a:srgbClr val="003A59"/>
           </a:solidFill>
           <a:ln>
             <a:solidFill>
@@ -3248,20 +3190,20 @@
       </p:sp>
       <p:sp>
         <p:nvSpPr>
-          <p:cNvPr id="6" name="Rectangle 5"/>
+          <p:cNvPr id="4" name="Rectangle 3"/>
           <p:cNvSpPr/>
           <p:nvPr/>
         </p:nvSpPr>
         <p:spPr>
           <a:xfrm>
-            <a:off x="256032" y="1005840"/>
-            <a:ext cx="1298448" cy="841248"/>
-          </a:xfrm>
-          <a:prstGeom prst="rect">
-            <a:avLst/>
-          </a:prstGeom>
-          <a:solidFill>
-            <a:srgbClr val="C0392B"/>
+            <a:off x="0" y="841248"/>
+            <a:ext cx="9144000" cy="36576"/>
+          </a:xfrm>
+          <a:prstGeom prst="rect">
+            <a:avLst/>
+          </a:prstGeom>
+          <a:solidFill>
+            <a:srgbClr val="69CD2B"/>
           </a:solidFill>
           <a:ln>
             <a:solidFill>
@@ -3293,14 +3235,14 @@
       </p:sp>
       <p:sp>
         <p:nvSpPr>
-          <p:cNvPr id="7" name="TextBox 6"/>
+          <p:cNvPr id="5" name="TextBox 4"/>
           <p:cNvSpPr txBox="1"/>
           <p:nvPr/>
         </p:nvSpPr>
         <p:spPr>
           <a:xfrm>
-            <a:off x="256032" y="1005840"/>
-            <a:ext cx="1298448" cy="566928"/>
+            <a:off x="292608" y="182880"/>
+            <a:ext cx="5486400" cy="164592"/>
           </a:xfrm>
           <a:prstGeom prst="rect">
             <a:avLst/>
@@ -3308,32 +3250,34 @@
           <a:noFill/>
         </p:spPr>
         <p:txBody>
-          <a:bodyPr wrap="square"/>
-          <a:lstStyle/>
-          <a:p>
-            <a:pPr algn="ctr"/>
-            <a:r>
-              <a:rPr sz="2800" b="1" i="0">
-                <a:solidFill>
-                  <a:srgbClr val="FFFFFF"/>
+          <a:bodyPr wrap="square">
+            <a:normAutofit/>
+          </a:bodyPr>
+          <a:lstStyle/>
+          <a:p>
+            <a:pPr algn="l"/>
+            <a:r>
+              <a:rPr sz="750" b="1" i="0">
+                <a:solidFill>
+                  <a:srgbClr val="69CD2B"/>
                 </a:solidFill>
                 <a:latin typeface="Poppins"/>
               </a:rPr>
-              <a:t>6</a:t>
-            </a:r>
-          </a:p>
-        </p:txBody>
-      </p:sp>
-      <p:sp>
-        <p:nvSpPr>
-          <p:cNvPr id="8" name="TextBox 7"/>
+              <a:t>LAW FIRM GROWTH AUDIT  ·  GAYDOS LAW, P.C.</a:t>
+            </a:r>
+          </a:p>
+        </p:txBody>
+      </p:sp>
+      <p:sp>
+        <p:nvSpPr>
+          <p:cNvPr id="6" name="TextBox 5"/>
           <p:cNvSpPr txBox="1"/>
           <p:nvPr/>
         </p:nvSpPr>
         <p:spPr>
           <a:xfrm>
-            <a:off x="256032" y="1572768"/>
-            <a:ext cx="1298448" cy="274320"/>
+            <a:off x="292608" y="365760"/>
+            <a:ext cx="6309360" cy="365760"/>
           </a:xfrm>
           <a:prstGeom prst="rect">
             <a:avLst/>
@@ -3341,38 +3285,40 @@
           <a:noFill/>
         </p:spPr>
         <p:txBody>
-          <a:bodyPr wrap="square"/>
-          <a:lstStyle/>
-          <a:p>
-            <a:pPr algn="ctr"/>
-            <a:r>
-              <a:rPr sz="600" b="1" i="0">
+          <a:bodyPr wrap="square">
+            <a:normAutofit/>
+          </a:bodyPr>
+          <a:lstStyle/>
+          <a:p>
+            <a:pPr algn="l"/>
+            <a:r>
+              <a:rPr sz="2000" b="1" i="0">
                 <a:solidFill>
                   <a:srgbClr val="FFFFFF"/>
                 </a:solidFill>
                 <a:latin typeface="Poppins"/>
               </a:rPr>
-              <a:t>COMPETITIVE URGENCY</a:t>
-            </a:r>
-          </a:p>
-        </p:txBody>
-      </p:sp>
-      <p:sp>
-        <p:nvSpPr>
-          <p:cNvPr id="9" name="Rectangle 8"/>
+              <a:t>Where Gaydos Law, P.C. Stands Today</a:t>
+            </a:r>
+          </a:p>
+        </p:txBody>
+      </p:sp>
+      <p:sp>
+        <p:nvSpPr>
+          <p:cNvPr id="7" name="Rectangle 6"/>
           <p:cNvSpPr/>
           <p:nvPr/>
         </p:nvSpPr>
         <p:spPr>
           <a:xfrm>
-            <a:off x="1682496" y="1005840"/>
-            <a:ext cx="804672" cy="164592"/>
-          </a:xfrm>
-          <a:prstGeom prst="rect">
-            <a:avLst/>
-          </a:prstGeom>
-          <a:solidFill>
-            <a:srgbClr val="C0392B"/>
+            <a:off x="6784848" y="164592"/>
+            <a:ext cx="2066543" cy="512064"/>
+          </a:xfrm>
+          <a:prstGeom prst="rect">
+            <a:avLst/>
+          </a:prstGeom>
+          <a:solidFill>
+            <a:srgbClr val="0B4C6E"/>
           </a:solidFill>
           <a:ln>
             <a:solidFill>
@@ -3404,20 +3350,125 @@
       </p:sp>
       <p:sp>
         <p:nvSpPr>
-          <p:cNvPr id="10" name="Rectangle 9"/>
+          <p:cNvPr id="8" name="TextBox 7"/>
+          <p:cNvSpPr txBox="1"/>
+          <p:nvPr/>
+        </p:nvSpPr>
+        <p:spPr>
+          <a:xfrm>
+            <a:off x="6931152" y="210312"/>
+            <a:ext cx="384048" cy="384048"/>
+          </a:xfrm>
+          <a:prstGeom prst="rect">
+            <a:avLst/>
+          </a:prstGeom>
+          <a:noFill/>
+        </p:spPr>
+        <p:txBody>
+          <a:bodyPr wrap="square">
+            <a:normAutofit/>
+          </a:bodyPr>
+          <a:lstStyle/>
+          <a:p>
+            <a:pPr algn="ctr"/>
+            <a:r>
+              <a:rPr sz="2100" b="1" i="0">
+                <a:solidFill>
+                  <a:srgbClr val="FFFFFF"/>
+                </a:solidFill>
+                <a:latin typeface="Poppins"/>
+              </a:rPr>
+              <a:t>6</a:t>
+            </a:r>
+          </a:p>
+        </p:txBody>
+      </p:sp>
+      <p:sp>
+        <p:nvSpPr>
+          <p:cNvPr id="9" name="TextBox 8"/>
+          <p:cNvSpPr txBox="1"/>
+          <p:nvPr/>
+        </p:nvSpPr>
+        <p:spPr>
+          <a:xfrm>
+            <a:off x="7351775" y="274320"/>
+            <a:ext cx="1417320" cy="164592"/>
+          </a:xfrm>
+          <a:prstGeom prst="rect">
+            <a:avLst/>
+          </a:prstGeom>
+          <a:noFill/>
+        </p:spPr>
+        <p:txBody>
+          <a:bodyPr wrap="square">
+            <a:normAutofit/>
+          </a:bodyPr>
+          <a:lstStyle/>
+          <a:p>
+            <a:pPr algn="l"/>
+            <a:r>
+              <a:rPr sz="700" b="1" i="0">
+                <a:solidFill>
+                  <a:srgbClr val="69CD2B"/>
+                </a:solidFill>
+                <a:latin typeface="Poppins"/>
+              </a:rPr>
+              <a:t>COMPETITIVE URGENCY</a:t>
+            </a:r>
+          </a:p>
+        </p:txBody>
+      </p:sp>
+      <p:sp>
+        <p:nvSpPr>
+          <p:cNvPr id="10" name="TextBox 9"/>
+          <p:cNvSpPr txBox="1"/>
+          <p:nvPr/>
+        </p:nvSpPr>
+        <p:spPr>
+          <a:xfrm>
+            <a:off x="7351775" y="429768"/>
+            <a:ext cx="1417320" cy="164592"/>
+          </a:xfrm>
+          <a:prstGeom prst="rect">
+            <a:avLst/>
+          </a:prstGeom>
+          <a:noFill/>
+        </p:spPr>
+        <p:txBody>
+          <a:bodyPr wrap="square">
+            <a:normAutofit/>
+          </a:bodyPr>
+          <a:lstStyle/>
+          <a:p>
+            <a:pPr algn="l"/>
+            <a:r>
+              <a:rPr sz="700" b="0" i="0">
+                <a:solidFill>
+                  <a:srgbClr val="9CC0D6"/>
+                </a:solidFill>
+                <a:latin typeface="Poppins"/>
+              </a:rPr>
+              <a:t>Score out of 10</a:t>
+            </a:r>
+          </a:p>
+        </p:txBody>
+      </p:sp>
+      <p:sp>
+        <p:nvSpPr>
+          <p:cNvPr id="11" name="Rectangle 10"/>
           <p:cNvSpPr/>
           <p:nvPr/>
         </p:nvSpPr>
         <p:spPr>
           <a:xfrm>
-            <a:off x="1682496" y="1170432"/>
-            <a:ext cx="804672" cy="676656"/>
-          </a:xfrm>
-          <a:prstGeom prst="rect">
-            <a:avLst/>
-          </a:prstGeom>
-          <a:solidFill>
-            <a:srgbClr val="265872"/>
+            <a:off x="274320" y="1005840"/>
+            <a:ext cx="2066543" cy="877824"/>
+          </a:xfrm>
+          <a:prstGeom prst="rect">
+            <a:avLst/>
+          </a:prstGeom>
+          <a:solidFill>
+            <a:srgbClr val="FFFFFF"/>
           </a:solidFill>
           <a:ln>
             <a:solidFill>
@@ -3449,119 +3500,20 @@
       </p:sp>
       <p:sp>
         <p:nvSpPr>
-          <p:cNvPr id="11" name="TextBox 10"/>
-          <p:cNvSpPr txBox="1"/>
-          <p:nvPr/>
-        </p:nvSpPr>
-        <p:spPr>
-          <a:xfrm>
-            <a:off x="1737360" y="1188720"/>
-            <a:ext cx="694944" cy="237744"/>
-          </a:xfrm>
-          <a:prstGeom prst="rect">
-            <a:avLst/>
-          </a:prstGeom>
-          <a:noFill/>
-        </p:spPr>
-        <p:txBody>
-          <a:bodyPr wrap="square"/>
-          <a:lstStyle/>
-          <a:p>
-            <a:pPr algn="l"/>
-            <a:r>
-              <a:rPr sz="800" b="1" i="0">
-                <a:solidFill>
-                  <a:srgbClr val="FFFFFF"/>
-                </a:solidFill>
-                <a:latin typeface="Poppins"/>
-              </a:rPr>
-              <a:t>Lead Generation</a:t>
-            </a:r>
-          </a:p>
-        </p:txBody>
-      </p:sp>
-      <p:sp>
-        <p:nvSpPr>
-          <p:cNvPr id="12" name="TextBox 11"/>
-          <p:cNvSpPr txBox="1"/>
-          <p:nvPr/>
-        </p:nvSpPr>
-        <p:spPr>
-          <a:xfrm>
-            <a:off x="1737360" y="1417320"/>
-            <a:ext cx="694944" cy="182880"/>
-          </a:xfrm>
-          <a:prstGeom prst="rect">
-            <a:avLst/>
-          </a:prstGeom>
-          <a:noFill/>
-        </p:spPr>
-        <p:txBody>
-          <a:bodyPr wrap="square"/>
-          <a:lstStyle/>
-          <a:p>
-            <a:pPr algn="l"/>
-            <a:r>
-              <a:rPr sz="700" b="1" i="0">
-                <a:solidFill>
-                  <a:srgbClr val="C0392B"/>
-                </a:solidFill>
-                <a:latin typeface="Poppins"/>
-              </a:rPr>
-              <a:t>RED</a:t>
-            </a:r>
-          </a:p>
-        </p:txBody>
-      </p:sp>
-      <p:sp>
-        <p:nvSpPr>
-          <p:cNvPr id="13" name="TextBox 12"/>
-          <p:cNvSpPr txBox="1"/>
-          <p:nvPr/>
-        </p:nvSpPr>
-        <p:spPr>
-          <a:xfrm>
-            <a:off x="1737360" y="1591056"/>
-            <a:ext cx="694944" cy="237744"/>
-          </a:xfrm>
-          <a:prstGeom prst="rect">
-            <a:avLst/>
-          </a:prstGeom>
-          <a:noFill/>
-        </p:spPr>
-        <p:txBody>
-          <a:bodyPr wrap="square"/>
-          <a:lstStyle/>
-          <a:p>
-            <a:pPr algn="l"/>
-            <a:r>
-              <a:rPr sz="700" b="0" i="0">
-                <a:solidFill>
-                  <a:srgbClr val="8BADD0"/>
-                </a:solidFill>
-                <a:latin typeface="Poppins"/>
-              </a:rPr>
-              <a:t>Waning referrals only</a:t>
-            </a:r>
-          </a:p>
-        </p:txBody>
-      </p:sp>
-      <p:sp>
-        <p:nvSpPr>
-          <p:cNvPr id="14" name="Rectangle 13"/>
+          <p:cNvPr id="12" name="Rectangle 11"/>
           <p:cNvSpPr/>
           <p:nvPr/>
         </p:nvSpPr>
         <p:spPr>
           <a:xfrm>
-            <a:off x="2542032" y="1005840"/>
-            <a:ext cx="804672" cy="164592"/>
-          </a:xfrm>
-          <a:prstGeom prst="rect">
-            <a:avLst/>
-          </a:prstGeom>
-          <a:solidFill>
-            <a:srgbClr val="D97706"/>
+            <a:off x="274320" y="1005840"/>
+            <a:ext cx="2066543" cy="36576"/>
+          </a:xfrm>
+          <a:prstGeom prst="rect">
+            <a:avLst/>
+          </a:prstGeom>
+          <a:solidFill>
+            <a:srgbClr val="B32D2D"/>
           </a:solidFill>
           <a:ln>
             <a:solidFill>
@@ -3593,20 +3545,168 @@
       </p:sp>
       <p:sp>
         <p:nvSpPr>
-          <p:cNvPr id="15" name="Rectangle 14"/>
+          <p:cNvPr id="13" name="TextBox 12"/>
+          <p:cNvSpPr txBox="1"/>
+          <p:nvPr/>
+        </p:nvSpPr>
+        <p:spPr>
+          <a:xfrm>
+            <a:off x="420623" y="1152144"/>
+            <a:ext cx="1773936" cy="219456"/>
+          </a:xfrm>
+          <a:prstGeom prst="rect">
+            <a:avLst/>
+          </a:prstGeom>
+          <a:noFill/>
+        </p:spPr>
+        <p:txBody>
+          <a:bodyPr wrap="square">
+            <a:normAutofit/>
+          </a:bodyPr>
+          <a:lstStyle/>
+          <a:p>
+            <a:pPr algn="l"/>
+            <a:r>
+              <a:rPr sz="1200" b="1" i="0">
+                <a:solidFill>
+                  <a:srgbClr val="1B2A38"/>
+                </a:solidFill>
+                <a:latin typeface="Poppins"/>
+              </a:rPr>
+              <a:t>Lead Generation</a:t>
+            </a:r>
+          </a:p>
+        </p:txBody>
+      </p:sp>
+      <p:sp>
+        <p:nvSpPr>
+          <p:cNvPr id="14" name="Rounded Rectangle 13"/>
           <p:cNvSpPr/>
           <p:nvPr/>
         </p:nvSpPr>
         <p:spPr>
           <a:xfrm>
-            <a:off x="2542032" y="1170432"/>
-            <a:ext cx="804672" cy="676656"/>
-          </a:xfrm>
-          <a:prstGeom prst="rect">
-            <a:avLst/>
-          </a:prstGeom>
-          <a:solidFill>
-            <a:srgbClr val="265872"/>
+            <a:off x="420623" y="1426464"/>
+            <a:ext cx="585216" cy="173736"/>
+          </a:xfrm>
+          <a:prstGeom prst="roundRect">
+            <a:avLst/>
+          </a:prstGeom>
+          <a:solidFill>
+            <a:srgbClr val="FBEEEE"/>
+          </a:solidFill>
+          <a:ln>
+            <a:noFill/>
+          </a:ln>
+        </p:spPr>
+        <p:style>
+          <a:lnRef idx="1">
+            <a:schemeClr val="accent1"/>
+          </a:lnRef>
+          <a:fillRef idx="3">
+            <a:schemeClr val="accent1"/>
+          </a:fillRef>
+          <a:effectRef idx="2">
+            <a:schemeClr val="accent1"/>
+          </a:effectRef>
+          <a:fontRef idx="minor">
+            <a:schemeClr val="lt1"/>
+          </a:fontRef>
+        </p:style>
+        <p:txBody>
+          <a:bodyPr rtlCol="0" anchor="ctr"/>
+          <a:lstStyle/>
+          <a:p>
+            <a:pPr algn="ctr"/>
+          </a:p>
+        </p:txBody>
+      </p:sp>
+      <p:sp>
+        <p:nvSpPr>
+          <p:cNvPr id="15" name="TextBox 14"/>
+          <p:cNvSpPr txBox="1"/>
+          <p:nvPr/>
+        </p:nvSpPr>
+        <p:spPr>
+          <a:xfrm>
+            <a:off x="420623" y="1426464"/>
+            <a:ext cx="585216" cy="173736"/>
+          </a:xfrm>
+          <a:prstGeom prst="rect">
+            <a:avLst/>
+          </a:prstGeom>
+          <a:noFill/>
+        </p:spPr>
+        <p:txBody>
+          <a:bodyPr wrap="square">
+            <a:normAutofit/>
+          </a:bodyPr>
+          <a:lstStyle/>
+          <a:p>
+            <a:pPr algn="ctr"/>
+            <a:r>
+              <a:rPr sz="750" b="1" i="0">
+                <a:solidFill>
+                  <a:srgbClr val="B32D2D"/>
+                </a:solidFill>
+                <a:latin typeface="Poppins"/>
+              </a:rPr>
+              <a:t>RED</a:t>
+            </a:r>
+          </a:p>
+        </p:txBody>
+      </p:sp>
+      <p:sp>
+        <p:nvSpPr>
+          <p:cNvPr id="16" name="TextBox 15"/>
+          <p:cNvSpPr txBox="1"/>
+          <p:nvPr/>
+        </p:nvSpPr>
+        <p:spPr>
+          <a:xfrm>
+            <a:off x="420623" y="1664208"/>
+            <a:ext cx="1773936" cy="201168"/>
+          </a:xfrm>
+          <a:prstGeom prst="rect">
+            <a:avLst/>
+          </a:prstGeom>
+          <a:noFill/>
+        </p:spPr>
+        <p:txBody>
+          <a:bodyPr wrap="square">
+            <a:normAutofit/>
+          </a:bodyPr>
+          <a:lstStyle/>
+          <a:p>
+            <a:pPr algn="l"/>
+            <a:r>
+              <a:rPr sz="950" b="0" i="0">
+                <a:solidFill>
+                  <a:srgbClr val="7C8D9B"/>
+                </a:solidFill>
+                <a:latin typeface="Poppins"/>
+              </a:rPr>
+              <a:t>Waning referrals only</a:t>
+            </a:r>
+          </a:p>
+        </p:txBody>
+      </p:sp>
+      <p:sp>
+        <p:nvSpPr>
+          <p:cNvPr id="17" name="Rectangle 16"/>
+          <p:cNvSpPr/>
+          <p:nvPr/>
+        </p:nvSpPr>
+        <p:spPr>
+          <a:xfrm>
+            <a:off x="2450592" y="1005840"/>
+            <a:ext cx="2066543" cy="877824"/>
+          </a:xfrm>
+          <a:prstGeom prst="rect">
+            <a:avLst/>
+          </a:prstGeom>
+          <a:solidFill>
+            <a:srgbClr val="FFFFFF"/>
           </a:solidFill>
           <a:ln>
             <a:solidFill>
@@ -3638,119 +3738,20 @@
       </p:sp>
       <p:sp>
         <p:nvSpPr>
-          <p:cNvPr id="16" name="TextBox 15"/>
-          <p:cNvSpPr txBox="1"/>
-          <p:nvPr/>
-        </p:nvSpPr>
-        <p:spPr>
-          <a:xfrm>
-            <a:off x="2596896" y="1188720"/>
-            <a:ext cx="694944" cy="237744"/>
-          </a:xfrm>
-          <a:prstGeom prst="rect">
-            <a:avLst/>
-          </a:prstGeom>
-          <a:noFill/>
-        </p:spPr>
-        <p:txBody>
-          <a:bodyPr wrap="square"/>
-          <a:lstStyle/>
-          <a:p>
-            <a:pPr algn="l"/>
-            <a:r>
-              <a:rPr sz="800" b="1" i="0">
-                <a:solidFill>
-                  <a:srgbClr val="FFFFFF"/>
-                </a:solidFill>
-                <a:latin typeface="Poppins"/>
-              </a:rPr>
-              <a:t>Intake</a:t>
-            </a:r>
-          </a:p>
-        </p:txBody>
-      </p:sp>
-      <p:sp>
-        <p:nvSpPr>
-          <p:cNvPr id="17" name="TextBox 16"/>
-          <p:cNvSpPr txBox="1"/>
-          <p:nvPr/>
-        </p:nvSpPr>
-        <p:spPr>
-          <a:xfrm>
-            <a:off x="2596896" y="1417320"/>
-            <a:ext cx="694944" cy="182880"/>
-          </a:xfrm>
-          <a:prstGeom prst="rect">
-            <a:avLst/>
-          </a:prstGeom>
-          <a:noFill/>
-        </p:spPr>
-        <p:txBody>
-          <a:bodyPr wrap="square"/>
-          <a:lstStyle/>
-          <a:p>
-            <a:pPr algn="l"/>
-            <a:r>
-              <a:rPr sz="700" b="1" i="0">
-                <a:solidFill>
-                  <a:srgbClr val="D97706"/>
-                </a:solidFill>
-                <a:latin typeface="Poppins"/>
-              </a:rPr>
-              <a:t>AMBER</a:t>
-            </a:r>
-          </a:p>
-        </p:txBody>
-      </p:sp>
-      <p:sp>
-        <p:nvSpPr>
-          <p:cNvPr id="18" name="TextBox 17"/>
-          <p:cNvSpPr txBox="1"/>
-          <p:nvPr/>
-        </p:nvSpPr>
-        <p:spPr>
-          <a:xfrm>
-            <a:off x="2596896" y="1591056"/>
-            <a:ext cx="694944" cy="237744"/>
-          </a:xfrm>
-          <a:prstGeom prst="rect">
-            <a:avLst/>
-          </a:prstGeom>
-          <a:noFill/>
-        </p:spPr>
-        <p:txBody>
-          <a:bodyPr wrap="square"/>
-          <a:lstStyle/>
-          <a:p>
-            <a:pPr algn="l"/>
-            <a:r>
-              <a:rPr sz="700" b="0" i="0">
-                <a:solidFill>
-                  <a:srgbClr val="8BADD0"/>
-                </a:solidFill>
-                <a:latin typeface="Poppins"/>
-              </a:rPr>
-              <a:t>No CRM / lead tracking</a:t>
-            </a:r>
-          </a:p>
-        </p:txBody>
-      </p:sp>
-      <p:sp>
-        <p:nvSpPr>
-          <p:cNvPr id="19" name="Rectangle 18"/>
+          <p:cNvPr id="18" name="Rectangle 17"/>
           <p:cNvSpPr/>
           <p:nvPr/>
         </p:nvSpPr>
         <p:spPr>
           <a:xfrm>
-            <a:off x="3401568" y="1005840"/>
-            <a:ext cx="804672" cy="164592"/>
-          </a:xfrm>
-          <a:prstGeom prst="rect">
-            <a:avLst/>
-          </a:prstGeom>
-          <a:solidFill>
-            <a:srgbClr val="D97706"/>
+            <a:off x="2450592" y="1005840"/>
+            <a:ext cx="2066543" cy="36576"/>
+          </a:xfrm>
+          <a:prstGeom prst="rect">
+            <a:avLst/>
+          </a:prstGeom>
+          <a:solidFill>
+            <a:srgbClr val="B5770B"/>
           </a:solidFill>
           <a:ln>
             <a:solidFill>
@@ -3782,20 +3783,168 @@
       </p:sp>
       <p:sp>
         <p:nvSpPr>
-          <p:cNvPr id="20" name="Rectangle 19"/>
+          <p:cNvPr id="19" name="TextBox 18"/>
+          <p:cNvSpPr txBox="1"/>
+          <p:nvPr/>
+        </p:nvSpPr>
+        <p:spPr>
+          <a:xfrm>
+            <a:off x="2596896" y="1152144"/>
+            <a:ext cx="1773936" cy="219456"/>
+          </a:xfrm>
+          <a:prstGeom prst="rect">
+            <a:avLst/>
+          </a:prstGeom>
+          <a:noFill/>
+        </p:spPr>
+        <p:txBody>
+          <a:bodyPr wrap="square">
+            <a:normAutofit/>
+          </a:bodyPr>
+          <a:lstStyle/>
+          <a:p>
+            <a:pPr algn="l"/>
+            <a:r>
+              <a:rPr sz="1200" b="1" i="0">
+                <a:solidFill>
+                  <a:srgbClr val="1B2A38"/>
+                </a:solidFill>
+                <a:latin typeface="Poppins"/>
+              </a:rPr>
+              <a:t>Intake</a:t>
+            </a:r>
+          </a:p>
+        </p:txBody>
+      </p:sp>
+      <p:sp>
+        <p:nvSpPr>
+          <p:cNvPr id="20" name="Rounded Rectangle 19"/>
           <p:cNvSpPr/>
           <p:nvPr/>
         </p:nvSpPr>
         <p:spPr>
           <a:xfrm>
-            <a:off x="3401568" y="1170432"/>
-            <a:ext cx="804672" cy="676656"/>
-          </a:xfrm>
-          <a:prstGeom prst="rect">
-            <a:avLst/>
-          </a:prstGeom>
-          <a:solidFill>
-            <a:srgbClr val="265872"/>
+            <a:off x="2596896" y="1426464"/>
+            <a:ext cx="585216" cy="173736"/>
+          </a:xfrm>
+          <a:prstGeom prst="roundRect">
+            <a:avLst/>
+          </a:prstGeom>
+          <a:solidFill>
+            <a:srgbClr val="FDF4E3"/>
+          </a:solidFill>
+          <a:ln>
+            <a:noFill/>
+          </a:ln>
+        </p:spPr>
+        <p:style>
+          <a:lnRef idx="1">
+            <a:schemeClr val="accent1"/>
+          </a:lnRef>
+          <a:fillRef idx="3">
+            <a:schemeClr val="accent1"/>
+          </a:fillRef>
+          <a:effectRef idx="2">
+            <a:schemeClr val="accent1"/>
+          </a:effectRef>
+          <a:fontRef idx="minor">
+            <a:schemeClr val="lt1"/>
+          </a:fontRef>
+        </p:style>
+        <p:txBody>
+          <a:bodyPr rtlCol="0" anchor="ctr"/>
+          <a:lstStyle/>
+          <a:p>
+            <a:pPr algn="ctr"/>
+          </a:p>
+        </p:txBody>
+      </p:sp>
+      <p:sp>
+        <p:nvSpPr>
+          <p:cNvPr id="21" name="TextBox 20"/>
+          <p:cNvSpPr txBox="1"/>
+          <p:nvPr/>
+        </p:nvSpPr>
+        <p:spPr>
+          <a:xfrm>
+            <a:off x="2596896" y="1426464"/>
+            <a:ext cx="585216" cy="173736"/>
+          </a:xfrm>
+          <a:prstGeom prst="rect">
+            <a:avLst/>
+          </a:prstGeom>
+          <a:noFill/>
+        </p:spPr>
+        <p:txBody>
+          <a:bodyPr wrap="square">
+            <a:normAutofit/>
+          </a:bodyPr>
+          <a:lstStyle/>
+          <a:p>
+            <a:pPr algn="ctr"/>
+            <a:r>
+              <a:rPr sz="750" b="1" i="0">
+                <a:solidFill>
+                  <a:srgbClr val="B5770B"/>
+                </a:solidFill>
+                <a:latin typeface="Poppins"/>
+              </a:rPr>
+              <a:t>AMBER</a:t>
+            </a:r>
+          </a:p>
+        </p:txBody>
+      </p:sp>
+      <p:sp>
+        <p:nvSpPr>
+          <p:cNvPr id="22" name="TextBox 21"/>
+          <p:cNvSpPr txBox="1"/>
+          <p:nvPr/>
+        </p:nvSpPr>
+        <p:spPr>
+          <a:xfrm>
+            <a:off x="2596896" y="1664208"/>
+            <a:ext cx="1773936" cy="201168"/>
+          </a:xfrm>
+          <a:prstGeom prst="rect">
+            <a:avLst/>
+          </a:prstGeom>
+          <a:noFill/>
+        </p:spPr>
+        <p:txBody>
+          <a:bodyPr wrap="square">
+            <a:normAutofit/>
+          </a:bodyPr>
+          <a:lstStyle/>
+          <a:p>
+            <a:pPr algn="l"/>
+            <a:r>
+              <a:rPr sz="950" b="0" i="0">
+                <a:solidFill>
+                  <a:srgbClr val="7C8D9B"/>
+                </a:solidFill>
+                <a:latin typeface="Poppins"/>
+              </a:rPr>
+              <a:t>No CRM / lead tracking</a:t>
+            </a:r>
+          </a:p>
+        </p:txBody>
+      </p:sp>
+      <p:sp>
+        <p:nvSpPr>
+          <p:cNvPr id="23" name="Rectangle 22"/>
+          <p:cNvSpPr/>
+          <p:nvPr/>
+        </p:nvSpPr>
+        <p:spPr>
+          <a:xfrm>
+            <a:off x="4636008" y="1005840"/>
+            <a:ext cx="2066543" cy="877824"/>
+          </a:xfrm>
+          <a:prstGeom prst="rect">
+            <a:avLst/>
+          </a:prstGeom>
+          <a:solidFill>
+            <a:srgbClr val="FFFFFF"/>
           </a:solidFill>
           <a:ln>
             <a:solidFill>
@@ -3827,119 +3976,20 @@
       </p:sp>
       <p:sp>
         <p:nvSpPr>
-          <p:cNvPr id="21" name="TextBox 20"/>
-          <p:cNvSpPr txBox="1"/>
-          <p:nvPr/>
-        </p:nvSpPr>
-        <p:spPr>
-          <a:xfrm>
-            <a:off x="3456432" y="1188720"/>
-            <a:ext cx="694944" cy="237744"/>
-          </a:xfrm>
-          <a:prstGeom prst="rect">
-            <a:avLst/>
-          </a:prstGeom>
-          <a:noFill/>
-        </p:spPr>
-        <p:txBody>
-          <a:bodyPr wrap="square"/>
-          <a:lstStyle/>
-          <a:p>
-            <a:pPr algn="l"/>
-            <a:r>
-              <a:rPr sz="800" b="1" i="0">
-                <a:solidFill>
-                  <a:srgbClr val="FFFFFF"/>
-                </a:solidFill>
-                <a:latin typeface="Poppins"/>
-              </a:rPr>
-              <a:t>Team</a:t>
-            </a:r>
-          </a:p>
-        </p:txBody>
-      </p:sp>
-      <p:sp>
-        <p:nvSpPr>
-          <p:cNvPr id="22" name="TextBox 21"/>
-          <p:cNvSpPr txBox="1"/>
-          <p:nvPr/>
-        </p:nvSpPr>
-        <p:spPr>
-          <a:xfrm>
-            <a:off x="3456432" y="1417320"/>
-            <a:ext cx="694944" cy="182880"/>
-          </a:xfrm>
-          <a:prstGeom prst="rect">
-            <a:avLst/>
-          </a:prstGeom>
-          <a:noFill/>
-        </p:spPr>
-        <p:txBody>
-          <a:bodyPr wrap="square"/>
-          <a:lstStyle/>
-          <a:p>
-            <a:pPr algn="l"/>
-            <a:r>
-              <a:rPr sz="700" b="1" i="0">
-                <a:solidFill>
-                  <a:srgbClr val="D97706"/>
-                </a:solidFill>
-                <a:latin typeface="Poppins"/>
-              </a:rPr>
-              <a:t>AMBER</a:t>
-            </a:r>
-          </a:p>
-        </p:txBody>
-      </p:sp>
-      <p:sp>
-        <p:nvSpPr>
-          <p:cNvPr id="23" name="TextBox 22"/>
-          <p:cNvSpPr txBox="1"/>
-          <p:nvPr/>
-        </p:nvSpPr>
-        <p:spPr>
-          <a:xfrm>
-            <a:off x="3456432" y="1591056"/>
-            <a:ext cx="694944" cy="237744"/>
-          </a:xfrm>
-          <a:prstGeom prst="rect">
-            <a:avLst/>
-          </a:prstGeom>
-          <a:noFill/>
-        </p:spPr>
-        <p:txBody>
-          <a:bodyPr wrap="square"/>
-          <a:lstStyle/>
-          <a:p>
-            <a:pPr algn="l"/>
-            <a:r>
-              <a:rPr sz="700" b="0" i="0">
-                <a:solidFill>
-                  <a:srgbClr val="8BADD0"/>
-                </a:solidFill>
-                <a:latin typeface="Poppins"/>
-              </a:rPr>
-              <a:t>No formal leadership</a:t>
-            </a:r>
-          </a:p>
-        </p:txBody>
-      </p:sp>
-      <p:sp>
-        <p:nvSpPr>
           <p:cNvPr id="24" name="Rectangle 23"/>
           <p:cNvSpPr/>
           <p:nvPr/>
         </p:nvSpPr>
         <p:spPr>
           <a:xfrm>
-            <a:off x="4261104" y="1005840"/>
-            <a:ext cx="804672" cy="164592"/>
-          </a:xfrm>
-          <a:prstGeom prst="rect">
-            <a:avLst/>
-          </a:prstGeom>
-          <a:solidFill>
-            <a:srgbClr val="C0392B"/>
+            <a:off x="4636008" y="1005840"/>
+            <a:ext cx="2066543" cy="36576"/>
+          </a:xfrm>
+          <a:prstGeom prst="rect">
+            <a:avLst/>
+          </a:prstGeom>
+          <a:solidFill>
+            <a:srgbClr val="B5770B"/>
           </a:solidFill>
           <a:ln>
             <a:solidFill>
@@ -3971,20 +4021,168 @@
       </p:sp>
       <p:sp>
         <p:nvSpPr>
-          <p:cNvPr id="25" name="Rectangle 24"/>
+          <p:cNvPr id="25" name="TextBox 24"/>
+          <p:cNvSpPr txBox="1"/>
+          <p:nvPr/>
+        </p:nvSpPr>
+        <p:spPr>
+          <a:xfrm>
+            <a:off x="4782312" y="1152144"/>
+            <a:ext cx="1773936" cy="219456"/>
+          </a:xfrm>
+          <a:prstGeom prst="rect">
+            <a:avLst/>
+          </a:prstGeom>
+          <a:noFill/>
+        </p:spPr>
+        <p:txBody>
+          <a:bodyPr wrap="square">
+            <a:normAutofit/>
+          </a:bodyPr>
+          <a:lstStyle/>
+          <a:p>
+            <a:pPr algn="l"/>
+            <a:r>
+              <a:rPr sz="1200" b="1" i="0">
+                <a:solidFill>
+                  <a:srgbClr val="1B2A38"/>
+                </a:solidFill>
+                <a:latin typeface="Poppins"/>
+              </a:rPr>
+              <a:t>Team</a:t>
+            </a:r>
+          </a:p>
+        </p:txBody>
+      </p:sp>
+      <p:sp>
+        <p:nvSpPr>
+          <p:cNvPr id="26" name="Rounded Rectangle 25"/>
           <p:cNvSpPr/>
           <p:nvPr/>
         </p:nvSpPr>
         <p:spPr>
           <a:xfrm>
-            <a:off x="4261104" y="1170432"/>
-            <a:ext cx="804672" cy="676656"/>
-          </a:xfrm>
-          <a:prstGeom prst="rect">
-            <a:avLst/>
-          </a:prstGeom>
-          <a:solidFill>
-            <a:srgbClr val="265872"/>
+            <a:off x="4782312" y="1426464"/>
+            <a:ext cx="585216" cy="173736"/>
+          </a:xfrm>
+          <a:prstGeom prst="roundRect">
+            <a:avLst/>
+          </a:prstGeom>
+          <a:solidFill>
+            <a:srgbClr val="FDF4E3"/>
+          </a:solidFill>
+          <a:ln>
+            <a:noFill/>
+          </a:ln>
+        </p:spPr>
+        <p:style>
+          <a:lnRef idx="1">
+            <a:schemeClr val="accent1"/>
+          </a:lnRef>
+          <a:fillRef idx="3">
+            <a:schemeClr val="accent1"/>
+          </a:fillRef>
+          <a:effectRef idx="2">
+            <a:schemeClr val="accent1"/>
+          </a:effectRef>
+          <a:fontRef idx="minor">
+            <a:schemeClr val="lt1"/>
+          </a:fontRef>
+        </p:style>
+        <p:txBody>
+          <a:bodyPr rtlCol="0" anchor="ctr"/>
+          <a:lstStyle/>
+          <a:p>
+            <a:pPr algn="ctr"/>
+          </a:p>
+        </p:txBody>
+      </p:sp>
+      <p:sp>
+        <p:nvSpPr>
+          <p:cNvPr id="27" name="TextBox 26"/>
+          <p:cNvSpPr txBox="1"/>
+          <p:nvPr/>
+        </p:nvSpPr>
+        <p:spPr>
+          <a:xfrm>
+            <a:off x="4782312" y="1426464"/>
+            <a:ext cx="585216" cy="173736"/>
+          </a:xfrm>
+          <a:prstGeom prst="rect">
+            <a:avLst/>
+          </a:prstGeom>
+          <a:noFill/>
+        </p:spPr>
+        <p:txBody>
+          <a:bodyPr wrap="square">
+            <a:normAutofit/>
+          </a:bodyPr>
+          <a:lstStyle/>
+          <a:p>
+            <a:pPr algn="ctr"/>
+            <a:r>
+              <a:rPr sz="750" b="1" i="0">
+                <a:solidFill>
+                  <a:srgbClr val="B5770B"/>
+                </a:solidFill>
+                <a:latin typeface="Poppins"/>
+              </a:rPr>
+              <a:t>AMBER</a:t>
+            </a:r>
+          </a:p>
+        </p:txBody>
+      </p:sp>
+      <p:sp>
+        <p:nvSpPr>
+          <p:cNvPr id="28" name="TextBox 27"/>
+          <p:cNvSpPr txBox="1"/>
+          <p:nvPr/>
+        </p:nvSpPr>
+        <p:spPr>
+          <a:xfrm>
+            <a:off x="4782312" y="1664208"/>
+            <a:ext cx="1773936" cy="201168"/>
+          </a:xfrm>
+          <a:prstGeom prst="rect">
+            <a:avLst/>
+          </a:prstGeom>
+          <a:noFill/>
+        </p:spPr>
+        <p:txBody>
+          <a:bodyPr wrap="square">
+            <a:normAutofit/>
+          </a:bodyPr>
+          <a:lstStyle/>
+          <a:p>
+            <a:pPr algn="l"/>
+            <a:r>
+              <a:rPr sz="950" b="0" i="0">
+                <a:solidFill>
+                  <a:srgbClr val="7C8D9B"/>
+                </a:solidFill>
+                <a:latin typeface="Poppins"/>
+              </a:rPr>
+              <a:t>No formal leadership</a:t>
+            </a:r>
+          </a:p>
+        </p:txBody>
+      </p:sp>
+      <p:sp>
+        <p:nvSpPr>
+          <p:cNvPr id="29" name="Rectangle 28"/>
+          <p:cNvSpPr/>
+          <p:nvPr/>
+        </p:nvSpPr>
+        <p:spPr>
+          <a:xfrm>
+            <a:off x="6812280" y="1005840"/>
+            <a:ext cx="2066543" cy="877824"/>
+          </a:xfrm>
+          <a:prstGeom prst="rect">
+            <a:avLst/>
+          </a:prstGeom>
+          <a:solidFill>
+            <a:srgbClr val="FFFFFF"/>
           </a:solidFill>
           <a:ln>
             <a:solidFill>
@@ -4016,152 +4214,20 @@
       </p:sp>
       <p:sp>
         <p:nvSpPr>
-          <p:cNvPr id="26" name="TextBox 25"/>
-          <p:cNvSpPr txBox="1"/>
-          <p:nvPr/>
-        </p:nvSpPr>
-        <p:spPr>
-          <a:xfrm>
-            <a:off x="4315968" y="1188720"/>
-            <a:ext cx="694944" cy="237744"/>
-          </a:xfrm>
-          <a:prstGeom prst="rect">
-            <a:avLst/>
-          </a:prstGeom>
-          <a:noFill/>
-        </p:spPr>
-        <p:txBody>
-          <a:bodyPr wrap="square"/>
-          <a:lstStyle/>
-          <a:p>
-            <a:pPr algn="l"/>
-            <a:r>
-              <a:rPr sz="800" b="1" i="0">
-                <a:solidFill>
-                  <a:srgbClr val="FFFFFF"/>
-                </a:solidFill>
-                <a:latin typeface="Poppins"/>
-              </a:rPr>
-              <a:t>Profit Plan</a:t>
-            </a:r>
-          </a:p>
-        </p:txBody>
-      </p:sp>
-      <p:sp>
-        <p:nvSpPr>
-          <p:cNvPr id="27" name="TextBox 26"/>
-          <p:cNvSpPr txBox="1"/>
-          <p:nvPr/>
-        </p:nvSpPr>
-        <p:spPr>
-          <a:xfrm>
-            <a:off x="4315968" y="1417320"/>
-            <a:ext cx="694944" cy="182880"/>
-          </a:xfrm>
-          <a:prstGeom prst="rect">
-            <a:avLst/>
-          </a:prstGeom>
-          <a:noFill/>
-        </p:spPr>
-        <p:txBody>
-          <a:bodyPr wrap="square"/>
-          <a:lstStyle/>
-          <a:p>
-            <a:pPr algn="l"/>
-            <a:r>
-              <a:rPr sz="700" b="1" i="0">
-                <a:solidFill>
-                  <a:srgbClr val="C0392B"/>
-                </a:solidFill>
-                <a:latin typeface="Poppins"/>
-              </a:rPr>
-              <a:t>RED</a:t>
-            </a:r>
-          </a:p>
-        </p:txBody>
-      </p:sp>
-      <p:sp>
-        <p:nvSpPr>
-          <p:cNvPr id="28" name="TextBox 27"/>
-          <p:cNvSpPr txBox="1"/>
-          <p:nvPr/>
-        </p:nvSpPr>
-        <p:spPr>
-          <a:xfrm>
-            <a:off x="4315968" y="1591056"/>
-            <a:ext cx="694944" cy="237744"/>
-          </a:xfrm>
-          <a:prstGeom prst="rect">
-            <a:avLst/>
-          </a:prstGeom>
-          <a:noFill/>
-        </p:spPr>
-        <p:txBody>
-          <a:bodyPr wrap="square"/>
-          <a:lstStyle/>
-          <a:p>
-            <a:pPr algn="l"/>
-            <a:r>
-              <a:rPr sz="700" b="0" i="0">
-                <a:solidFill>
-                  <a:srgbClr val="8BADD0"/>
-                </a:solidFill>
-                <a:latin typeface="Poppins"/>
-              </a:rPr>
-              <a:t>No margin visibility</a:t>
-            </a:r>
-          </a:p>
-        </p:txBody>
-      </p:sp>
-      <p:sp>
-        <p:nvSpPr>
-          <p:cNvPr id="29" name="TextBox 28"/>
-          <p:cNvSpPr txBox="1"/>
-          <p:nvPr/>
-        </p:nvSpPr>
-        <p:spPr>
-          <a:xfrm>
-            <a:off x="256032" y="1956816"/>
-            <a:ext cx="4846320" cy="219456"/>
-          </a:xfrm>
-          <a:prstGeom prst="rect">
-            <a:avLst/>
-          </a:prstGeom>
-          <a:noFill/>
-        </p:spPr>
-        <p:txBody>
-          <a:bodyPr wrap="square"/>
-          <a:lstStyle/>
-          <a:p>
-            <a:pPr algn="l"/>
-            <a:r>
-              <a:rPr sz="800" b="1" i="0">
-                <a:solidFill>
-                  <a:srgbClr val="69CD2B"/>
-                </a:solidFill>
-                <a:latin typeface="Poppins"/>
-              </a:rPr>
-              <a:t>KEY FINDINGS</a:t>
-            </a:r>
-          </a:p>
-        </p:txBody>
-      </p:sp>
-      <p:sp>
-        <p:nvSpPr>
           <p:cNvPr id="30" name="Rectangle 29"/>
           <p:cNvSpPr/>
           <p:nvPr/>
         </p:nvSpPr>
         <p:spPr>
           <a:xfrm>
-            <a:off x="256032" y="2212848"/>
-            <a:ext cx="4846320" cy="566928"/>
-          </a:xfrm>
-          <a:prstGeom prst="rect">
-            <a:avLst/>
-          </a:prstGeom>
-          <a:solidFill>
-            <a:srgbClr val="2C1010"/>
+            <a:off x="6812280" y="1005840"/>
+            <a:ext cx="2066543" cy="36576"/>
+          </a:xfrm>
+          <a:prstGeom prst="rect">
+            <a:avLst/>
+          </a:prstGeom>
+          <a:solidFill>
+            <a:srgbClr val="B32D2D"/>
           </a:solidFill>
           <a:ln>
             <a:solidFill>
@@ -4193,20 +4259,203 @@
       </p:sp>
       <p:sp>
         <p:nvSpPr>
-          <p:cNvPr id="31" name="Rectangle 30"/>
+          <p:cNvPr id="31" name="TextBox 30"/>
+          <p:cNvSpPr txBox="1"/>
+          <p:nvPr/>
+        </p:nvSpPr>
+        <p:spPr>
+          <a:xfrm>
+            <a:off x="6958584" y="1152144"/>
+            <a:ext cx="1773936" cy="219456"/>
+          </a:xfrm>
+          <a:prstGeom prst="rect">
+            <a:avLst/>
+          </a:prstGeom>
+          <a:noFill/>
+        </p:spPr>
+        <p:txBody>
+          <a:bodyPr wrap="square">
+            <a:normAutofit/>
+          </a:bodyPr>
+          <a:lstStyle/>
+          <a:p>
+            <a:pPr algn="l"/>
+            <a:r>
+              <a:rPr sz="1200" b="1" i="0">
+                <a:solidFill>
+                  <a:srgbClr val="1B2A38"/>
+                </a:solidFill>
+                <a:latin typeface="Poppins"/>
+              </a:rPr>
+              <a:t>Profit Plan</a:t>
+            </a:r>
+          </a:p>
+        </p:txBody>
+      </p:sp>
+      <p:sp>
+        <p:nvSpPr>
+          <p:cNvPr id="32" name="Rounded Rectangle 31"/>
           <p:cNvSpPr/>
           <p:nvPr/>
         </p:nvSpPr>
         <p:spPr>
           <a:xfrm>
-            <a:off x="365760" y="2386584"/>
-            <a:ext cx="219456" cy="219456"/>
-          </a:xfrm>
-          <a:prstGeom prst="rect">
-            <a:avLst/>
-          </a:prstGeom>
-          <a:solidFill>
-            <a:srgbClr val="C0392B"/>
+            <a:off x="6958584" y="1426464"/>
+            <a:ext cx="585216" cy="173736"/>
+          </a:xfrm>
+          <a:prstGeom prst="roundRect">
+            <a:avLst/>
+          </a:prstGeom>
+          <a:solidFill>
+            <a:srgbClr val="FBEEEE"/>
+          </a:solidFill>
+          <a:ln>
+            <a:noFill/>
+          </a:ln>
+        </p:spPr>
+        <p:style>
+          <a:lnRef idx="1">
+            <a:schemeClr val="accent1"/>
+          </a:lnRef>
+          <a:fillRef idx="3">
+            <a:schemeClr val="accent1"/>
+          </a:fillRef>
+          <a:effectRef idx="2">
+            <a:schemeClr val="accent1"/>
+          </a:effectRef>
+          <a:fontRef idx="minor">
+            <a:schemeClr val="lt1"/>
+          </a:fontRef>
+        </p:style>
+        <p:txBody>
+          <a:bodyPr rtlCol="0" anchor="ctr"/>
+          <a:lstStyle/>
+          <a:p>
+            <a:pPr algn="ctr"/>
+          </a:p>
+        </p:txBody>
+      </p:sp>
+      <p:sp>
+        <p:nvSpPr>
+          <p:cNvPr id="33" name="TextBox 32"/>
+          <p:cNvSpPr txBox="1"/>
+          <p:nvPr/>
+        </p:nvSpPr>
+        <p:spPr>
+          <a:xfrm>
+            <a:off x="6958584" y="1426464"/>
+            <a:ext cx="585216" cy="173736"/>
+          </a:xfrm>
+          <a:prstGeom prst="rect">
+            <a:avLst/>
+          </a:prstGeom>
+          <a:noFill/>
+        </p:spPr>
+        <p:txBody>
+          <a:bodyPr wrap="square">
+            <a:normAutofit/>
+          </a:bodyPr>
+          <a:lstStyle/>
+          <a:p>
+            <a:pPr algn="ctr"/>
+            <a:r>
+              <a:rPr sz="750" b="1" i="0">
+                <a:solidFill>
+                  <a:srgbClr val="B32D2D"/>
+                </a:solidFill>
+                <a:latin typeface="Poppins"/>
+              </a:rPr>
+              <a:t>RED</a:t>
+            </a:r>
+          </a:p>
+        </p:txBody>
+      </p:sp>
+      <p:sp>
+        <p:nvSpPr>
+          <p:cNvPr id="34" name="TextBox 33"/>
+          <p:cNvSpPr txBox="1"/>
+          <p:nvPr/>
+        </p:nvSpPr>
+        <p:spPr>
+          <a:xfrm>
+            <a:off x="6958584" y="1664208"/>
+            <a:ext cx="1773936" cy="201168"/>
+          </a:xfrm>
+          <a:prstGeom prst="rect">
+            <a:avLst/>
+          </a:prstGeom>
+          <a:noFill/>
+        </p:spPr>
+        <p:txBody>
+          <a:bodyPr wrap="square">
+            <a:normAutofit/>
+          </a:bodyPr>
+          <a:lstStyle/>
+          <a:p>
+            <a:pPr algn="l"/>
+            <a:r>
+              <a:rPr sz="950" b="0" i="0">
+                <a:solidFill>
+                  <a:srgbClr val="7C8D9B"/>
+                </a:solidFill>
+                <a:latin typeface="Poppins"/>
+              </a:rPr>
+              <a:t>No margin visibility</a:t>
+            </a:r>
+          </a:p>
+        </p:txBody>
+      </p:sp>
+      <p:sp>
+        <p:nvSpPr>
+          <p:cNvPr id="35" name="TextBox 34"/>
+          <p:cNvSpPr txBox="1"/>
+          <p:nvPr/>
+        </p:nvSpPr>
+        <p:spPr>
+          <a:xfrm>
+            <a:off x="274320" y="2011680"/>
+            <a:ext cx="4297680" cy="164592"/>
+          </a:xfrm>
+          <a:prstGeom prst="rect">
+            <a:avLst/>
+          </a:prstGeom>
+          <a:noFill/>
+        </p:spPr>
+        <p:txBody>
+          <a:bodyPr wrap="square">
+            <a:normAutofit/>
+          </a:bodyPr>
+          <a:lstStyle/>
+          <a:p>
+            <a:pPr algn="l"/>
+            <a:r>
+              <a:rPr sz="750" b="1" i="0">
+                <a:solidFill>
+                  <a:srgbClr val="003A59"/>
+                </a:solidFill>
+                <a:latin typeface="Poppins"/>
+              </a:rPr>
+              <a:t>KEY FINDINGS</a:t>
+            </a:r>
+          </a:p>
+        </p:txBody>
+      </p:sp>
+      <p:sp>
+        <p:nvSpPr>
+          <p:cNvPr id="36" name="Rectangle 35"/>
+          <p:cNvSpPr/>
+          <p:nvPr/>
+        </p:nvSpPr>
+        <p:spPr>
+          <a:xfrm>
+            <a:off x="274320" y="2267712"/>
+            <a:ext cx="4315968" cy="557784"/>
+          </a:xfrm>
+          <a:prstGeom prst="rect">
+            <a:avLst/>
+          </a:prstGeom>
+          <a:solidFill>
+            <a:srgbClr val="FFFFFF"/>
           </a:solidFill>
           <a:ln>
             <a:solidFill>
@@ -4238,86 +4487,20 @@
       </p:sp>
       <p:sp>
         <p:nvSpPr>
-          <p:cNvPr id="32" name="TextBox 31"/>
-          <p:cNvSpPr txBox="1"/>
-          <p:nvPr/>
-        </p:nvSpPr>
-        <p:spPr>
-          <a:xfrm>
-            <a:off x="365760" y="2368296"/>
-            <a:ext cx="219456" cy="237744"/>
-          </a:xfrm>
-          <a:prstGeom prst="rect">
-            <a:avLst/>
-          </a:prstGeom>
-          <a:noFill/>
-        </p:spPr>
-        <p:txBody>
-          <a:bodyPr wrap="square"/>
-          <a:lstStyle/>
-          <a:p>
-            <a:pPr algn="ctr"/>
-            <a:r>
-              <a:rPr sz="900" b="1" i="0">
-                <a:solidFill>
-                  <a:srgbClr val="FFFFFF"/>
-                </a:solidFill>
-                <a:latin typeface="Poppins"/>
-              </a:rPr>
-              <a:t>✕</a:t>
-            </a:r>
-          </a:p>
-        </p:txBody>
-      </p:sp>
-      <p:sp>
-        <p:nvSpPr>
-          <p:cNvPr id="33" name="TextBox 32"/>
-          <p:cNvSpPr txBox="1"/>
-          <p:nvPr/>
-        </p:nvSpPr>
-        <p:spPr>
-          <a:xfrm>
-            <a:off x="676656" y="2286000"/>
-            <a:ext cx="4352544" cy="420624"/>
-          </a:xfrm>
-          <a:prstGeom prst="rect">
-            <a:avLst/>
-          </a:prstGeom>
-          <a:noFill/>
-        </p:spPr>
-        <p:txBody>
-          <a:bodyPr wrap="square"/>
-          <a:lstStyle/>
-          <a:p>
-            <a:pPr algn="l"/>
-            <a:r>
-              <a:rPr sz="1000" b="0" i="0">
-                <a:solidFill>
-                  <a:srgbClr val="F0BABA"/>
-                </a:solidFill>
-                <a:latin typeface="Poppins"/>
-              </a:rPr>
-              <a:t>A waning referral flywheel is the firm's only real client source, with no scalable system replacing it.</a:t>
-            </a:r>
-          </a:p>
-        </p:txBody>
-      </p:sp>
-      <p:sp>
-        <p:nvSpPr>
-          <p:cNvPr id="34" name="Rectangle 33"/>
+          <p:cNvPr id="37" name="Rectangle 36"/>
           <p:cNvSpPr/>
           <p:nvPr/>
         </p:nvSpPr>
         <p:spPr>
           <a:xfrm>
-            <a:off x="256032" y="2834640"/>
-            <a:ext cx="4846320" cy="566928"/>
-          </a:xfrm>
-          <a:prstGeom prst="rect">
-            <a:avLst/>
-          </a:prstGeom>
-          <a:solidFill>
-            <a:srgbClr val="2C1010"/>
+            <a:off x="274320" y="2267712"/>
+            <a:ext cx="36576" cy="557784"/>
+          </a:xfrm>
+          <a:prstGeom prst="rect">
+            <a:avLst/>
+          </a:prstGeom>
+          <a:solidFill>
+            <a:srgbClr val="B32D2D"/>
           </a:solidFill>
           <a:ln>
             <a:solidFill>
@@ -4349,20 +4532,168 @@
       </p:sp>
       <p:sp>
         <p:nvSpPr>
-          <p:cNvPr id="35" name="Rectangle 34"/>
+          <p:cNvPr id="38" name="Rounded Rectangle 37"/>
           <p:cNvSpPr/>
           <p:nvPr/>
         </p:nvSpPr>
         <p:spPr>
           <a:xfrm>
-            <a:off x="365760" y="3008376"/>
-            <a:ext cx="219456" cy="219456"/>
-          </a:xfrm>
-          <a:prstGeom prst="rect">
-            <a:avLst/>
-          </a:prstGeom>
-          <a:solidFill>
-            <a:srgbClr val="C0392B"/>
+            <a:off x="429768" y="2459736"/>
+            <a:ext cx="164592" cy="164592"/>
+          </a:xfrm>
+          <a:prstGeom prst="roundRect">
+            <a:avLst/>
+          </a:prstGeom>
+          <a:solidFill>
+            <a:srgbClr val="B32D2D"/>
+          </a:solidFill>
+          <a:ln>
+            <a:noFill/>
+          </a:ln>
+        </p:spPr>
+        <p:style>
+          <a:lnRef idx="1">
+            <a:schemeClr val="accent1"/>
+          </a:lnRef>
+          <a:fillRef idx="3">
+            <a:schemeClr val="accent1"/>
+          </a:fillRef>
+          <a:effectRef idx="2">
+            <a:schemeClr val="accent1"/>
+          </a:effectRef>
+          <a:fontRef idx="minor">
+            <a:schemeClr val="lt1"/>
+          </a:fontRef>
+        </p:style>
+        <p:txBody>
+          <a:bodyPr rtlCol="0" anchor="ctr"/>
+          <a:lstStyle/>
+          <a:p>
+            <a:pPr algn="ctr"/>
+          </a:p>
+        </p:txBody>
+      </p:sp>
+      <p:cxnSp>
+        <p:nvCxnSpPr>
+          <p:cNvPr id="39" name="Connector 38"/>
+          <p:cNvCxnSpPr/>
+          <p:nvPr/>
+        </p:nvCxnSpPr>
+        <p:spPr>
+          <a:xfrm>
+            <a:off x="469270" y="2499238"/>
+            <a:ext cx="85587" cy="85587"/>
+          </a:xfrm>
+          <a:prstGeom prst="line">
+            <a:avLst/>
+          </a:prstGeom>
+          <a:ln w="22225">
+            <a:solidFill>
+              <a:srgbClr val="FFFFFF"/>
+            </a:solidFill>
+          </a:ln>
+        </p:spPr>
+        <p:style>
+          <a:lnRef idx="2">
+            <a:schemeClr val="accent1"/>
+          </a:lnRef>
+          <a:fillRef idx="0">
+            <a:schemeClr val="accent1"/>
+          </a:fillRef>
+          <a:effectRef idx="1">
+            <a:schemeClr val="accent1"/>
+          </a:effectRef>
+          <a:fontRef idx="minor">
+            <a:schemeClr val="tx1"/>
+          </a:fontRef>
+        </p:style>
+      </p:cxnSp>
+      <p:cxnSp>
+        <p:nvCxnSpPr>
+          <p:cNvPr id="40" name="Connector 39"/>
+          <p:cNvCxnSpPr/>
+          <p:nvPr/>
+        </p:nvCxnSpPr>
+        <p:spPr>
+          <a:xfrm flipV="1">
+            <a:off x="469270" y="2499238"/>
+            <a:ext cx="85587" cy="85587"/>
+          </a:xfrm>
+          <a:prstGeom prst="line">
+            <a:avLst/>
+          </a:prstGeom>
+          <a:ln w="22225">
+            <a:solidFill>
+              <a:srgbClr val="FFFFFF"/>
+            </a:solidFill>
+          </a:ln>
+        </p:spPr>
+        <p:style>
+          <a:lnRef idx="2">
+            <a:schemeClr val="accent1"/>
+          </a:lnRef>
+          <a:fillRef idx="0">
+            <a:schemeClr val="accent1"/>
+          </a:fillRef>
+          <a:effectRef idx="1">
+            <a:schemeClr val="accent1"/>
+          </a:effectRef>
+          <a:fontRef idx="minor">
+            <a:schemeClr val="tx1"/>
+          </a:fontRef>
+        </p:style>
+      </p:cxnSp>
+      <p:sp>
+        <p:nvSpPr>
+          <p:cNvPr id="41" name="TextBox 40"/>
+          <p:cNvSpPr txBox="1"/>
+          <p:nvPr/>
+        </p:nvSpPr>
+        <p:spPr>
+          <a:xfrm>
+            <a:off x="685800" y="2386584"/>
+            <a:ext cx="3447288" cy="374904"/>
+          </a:xfrm>
+          <a:prstGeom prst="rect">
+            <a:avLst/>
+          </a:prstGeom>
+          <a:noFill/>
+        </p:spPr>
+        <p:txBody>
+          <a:bodyPr wrap="square">
+            <a:normAutofit/>
+          </a:bodyPr>
+          <a:lstStyle/>
+          <a:p>
+            <a:pPr algn="l"/>
+            <a:r>
+              <a:rPr sz="850" b="0" i="0">
+                <a:solidFill>
+                  <a:srgbClr val="4A5C6B"/>
+                </a:solidFill>
+                <a:latin typeface="Poppins"/>
+              </a:rPr>
+              <a:t>A waning referral flywheel is the firm's only real client source, with no scalable system replacing it.</a:t>
+            </a:r>
+          </a:p>
+        </p:txBody>
+      </p:sp>
+      <p:sp>
+        <p:nvSpPr>
+          <p:cNvPr id="42" name="Rectangle 41"/>
+          <p:cNvSpPr/>
+          <p:nvPr/>
+        </p:nvSpPr>
+        <p:spPr>
+          <a:xfrm>
+            <a:off x="274320" y="2889504"/>
+            <a:ext cx="4315968" cy="557784"/>
+          </a:xfrm>
+          <a:prstGeom prst="rect">
+            <a:avLst/>
+          </a:prstGeom>
+          <a:solidFill>
+            <a:srgbClr val="FFFFFF"/>
           </a:solidFill>
           <a:ln>
             <a:solidFill>
@@ -4394,86 +4725,20 @@
       </p:sp>
       <p:sp>
         <p:nvSpPr>
-          <p:cNvPr id="36" name="TextBox 35"/>
-          <p:cNvSpPr txBox="1"/>
-          <p:nvPr/>
-        </p:nvSpPr>
-        <p:spPr>
-          <a:xfrm>
-            <a:off x="365760" y="2990088"/>
-            <a:ext cx="219456" cy="237744"/>
-          </a:xfrm>
-          <a:prstGeom prst="rect">
-            <a:avLst/>
-          </a:prstGeom>
-          <a:noFill/>
-        </p:spPr>
-        <p:txBody>
-          <a:bodyPr wrap="square"/>
-          <a:lstStyle/>
-          <a:p>
-            <a:pPr algn="ctr"/>
-            <a:r>
-              <a:rPr sz="900" b="1" i="0">
-                <a:solidFill>
-                  <a:srgbClr val="FFFFFF"/>
-                </a:solidFill>
-                <a:latin typeface="Poppins"/>
-              </a:rPr>
-              <a:t>✕</a:t>
-            </a:r>
-          </a:p>
-        </p:txBody>
-      </p:sp>
-      <p:sp>
-        <p:nvSpPr>
-          <p:cNvPr id="37" name="TextBox 36"/>
-          <p:cNvSpPr txBox="1"/>
-          <p:nvPr/>
-        </p:nvSpPr>
-        <p:spPr>
-          <a:xfrm>
-            <a:off x="676656" y="2907792"/>
-            <a:ext cx="4352544" cy="420624"/>
-          </a:xfrm>
-          <a:prstGeom prst="rect">
-            <a:avLst/>
-          </a:prstGeom>
-          <a:noFill/>
-        </p:spPr>
-        <p:txBody>
-          <a:bodyPr wrap="square"/>
-          <a:lstStyle/>
-          <a:p>
-            <a:pPr algn="l"/>
-            <a:r>
-              <a:rPr sz="1000" b="0" i="0">
-                <a:solidFill>
-                  <a:srgbClr val="F0BABA"/>
-                </a:solidFill>
-                <a:latin typeface="Poppins"/>
-              </a:rPr>
-              <a:t>Near-zero organic visibility outside personal injury is losing estate planning and probate cases to competitors.</a:t>
-            </a:r>
-          </a:p>
-        </p:txBody>
-      </p:sp>
-      <p:sp>
-        <p:nvSpPr>
-          <p:cNvPr id="38" name="Rectangle 37"/>
+          <p:cNvPr id="43" name="Rectangle 42"/>
           <p:cNvSpPr/>
           <p:nvPr/>
         </p:nvSpPr>
         <p:spPr>
           <a:xfrm>
-            <a:off x="256032" y="3456432"/>
-            <a:ext cx="4846320" cy="566928"/>
-          </a:xfrm>
-          <a:prstGeom prst="rect">
-            <a:avLst/>
-          </a:prstGeom>
-          <a:solidFill>
-            <a:srgbClr val="2C1010"/>
+            <a:off x="274320" y="2889504"/>
+            <a:ext cx="36576" cy="557784"/>
+          </a:xfrm>
+          <a:prstGeom prst="rect">
+            <a:avLst/>
+          </a:prstGeom>
+          <a:solidFill>
+            <a:srgbClr val="B32D2D"/>
           </a:solidFill>
           <a:ln>
             <a:solidFill>
@@ -4505,20 +4770,168 @@
       </p:sp>
       <p:sp>
         <p:nvSpPr>
-          <p:cNvPr id="39" name="Rectangle 38"/>
+          <p:cNvPr id="44" name="Rounded Rectangle 43"/>
           <p:cNvSpPr/>
           <p:nvPr/>
         </p:nvSpPr>
         <p:spPr>
           <a:xfrm>
-            <a:off x="365760" y="3630168"/>
-            <a:ext cx="219456" cy="219456"/>
-          </a:xfrm>
-          <a:prstGeom prst="rect">
-            <a:avLst/>
-          </a:prstGeom>
-          <a:solidFill>
-            <a:srgbClr val="C0392B"/>
+            <a:off x="429768" y="3081528"/>
+            <a:ext cx="164592" cy="164592"/>
+          </a:xfrm>
+          <a:prstGeom prst="roundRect">
+            <a:avLst/>
+          </a:prstGeom>
+          <a:solidFill>
+            <a:srgbClr val="B32D2D"/>
+          </a:solidFill>
+          <a:ln>
+            <a:noFill/>
+          </a:ln>
+        </p:spPr>
+        <p:style>
+          <a:lnRef idx="1">
+            <a:schemeClr val="accent1"/>
+          </a:lnRef>
+          <a:fillRef idx="3">
+            <a:schemeClr val="accent1"/>
+          </a:fillRef>
+          <a:effectRef idx="2">
+            <a:schemeClr val="accent1"/>
+          </a:effectRef>
+          <a:fontRef idx="minor">
+            <a:schemeClr val="lt1"/>
+          </a:fontRef>
+        </p:style>
+        <p:txBody>
+          <a:bodyPr rtlCol="0" anchor="ctr"/>
+          <a:lstStyle/>
+          <a:p>
+            <a:pPr algn="ctr"/>
+          </a:p>
+        </p:txBody>
+      </p:sp>
+      <p:cxnSp>
+        <p:nvCxnSpPr>
+          <p:cNvPr id="45" name="Connector 44"/>
+          <p:cNvCxnSpPr/>
+          <p:nvPr/>
+        </p:nvCxnSpPr>
+        <p:spPr>
+          <a:xfrm>
+            <a:off x="469270" y="3121030"/>
+            <a:ext cx="85587" cy="85587"/>
+          </a:xfrm>
+          <a:prstGeom prst="line">
+            <a:avLst/>
+          </a:prstGeom>
+          <a:ln w="22225">
+            <a:solidFill>
+              <a:srgbClr val="FFFFFF"/>
+            </a:solidFill>
+          </a:ln>
+        </p:spPr>
+        <p:style>
+          <a:lnRef idx="2">
+            <a:schemeClr val="accent1"/>
+          </a:lnRef>
+          <a:fillRef idx="0">
+            <a:schemeClr val="accent1"/>
+          </a:fillRef>
+          <a:effectRef idx="1">
+            <a:schemeClr val="accent1"/>
+          </a:effectRef>
+          <a:fontRef idx="minor">
+            <a:schemeClr val="tx1"/>
+          </a:fontRef>
+        </p:style>
+      </p:cxnSp>
+      <p:cxnSp>
+        <p:nvCxnSpPr>
+          <p:cNvPr id="46" name="Connector 45"/>
+          <p:cNvCxnSpPr/>
+          <p:nvPr/>
+        </p:nvCxnSpPr>
+        <p:spPr>
+          <a:xfrm flipV="1">
+            <a:off x="469270" y="3121030"/>
+            <a:ext cx="85587" cy="85587"/>
+          </a:xfrm>
+          <a:prstGeom prst="line">
+            <a:avLst/>
+          </a:prstGeom>
+          <a:ln w="22225">
+            <a:solidFill>
+              <a:srgbClr val="FFFFFF"/>
+            </a:solidFill>
+          </a:ln>
+        </p:spPr>
+        <p:style>
+          <a:lnRef idx="2">
+            <a:schemeClr val="accent1"/>
+          </a:lnRef>
+          <a:fillRef idx="0">
+            <a:schemeClr val="accent1"/>
+          </a:fillRef>
+          <a:effectRef idx="1">
+            <a:schemeClr val="accent1"/>
+          </a:effectRef>
+          <a:fontRef idx="minor">
+            <a:schemeClr val="tx1"/>
+          </a:fontRef>
+        </p:style>
+      </p:cxnSp>
+      <p:sp>
+        <p:nvSpPr>
+          <p:cNvPr id="47" name="TextBox 46"/>
+          <p:cNvSpPr txBox="1"/>
+          <p:nvPr/>
+        </p:nvSpPr>
+        <p:spPr>
+          <a:xfrm>
+            <a:off x="685800" y="3008376"/>
+            <a:ext cx="3447288" cy="374904"/>
+          </a:xfrm>
+          <a:prstGeom prst="rect">
+            <a:avLst/>
+          </a:prstGeom>
+          <a:noFill/>
+        </p:spPr>
+        <p:txBody>
+          <a:bodyPr wrap="square">
+            <a:normAutofit/>
+          </a:bodyPr>
+          <a:lstStyle/>
+          <a:p>
+            <a:pPr algn="l"/>
+            <a:r>
+              <a:rPr sz="850" b="0" i="0">
+                <a:solidFill>
+                  <a:srgbClr val="4A5C6B"/>
+                </a:solidFill>
+                <a:latin typeface="Poppins"/>
+              </a:rPr>
+              <a:t>Near-zero organic visibility outside personal injury is losing estate planning and probate cases to competitors.</a:t>
+            </a:r>
+          </a:p>
+        </p:txBody>
+      </p:sp>
+      <p:sp>
+        <p:nvSpPr>
+          <p:cNvPr id="48" name="Rectangle 47"/>
+          <p:cNvSpPr/>
+          <p:nvPr/>
+        </p:nvSpPr>
+        <p:spPr>
+          <a:xfrm>
+            <a:off x="274320" y="3511296"/>
+            <a:ext cx="4315968" cy="557784"/>
+          </a:xfrm>
+          <a:prstGeom prst="rect">
+            <a:avLst/>
+          </a:prstGeom>
+          <a:solidFill>
+            <a:srgbClr val="FFFFFF"/>
           </a:solidFill>
           <a:ln>
             <a:solidFill>
@@ -4550,86 +4963,20 @@
       </p:sp>
       <p:sp>
         <p:nvSpPr>
-          <p:cNvPr id="40" name="TextBox 39"/>
-          <p:cNvSpPr txBox="1"/>
-          <p:nvPr/>
-        </p:nvSpPr>
-        <p:spPr>
-          <a:xfrm>
-            <a:off x="365760" y="3611879"/>
-            <a:ext cx="219456" cy="237744"/>
-          </a:xfrm>
-          <a:prstGeom prst="rect">
-            <a:avLst/>
-          </a:prstGeom>
-          <a:noFill/>
-        </p:spPr>
-        <p:txBody>
-          <a:bodyPr wrap="square"/>
-          <a:lstStyle/>
-          <a:p>
-            <a:pPr algn="ctr"/>
-            <a:r>
-              <a:rPr sz="900" b="1" i="0">
-                <a:solidFill>
-                  <a:srgbClr val="FFFFFF"/>
-                </a:solidFill>
-                <a:latin typeface="Poppins"/>
-              </a:rPr>
-              <a:t>✕</a:t>
-            </a:r>
-          </a:p>
-        </p:txBody>
-      </p:sp>
-      <p:sp>
-        <p:nvSpPr>
-          <p:cNvPr id="41" name="TextBox 40"/>
-          <p:cNvSpPr txBox="1"/>
-          <p:nvPr/>
-        </p:nvSpPr>
-        <p:spPr>
-          <a:xfrm>
-            <a:off x="676656" y="3529584"/>
-            <a:ext cx="4352544" cy="420624"/>
-          </a:xfrm>
-          <a:prstGeom prst="rect">
-            <a:avLst/>
-          </a:prstGeom>
-          <a:noFill/>
-        </p:spPr>
-        <p:txBody>
-          <a:bodyPr wrap="square"/>
-          <a:lstStyle/>
-          <a:p>
-            <a:pPr algn="l"/>
-            <a:r>
-              <a:rPr sz="1000" b="0" i="0">
-                <a:solidFill>
-                  <a:srgbClr val="F0BABA"/>
-                </a:solidFill>
-                <a:latin typeface="Poppins"/>
-              </a:rPr>
-              <a:t>With no CRM or lead tracking, referrals and inquiries can be lost with no way to see it happening.</a:t>
-            </a:r>
-          </a:p>
-        </p:txBody>
-      </p:sp>
-      <p:sp>
-        <p:nvSpPr>
-          <p:cNvPr id="42" name="Rectangle 41"/>
+          <p:cNvPr id="49" name="Rectangle 48"/>
           <p:cNvSpPr/>
           <p:nvPr/>
         </p:nvSpPr>
         <p:spPr>
           <a:xfrm>
-            <a:off x="256032" y="4078224"/>
-            <a:ext cx="4846320" cy="566928"/>
-          </a:xfrm>
-          <a:prstGeom prst="rect">
-            <a:avLst/>
-          </a:prstGeom>
-          <a:solidFill>
-            <a:srgbClr val="0C2818"/>
+            <a:off x="274320" y="3511296"/>
+            <a:ext cx="36576" cy="557784"/>
+          </a:xfrm>
+          <a:prstGeom prst="rect">
+            <a:avLst/>
+          </a:prstGeom>
+          <a:solidFill>
+            <a:srgbClr val="B32D2D"/>
           </a:solidFill>
           <a:ln>
             <a:solidFill>
@@ -4661,20 +5008,168 @@
       </p:sp>
       <p:sp>
         <p:nvSpPr>
-          <p:cNvPr id="43" name="Rectangle 42"/>
+          <p:cNvPr id="50" name="Rounded Rectangle 49"/>
           <p:cNvSpPr/>
           <p:nvPr/>
         </p:nvSpPr>
         <p:spPr>
           <a:xfrm>
-            <a:off x="365760" y="4251960"/>
-            <a:ext cx="219456" cy="219456"/>
-          </a:xfrm>
-          <a:prstGeom prst="rect">
-            <a:avLst/>
-          </a:prstGeom>
-          <a:solidFill>
-            <a:srgbClr val="16A34A"/>
+            <a:off x="429768" y="3703320"/>
+            <a:ext cx="164592" cy="164592"/>
+          </a:xfrm>
+          <a:prstGeom prst="roundRect">
+            <a:avLst/>
+          </a:prstGeom>
+          <a:solidFill>
+            <a:srgbClr val="B32D2D"/>
+          </a:solidFill>
+          <a:ln>
+            <a:noFill/>
+          </a:ln>
+        </p:spPr>
+        <p:style>
+          <a:lnRef idx="1">
+            <a:schemeClr val="accent1"/>
+          </a:lnRef>
+          <a:fillRef idx="3">
+            <a:schemeClr val="accent1"/>
+          </a:fillRef>
+          <a:effectRef idx="2">
+            <a:schemeClr val="accent1"/>
+          </a:effectRef>
+          <a:fontRef idx="minor">
+            <a:schemeClr val="lt1"/>
+          </a:fontRef>
+        </p:style>
+        <p:txBody>
+          <a:bodyPr rtlCol="0" anchor="ctr"/>
+          <a:lstStyle/>
+          <a:p>
+            <a:pPr algn="ctr"/>
+          </a:p>
+        </p:txBody>
+      </p:sp>
+      <p:cxnSp>
+        <p:nvCxnSpPr>
+          <p:cNvPr id="51" name="Connector 50"/>
+          <p:cNvCxnSpPr/>
+          <p:nvPr/>
+        </p:nvCxnSpPr>
+        <p:spPr>
+          <a:xfrm>
+            <a:off x="469270" y="3742822"/>
+            <a:ext cx="85587" cy="85587"/>
+          </a:xfrm>
+          <a:prstGeom prst="line">
+            <a:avLst/>
+          </a:prstGeom>
+          <a:ln w="22225">
+            <a:solidFill>
+              <a:srgbClr val="FFFFFF"/>
+            </a:solidFill>
+          </a:ln>
+        </p:spPr>
+        <p:style>
+          <a:lnRef idx="2">
+            <a:schemeClr val="accent1"/>
+          </a:lnRef>
+          <a:fillRef idx="0">
+            <a:schemeClr val="accent1"/>
+          </a:fillRef>
+          <a:effectRef idx="1">
+            <a:schemeClr val="accent1"/>
+          </a:effectRef>
+          <a:fontRef idx="minor">
+            <a:schemeClr val="tx1"/>
+          </a:fontRef>
+        </p:style>
+      </p:cxnSp>
+      <p:cxnSp>
+        <p:nvCxnSpPr>
+          <p:cNvPr id="52" name="Connector 51"/>
+          <p:cNvCxnSpPr/>
+          <p:nvPr/>
+        </p:nvCxnSpPr>
+        <p:spPr>
+          <a:xfrm flipV="1">
+            <a:off x="469270" y="3742822"/>
+            <a:ext cx="85587" cy="85587"/>
+          </a:xfrm>
+          <a:prstGeom prst="line">
+            <a:avLst/>
+          </a:prstGeom>
+          <a:ln w="22225">
+            <a:solidFill>
+              <a:srgbClr val="FFFFFF"/>
+            </a:solidFill>
+          </a:ln>
+        </p:spPr>
+        <p:style>
+          <a:lnRef idx="2">
+            <a:schemeClr val="accent1"/>
+          </a:lnRef>
+          <a:fillRef idx="0">
+            <a:schemeClr val="accent1"/>
+          </a:fillRef>
+          <a:effectRef idx="1">
+            <a:schemeClr val="accent1"/>
+          </a:effectRef>
+          <a:fontRef idx="minor">
+            <a:schemeClr val="tx1"/>
+          </a:fontRef>
+        </p:style>
+      </p:cxnSp>
+      <p:sp>
+        <p:nvSpPr>
+          <p:cNvPr id="53" name="TextBox 52"/>
+          <p:cNvSpPr txBox="1"/>
+          <p:nvPr/>
+        </p:nvSpPr>
+        <p:spPr>
+          <a:xfrm>
+            <a:off x="685800" y="3630168"/>
+            <a:ext cx="3447288" cy="374904"/>
+          </a:xfrm>
+          <a:prstGeom prst="rect">
+            <a:avLst/>
+          </a:prstGeom>
+          <a:noFill/>
+        </p:spPr>
+        <p:txBody>
+          <a:bodyPr wrap="square">
+            <a:normAutofit/>
+          </a:bodyPr>
+          <a:lstStyle/>
+          <a:p>
+            <a:pPr algn="l"/>
+            <a:r>
+              <a:rPr sz="850" b="0" i="0">
+                <a:solidFill>
+                  <a:srgbClr val="4A5C6B"/>
+                </a:solidFill>
+                <a:latin typeface="Poppins"/>
+              </a:rPr>
+              <a:t>With no CRM or lead tracking, referrals and inquiries can be lost with no way to see it happening.</a:t>
+            </a:r>
+          </a:p>
+        </p:txBody>
+      </p:sp>
+      <p:sp>
+        <p:nvSpPr>
+          <p:cNvPr id="54" name="Rectangle 53"/>
+          <p:cNvSpPr/>
+          <p:nvPr/>
+        </p:nvSpPr>
+        <p:spPr>
+          <a:xfrm>
+            <a:off x="274320" y="4133087"/>
+            <a:ext cx="4315968" cy="557784"/>
+          </a:xfrm>
+          <a:prstGeom prst="rect">
+            <a:avLst/>
+          </a:prstGeom>
+          <a:solidFill>
+            <a:srgbClr val="FFFFFF"/>
           </a:solidFill>
           <a:ln>
             <a:solidFill>
@@ -4706,86 +5201,20 @@
       </p:sp>
       <p:sp>
         <p:nvSpPr>
-          <p:cNvPr id="44" name="TextBox 43"/>
-          <p:cNvSpPr txBox="1"/>
-          <p:nvPr/>
-        </p:nvSpPr>
-        <p:spPr>
-          <a:xfrm>
-            <a:off x="365760" y="4233672"/>
-            <a:ext cx="219456" cy="237744"/>
-          </a:xfrm>
-          <a:prstGeom prst="rect">
-            <a:avLst/>
-          </a:prstGeom>
-          <a:noFill/>
-        </p:spPr>
-        <p:txBody>
-          <a:bodyPr wrap="square"/>
-          <a:lstStyle/>
-          <a:p>
-            <a:pPr algn="ctr"/>
-            <a:r>
-              <a:rPr sz="900" b="1" i="0">
-                <a:solidFill>
-                  <a:srgbClr val="FFFFFF"/>
-                </a:solidFill>
-                <a:latin typeface="Poppins"/>
-              </a:rPr>
-              <a:t>✓</a:t>
-            </a:r>
-          </a:p>
-        </p:txBody>
-      </p:sp>
-      <p:sp>
-        <p:nvSpPr>
-          <p:cNvPr id="45" name="TextBox 44"/>
-          <p:cNvSpPr txBox="1"/>
-          <p:nvPr/>
-        </p:nvSpPr>
-        <p:spPr>
-          <a:xfrm>
-            <a:off x="676656" y="4151376"/>
-            <a:ext cx="4352544" cy="420624"/>
-          </a:xfrm>
-          <a:prstGeom prst="rect">
-            <a:avLst/>
-          </a:prstGeom>
-          <a:noFill/>
-        </p:spPr>
-        <p:txBody>
-          <a:bodyPr wrap="square"/>
-          <a:lstStyle/>
-          <a:p>
-            <a:pPr algn="l"/>
-            <a:r>
-              <a:rPr sz="1000" b="0" i="0">
-                <a:solidFill>
-                  <a:srgbClr val="86EFAC"/>
-                </a:solidFill>
-                <a:latin typeface="Poppins"/>
-              </a:rPr>
-              <a:t>An 8-person team and a 30-year office manager already provide real, informal delegation to build on.</a:t>
-            </a:r>
-          </a:p>
-        </p:txBody>
-      </p:sp>
-      <p:sp>
-        <p:nvSpPr>
-          <p:cNvPr id="46" name="Rectangle 45"/>
+          <p:cNvPr id="55" name="Rectangle 54"/>
           <p:cNvSpPr/>
           <p:nvPr/>
         </p:nvSpPr>
         <p:spPr>
           <a:xfrm>
-            <a:off x="5257800" y="960120"/>
-            <a:ext cx="3886200" cy="3867912"/>
-          </a:xfrm>
-          <a:prstGeom prst="rect">
-            <a:avLst/>
-          </a:prstGeom>
-          <a:solidFill>
-            <a:srgbClr val="FFFFFF"/>
+            <a:off x="274320" y="4133087"/>
+            <a:ext cx="36576" cy="557784"/>
+          </a:xfrm>
+          <a:prstGeom prst="rect">
+            <a:avLst/>
+          </a:prstGeom>
+          <a:solidFill>
+            <a:srgbClr val="3F8F1A"/>
           </a:solidFill>
           <a:ln>
             <a:solidFill>
@@ -4817,14 +5246,162 @@
       </p:sp>
       <p:sp>
         <p:nvSpPr>
-          <p:cNvPr id="47" name="Rectangle 46"/>
+          <p:cNvPr id="56" name="Rounded Rectangle 55"/>
           <p:cNvSpPr/>
           <p:nvPr/>
         </p:nvSpPr>
         <p:spPr>
           <a:xfrm>
-            <a:off x="5257800" y="1024128"/>
-            <a:ext cx="3886200" cy="694944"/>
+            <a:off x="429768" y="4325112"/>
+            <a:ext cx="164592" cy="164592"/>
+          </a:xfrm>
+          <a:prstGeom prst="roundRect">
+            <a:avLst/>
+          </a:prstGeom>
+          <a:solidFill>
+            <a:srgbClr val="3F8F1A"/>
+          </a:solidFill>
+          <a:ln>
+            <a:noFill/>
+          </a:ln>
+        </p:spPr>
+        <p:style>
+          <a:lnRef idx="1">
+            <a:schemeClr val="accent1"/>
+          </a:lnRef>
+          <a:fillRef idx="3">
+            <a:schemeClr val="accent1"/>
+          </a:fillRef>
+          <a:effectRef idx="2">
+            <a:schemeClr val="accent1"/>
+          </a:effectRef>
+          <a:fontRef idx="minor">
+            <a:schemeClr val="lt1"/>
+          </a:fontRef>
+        </p:style>
+        <p:txBody>
+          <a:bodyPr rtlCol="0" anchor="ctr"/>
+          <a:lstStyle/>
+          <a:p>
+            <a:pPr algn="ctr"/>
+          </a:p>
+        </p:txBody>
+      </p:sp>
+      <p:cxnSp>
+        <p:nvCxnSpPr>
+          <p:cNvPr id="57" name="Connector 56"/>
+          <p:cNvCxnSpPr/>
+          <p:nvPr/>
+        </p:nvCxnSpPr>
+        <p:spPr>
+          <a:xfrm>
+            <a:off x="465978" y="4415637"/>
+            <a:ext cx="32918" cy="31273"/>
+          </a:xfrm>
+          <a:prstGeom prst="line">
+            <a:avLst/>
+          </a:prstGeom>
+          <a:ln w="22225">
+            <a:solidFill>
+              <a:srgbClr val="FFFFFF"/>
+            </a:solidFill>
+          </a:ln>
+        </p:spPr>
+        <p:style>
+          <a:lnRef idx="2">
+            <a:schemeClr val="accent1"/>
+          </a:lnRef>
+          <a:fillRef idx="0">
+            <a:schemeClr val="accent1"/>
+          </a:fillRef>
+          <a:effectRef idx="1">
+            <a:schemeClr val="accent1"/>
+          </a:effectRef>
+          <a:fontRef idx="minor">
+            <a:schemeClr val="tx1"/>
+          </a:fontRef>
+        </p:style>
+      </p:cxnSp>
+      <p:cxnSp>
+        <p:nvCxnSpPr>
+          <p:cNvPr id="58" name="Connector 57"/>
+          <p:cNvCxnSpPr/>
+          <p:nvPr/>
+        </p:nvCxnSpPr>
+        <p:spPr>
+          <a:xfrm flipV="1">
+            <a:off x="498896" y="4367905"/>
+            <a:ext cx="62545" cy="79005"/>
+          </a:xfrm>
+          <a:prstGeom prst="line">
+            <a:avLst/>
+          </a:prstGeom>
+          <a:ln w="22225">
+            <a:solidFill>
+              <a:srgbClr val="FFFFFF"/>
+            </a:solidFill>
+          </a:ln>
+        </p:spPr>
+        <p:style>
+          <a:lnRef idx="2">
+            <a:schemeClr val="accent1"/>
+          </a:lnRef>
+          <a:fillRef idx="0">
+            <a:schemeClr val="accent1"/>
+          </a:fillRef>
+          <a:effectRef idx="1">
+            <a:schemeClr val="accent1"/>
+          </a:effectRef>
+          <a:fontRef idx="minor">
+            <a:schemeClr val="tx1"/>
+          </a:fontRef>
+        </p:style>
+      </p:cxnSp>
+      <p:sp>
+        <p:nvSpPr>
+          <p:cNvPr id="59" name="TextBox 58"/>
+          <p:cNvSpPr txBox="1"/>
+          <p:nvPr/>
+        </p:nvSpPr>
+        <p:spPr>
+          <a:xfrm>
+            <a:off x="685800" y="4251959"/>
+            <a:ext cx="3447288" cy="374904"/>
+          </a:xfrm>
+          <a:prstGeom prst="rect">
+            <a:avLst/>
+          </a:prstGeom>
+          <a:noFill/>
+        </p:spPr>
+        <p:txBody>
+          <a:bodyPr wrap="square">
+            <a:normAutofit/>
+          </a:bodyPr>
+          <a:lstStyle/>
+          <a:p>
+            <a:pPr algn="l"/>
+            <a:r>
+              <a:rPr sz="850" b="0" i="0">
+                <a:solidFill>
+                  <a:srgbClr val="4A5C6B"/>
+                </a:solidFill>
+                <a:latin typeface="Poppins"/>
+              </a:rPr>
+              <a:t>An 8-person team and a 30-year office manager already provide real, informal delegation to build on.</a:t>
+            </a:r>
+          </a:p>
+        </p:txBody>
+      </p:sp>
+      <p:sp>
+        <p:nvSpPr>
+          <p:cNvPr id="60" name="Rectangle 59"/>
+          <p:cNvSpPr/>
+          <p:nvPr/>
+        </p:nvSpPr>
+        <p:spPr>
+          <a:xfrm>
+            <a:off x="4828032" y="2011680"/>
+            <a:ext cx="4041648" cy="676656"/>
           </a:xfrm>
           <a:prstGeom prst="rect">
             <a:avLst/>
@@ -4862,20 +5439,20 @@
       </p:sp>
       <p:sp>
         <p:nvSpPr>
-          <p:cNvPr id="48" name="Rectangle 47"/>
+          <p:cNvPr id="61" name="Rectangle 60"/>
           <p:cNvSpPr/>
           <p:nvPr/>
         </p:nvSpPr>
         <p:spPr>
           <a:xfrm>
-            <a:off x="5257800" y="1024128"/>
-            <a:ext cx="128016" cy="694944"/>
-          </a:xfrm>
-          <a:prstGeom prst="rect">
-            <a:avLst/>
-          </a:prstGeom>
-          <a:solidFill>
-            <a:srgbClr val="0091C9"/>
+            <a:off x="4828032" y="2011680"/>
+            <a:ext cx="36576" cy="676656"/>
+          </a:xfrm>
+          <a:prstGeom prst="rect">
+            <a:avLst/>
+          </a:prstGeom>
+          <a:solidFill>
+            <a:srgbClr val="69CD2B"/>
           </a:solidFill>
           <a:ln>
             <a:solidFill>
@@ -4907,14 +5484,14 @@
       </p:sp>
       <p:sp>
         <p:nvSpPr>
-          <p:cNvPr id="49" name="TextBox 48"/>
+          <p:cNvPr id="62" name="TextBox 61"/>
           <p:cNvSpPr txBox="1"/>
           <p:nvPr/>
         </p:nvSpPr>
         <p:spPr>
           <a:xfrm>
-            <a:off x="5486400" y="1042415"/>
-            <a:ext cx="3474720" cy="201168"/>
+            <a:off x="5010912" y="2130552"/>
+            <a:ext cx="3675887" cy="146304"/>
           </a:xfrm>
           <a:prstGeom prst="rect">
             <a:avLst/>
@@ -4922,12 +5499,14 @@
           <a:noFill/>
         </p:spPr>
         <p:txBody>
-          <a:bodyPr wrap="square"/>
+          <a:bodyPr wrap="square">
+            <a:normAutofit/>
+          </a:bodyPr>
           <a:lstStyle/>
           <a:p>
             <a:pPr algn="l"/>
             <a:r>
-              <a:rPr sz="800" b="1" i="0">
+              <a:rPr sz="750" b="1" i="0">
                 <a:solidFill>
                   <a:srgbClr val="69CD2B"/>
                 </a:solidFill>
@@ -4940,14 +5519,14 @@
       </p:sp>
       <p:sp>
         <p:nvSpPr>
-          <p:cNvPr id="50" name="TextBox 49"/>
+          <p:cNvPr id="63" name="TextBox 62"/>
           <p:cNvSpPr txBox="1"/>
           <p:nvPr/>
         </p:nvSpPr>
         <p:spPr>
           <a:xfrm>
-            <a:off x="5486400" y="1243584"/>
-            <a:ext cx="3474720" cy="402336"/>
+            <a:off x="5010912" y="2322576"/>
+            <a:ext cx="3675887" cy="310896"/>
           </a:xfrm>
           <a:prstGeom prst="rect">
             <a:avLst/>
@@ -4955,7 +5534,9 @@
           <a:noFill/>
         </p:spPr>
         <p:txBody>
-          <a:bodyPr wrap="square"/>
+          <a:bodyPr wrap="square">
+            <a:normAutofit/>
+          </a:bodyPr>
           <a:lstStyle/>
           <a:p>
             <a:pPr algn="l"/>
@@ -4973,14 +5554,14 @@
       </p:sp>
       <p:sp>
         <p:nvSpPr>
-          <p:cNvPr id="51" name="TextBox 50"/>
+          <p:cNvPr id="64" name="TextBox 63"/>
           <p:cNvSpPr txBox="1"/>
           <p:nvPr/>
         </p:nvSpPr>
         <p:spPr>
           <a:xfrm>
-            <a:off x="5394960" y="1920240"/>
-            <a:ext cx="3566160" cy="219456"/>
+            <a:off x="4828032" y="2871216"/>
+            <a:ext cx="4041648" cy="164592"/>
           </a:xfrm>
           <a:prstGeom prst="rect">
             <a:avLst/>
@@ -4988,14 +5569,16 @@
           <a:noFill/>
         </p:spPr>
         <p:txBody>
-          <a:bodyPr wrap="square"/>
+          <a:bodyPr wrap="square">
+            <a:normAutofit/>
+          </a:bodyPr>
           <a:lstStyle/>
           <a:p>
             <a:pPr algn="l"/>
             <a:r>
-              <a:rPr sz="800" b="1" i="0">
-                <a:solidFill>
-                  <a:srgbClr val="64748B"/>
+              <a:rPr sz="750" b="1" i="0">
+                <a:solidFill>
+                  <a:srgbClr val="003A59"/>
                 </a:solidFill>
                 <a:latin typeface="Poppins"/>
               </a:rPr>
@@ -5006,20 +5589,20 @@
       </p:sp>
       <p:sp>
         <p:nvSpPr>
-          <p:cNvPr id="52" name="Rectangle 51"/>
+          <p:cNvPr id="65" name="Rectangle 64"/>
           <p:cNvSpPr/>
           <p:nvPr/>
         </p:nvSpPr>
         <p:spPr>
           <a:xfrm>
-            <a:off x="5257800" y="2176272"/>
-            <a:ext cx="3886200" cy="310896"/>
-          </a:xfrm>
-          <a:prstGeom prst="rect">
-            <a:avLst/>
-          </a:prstGeom>
-          <a:solidFill>
-            <a:srgbClr val="F0F4FA"/>
+            <a:off x="4828032" y="3127248"/>
+            <a:ext cx="4041648" cy="356616"/>
+          </a:xfrm>
+          <a:prstGeom prst="rect">
+            <a:avLst/>
+          </a:prstGeom>
+          <a:solidFill>
+            <a:srgbClr val="FFFFFF"/>
           </a:solidFill>
           <a:ln>
             <a:solidFill>
@@ -5051,14 +5634,14 @@
       </p:sp>
       <p:sp>
         <p:nvSpPr>
-          <p:cNvPr id="53" name="TextBox 52"/>
+          <p:cNvPr id="66" name="TextBox 65"/>
           <p:cNvSpPr txBox="1"/>
           <p:nvPr/>
         </p:nvSpPr>
         <p:spPr>
           <a:xfrm>
-            <a:off x="5413248" y="2221991"/>
-            <a:ext cx="1828800" cy="219456"/>
+            <a:off x="4992624" y="3127248"/>
+            <a:ext cx="1627632" cy="356616"/>
           </a:xfrm>
           <a:prstGeom prst="rect">
             <a:avLst/>
@@ -5066,14 +5649,16 @@
           <a:noFill/>
         </p:spPr>
         <p:txBody>
-          <a:bodyPr wrap="square"/>
+          <a:bodyPr wrap="square">
+            <a:normAutofit/>
+          </a:bodyPr>
           <a:lstStyle/>
           <a:p>
             <a:pPr algn="l"/>
             <a:r>
-              <a:rPr sz="800" b="0" i="0">
-                <a:solidFill>
-                  <a:srgbClr val="1E293B"/>
+              <a:rPr sz="850" b="0" i="0">
+                <a:solidFill>
+                  <a:srgbClr val="1B2A38"/>
                 </a:solidFill>
                 <a:latin typeface="Poppins"/>
               </a:rPr>
@@ -5084,14 +5669,14 @@
       </p:sp>
       <p:sp>
         <p:nvSpPr>
-          <p:cNvPr id="54" name="TextBox 53"/>
+          <p:cNvPr id="67" name="TextBox 66"/>
           <p:cNvSpPr txBox="1"/>
           <p:nvPr/>
         </p:nvSpPr>
         <p:spPr>
           <a:xfrm>
-            <a:off x="7260336" y="2221991"/>
-            <a:ext cx="914400" cy="219456"/>
+            <a:off x="6638544" y="3127248"/>
+            <a:ext cx="1353312" cy="356616"/>
           </a:xfrm>
           <a:prstGeom prst="rect">
             <a:avLst/>
@@ -5099,14 +5684,16 @@
           <a:noFill/>
         </p:spPr>
         <p:txBody>
-          <a:bodyPr wrap="square"/>
+          <a:bodyPr wrap="square">
+            <a:normAutofit/>
+          </a:bodyPr>
           <a:lstStyle/>
           <a:p>
             <a:pPr algn="l"/>
             <a:r>
               <a:rPr sz="800" b="0" i="0">
                 <a:solidFill>
-                  <a:srgbClr val="16A34A"/>
+                  <a:srgbClr val="3F8F1A"/>
                 </a:solidFill>
                 <a:latin typeface="Poppins"/>
               </a:rPr>
@@ -5117,14 +5704,14 @@
       </p:sp>
       <p:sp>
         <p:nvSpPr>
-          <p:cNvPr id="55" name="TextBox 54"/>
+          <p:cNvPr id="68" name="TextBox 67"/>
           <p:cNvSpPr txBox="1"/>
           <p:nvPr/>
         </p:nvSpPr>
         <p:spPr>
           <a:xfrm>
-            <a:off x="8193024" y="2240279"/>
-            <a:ext cx="822960" cy="201168"/>
+            <a:off x="8028431" y="3127248"/>
+            <a:ext cx="731520" cy="356616"/>
           </a:xfrm>
           <a:prstGeom prst="rect">
             <a:avLst/>
@@ -5132,14 +5719,16 @@
           <a:noFill/>
         </p:spPr>
         <p:txBody>
-          <a:bodyPr wrap="square"/>
+          <a:bodyPr wrap="square">
+            <a:normAutofit/>
+          </a:bodyPr>
           <a:lstStyle/>
           <a:p>
             <a:pPr algn="l"/>
             <a:r>
-              <a:rPr sz="600" b="0" i="0">
-                <a:solidFill>
-                  <a:srgbClr val="64748B"/>
+              <a:rPr sz="700" b="0" i="0">
+                <a:solidFill>
+                  <a:srgbClr val="7C8D9B"/>
                 </a:solidFill>
                 <a:latin typeface="Poppins"/>
               </a:rPr>
@@ -5150,14 +5739,14 @@
       </p:sp>
       <p:sp>
         <p:nvSpPr>
-          <p:cNvPr id="56" name="Rectangle 55"/>
+          <p:cNvPr id="69" name="Rectangle 68"/>
           <p:cNvSpPr/>
           <p:nvPr/>
         </p:nvSpPr>
         <p:spPr>
           <a:xfrm>
-            <a:off x="5257800" y="2523744"/>
-            <a:ext cx="3886200" cy="310896"/>
+            <a:off x="4828032" y="3529584"/>
+            <a:ext cx="4041648" cy="356616"/>
           </a:xfrm>
           <a:prstGeom prst="rect">
             <a:avLst/>
@@ -5195,14 +5784,14 @@
       </p:sp>
       <p:sp>
         <p:nvSpPr>
-          <p:cNvPr id="57" name="TextBox 56"/>
+          <p:cNvPr id="70" name="TextBox 69"/>
           <p:cNvSpPr txBox="1"/>
           <p:nvPr/>
         </p:nvSpPr>
         <p:spPr>
           <a:xfrm>
-            <a:off x="5413248" y="2569463"/>
-            <a:ext cx="1828800" cy="219456"/>
+            <a:off x="4992624" y="3529584"/>
+            <a:ext cx="1627632" cy="356616"/>
           </a:xfrm>
           <a:prstGeom prst="rect">
             <a:avLst/>
@@ -5210,14 +5799,16 @@
           <a:noFill/>
         </p:spPr>
         <p:txBody>
-          <a:bodyPr wrap="square"/>
+          <a:bodyPr wrap="square">
+            <a:normAutofit/>
+          </a:bodyPr>
           <a:lstStyle/>
           <a:p>
             <a:pPr algn="l"/>
             <a:r>
-              <a:rPr sz="800" b="0" i="0">
-                <a:solidFill>
-                  <a:srgbClr val="1E293B"/>
+              <a:rPr sz="850" b="0" i="0">
+                <a:solidFill>
+                  <a:srgbClr val="1B2A38"/>
                 </a:solidFill>
                 <a:latin typeface="Poppins"/>
               </a:rPr>
@@ -5228,14 +5819,14 @@
       </p:sp>
       <p:sp>
         <p:nvSpPr>
-          <p:cNvPr id="58" name="TextBox 57"/>
+          <p:cNvPr id="71" name="TextBox 70"/>
           <p:cNvSpPr txBox="1"/>
           <p:nvPr/>
         </p:nvSpPr>
         <p:spPr>
           <a:xfrm>
-            <a:off x="7260336" y="2569463"/>
-            <a:ext cx="914400" cy="219456"/>
+            <a:off x="6638544" y="3529584"/>
+            <a:ext cx="1353312" cy="356616"/>
           </a:xfrm>
           <a:prstGeom prst="rect">
             <a:avLst/>
@@ -5243,14 +5834,16 @@
           <a:noFill/>
         </p:spPr>
         <p:txBody>
-          <a:bodyPr wrap="square"/>
+          <a:bodyPr wrap="square">
+            <a:normAutofit/>
+          </a:bodyPr>
           <a:lstStyle/>
           <a:p>
             <a:pPr algn="l"/>
             <a:r>
               <a:rPr sz="800" b="0" i="0">
                 <a:solidFill>
-                  <a:srgbClr val="16A34A"/>
+                  <a:srgbClr val="3F8F1A"/>
                 </a:solidFill>
                 <a:latin typeface="Poppins"/>
               </a:rPr>
@@ -5261,14 +5854,14 @@
       </p:sp>
       <p:sp>
         <p:nvSpPr>
-          <p:cNvPr id="59" name="TextBox 58"/>
+          <p:cNvPr id="72" name="TextBox 71"/>
           <p:cNvSpPr txBox="1"/>
           <p:nvPr/>
         </p:nvSpPr>
         <p:spPr>
           <a:xfrm>
-            <a:off x="8193024" y="2587751"/>
-            <a:ext cx="822960" cy="201168"/>
+            <a:off x="8028431" y="3529584"/>
+            <a:ext cx="731520" cy="356616"/>
           </a:xfrm>
           <a:prstGeom prst="rect">
             <a:avLst/>
@@ -5276,14 +5869,16 @@
           <a:noFill/>
         </p:spPr>
         <p:txBody>
-          <a:bodyPr wrap="square"/>
+          <a:bodyPr wrap="square">
+            <a:normAutofit/>
+          </a:bodyPr>
           <a:lstStyle/>
           <a:p>
             <a:pPr algn="l"/>
             <a:r>
-              <a:rPr sz="600" b="0" i="0">
-                <a:solidFill>
-                  <a:srgbClr val="64748B"/>
+              <a:rPr sz="700" b="0" i="0">
+                <a:solidFill>
+                  <a:srgbClr val="7C8D9B"/>
                 </a:solidFill>
                 <a:latin typeface="Poppins"/>
               </a:rPr>
@@ -5294,20 +5889,20 @@
       </p:sp>
       <p:sp>
         <p:nvSpPr>
-          <p:cNvPr id="60" name="Rectangle 59"/>
+          <p:cNvPr id="73" name="Rectangle 72"/>
           <p:cNvSpPr/>
           <p:nvPr/>
         </p:nvSpPr>
         <p:spPr>
           <a:xfrm>
-            <a:off x="5257800" y="2871216"/>
-            <a:ext cx="3886200" cy="310896"/>
-          </a:xfrm>
-          <a:prstGeom prst="rect">
-            <a:avLst/>
-          </a:prstGeom>
-          <a:solidFill>
-            <a:srgbClr val="F0F4FA"/>
+            <a:off x="4828032" y="3931920"/>
+            <a:ext cx="4041648" cy="356616"/>
+          </a:xfrm>
+          <a:prstGeom prst="rect">
+            <a:avLst/>
+          </a:prstGeom>
+          <a:solidFill>
+            <a:srgbClr val="FFFFFF"/>
           </a:solidFill>
           <a:ln>
             <a:solidFill>
@@ -5339,14 +5934,14 @@
       </p:sp>
       <p:sp>
         <p:nvSpPr>
-          <p:cNvPr id="61" name="TextBox 60"/>
+          <p:cNvPr id="74" name="TextBox 73"/>
           <p:cNvSpPr txBox="1"/>
           <p:nvPr/>
         </p:nvSpPr>
         <p:spPr>
           <a:xfrm>
-            <a:off x="5413248" y="2916936"/>
-            <a:ext cx="1828800" cy="219456"/>
+            <a:off x="4992624" y="3931920"/>
+            <a:ext cx="1627632" cy="356616"/>
           </a:xfrm>
           <a:prstGeom prst="rect">
             <a:avLst/>
@@ -5354,14 +5949,16 @@
           <a:noFill/>
         </p:spPr>
         <p:txBody>
-          <a:bodyPr wrap="square"/>
+          <a:bodyPr wrap="square">
+            <a:normAutofit/>
+          </a:bodyPr>
           <a:lstStyle/>
           <a:p>
             <a:pPr algn="l"/>
             <a:r>
-              <a:rPr sz="800" b="0" i="0">
-                <a:solidFill>
-                  <a:srgbClr val="1E293B"/>
+              <a:rPr sz="850" b="0" i="0">
+                <a:solidFill>
+                  <a:srgbClr val="1B2A38"/>
                 </a:solidFill>
                 <a:latin typeface="Poppins"/>
               </a:rPr>
@@ -5372,14 +5969,14 @@
       </p:sp>
       <p:sp>
         <p:nvSpPr>
-          <p:cNvPr id="62" name="TextBox 61"/>
+          <p:cNvPr id="75" name="TextBox 74"/>
           <p:cNvSpPr txBox="1"/>
           <p:nvPr/>
         </p:nvSpPr>
         <p:spPr>
           <a:xfrm>
-            <a:off x="7260336" y="2916936"/>
-            <a:ext cx="914400" cy="219456"/>
+            <a:off x="6638544" y="3931920"/>
+            <a:ext cx="1353312" cy="356616"/>
           </a:xfrm>
           <a:prstGeom prst="rect">
             <a:avLst/>
@@ -5387,14 +5984,16 @@
           <a:noFill/>
         </p:spPr>
         <p:txBody>
-          <a:bodyPr wrap="square"/>
+          <a:bodyPr wrap="square">
+            <a:normAutofit/>
+          </a:bodyPr>
           <a:lstStyle/>
           <a:p>
             <a:pPr algn="l"/>
             <a:r>
               <a:rPr sz="800" b="0" i="0">
                 <a:solidFill>
-                  <a:srgbClr val="16A34A"/>
+                  <a:srgbClr val="3F8F1A"/>
                 </a:solidFill>
                 <a:latin typeface="Poppins"/>
               </a:rPr>
@@ -5405,14 +6004,14 @@
       </p:sp>
       <p:sp>
         <p:nvSpPr>
-          <p:cNvPr id="63" name="TextBox 62"/>
+          <p:cNvPr id="76" name="TextBox 75"/>
           <p:cNvSpPr txBox="1"/>
           <p:nvPr/>
         </p:nvSpPr>
         <p:spPr>
           <a:xfrm>
-            <a:off x="8193024" y="2935224"/>
-            <a:ext cx="822960" cy="201168"/>
+            <a:off x="8028431" y="3931920"/>
+            <a:ext cx="731520" cy="356616"/>
           </a:xfrm>
           <a:prstGeom prst="rect">
             <a:avLst/>
@@ -5420,14 +6019,16 @@
           <a:noFill/>
         </p:spPr>
         <p:txBody>
-          <a:bodyPr wrap="square"/>
+          <a:bodyPr wrap="square">
+            <a:normAutofit/>
+          </a:bodyPr>
           <a:lstStyle/>
           <a:p>
             <a:pPr algn="l"/>
             <a:r>
-              <a:rPr sz="600" b="0" i="0">
-                <a:solidFill>
-                  <a:srgbClr val="64748B"/>
+              <a:rPr sz="700" b="0" i="0">
+                <a:solidFill>
+                  <a:srgbClr val="7C8D9B"/>
                 </a:solidFill>
                 <a:latin typeface="Poppins"/>
               </a:rPr>
@@ -5438,20 +6039,20 @@
       </p:sp>
       <p:sp>
         <p:nvSpPr>
-          <p:cNvPr id="64" name="Rectangle 63"/>
+          <p:cNvPr id="77" name="Rectangle 76"/>
           <p:cNvSpPr/>
           <p:nvPr/>
         </p:nvSpPr>
         <p:spPr>
           <a:xfrm>
-            <a:off x="5257800" y="3218688"/>
-            <a:ext cx="3886200" cy="310896"/>
-          </a:xfrm>
-          <a:prstGeom prst="rect">
-            <a:avLst/>
-          </a:prstGeom>
-          <a:solidFill>
-            <a:srgbClr val="FFF0F0"/>
+            <a:off x="4828032" y="4334256"/>
+            <a:ext cx="4041648" cy="356616"/>
+          </a:xfrm>
+          <a:prstGeom prst="rect">
+            <a:avLst/>
+          </a:prstGeom>
+          <a:solidFill>
+            <a:srgbClr val="FBEEEE"/>
           </a:solidFill>
           <a:ln>
             <a:solidFill>
@@ -5483,20 +6084,20 @@
       </p:sp>
       <p:sp>
         <p:nvSpPr>
-          <p:cNvPr id="65" name="Rectangle 64"/>
+          <p:cNvPr id="78" name="Rectangle 77"/>
           <p:cNvSpPr/>
           <p:nvPr/>
         </p:nvSpPr>
         <p:spPr>
           <a:xfrm>
-            <a:off x="5257800" y="3218688"/>
-            <a:ext cx="91440" cy="310896"/>
-          </a:xfrm>
-          <a:prstGeom prst="rect">
-            <a:avLst/>
-          </a:prstGeom>
-          <a:solidFill>
-            <a:srgbClr val="C0392B"/>
+            <a:off x="4828032" y="4334256"/>
+            <a:ext cx="36576" cy="356616"/>
+          </a:xfrm>
+          <a:prstGeom prst="rect">
+            <a:avLst/>
+          </a:prstGeom>
+          <a:solidFill>
+            <a:srgbClr val="B32D2D"/>
           </a:solidFill>
           <a:ln>
             <a:solidFill>
@@ -5528,14 +6129,14 @@
       </p:sp>
       <p:sp>
         <p:nvSpPr>
-          <p:cNvPr id="66" name="TextBox 65"/>
+          <p:cNvPr id="79" name="TextBox 78"/>
           <p:cNvSpPr txBox="1"/>
           <p:nvPr/>
         </p:nvSpPr>
         <p:spPr>
           <a:xfrm>
-            <a:off x="5413248" y="3264408"/>
-            <a:ext cx="1828800" cy="219456"/>
+            <a:off x="4992624" y="4334256"/>
+            <a:ext cx="1627632" cy="356616"/>
           </a:xfrm>
           <a:prstGeom prst="rect">
             <a:avLst/>
@@ -5543,14 +6144,16 @@
           <a:noFill/>
         </p:spPr>
         <p:txBody>
-          <a:bodyPr wrap="square"/>
+          <a:bodyPr wrap="square">
+            <a:normAutofit/>
+          </a:bodyPr>
           <a:lstStyle/>
           <a:p>
             <a:pPr algn="l"/>
             <a:r>
-              <a:rPr sz="900" b="1" i="0">
-                <a:solidFill>
-                  <a:srgbClr val="C0392B"/>
+              <a:rPr sz="850" b="1" i="0">
+                <a:solidFill>
+                  <a:srgbClr val="B32D2D"/>
                 </a:solidFill>
                 <a:latin typeface="Poppins"/>
               </a:rPr>
@@ -5561,14 +6164,14 @@
       </p:sp>
       <p:sp>
         <p:nvSpPr>
-          <p:cNvPr id="67" name="TextBox 66"/>
+          <p:cNvPr id="80" name="TextBox 79"/>
           <p:cNvSpPr txBox="1"/>
           <p:nvPr/>
         </p:nvSpPr>
         <p:spPr>
           <a:xfrm>
-            <a:off x="7260336" y="3264408"/>
-            <a:ext cx="914400" cy="219456"/>
+            <a:off x="6638544" y="4334256"/>
+            <a:ext cx="1353312" cy="356616"/>
           </a:xfrm>
           <a:prstGeom prst="rect">
             <a:avLst/>
@@ -5576,14 +6179,16 @@
           <a:noFill/>
         </p:spPr>
         <p:txBody>
-          <a:bodyPr wrap="square"/>
+          <a:bodyPr wrap="square">
+            <a:normAutofit/>
+          </a:bodyPr>
           <a:lstStyle/>
           <a:p>
             <a:pPr algn="l"/>
             <a:r>
               <a:rPr sz="800" b="1" i="0">
                 <a:solidFill>
-                  <a:srgbClr val="C0392B"/>
+                  <a:srgbClr val="B32D2D"/>
                 </a:solidFill>
                 <a:latin typeface="Poppins"/>
               </a:rPr>
@@ -5594,14 +6199,14 @@
       </p:sp>
       <p:sp>
         <p:nvSpPr>
-          <p:cNvPr id="68" name="TextBox 67"/>
+          <p:cNvPr id="81" name="TextBox 80"/>
           <p:cNvSpPr txBox="1"/>
           <p:nvPr/>
         </p:nvSpPr>
         <p:spPr>
           <a:xfrm>
-            <a:off x="8193024" y="3282696"/>
-            <a:ext cx="822960" cy="201168"/>
+            <a:off x="8028431" y="4334256"/>
+            <a:ext cx="731520" cy="356616"/>
           </a:xfrm>
           <a:prstGeom prst="rect">
             <a:avLst/>
@@ -5609,14 +6214,16 @@
           <a:noFill/>
         </p:spPr>
         <p:txBody>
-          <a:bodyPr wrap="square"/>
+          <a:bodyPr wrap="square">
+            <a:normAutofit/>
+          </a:bodyPr>
           <a:lstStyle/>
           <a:p>
             <a:pPr algn="l"/>
             <a:r>
-              <a:rPr sz="600" b="0" i="0">
-                <a:solidFill>
-                  <a:srgbClr val="64748B"/>
+              <a:rPr sz="700" b="0" i="0">
+                <a:solidFill>
+                  <a:srgbClr val="7C8D9B"/>
                 </a:solidFill>
                 <a:latin typeface="Poppins"/>
               </a:rPr>
@@ -5627,13 +6234,13 @@
       </p:sp>
       <p:sp>
         <p:nvSpPr>
-          <p:cNvPr id="69" name="Rectangle 68"/>
+          <p:cNvPr id="82" name="Rectangle 81"/>
           <p:cNvSpPr/>
           <p:nvPr/>
         </p:nvSpPr>
         <p:spPr>
           <a:xfrm>
-            <a:off x="0" y="4828032"/>
+            <a:off x="0" y="4818888"/>
             <a:ext cx="9144000" cy="320040"/>
           </a:xfrm>
           <a:prstGeom prst="rect">
@@ -5672,7 +6279,7 @@
       </p:sp>
       <p:pic>
         <p:nvPicPr>
-          <p:cNvPr id="70" name="Picture 69" descr="smb_team_logo.png"/>
+          <p:cNvPr id="83" name="Picture 82" descr="smb_team_logo.png"/>
           <p:cNvPicPr>
             <a:picLocks noChangeAspect="1"/>
           </p:cNvPicPr>
@@ -5686,8 +6293,8 @@
         </p:blipFill>
         <p:spPr>
           <a:xfrm>
-            <a:off x="201168" y="4837176"/>
-            <a:ext cx="1170432" cy="237744"/>
+            <a:off x="274320" y="4873752"/>
+            <a:ext cx="941832" cy="192024"/>
           </a:xfrm>
           <a:prstGeom prst="rect">
             <a:avLst/>
@@ -5696,14 +6303,14 @@
       </p:pic>
       <p:sp>
         <p:nvSpPr>
-          <p:cNvPr id="71" name="TextBox 70"/>
+          <p:cNvPr id="84" name="TextBox 83"/>
           <p:cNvSpPr txBox="1"/>
           <p:nvPr/>
         </p:nvSpPr>
         <p:spPr>
           <a:xfrm>
-            <a:off x="1609344" y="4837176"/>
-            <a:ext cx="5303520" cy="274320"/>
+            <a:off x="1417320" y="4892040"/>
+            <a:ext cx="4937760" cy="182880"/>
           </a:xfrm>
           <a:prstGeom prst="rect">
             <a:avLst/>
@@ -5711,32 +6318,34 @@
           <a:noFill/>
         </p:spPr>
         <p:txBody>
-          <a:bodyPr wrap="square"/>
+          <a:bodyPr wrap="square">
+            <a:normAutofit/>
+          </a:bodyPr>
           <a:lstStyle/>
           <a:p>
             <a:pPr algn="l"/>
             <a:r>
-              <a:rPr sz="800" b="0" i="0">
-                <a:solidFill>
-                  <a:srgbClr val="5A7A9A"/>
+              <a:rPr sz="700" b="0" i="0">
+                <a:solidFill>
+                  <a:srgbClr val="8FB2C6"/>
                 </a:solidFill>
                 <a:latin typeface="Poppins"/>
               </a:rPr>
-              <a:t>CONFIDENTIAL  ·  Prepared by Dan Bryant | SMB Team</a:t>
-            </a:r>
-          </a:p>
-        </p:txBody>
-      </p:sp>
-      <p:sp>
-        <p:nvSpPr>
-          <p:cNvPr id="72" name="TextBox 71"/>
+              <a:t>CONFIDENTIAL  ·  PREPARED BY DAN BRYANT | SMB TEAM</a:t>
+            </a:r>
+          </a:p>
+        </p:txBody>
+      </p:sp>
+      <p:sp>
+        <p:nvSpPr>
+          <p:cNvPr id="85" name="TextBox 84"/>
           <p:cNvSpPr txBox="1"/>
           <p:nvPr/>
         </p:nvSpPr>
         <p:spPr>
           <a:xfrm>
-            <a:off x="8138160" y="4837176"/>
-            <a:ext cx="786384" cy="274320"/>
+            <a:off x="7680960" y="4892040"/>
+            <a:ext cx="1188720" cy="182880"/>
           </a:xfrm>
           <a:prstGeom prst="rect">
             <a:avLst/>
@@ -5744,14 +6353,16 @@
           <a:noFill/>
         </p:spPr>
         <p:txBody>
-          <a:bodyPr wrap="square"/>
+          <a:bodyPr wrap="square">
+            <a:normAutofit/>
+          </a:bodyPr>
           <a:lstStyle/>
           <a:p>
             <a:pPr algn="r"/>
             <a:r>
-              <a:rPr sz="800" b="0" i="0">
-                <a:solidFill>
-                  <a:srgbClr val="5A7A9A"/>
+              <a:rPr sz="700" b="0" i="0">
+                <a:solidFill>
+                  <a:srgbClr val="8FB2C6"/>
                 </a:solidFill>
                 <a:latin typeface="Poppins"/>
               </a:rPr>
@@ -5787,13 +6398,13 @@
         <p:spPr>
           <a:xfrm>
             <a:off x="0" y="0"/>
-            <a:ext cx="9144000" cy="960120"/>
-          </a:xfrm>
-          <a:prstGeom prst="rect">
-            <a:avLst/>
-          </a:prstGeom>
-          <a:solidFill>
-            <a:srgbClr val="003A59"/>
+            <a:ext cx="9144000" cy="5143500"/>
+          </a:xfrm>
+          <a:prstGeom prst="rect">
+            <a:avLst/>
+          </a:prstGeom>
+          <a:solidFill>
+            <a:srgbClr val="F4F7F9"/>
           </a:solidFill>
           <a:ln>
             <a:solidFill>
@@ -5825,80 +6436,14 @@
       </p:sp>
       <p:sp>
         <p:nvSpPr>
-          <p:cNvPr id="3" name="TextBox 2"/>
-          <p:cNvSpPr txBox="1"/>
-          <p:nvPr/>
-        </p:nvSpPr>
-        <p:spPr>
-          <a:xfrm>
-            <a:off x="292608" y="91440"/>
-            <a:ext cx="8595360" cy="201168"/>
-          </a:xfrm>
-          <a:prstGeom prst="rect">
-            <a:avLst/>
-          </a:prstGeom>
-          <a:noFill/>
-        </p:spPr>
-        <p:txBody>
-          <a:bodyPr wrap="square"/>
-          <a:lstStyle/>
-          <a:p>
-            <a:pPr algn="l"/>
-            <a:r>
-              <a:rPr sz="800" b="1" i="0">
-                <a:solidFill>
-                  <a:srgbClr val="69CD2B"/>
-                </a:solidFill>
-                <a:latin typeface="Poppins"/>
-              </a:rPr>
-              <a:t>LAW FIRM GROWTH AUDIT  ·  GAYDOS LAW, P.C.</a:t>
-            </a:r>
-          </a:p>
-        </p:txBody>
-      </p:sp>
-      <p:sp>
-        <p:nvSpPr>
-          <p:cNvPr id="4" name="TextBox 3"/>
-          <p:cNvSpPr txBox="1"/>
-          <p:nvPr/>
-        </p:nvSpPr>
-        <p:spPr>
-          <a:xfrm>
-            <a:off x="292608" y="310896"/>
-            <a:ext cx="8595360" cy="548640"/>
-          </a:xfrm>
-          <a:prstGeom prst="rect">
-            <a:avLst/>
-          </a:prstGeom>
-          <a:noFill/>
-        </p:spPr>
-        <p:txBody>
-          <a:bodyPr wrap="square"/>
-          <a:lstStyle/>
-          <a:p>
-            <a:pPr algn="l"/>
-            <a:r>
-              <a:rPr sz="2200" b="1" i="0">
-                <a:solidFill>
-                  <a:srgbClr val="FFFFFF"/>
-                </a:solidFill>
-                <a:latin typeface="Poppins"/>
-              </a:rPr>
-              <a:t>Your Growth Plan: 3 Priorities to Build a Firm That Outlasts You</a:t>
-            </a:r>
-          </a:p>
-        </p:txBody>
-      </p:sp>
-      <p:sp>
-        <p:nvSpPr>
-          <p:cNvPr id="5" name="Rectangle 4"/>
+          <p:cNvPr id="3" name="Rectangle 2"/>
           <p:cNvSpPr/>
           <p:nvPr/>
         </p:nvSpPr>
         <p:spPr>
           <a:xfrm>
-            <a:off x="182880" y="1024128"/>
-            <a:ext cx="2487168" cy="3639312"/>
+            <a:off x="0" y="0"/>
+            <a:ext cx="9144000" cy="841248"/>
           </a:xfrm>
           <a:prstGeom prst="rect">
             <a:avLst/>
@@ -5936,20 +6481,20 @@
       </p:sp>
       <p:sp>
         <p:nvSpPr>
-          <p:cNvPr id="6" name="Rectangle 5"/>
+          <p:cNvPr id="4" name="Rectangle 3"/>
           <p:cNvSpPr/>
           <p:nvPr/>
         </p:nvSpPr>
         <p:spPr>
           <a:xfrm>
-            <a:off x="182880" y="1042415"/>
-            <a:ext cx="2487168" cy="18288"/>
-          </a:xfrm>
-          <a:prstGeom prst="rect">
-            <a:avLst/>
-          </a:prstGeom>
-          <a:solidFill>
-            <a:srgbClr val="0091C9"/>
+            <a:off x="0" y="841248"/>
+            <a:ext cx="9144000" cy="36576"/>
+          </a:xfrm>
+          <a:prstGeom prst="rect">
+            <a:avLst/>
+          </a:prstGeom>
+          <a:solidFill>
+            <a:srgbClr val="69CD2B"/>
           </a:solidFill>
           <a:ln>
             <a:solidFill>
@@ -5981,14 +6526,14 @@
       </p:sp>
       <p:sp>
         <p:nvSpPr>
-          <p:cNvPr id="7" name="TextBox 6"/>
+          <p:cNvPr id="5" name="TextBox 4"/>
           <p:cNvSpPr txBox="1"/>
           <p:nvPr/>
         </p:nvSpPr>
         <p:spPr>
           <a:xfrm>
-            <a:off x="292608" y="1097280"/>
-            <a:ext cx="2267712" cy="201168"/>
+            <a:off x="292608" y="182880"/>
+            <a:ext cx="5486400" cy="164592"/>
           </a:xfrm>
           <a:prstGeom prst="rect">
             <a:avLst/>
@@ -5996,32 +6541,34 @@
           <a:noFill/>
         </p:spPr>
         <p:txBody>
-          <a:bodyPr wrap="square"/>
+          <a:bodyPr wrap="square">
+            <a:normAutofit/>
+          </a:bodyPr>
           <a:lstStyle/>
           <a:p>
             <a:pPr algn="l"/>
             <a:r>
-              <a:rPr sz="800" b="1" i="0">
+              <a:rPr sz="750" b="1" i="0">
                 <a:solidFill>
                   <a:srgbClr val="69CD2B"/>
                 </a:solidFill>
                 <a:latin typeface="Poppins"/>
               </a:rPr>
-              <a:t>THE SMB TEAM MODEL</a:t>
-            </a:r>
-          </a:p>
-        </p:txBody>
-      </p:sp>
-      <p:sp>
-        <p:nvSpPr>
-          <p:cNvPr id="8" name="TextBox 7"/>
+              <a:t>LAW FIRM GROWTH AUDIT  ·  GAYDOS LAW, P.C.</a:t>
+            </a:r>
+          </a:p>
+        </p:txBody>
+      </p:sp>
+      <p:sp>
+        <p:nvSpPr>
+          <p:cNvPr id="6" name="TextBox 5"/>
           <p:cNvSpPr txBox="1"/>
           <p:nvPr/>
         </p:nvSpPr>
         <p:spPr>
           <a:xfrm>
-            <a:off x="292608" y="1335024"/>
-            <a:ext cx="2267712" cy="1572768"/>
+            <a:off x="292608" y="365760"/>
+            <a:ext cx="8503920" cy="365760"/>
           </a:xfrm>
           <a:prstGeom prst="rect">
             <a:avLst/>
@@ -6029,38 +6576,40 @@
           <a:noFill/>
         </p:spPr>
         <p:txBody>
-          <a:bodyPr wrap="square"/>
+          <a:bodyPr wrap="square">
+            <a:normAutofit/>
+          </a:bodyPr>
           <a:lstStyle/>
           <a:p>
             <a:pPr algn="l"/>
             <a:r>
-              <a:rPr sz="900" b="0" i="0">
-                <a:solidFill>
-                  <a:srgbClr val="A8BFDA"/>
+              <a:rPr sz="2000" b="1" i="0">
+                <a:solidFill>
+                  <a:srgbClr val="FFFFFF"/>
                 </a:solidFill>
                 <a:latin typeface="Poppins"/>
               </a:rPr>
-              <a:t>All four pillars — Lead Generation, Intake, Team, and Profit — must work together. Missing any one means growth stalls no matter how strong the others are. When all four work together, Joseph can finally build a firm that runs on its own systems, not on him.</a:t>
-            </a:r>
-          </a:p>
-        </p:txBody>
-      </p:sp>
-      <p:sp>
-        <p:nvSpPr>
-          <p:cNvPr id="9" name="Rectangle 8"/>
+              <a:t>Your Growth Plan: 3 Priorities to Build a Firm That Outlasts You</a:t>
+            </a:r>
+          </a:p>
+        </p:txBody>
+      </p:sp>
+      <p:sp>
+        <p:nvSpPr>
+          <p:cNvPr id="7" name="Rectangle 6"/>
           <p:cNvSpPr/>
           <p:nvPr/>
         </p:nvSpPr>
         <p:spPr>
           <a:xfrm>
-            <a:off x="182880" y="2999232"/>
-            <a:ext cx="2487168" cy="749808"/>
-          </a:xfrm>
-          <a:prstGeom prst="rect">
-            <a:avLst/>
-          </a:prstGeom>
-          <a:solidFill>
-            <a:srgbClr val="69CD2B"/>
+            <a:off x="274320" y="1005840"/>
+            <a:ext cx="2212848" cy="2286000"/>
+          </a:xfrm>
+          <a:prstGeom prst="rect">
+            <a:avLst/>
+          </a:prstGeom>
+          <a:solidFill>
+            <a:srgbClr val="003A59"/>
           </a:solidFill>
           <a:ln>
             <a:solidFill>
@@ -6092,86 +6641,20 @@
       </p:sp>
       <p:sp>
         <p:nvSpPr>
-          <p:cNvPr id="10" name="TextBox 9"/>
-          <p:cNvSpPr txBox="1"/>
-          <p:nvPr/>
-        </p:nvSpPr>
-        <p:spPr>
-          <a:xfrm>
-            <a:off x="292608" y="3017520"/>
-            <a:ext cx="2286000" cy="274320"/>
-          </a:xfrm>
-          <a:prstGeom prst="rect">
-            <a:avLst/>
-          </a:prstGeom>
-          <a:noFill/>
-        </p:spPr>
-        <p:txBody>
-          <a:bodyPr wrap="square"/>
-          <a:lstStyle/>
-          <a:p>
-            <a:pPr algn="l"/>
-            <a:r>
-              <a:rPr sz="1200" b="1" i="0">
-                <a:solidFill>
-                  <a:srgbClr val="003A59"/>
-                </a:solidFill>
-                <a:latin typeface="Poppins"/>
-              </a:rPr>
-              <a:t>Referral-Only → Multi-Channel Growth</a:t>
-            </a:r>
-          </a:p>
-        </p:txBody>
-      </p:sp>
-      <p:sp>
-        <p:nvSpPr>
-          <p:cNvPr id="11" name="TextBox 10"/>
-          <p:cNvSpPr txBox="1"/>
-          <p:nvPr/>
-        </p:nvSpPr>
-        <p:spPr>
-          <a:xfrm>
-            <a:off x="292608" y="3291840"/>
-            <a:ext cx="2286000" cy="402336"/>
-          </a:xfrm>
-          <a:prstGeom prst="rect">
-            <a:avLst/>
-          </a:prstGeom>
-          <a:noFill/>
-        </p:spPr>
-        <p:txBody>
-          <a:bodyPr wrap="square"/>
-          <a:lstStyle/>
-          <a:p>
-            <a:pPr algn="l"/>
-            <a:r>
-              <a:rPr sz="900" b="0" i="0">
-                <a:solidFill>
-                  <a:srgbClr val="003A59"/>
-                </a:solidFill>
-                <a:latin typeface="Poppins"/>
-              </a:rPr>
-              <a:t>Build something built to outlast you</a:t>
-            </a:r>
-          </a:p>
-        </p:txBody>
-      </p:sp>
-      <p:sp>
-        <p:nvSpPr>
-          <p:cNvPr id="12" name="Rectangle 11"/>
+          <p:cNvPr id="8" name="Rectangle 7"/>
           <p:cNvSpPr/>
           <p:nvPr/>
         </p:nvSpPr>
         <p:spPr>
           <a:xfrm>
-            <a:off x="2816352" y="1024128"/>
-            <a:ext cx="2048256" cy="841248"/>
-          </a:xfrm>
-          <a:prstGeom prst="rect">
-            <a:avLst/>
-          </a:prstGeom>
-          <a:solidFill>
-            <a:srgbClr val="0091C9"/>
+            <a:off x="274320" y="1005840"/>
+            <a:ext cx="2212848" cy="36576"/>
+          </a:xfrm>
+          <a:prstGeom prst="rect">
+            <a:avLst/>
+          </a:prstGeom>
+          <a:solidFill>
+            <a:srgbClr val="69CD2B"/>
           </a:solidFill>
           <a:ln>
             <a:solidFill>
@@ -6203,14 +6686,14 @@
       </p:sp>
       <p:sp>
         <p:nvSpPr>
-          <p:cNvPr id="13" name="TextBox 12"/>
+          <p:cNvPr id="9" name="TextBox 8"/>
           <p:cNvSpPr txBox="1"/>
           <p:nvPr/>
         </p:nvSpPr>
         <p:spPr>
           <a:xfrm>
-            <a:off x="2926080" y="1042415"/>
-            <a:ext cx="457200" cy="274320"/>
+            <a:off x="457200" y="1170432"/>
+            <a:ext cx="1847088" cy="146304"/>
           </a:xfrm>
           <a:prstGeom prst="rect">
             <a:avLst/>
@@ -6218,32 +6701,34 @@
           <a:noFill/>
         </p:spPr>
         <p:txBody>
-          <a:bodyPr wrap="square"/>
+          <a:bodyPr wrap="square">
+            <a:normAutofit/>
+          </a:bodyPr>
           <a:lstStyle/>
           <a:p>
             <a:pPr algn="l"/>
             <a:r>
-              <a:rPr sz="1000" b="1" i="0">
-                <a:solidFill>
-                  <a:srgbClr val="FFFFFF"/>
+              <a:rPr sz="750" b="1" i="0">
+                <a:solidFill>
+                  <a:srgbClr val="69CD2B"/>
                 </a:solidFill>
                 <a:latin typeface="Poppins"/>
               </a:rPr>
-              <a:t>01</a:t>
-            </a:r>
-          </a:p>
-        </p:txBody>
-      </p:sp>
-      <p:sp>
-        <p:nvSpPr>
-          <p:cNvPr id="14" name="TextBox 13"/>
+              <a:t>THE SMB TEAM MODEL</a:t>
+            </a:r>
+          </a:p>
+        </p:txBody>
+      </p:sp>
+      <p:sp>
+        <p:nvSpPr>
+          <p:cNvPr id="10" name="TextBox 9"/>
           <p:cNvSpPr txBox="1"/>
           <p:nvPr/>
         </p:nvSpPr>
         <p:spPr>
           <a:xfrm>
-            <a:off x="2926080" y="1316736"/>
-            <a:ext cx="1865376" cy="256032"/>
+            <a:off x="457200" y="1426464"/>
+            <a:ext cx="1847088" cy="1737360"/>
           </a:xfrm>
           <a:prstGeom prst="rect">
             <a:avLst/>
@@ -6251,71 +6736,40 @@
           <a:noFill/>
         </p:spPr>
         <p:txBody>
-          <a:bodyPr wrap="square"/>
+          <a:bodyPr wrap="square">
+            <a:normAutofit/>
+          </a:bodyPr>
           <a:lstStyle/>
           <a:p>
             <a:pPr algn="l"/>
             <a:r>
-              <a:rPr sz="1200" b="1" i="0">
-                <a:solidFill>
-                  <a:srgbClr val="FFFFFF"/>
+              <a:rPr sz="850" b="0" i="0">
+                <a:solidFill>
+                  <a:srgbClr val="B8CDDD"/>
                 </a:solidFill>
                 <a:latin typeface="Poppins"/>
               </a:rPr>
-              <a:t>Build the</a:t>
-            </a:r>
-          </a:p>
-        </p:txBody>
-      </p:sp>
-      <p:sp>
-        <p:nvSpPr>
-          <p:cNvPr id="15" name="TextBox 14"/>
-          <p:cNvSpPr txBox="1"/>
-          <p:nvPr/>
-        </p:nvSpPr>
-        <p:spPr>
-          <a:xfrm>
-            <a:off x="2926080" y="1554480"/>
-            <a:ext cx="1865376" cy="256032"/>
-          </a:xfrm>
-          <a:prstGeom prst="rect">
-            <a:avLst/>
-          </a:prstGeom>
-          <a:noFill/>
-        </p:spPr>
-        <p:txBody>
-          <a:bodyPr wrap="square"/>
-          <a:lstStyle/>
-          <a:p>
-            <a:pPr algn="l"/>
-            <a:r>
-              <a:rPr sz="1200" b="1" i="0">
-                <a:solidFill>
-                  <a:srgbClr val="FFFFFF"/>
-                </a:solidFill>
-                <a:latin typeface="Poppins"/>
-              </a:rPr>
-              <a:t>Marketing Engine</a:t>
-            </a:r>
-          </a:p>
-        </p:txBody>
-      </p:sp>
-      <p:sp>
-        <p:nvSpPr>
-          <p:cNvPr id="16" name="Rectangle 15"/>
+              <a:t>All four pillars — Lead Generation, Intake, Team, and Profit — must work together. Missing any one means growth stalls no matter how strong the others are. When all four work together, Joseph can finally build a firm that runs on its own systems, not on him.</a:t>
+            </a:r>
+          </a:p>
+        </p:txBody>
+      </p:sp>
+      <p:sp>
+        <p:nvSpPr>
+          <p:cNvPr id="11" name="Rectangle 10"/>
           <p:cNvSpPr/>
           <p:nvPr/>
         </p:nvSpPr>
         <p:spPr>
           <a:xfrm>
-            <a:off x="2816352" y="1865376"/>
-            <a:ext cx="2048256" cy="566928"/>
-          </a:xfrm>
-          <a:prstGeom prst="rect">
-            <a:avLst/>
-          </a:prstGeom>
-          <a:solidFill>
-            <a:srgbClr val="E3F4FA"/>
+            <a:off x="274320" y="3456432"/>
+            <a:ext cx="2212848" cy="1124712"/>
+          </a:xfrm>
+          <a:prstGeom prst="rect">
+            <a:avLst/>
+          </a:prstGeom>
+          <a:solidFill>
+            <a:srgbClr val="69CD2B"/>
           </a:solidFill>
           <a:ln>
             <a:solidFill>
@@ -6347,14 +6801,84 @@
       </p:sp>
       <p:sp>
         <p:nvSpPr>
-          <p:cNvPr id="17" name="Rectangle 16"/>
+          <p:cNvPr id="12" name="TextBox 11"/>
+          <p:cNvSpPr txBox="1"/>
+          <p:nvPr/>
+        </p:nvSpPr>
+        <p:spPr>
+          <a:xfrm>
+            <a:off x="457200" y="3621024"/>
+            <a:ext cx="1847088" cy="475488"/>
+          </a:xfrm>
+          <a:prstGeom prst="rect">
+            <a:avLst/>
+          </a:prstGeom>
+          <a:noFill/>
+        </p:spPr>
+        <p:txBody>
+          <a:bodyPr wrap="square">
+            <a:normAutofit/>
+          </a:bodyPr>
+          <a:lstStyle/>
+          <a:p>
+            <a:pPr algn="l"/>
+            <a:r>
+              <a:rPr sz="1200" b="1" i="0">
+                <a:solidFill>
+                  <a:srgbClr val="143306"/>
+                </a:solidFill>
+                <a:latin typeface="Poppins"/>
+              </a:rPr>
+              <a:t>Referral-Only → Multi-Channel Growth</a:t>
+            </a:r>
+          </a:p>
+        </p:txBody>
+      </p:sp>
+      <p:sp>
+        <p:nvSpPr>
+          <p:cNvPr id="13" name="TextBox 12"/>
+          <p:cNvSpPr txBox="1"/>
+          <p:nvPr/>
+        </p:nvSpPr>
+        <p:spPr>
+          <a:xfrm>
+            <a:off x="457200" y="4133087"/>
+            <a:ext cx="1847088" cy="310896"/>
+          </a:xfrm>
+          <a:prstGeom prst="rect">
+            <a:avLst/>
+          </a:prstGeom>
+          <a:noFill/>
+        </p:spPr>
+        <p:txBody>
+          <a:bodyPr wrap="square">
+            <a:normAutofit/>
+          </a:bodyPr>
+          <a:lstStyle/>
+          <a:p>
+            <a:pPr algn="l"/>
+            <a:r>
+              <a:rPr sz="850" b="0" i="0">
+                <a:solidFill>
+                  <a:srgbClr val="1F470C"/>
+                </a:solidFill>
+                <a:latin typeface="Poppins"/>
+              </a:rPr>
+              <a:t>Build something built to outlast you</a:t>
+            </a:r>
+          </a:p>
+        </p:txBody>
+      </p:sp>
+      <p:sp>
+        <p:nvSpPr>
+          <p:cNvPr id="14" name="Rectangle 13"/>
           <p:cNvSpPr/>
           <p:nvPr/>
         </p:nvSpPr>
         <p:spPr>
           <a:xfrm>
-            <a:off x="2907792" y="2084832"/>
-            <a:ext cx="91440" cy="91440"/>
+            <a:off x="2670048" y="1005840"/>
+            <a:ext cx="2066543" cy="841248"/>
           </a:xfrm>
           <a:prstGeom prst="rect">
             <a:avLst/>
@@ -6392,14 +6916,14 @@
       </p:sp>
       <p:sp>
         <p:nvSpPr>
-          <p:cNvPr id="18" name="TextBox 17"/>
+          <p:cNvPr id="15" name="TextBox 14"/>
           <p:cNvSpPr txBox="1"/>
           <p:nvPr/>
         </p:nvSpPr>
         <p:spPr>
           <a:xfrm>
-            <a:off x="3054096" y="1920240"/>
-            <a:ext cx="1755648" cy="475488"/>
+            <a:off x="2834640" y="1097280"/>
+            <a:ext cx="457200" cy="219456"/>
           </a:xfrm>
           <a:prstGeom prst="rect">
             <a:avLst/>
@@ -6407,38 +6931,110 @@
           <a:noFill/>
         </p:spPr>
         <p:txBody>
-          <a:bodyPr wrap="square"/>
+          <a:bodyPr wrap="square">
+            <a:normAutofit/>
+          </a:bodyPr>
           <a:lstStyle/>
           <a:p>
             <a:pPr algn="l"/>
             <a:r>
-              <a:rPr sz="800" b="0" i="0">
-                <a:solidFill>
-                  <a:srgbClr val="1E293B"/>
+              <a:rPr sz="1300" b="1" i="0">
+                <a:solidFill>
+                  <a:srgbClr val="FFFFFF"/>
                 </a:solidFill>
                 <a:latin typeface="Poppins"/>
               </a:rPr>
-              <a:t>Launch LSA for Family Law and Probate leads</a:t>
-            </a:r>
-          </a:p>
-        </p:txBody>
-      </p:sp>
-      <p:sp>
-        <p:nvSpPr>
-          <p:cNvPr id="19" name="Rectangle 18"/>
+              <a:t>01</a:t>
+            </a:r>
+          </a:p>
+        </p:txBody>
+      </p:sp>
+      <p:sp>
+        <p:nvSpPr>
+          <p:cNvPr id="16" name="TextBox 15"/>
+          <p:cNvSpPr txBox="1"/>
+          <p:nvPr/>
+        </p:nvSpPr>
+        <p:spPr>
+          <a:xfrm>
+            <a:off x="2834640" y="1316736"/>
+            <a:ext cx="1828800" cy="219456"/>
+          </a:xfrm>
+          <a:prstGeom prst="rect">
+            <a:avLst/>
+          </a:prstGeom>
+          <a:noFill/>
+        </p:spPr>
+        <p:txBody>
+          <a:bodyPr wrap="square">
+            <a:normAutofit/>
+          </a:bodyPr>
+          <a:lstStyle/>
+          <a:p>
+            <a:pPr algn="l"/>
+            <a:r>
+              <a:rPr sz="1400" b="1" i="0">
+                <a:solidFill>
+                  <a:srgbClr val="FFFFFF"/>
+                </a:solidFill>
+                <a:latin typeface="Poppins"/>
+              </a:rPr>
+              <a:t>Build the</a:t>
+            </a:r>
+          </a:p>
+        </p:txBody>
+      </p:sp>
+      <p:sp>
+        <p:nvSpPr>
+          <p:cNvPr id="17" name="TextBox 16"/>
+          <p:cNvSpPr txBox="1"/>
+          <p:nvPr/>
+        </p:nvSpPr>
+        <p:spPr>
+          <a:xfrm>
+            <a:off x="2834640" y="1536192"/>
+            <a:ext cx="1828800" cy="219456"/>
+          </a:xfrm>
+          <a:prstGeom prst="rect">
+            <a:avLst/>
+          </a:prstGeom>
+          <a:noFill/>
+        </p:spPr>
+        <p:txBody>
+          <a:bodyPr wrap="square">
+            <a:normAutofit/>
+          </a:bodyPr>
+          <a:lstStyle/>
+          <a:p>
+            <a:pPr algn="l"/>
+            <a:r>
+              <a:rPr sz="1400" b="1" i="0">
+                <a:solidFill>
+                  <a:srgbClr val="FFFFFF"/>
+                </a:solidFill>
+                <a:latin typeface="Poppins"/>
+              </a:rPr>
+              <a:t>Marketing Engine</a:t>
+            </a:r>
+          </a:p>
+        </p:txBody>
+      </p:sp>
+      <p:sp>
+        <p:nvSpPr>
+          <p:cNvPr id="18" name="Rectangle 17"/>
           <p:cNvSpPr/>
           <p:nvPr/>
         </p:nvSpPr>
         <p:spPr>
           <a:xfrm>
-            <a:off x="2816352" y="2468880"/>
-            <a:ext cx="2048256" cy="566928"/>
-          </a:xfrm>
-          <a:prstGeom prst="rect">
-            <a:avLst/>
-          </a:prstGeom>
-          <a:solidFill>
-            <a:srgbClr val="FFFFFF"/>
+            <a:off x="2670048" y="1865376"/>
+            <a:ext cx="2066543" cy="512064"/>
+          </a:xfrm>
+          <a:prstGeom prst="rect">
+            <a:avLst/>
+          </a:prstGeom>
+          <a:solidFill>
+            <a:srgbClr val="ECF5FA"/>
           </a:solidFill>
           <a:ln>
             <a:solidFill>
@@ -6470,14 +7066,14 @@
       </p:sp>
       <p:sp>
         <p:nvSpPr>
-          <p:cNvPr id="20" name="Rectangle 19"/>
+          <p:cNvPr id="19" name="Rectangle 18"/>
           <p:cNvSpPr/>
           <p:nvPr/>
         </p:nvSpPr>
         <p:spPr>
           <a:xfrm>
-            <a:off x="2907792" y="2688336"/>
-            <a:ext cx="91440" cy="91440"/>
+            <a:off x="2816352" y="2093976"/>
+            <a:ext cx="64008" cy="64008"/>
           </a:xfrm>
           <a:prstGeom prst="rect">
             <a:avLst/>
@@ -6515,14 +7111,14 @@
       </p:sp>
       <p:sp>
         <p:nvSpPr>
-          <p:cNvPr id="21" name="TextBox 20"/>
+          <p:cNvPr id="20" name="TextBox 19"/>
           <p:cNvSpPr txBox="1"/>
           <p:nvPr/>
         </p:nvSpPr>
         <p:spPr>
           <a:xfrm>
-            <a:off x="3054096" y="2523744"/>
-            <a:ext cx="1755648" cy="475488"/>
+            <a:off x="2971800" y="1965960"/>
+            <a:ext cx="1609344" cy="365760"/>
           </a:xfrm>
           <a:prstGeom prst="rect">
             <a:avLst/>
@@ -6530,38 +7126,40 @@
           <a:noFill/>
         </p:spPr>
         <p:txBody>
-          <a:bodyPr wrap="square"/>
+          <a:bodyPr wrap="square">
+            <a:normAutofit/>
+          </a:bodyPr>
           <a:lstStyle/>
           <a:p>
             <a:pPr algn="l"/>
             <a:r>
               <a:rPr sz="800" b="0" i="0">
                 <a:solidFill>
-                  <a:srgbClr val="1E293B"/>
+                  <a:srgbClr val="1B2A38"/>
                 </a:solidFill>
                 <a:latin typeface="Poppins"/>
               </a:rPr>
-              <a:t>Fix title tag and H1 SEO issues found on the site</a:t>
-            </a:r>
-          </a:p>
-        </p:txBody>
-      </p:sp>
-      <p:sp>
-        <p:nvSpPr>
-          <p:cNvPr id="22" name="Rectangle 21"/>
+              <a:t>Launch LSA for Family Law and Probate leads</a:t>
+            </a:r>
+          </a:p>
+        </p:txBody>
+      </p:sp>
+      <p:sp>
+        <p:nvSpPr>
+          <p:cNvPr id="21" name="Rectangle 20"/>
           <p:cNvSpPr/>
           <p:nvPr/>
         </p:nvSpPr>
         <p:spPr>
           <a:xfrm>
-            <a:off x="2816352" y="3072384"/>
-            <a:ext cx="2048256" cy="566928"/>
-          </a:xfrm>
-          <a:prstGeom prst="rect">
-            <a:avLst/>
-          </a:prstGeom>
-          <a:solidFill>
-            <a:srgbClr val="E3F4FA"/>
+            <a:off x="2670048" y="2423160"/>
+            <a:ext cx="2066543" cy="512064"/>
+          </a:xfrm>
+          <a:prstGeom prst="rect">
+            <a:avLst/>
+          </a:prstGeom>
+          <a:solidFill>
+            <a:srgbClr val="FFFFFF"/>
           </a:solidFill>
           <a:ln>
             <a:solidFill>
@@ -6593,14 +7191,14 @@
       </p:sp>
       <p:sp>
         <p:nvSpPr>
-          <p:cNvPr id="23" name="Rectangle 22"/>
+          <p:cNvPr id="22" name="Rectangle 21"/>
           <p:cNvSpPr/>
           <p:nvPr/>
         </p:nvSpPr>
         <p:spPr>
           <a:xfrm>
-            <a:off x="2907792" y="3291839"/>
-            <a:ext cx="91440" cy="91440"/>
+            <a:off x="2816352" y="2651760"/>
+            <a:ext cx="64008" cy="64008"/>
           </a:xfrm>
           <a:prstGeom prst="rect">
             <a:avLst/>
@@ -6638,14 +7236,14 @@
       </p:sp>
       <p:sp>
         <p:nvSpPr>
-          <p:cNvPr id="24" name="TextBox 23"/>
+          <p:cNvPr id="23" name="TextBox 22"/>
           <p:cNvSpPr txBox="1"/>
           <p:nvPr/>
         </p:nvSpPr>
         <p:spPr>
           <a:xfrm>
-            <a:off x="3054096" y="3127248"/>
-            <a:ext cx="1755648" cy="475488"/>
+            <a:off x="2971800" y="2523744"/>
+            <a:ext cx="1609344" cy="365760"/>
           </a:xfrm>
           <a:prstGeom prst="rect">
             <a:avLst/>
@@ -6653,38 +7251,40 @@
           <a:noFill/>
         </p:spPr>
         <p:txBody>
-          <a:bodyPr wrap="square"/>
+          <a:bodyPr wrap="square">
+            <a:normAutofit/>
+          </a:bodyPr>
           <a:lstStyle/>
           <a:p>
             <a:pPr algn="l"/>
             <a:r>
               <a:rPr sz="800" b="0" i="0">
                 <a:solidFill>
-                  <a:srgbClr val="1E293B"/>
+                  <a:srgbClr val="1B2A38"/>
                 </a:solidFill>
                 <a:latin typeface="Poppins"/>
               </a:rPr>
-              <a:t>Build dedicated Family Law and Probate pages</a:t>
-            </a:r>
-          </a:p>
-        </p:txBody>
-      </p:sp>
-      <p:sp>
-        <p:nvSpPr>
-          <p:cNvPr id="25" name="Rectangle 24"/>
+              <a:t>Fix title tag and H1 SEO issues found on the site</a:t>
+            </a:r>
+          </a:p>
+        </p:txBody>
+      </p:sp>
+      <p:sp>
+        <p:nvSpPr>
+          <p:cNvPr id="24" name="Rectangle 23"/>
           <p:cNvSpPr/>
           <p:nvPr/>
         </p:nvSpPr>
         <p:spPr>
           <a:xfrm>
-            <a:off x="2816352" y="3675887"/>
-            <a:ext cx="2048256" cy="566928"/>
-          </a:xfrm>
-          <a:prstGeom prst="rect">
-            <a:avLst/>
-          </a:prstGeom>
-          <a:solidFill>
-            <a:srgbClr val="FFFFFF"/>
+            <a:off x="2670048" y="2971800"/>
+            <a:ext cx="2066543" cy="512064"/>
+          </a:xfrm>
+          <a:prstGeom prst="rect">
+            <a:avLst/>
+          </a:prstGeom>
+          <a:solidFill>
+            <a:srgbClr val="ECF5FA"/>
           </a:solidFill>
           <a:ln>
             <a:solidFill>
@@ -6716,14 +7316,14 @@
       </p:sp>
       <p:sp>
         <p:nvSpPr>
-          <p:cNvPr id="26" name="Rectangle 25"/>
+          <p:cNvPr id="25" name="Rectangle 24"/>
           <p:cNvSpPr/>
           <p:nvPr/>
         </p:nvSpPr>
         <p:spPr>
           <a:xfrm>
-            <a:off x="2907792" y="3895344"/>
-            <a:ext cx="91440" cy="91440"/>
+            <a:off x="2816352" y="3200400"/>
+            <a:ext cx="64008" cy="64008"/>
           </a:xfrm>
           <a:prstGeom prst="rect">
             <a:avLst/>
@@ -6761,14 +7361,14 @@
       </p:sp>
       <p:sp>
         <p:nvSpPr>
-          <p:cNvPr id="27" name="TextBox 26"/>
+          <p:cNvPr id="26" name="TextBox 25"/>
           <p:cNvSpPr txBox="1"/>
           <p:nvPr/>
         </p:nvSpPr>
         <p:spPr>
           <a:xfrm>
-            <a:off x="3054096" y="3730751"/>
-            <a:ext cx="1755648" cy="475488"/>
+            <a:off x="2971800" y="3072384"/>
+            <a:ext cx="1609344" cy="365760"/>
           </a:xfrm>
           <a:prstGeom prst="rect">
             <a:avLst/>
@@ -6776,38 +7376,40 @@
           <a:noFill/>
         </p:spPr>
         <p:txBody>
-          <a:bodyPr wrap="square"/>
+          <a:bodyPr wrap="square">
+            <a:normAutofit/>
+          </a:bodyPr>
           <a:lstStyle/>
           <a:p>
             <a:pPr algn="l"/>
             <a:r>
               <a:rPr sz="800" b="0" i="0">
                 <a:solidFill>
-                  <a:srgbClr val="1E293B"/>
+                  <a:srgbClr val="1B2A38"/>
                 </a:solidFill>
                 <a:latin typeface="Poppins"/>
               </a:rPr>
-              <a:t>Add PPC at month 3 to scale to $7,500/mo</a:t>
-            </a:r>
-          </a:p>
-        </p:txBody>
-      </p:sp>
-      <p:sp>
-        <p:nvSpPr>
-          <p:cNvPr id="28" name="Rectangle 27"/>
+              <a:t>Build dedicated Family Law and Probate pages</a:t>
+            </a:r>
+          </a:p>
+        </p:txBody>
+      </p:sp>
+      <p:sp>
+        <p:nvSpPr>
+          <p:cNvPr id="27" name="Rectangle 26"/>
           <p:cNvSpPr/>
           <p:nvPr/>
         </p:nvSpPr>
         <p:spPr>
           <a:xfrm>
-            <a:off x="2816352" y="4279392"/>
-            <a:ext cx="2048256" cy="566928"/>
-          </a:xfrm>
-          <a:prstGeom prst="rect">
-            <a:avLst/>
-          </a:prstGeom>
-          <a:solidFill>
-            <a:srgbClr val="E3F4FA"/>
+            <a:off x="2670048" y="3520440"/>
+            <a:ext cx="2066543" cy="512064"/>
+          </a:xfrm>
+          <a:prstGeom prst="rect">
+            <a:avLst/>
+          </a:prstGeom>
+          <a:solidFill>
+            <a:srgbClr val="FFFFFF"/>
           </a:solidFill>
           <a:ln>
             <a:solidFill>
@@ -6839,14 +7441,14 @@
       </p:sp>
       <p:sp>
         <p:nvSpPr>
-          <p:cNvPr id="29" name="Rectangle 28"/>
+          <p:cNvPr id="28" name="Rectangle 27"/>
           <p:cNvSpPr/>
           <p:nvPr/>
         </p:nvSpPr>
         <p:spPr>
           <a:xfrm>
-            <a:off x="2907792" y="4498848"/>
-            <a:ext cx="91440" cy="91440"/>
+            <a:off x="2816352" y="3749039"/>
+            <a:ext cx="64008" cy="64008"/>
           </a:xfrm>
           <a:prstGeom prst="rect">
             <a:avLst/>
@@ -6884,14 +7486,14 @@
       </p:sp>
       <p:sp>
         <p:nvSpPr>
-          <p:cNvPr id="30" name="TextBox 29"/>
+          <p:cNvPr id="29" name="TextBox 28"/>
           <p:cNvSpPr txBox="1"/>
           <p:nvPr/>
         </p:nvSpPr>
         <p:spPr>
           <a:xfrm>
-            <a:off x="3054096" y="4334255"/>
-            <a:ext cx="1755648" cy="475488"/>
+            <a:off x="2971800" y="3621024"/>
+            <a:ext cx="1609344" cy="365760"/>
           </a:xfrm>
           <a:prstGeom prst="rect">
             <a:avLst/>
@@ -6899,38 +7501,40 @@
           <a:noFill/>
         </p:spPr>
         <p:txBody>
-          <a:bodyPr wrap="square"/>
+          <a:bodyPr wrap="square">
+            <a:normAutofit/>
+          </a:bodyPr>
           <a:lstStyle/>
           <a:p>
             <a:pPr algn="l"/>
             <a:r>
               <a:rPr sz="800" b="0" i="0">
                 <a:solidFill>
-                  <a:srgbClr val="1E293B"/>
+                  <a:srgbClr val="1B2A38"/>
                 </a:solidFill>
                 <a:latin typeface="Poppins"/>
               </a:rPr>
-              <a:t>Turn paid search into a pipeline that runs without you</a:t>
-            </a:r>
-          </a:p>
-        </p:txBody>
-      </p:sp>
-      <p:sp>
-        <p:nvSpPr>
-          <p:cNvPr id="31" name="Rectangle 30"/>
+              <a:t>Add PPC at month 3 to scale to $7,500/mo</a:t>
+            </a:r>
+          </a:p>
+        </p:txBody>
+      </p:sp>
+      <p:sp>
+        <p:nvSpPr>
+          <p:cNvPr id="30" name="Rectangle 29"/>
           <p:cNvSpPr/>
           <p:nvPr/>
         </p:nvSpPr>
         <p:spPr>
           <a:xfrm>
-            <a:off x="4937760" y="1024128"/>
-            <a:ext cx="2048256" cy="841248"/>
-          </a:xfrm>
-          <a:prstGeom prst="rect">
-            <a:avLst/>
-          </a:prstGeom>
-          <a:solidFill>
-            <a:srgbClr val="69CD2B"/>
+            <a:off x="2670048" y="4078224"/>
+            <a:ext cx="2066543" cy="512064"/>
+          </a:xfrm>
+          <a:prstGeom prst="rect">
+            <a:avLst/>
+          </a:prstGeom>
+          <a:solidFill>
+            <a:srgbClr val="ECF5FA"/>
           </a:solidFill>
           <a:ln>
             <a:solidFill>
@@ -6962,119 +7566,20 @@
       </p:sp>
       <p:sp>
         <p:nvSpPr>
-          <p:cNvPr id="32" name="TextBox 31"/>
-          <p:cNvSpPr txBox="1"/>
-          <p:nvPr/>
-        </p:nvSpPr>
-        <p:spPr>
-          <a:xfrm>
-            <a:off x="5047488" y="1042415"/>
-            <a:ext cx="457200" cy="274320"/>
-          </a:xfrm>
-          <a:prstGeom prst="rect">
-            <a:avLst/>
-          </a:prstGeom>
-          <a:noFill/>
-        </p:spPr>
-        <p:txBody>
-          <a:bodyPr wrap="square"/>
-          <a:lstStyle/>
-          <a:p>
-            <a:pPr algn="l"/>
-            <a:r>
-              <a:rPr sz="1000" b="1" i="0">
-                <a:solidFill>
-                  <a:srgbClr val="003A59"/>
-                </a:solidFill>
-                <a:latin typeface="Poppins"/>
-              </a:rPr>
-              <a:t>02</a:t>
-            </a:r>
-          </a:p>
-        </p:txBody>
-      </p:sp>
-      <p:sp>
-        <p:nvSpPr>
-          <p:cNvPr id="33" name="TextBox 32"/>
-          <p:cNvSpPr txBox="1"/>
-          <p:nvPr/>
-        </p:nvSpPr>
-        <p:spPr>
-          <a:xfrm>
-            <a:off x="5047488" y="1316736"/>
-            <a:ext cx="1865376" cy="256032"/>
-          </a:xfrm>
-          <a:prstGeom prst="rect">
-            <a:avLst/>
-          </a:prstGeom>
-          <a:noFill/>
-        </p:spPr>
-        <p:txBody>
-          <a:bodyPr wrap="square"/>
-          <a:lstStyle/>
-          <a:p>
-            <a:pPr algn="l"/>
-            <a:r>
-              <a:rPr sz="1200" b="1" i="0">
-                <a:solidFill>
-                  <a:srgbClr val="003A59"/>
-                </a:solidFill>
-                <a:latin typeface="Poppins"/>
-              </a:rPr>
-              <a:t>Fix Intake &amp;</a:t>
-            </a:r>
-          </a:p>
-        </p:txBody>
-      </p:sp>
-      <p:sp>
-        <p:nvSpPr>
-          <p:cNvPr id="34" name="TextBox 33"/>
-          <p:cNvSpPr txBox="1"/>
-          <p:nvPr/>
-        </p:nvSpPr>
-        <p:spPr>
-          <a:xfrm>
-            <a:off x="5047488" y="1554480"/>
-            <a:ext cx="1865376" cy="256032"/>
-          </a:xfrm>
-          <a:prstGeom prst="rect">
-            <a:avLst/>
-          </a:prstGeom>
-          <a:noFill/>
-        </p:spPr>
-        <p:txBody>
-          <a:bodyPr wrap="square"/>
-          <a:lstStyle/>
-          <a:p>
-            <a:pPr algn="l"/>
-            <a:r>
-              <a:rPr sz="1200" b="1" i="0">
-                <a:solidFill>
-                  <a:srgbClr val="003A59"/>
-                </a:solidFill>
-                <a:latin typeface="Poppins"/>
-              </a:rPr>
-              <a:t>Stop Losing Cases</a:t>
-            </a:r>
-          </a:p>
-        </p:txBody>
-      </p:sp>
-      <p:sp>
-        <p:nvSpPr>
-          <p:cNvPr id="35" name="Rectangle 34"/>
+          <p:cNvPr id="31" name="Rectangle 30"/>
           <p:cNvSpPr/>
           <p:nvPr/>
         </p:nvSpPr>
         <p:spPr>
           <a:xfrm>
-            <a:off x="4937760" y="1865376"/>
-            <a:ext cx="2048256" cy="566928"/>
-          </a:xfrm>
-          <a:prstGeom prst="rect">
-            <a:avLst/>
-          </a:prstGeom>
-          <a:solidFill>
-            <a:srgbClr val="EDF9E6"/>
+            <a:off x="2816352" y="4306824"/>
+            <a:ext cx="64008" cy="64008"/>
+          </a:xfrm>
+          <a:prstGeom prst="rect">
+            <a:avLst/>
+          </a:prstGeom>
+          <a:solidFill>
+            <a:srgbClr val="0091C9"/>
           </a:solidFill>
           <a:ln>
             <a:solidFill>
@@ -7106,14 +7611,49 @@
       </p:sp>
       <p:sp>
         <p:nvSpPr>
-          <p:cNvPr id="36" name="Rectangle 35"/>
+          <p:cNvPr id="32" name="TextBox 31"/>
+          <p:cNvSpPr txBox="1"/>
+          <p:nvPr/>
+        </p:nvSpPr>
+        <p:spPr>
+          <a:xfrm>
+            <a:off x="2971800" y="4178808"/>
+            <a:ext cx="1609344" cy="365760"/>
+          </a:xfrm>
+          <a:prstGeom prst="rect">
+            <a:avLst/>
+          </a:prstGeom>
+          <a:noFill/>
+        </p:spPr>
+        <p:txBody>
+          <a:bodyPr wrap="square">
+            <a:normAutofit/>
+          </a:bodyPr>
+          <a:lstStyle/>
+          <a:p>
+            <a:pPr algn="l"/>
+            <a:r>
+              <a:rPr sz="800" b="0" i="0">
+                <a:solidFill>
+                  <a:srgbClr val="1B2A38"/>
+                </a:solidFill>
+                <a:latin typeface="Poppins"/>
+              </a:rPr>
+              <a:t>Turn paid search into a pipeline that runs without you</a:t>
+            </a:r>
+          </a:p>
+        </p:txBody>
+      </p:sp>
+      <p:sp>
+        <p:nvSpPr>
+          <p:cNvPr id="33" name="Rectangle 32"/>
           <p:cNvSpPr/>
           <p:nvPr/>
         </p:nvSpPr>
         <p:spPr>
           <a:xfrm>
-            <a:off x="5029200" y="2084832"/>
-            <a:ext cx="91440" cy="91440"/>
+            <a:off x="4846320" y="1005840"/>
+            <a:ext cx="2066543" cy="841248"/>
           </a:xfrm>
           <a:prstGeom prst="rect">
             <a:avLst/>
@@ -7151,14 +7691,14 @@
       </p:sp>
       <p:sp>
         <p:nvSpPr>
-          <p:cNvPr id="37" name="TextBox 36"/>
+          <p:cNvPr id="34" name="TextBox 33"/>
           <p:cNvSpPr txBox="1"/>
           <p:nvPr/>
         </p:nvSpPr>
         <p:spPr>
           <a:xfrm>
-            <a:off x="5175504" y="1920240"/>
-            <a:ext cx="1755648" cy="475488"/>
+            <a:off x="5010912" y="1097280"/>
+            <a:ext cx="457200" cy="219456"/>
           </a:xfrm>
           <a:prstGeom prst="rect">
             <a:avLst/>
@@ -7166,38 +7706,110 @@
           <a:noFill/>
         </p:spPr>
         <p:txBody>
-          <a:bodyPr wrap="square"/>
+          <a:bodyPr wrap="square">
+            <a:normAutofit/>
+          </a:bodyPr>
           <a:lstStyle/>
           <a:p>
             <a:pPr algn="l"/>
             <a:r>
-              <a:rPr sz="800" b="0" i="0">
-                <a:solidFill>
-                  <a:srgbClr val="1E293B"/>
+              <a:rPr sz="1300" b="1" i="0">
+                <a:solidFill>
+                  <a:srgbClr val="143306"/>
                 </a:solidFill>
                 <a:latin typeface="Poppins"/>
               </a:rPr>
-              <a:t>Track every referral so none go unseen</a:t>
-            </a:r>
-          </a:p>
-        </p:txBody>
-      </p:sp>
-      <p:sp>
-        <p:nvSpPr>
-          <p:cNvPr id="38" name="Rectangle 37"/>
+              <a:t>02</a:t>
+            </a:r>
+          </a:p>
+        </p:txBody>
+      </p:sp>
+      <p:sp>
+        <p:nvSpPr>
+          <p:cNvPr id="35" name="TextBox 34"/>
+          <p:cNvSpPr txBox="1"/>
+          <p:nvPr/>
+        </p:nvSpPr>
+        <p:spPr>
+          <a:xfrm>
+            <a:off x="5010912" y="1316736"/>
+            <a:ext cx="1828800" cy="219456"/>
+          </a:xfrm>
+          <a:prstGeom prst="rect">
+            <a:avLst/>
+          </a:prstGeom>
+          <a:noFill/>
+        </p:spPr>
+        <p:txBody>
+          <a:bodyPr wrap="square">
+            <a:normAutofit/>
+          </a:bodyPr>
+          <a:lstStyle/>
+          <a:p>
+            <a:pPr algn="l"/>
+            <a:r>
+              <a:rPr sz="1400" b="1" i="0">
+                <a:solidFill>
+                  <a:srgbClr val="143306"/>
+                </a:solidFill>
+                <a:latin typeface="Poppins"/>
+              </a:rPr>
+              <a:t>Fix Intake &amp;</a:t>
+            </a:r>
+          </a:p>
+        </p:txBody>
+      </p:sp>
+      <p:sp>
+        <p:nvSpPr>
+          <p:cNvPr id="36" name="TextBox 35"/>
+          <p:cNvSpPr txBox="1"/>
+          <p:nvPr/>
+        </p:nvSpPr>
+        <p:spPr>
+          <a:xfrm>
+            <a:off x="5010912" y="1536192"/>
+            <a:ext cx="1828800" cy="219456"/>
+          </a:xfrm>
+          <a:prstGeom prst="rect">
+            <a:avLst/>
+          </a:prstGeom>
+          <a:noFill/>
+        </p:spPr>
+        <p:txBody>
+          <a:bodyPr wrap="square">
+            <a:normAutofit/>
+          </a:bodyPr>
+          <a:lstStyle/>
+          <a:p>
+            <a:pPr algn="l"/>
+            <a:r>
+              <a:rPr sz="1400" b="1" i="0">
+                <a:solidFill>
+                  <a:srgbClr val="143306"/>
+                </a:solidFill>
+                <a:latin typeface="Poppins"/>
+              </a:rPr>
+              <a:t>Stop Losing Cases</a:t>
+            </a:r>
+          </a:p>
+        </p:txBody>
+      </p:sp>
+      <p:sp>
+        <p:nvSpPr>
+          <p:cNvPr id="37" name="Rectangle 36"/>
           <p:cNvSpPr/>
           <p:nvPr/>
         </p:nvSpPr>
         <p:spPr>
           <a:xfrm>
-            <a:off x="4937760" y="2468880"/>
-            <a:ext cx="2048256" cy="566928"/>
-          </a:xfrm>
-          <a:prstGeom prst="rect">
-            <a:avLst/>
-          </a:prstGeom>
-          <a:solidFill>
-            <a:srgbClr val="FFFFFF"/>
+            <a:off x="4846320" y="1865376"/>
+            <a:ext cx="2066543" cy="512064"/>
+          </a:xfrm>
+          <a:prstGeom prst="rect">
+            <a:avLst/>
+          </a:prstGeom>
+          <a:solidFill>
+            <a:srgbClr val="ECF7E4"/>
           </a:solidFill>
           <a:ln>
             <a:solidFill>
@@ -7229,14 +7841,14 @@
       </p:sp>
       <p:sp>
         <p:nvSpPr>
-          <p:cNvPr id="39" name="Rectangle 38"/>
+          <p:cNvPr id="38" name="Rectangle 37"/>
           <p:cNvSpPr/>
           <p:nvPr/>
         </p:nvSpPr>
         <p:spPr>
           <a:xfrm>
-            <a:off x="5029200" y="2688336"/>
-            <a:ext cx="91440" cy="91440"/>
+            <a:off x="4992624" y="2093976"/>
+            <a:ext cx="64008" cy="64008"/>
           </a:xfrm>
           <a:prstGeom prst="rect">
             <a:avLst/>
@@ -7274,14 +7886,14 @@
       </p:sp>
       <p:sp>
         <p:nvSpPr>
-          <p:cNvPr id="40" name="TextBox 39"/>
+          <p:cNvPr id="39" name="TextBox 38"/>
           <p:cNvSpPr txBox="1"/>
           <p:nvPr/>
         </p:nvSpPr>
         <p:spPr>
           <a:xfrm>
-            <a:off x="5175504" y="2523744"/>
-            <a:ext cx="1755648" cy="475488"/>
+            <a:off x="5148072" y="1965960"/>
+            <a:ext cx="1609344" cy="365760"/>
           </a:xfrm>
           <a:prstGeom prst="rect">
             <a:avLst/>
@@ -7289,38 +7901,40 @@
           <a:noFill/>
         </p:spPr>
         <p:txBody>
-          <a:bodyPr wrap="square"/>
+          <a:bodyPr wrap="square">
+            <a:normAutofit/>
+          </a:bodyPr>
           <a:lstStyle/>
           <a:p>
             <a:pPr algn="l"/>
             <a:r>
               <a:rPr sz="800" b="0" i="0">
                 <a:solidFill>
-                  <a:srgbClr val="1E293B"/>
+                  <a:srgbClr val="1B2A38"/>
                 </a:solidFill>
                 <a:latin typeface="Poppins"/>
               </a:rPr>
-              <a:t>Stand up a CRM to capture every inbound lead</a:t>
-            </a:r>
-          </a:p>
-        </p:txBody>
-      </p:sp>
-      <p:sp>
-        <p:nvSpPr>
-          <p:cNvPr id="41" name="Rectangle 40"/>
+              <a:t>Track every referral so none go unseen</a:t>
+            </a:r>
+          </a:p>
+        </p:txBody>
+      </p:sp>
+      <p:sp>
+        <p:nvSpPr>
+          <p:cNvPr id="40" name="Rectangle 39"/>
           <p:cNvSpPr/>
           <p:nvPr/>
         </p:nvSpPr>
         <p:spPr>
           <a:xfrm>
-            <a:off x="4937760" y="3072384"/>
-            <a:ext cx="2048256" cy="566928"/>
-          </a:xfrm>
-          <a:prstGeom prst="rect">
-            <a:avLst/>
-          </a:prstGeom>
-          <a:solidFill>
-            <a:srgbClr val="EDF9E6"/>
+            <a:off x="4846320" y="2423160"/>
+            <a:ext cx="2066543" cy="512064"/>
+          </a:xfrm>
+          <a:prstGeom prst="rect">
+            <a:avLst/>
+          </a:prstGeom>
+          <a:solidFill>
+            <a:srgbClr val="FFFFFF"/>
           </a:solidFill>
           <a:ln>
             <a:solidFill>
@@ -7352,14 +7966,14 @@
       </p:sp>
       <p:sp>
         <p:nvSpPr>
-          <p:cNvPr id="42" name="Rectangle 41"/>
+          <p:cNvPr id="41" name="Rectangle 40"/>
           <p:cNvSpPr/>
           <p:nvPr/>
         </p:nvSpPr>
         <p:spPr>
           <a:xfrm>
-            <a:off x="5029200" y="3291839"/>
-            <a:ext cx="91440" cy="91440"/>
+            <a:off x="4992624" y="2651760"/>
+            <a:ext cx="64008" cy="64008"/>
           </a:xfrm>
           <a:prstGeom prst="rect">
             <a:avLst/>
@@ -7397,14 +8011,14 @@
       </p:sp>
       <p:sp>
         <p:nvSpPr>
-          <p:cNvPr id="43" name="TextBox 42"/>
+          <p:cNvPr id="42" name="TextBox 41"/>
           <p:cNvSpPr txBox="1"/>
           <p:nvPr/>
         </p:nvSpPr>
         <p:spPr>
           <a:xfrm>
-            <a:off x="5175504" y="3127248"/>
-            <a:ext cx="1755648" cy="475488"/>
+            <a:off x="5148072" y="2523744"/>
+            <a:ext cx="1609344" cy="365760"/>
           </a:xfrm>
           <a:prstGeom prst="rect">
             <a:avLst/>
@@ -7412,38 +8026,40 @@
           <a:noFill/>
         </p:spPr>
         <p:txBody>
-          <a:bodyPr wrap="square"/>
+          <a:bodyPr wrap="square">
+            <a:normAutofit/>
+          </a:bodyPr>
           <a:lstStyle/>
           <a:p>
             <a:pPr algn="l"/>
             <a:r>
               <a:rPr sz="800" b="0" i="0">
                 <a:solidFill>
-                  <a:srgbClr val="1E293B"/>
+                  <a:srgbClr val="1B2A38"/>
                 </a:solidFill>
                 <a:latin typeface="Poppins"/>
               </a:rPr>
-              <a:t>Add after-hours coverage so no call goes unanswered</a:t>
-            </a:r>
-          </a:p>
-        </p:txBody>
-      </p:sp>
-      <p:sp>
-        <p:nvSpPr>
-          <p:cNvPr id="44" name="Rectangle 43"/>
+              <a:t>Stand up a CRM to capture every inbound lead</a:t>
+            </a:r>
+          </a:p>
+        </p:txBody>
+      </p:sp>
+      <p:sp>
+        <p:nvSpPr>
+          <p:cNvPr id="43" name="Rectangle 42"/>
           <p:cNvSpPr/>
           <p:nvPr/>
         </p:nvSpPr>
         <p:spPr>
           <a:xfrm>
-            <a:off x="4937760" y="3675887"/>
-            <a:ext cx="2048256" cy="566928"/>
-          </a:xfrm>
-          <a:prstGeom prst="rect">
-            <a:avLst/>
-          </a:prstGeom>
-          <a:solidFill>
-            <a:srgbClr val="FFFFFF"/>
+            <a:off x="4846320" y="2971800"/>
+            <a:ext cx="2066543" cy="512064"/>
+          </a:xfrm>
+          <a:prstGeom prst="rect">
+            <a:avLst/>
+          </a:prstGeom>
+          <a:solidFill>
+            <a:srgbClr val="ECF7E4"/>
           </a:solidFill>
           <a:ln>
             <a:solidFill>
@@ -7475,14 +8091,14 @@
       </p:sp>
       <p:sp>
         <p:nvSpPr>
-          <p:cNvPr id="45" name="Rectangle 44"/>
+          <p:cNvPr id="44" name="Rectangle 43"/>
           <p:cNvSpPr/>
           <p:nvPr/>
         </p:nvSpPr>
         <p:spPr>
           <a:xfrm>
-            <a:off x="5029200" y="3895344"/>
-            <a:ext cx="91440" cy="91440"/>
+            <a:off x="4992624" y="3200400"/>
+            <a:ext cx="64008" cy="64008"/>
           </a:xfrm>
           <a:prstGeom prst="rect">
             <a:avLst/>
@@ -7520,14 +8136,14 @@
       </p:sp>
       <p:sp>
         <p:nvSpPr>
-          <p:cNvPr id="46" name="TextBox 45"/>
+          <p:cNvPr id="45" name="TextBox 44"/>
           <p:cNvSpPr txBox="1"/>
           <p:nvPr/>
         </p:nvSpPr>
         <p:spPr>
           <a:xfrm>
-            <a:off x="5175504" y="3730751"/>
-            <a:ext cx="1755648" cy="475488"/>
+            <a:off x="5148072" y="3072384"/>
+            <a:ext cx="1609344" cy="365760"/>
           </a:xfrm>
           <a:prstGeom prst="rect">
             <a:avLst/>
@@ -7535,38 +8151,40 @@
           <a:noFill/>
         </p:spPr>
         <p:txBody>
-          <a:bodyPr wrap="square"/>
+          <a:bodyPr wrap="square">
+            <a:normAutofit/>
+          </a:bodyPr>
           <a:lstStyle/>
           <a:p>
             <a:pPr algn="l"/>
             <a:r>
               <a:rPr sz="800" b="0" i="0">
                 <a:solidFill>
-                  <a:srgbClr val="1E293B"/>
+                  <a:srgbClr val="1B2A38"/>
                 </a:solidFill>
                 <a:latin typeface="Poppins"/>
               </a:rPr>
-              <a:t>Protect the referral flow you already depend on</a:t>
-            </a:r>
-          </a:p>
-        </p:txBody>
-      </p:sp>
-      <p:sp>
-        <p:nvSpPr>
-          <p:cNvPr id="47" name="Rectangle 46"/>
+              <a:t>Add after-hours coverage so no call goes unanswered</a:t>
+            </a:r>
+          </a:p>
+        </p:txBody>
+      </p:sp>
+      <p:sp>
+        <p:nvSpPr>
+          <p:cNvPr id="46" name="Rectangle 45"/>
           <p:cNvSpPr/>
           <p:nvPr/>
         </p:nvSpPr>
         <p:spPr>
           <a:xfrm>
-            <a:off x="4937760" y="4279392"/>
-            <a:ext cx="2048256" cy="566928"/>
-          </a:xfrm>
-          <a:prstGeom prst="rect">
-            <a:avLst/>
-          </a:prstGeom>
-          <a:solidFill>
-            <a:srgbClr val="EDF9E6"/>
+            <a:off x="4846320" y="3520440"/>
+            <a:ext cx="2066543" cy="512064"/>
+          </a:xfrm>
+          <a:prstGeom prst="rect">
+            <a:avLst/>
+          </a:prstGeom>
+          <a:solidFill>
+            <a:srgbClr val="FFFFFF"/>
           </a:solidFill>
           <a:ln>
             <a:solidFill>
@@ -7598,14 +8216,14 @@
       </p:sp>
       <p:sp>
         <p:nvSpPr>
-          <p:cNvPr id="48" name="Rectangle 47"/>
+          <p:cNvPr id="47" name="Rectangle 46"/>
           <p:cNvSpPr/>
           <p:nvPr/>
         </p:nvSpPr>
         <p:spPr>
           <a:xfrm>
-            <a:off x="5029200" y="4498848"/>
-            <a:ext cx="91440" cy="91440"/>
+            <a:off x="4992624" y="3749039"/>
+            <a:ext cx="64008" cy="64008"/>
           </a:xfrm>
           <a:prstGeom prst="rect">
             <a:avLst/>
@@ -7643,14 +8261,14 @@
       </p:sp>
       <p:sp>
         <p:nvSpPr>
-          <p:cNvPr id="49" name="TextBox 48"/>
+          <p:cNvPr id="48" name="TextBox 47"/>
           <p:cNvSpPr txBox="1"/>
           <p:nvPr/>
         </p:nvSpPr>
         <p:spPr>
           <a:xfrm>
-            <a:off x="5175504" y="4334255"/>
-            <a:ext cx="1755648" cy="475488"/>
+            <a:off x="5148072" y="3621024"/>
+            <a:ext cx="1609344" cy="365760"/>
           </a:xfrm>
           <a:prstGeom prst="rect">
             <a:avLst/>
@@ -7658,38 +8276,40 @@
           <a:noFill/>
         </p:spPr>
         <p:txBody>
-          <a:bodyPr wrap="square"/>
+          <a:bodyPr wrap="square">
+            <a:normAutofit/>
+          </a:bodyPr>
           <a:lstStyle/>
           <a:p>
             <a:pPr algn="l"/>
             <a:r>
               <a:rPr sz="800" b="0" i="0">
                 <a:solidFill>
-                  <a:srgbClr val="1E293B"/>
+                  <a:srgbClr val="1B2A38"/>
                 </a:solidFill>
                 <a:latin typeface="Poppins"/>
               </a:rPr>
-              <a:t>Match every call to what the Gaydos name promises</a:t>
-            </a:r>
-          </a:p>
-        </p:txBody>
-      </p:sp>
-      <p:sp>
-        <p:nvSpPr>
-          <p:cNvPr id="50" name="Rectangle 49"/>
+              <a:t>Protect the referral flow you already depend on</a:t>
+            </a:r>
+          </a:p>
+        </p:txBody>
+      </p:sp>
+      <p:sp>
+        <p:nvSpPr>
+          <p:cNvPr id="49" name="Rectangle 48"/>
           <p:cNvSpPr/>
           <p:nvPr/>
         </p:nvSpPr>
         <p:spPr>
           <a:xfrm>
-            <a:off x="7059168" y="1024128"/>
-            <a:ext cx="2048256" cy="841248"/>
-          </a:xfrm>
-          <a:prstGeom prst="rect">
-            <a:avLst/>
-          </a:prstGeom>
-          <a:solidFill>
-            <a:srgbClr val="003A59"/>
+            <a:off x="4846320" y="4078224"/>
+            <a:ext cx="2066543" cy="512064"/>
+          </a:xfrm>
+          <a:prstGeom prst="rect">
+            <a:avLst/>
+          </a:prstGeom>
+          <a:solidFill>
+            <a:srgbClr val="ECF7E4"/>
           </a:solidFill>
           <a:ln>
             <a:solidFill>
@@ -7721,119 +8341,20 @@
       </p:sp>
       <p:sp>
         <p:nvSpPr>
-          <p:cNvPr id="51" name="TextBox 50"/>
-          <p:cNvSpPr txBox="1"/>
-          <p:nvPr/>
-        </p:nvSpPr>
-        <p:spPr>
-          <a:xfrm>
-            <a:off x="7168896" y="1042415"/>
-            <a:ext cx="457200" cy="274320"/>
-          </a:xfrm>
-          <a:prstGeom prst="rect">
-            <a:avLst/>
-          </a:prstGeom>
-          <a:noFill/>
-        </p:spPr>
-        <p:txBody>
-          <a:bodyPr wrap="square"/>
-          <a:lstStyle/>
-          <a:p>
-            <a:pPr algn="l"/>
-            <a:r>
-              <a:rPr sz="1000" b="1" i="0">
-                <a:solidFill>
-                  <a:srgbClr val="FFFFFF"/>
-                </a:solidFill>
-                <a:latin typeface="Poppins"/>
-              </a:rPr>
-              <a:t>03</a:t>
-            </a:r>
-          </a:p>
-        </p:txBody>
-      </p:sp>
-      <p:sp>
-        <p:nvSpPr>
-          <p:cNvPr id="52" name="TextBox 51"/>
-          <p:cNvSpPr txBox="1"/>
-          <p:nvPr/>
-        </p:nvSpPr>
-        <p:spPr>
-          <a:xfrm>
-            <a:off x="7168896" y="1316736"/>
-            <a:ext cx="1865376" cy="256032"/>
-          </a:xfrm>
-          <a:prstGeom prst="rect">
-            <a:avLst/>
-          </a:prstGeom>
-          <a:noFill/>
-        </p:spPr>
-        <p:txBody>
-          <a:bodyPr wrap="square"/>
-          <a:lstStyle/>
-          <a:p>
-            <a:pPr algn="l"/>
-            <a:r>
-              <a:rPr sz="1200" b="1" i="0">
-                <a:solidFill>
-                  <a:srgbClr val="FFFFFF"/>
-                </a:solidFill>
-                <a:latin typeface="Poppins"/>
-              </a:rPr>
-              <a:t>Install Team &amp;</a:t>
-            </a:r>
-          </a:p>
-        </p:txBody>
-      </p:sp>
-      <p:sp>
-        <p:nvSpPr>
-          <p:cNvPr id="53" name="TextBox 52"/>
-          <p:cNvSpPr txBox="1"/>
-          <p:nvPr/>
-        </p:nvSpPr>
-        <p:spPr>
-          <a:xfrm>
-            <a:off x="7168896" y="1554480"/>
-            <a:ext cx="1865376" cy="256032"/>
-          </a:xfrm>
-          <a:prstGeom prst="rect">
-            <a:avLst/>
-          </a:prstGeom>
-          <a:noFill/>
-        </p:spPr>
-        <p:txBody>
-          <a:bodyPr wrap="square"/>
-          <a:lstStyle/>
-          <a:p>
-            <a:pPr algn="l"/>
-            <a:r>
-              <a:rPr sz="1200" b="1" i="0">
-                <a:solidFill>
-                  <a:srgbClr val="FFFFFF"/>
-                </a:solidFill>
-                <a:latin typeface="Poppins"/>
-              </a:rPr>
-              <a:t>Profit Systems</a:t>
-            </a:r>
-          </a:p>
-        </p:txBody>
-      </p:sp>
-      <p:sp>
-        <p:nvSpPr>
-          <p:cNvPr id="54" name="Rectangle 53"/>
+          <p:cNvPr id="50" name="Rectangle 49"/>
           <p:cNvSpPr/>
           <p:nvPr/>
         </p:nvSpPr>
         <p:spPr>
           <a:xfrm>
-            <a:off x="7059168" y="1865376"/>
-            <a:ext cx="2048256" cy="566928"/>
-          </a:xfrm>
-          <a:prstGeom prst="rect">
-            <a:avLst/>
-          </a:prstGeom>
-          <a:solidFill>
-            <a:srgbClr val="E0E7EB"/>
+            <a:off x="4992624" y="4306824"/>
+            <a:ext cx="64008" cy="64008"/>
+          </a:xfrm>
+          <a:prstGeom prst="rect">
+            <a:avLst/>
+          </a:prstGeom>
+          <a:solidFill>
+            <a:srgbClr val="69CD2B"/>
           </a:solidFill>
           <a:ln>
             <a:solidFill>
@@ -7865,14 +8386,49 @@
       </p:sp>
       <p:sp>
         <p:nvSpPr>
-          <p:cNvPr id="55" name="Rectangle 54"/>
+          <p:cNvPr id="51" name="TextBox 50"/>
+          <p:cNvSpPr txBox="1"/>
+          <p:nvPr/>
+        </p:nvSpPr>
+        <p:spPr>
+          <a:xfrm>
+            <a:off x="5148072" y="4178808"/>
+            <a:ext cx="1609344" cy="365760"/>
+          </a:xfrm>
+          <a:prstGeom prst="rect">
+            <a:avLst/>
+          </a:prstGeom>
+          <a:noFill/>
+        </p:spPr>
+        <p:txBody>
+          <a:bodyPr wrap="square">
+            <a:normAutofit/>
+          </a:bodyPr>
+          <a:lstStyle/>
+          <a:p>
+            <a:pPr algn="l"/>
+            <a:r>
+              <a:rPr sz="800" b="0" i="0">
+                <a:solidFill>
+                  <a:srgbClr val="1B2A38"/>
+                </a:solidFill>
+                <a:latin typeface="Poppins"/>
+              </a:rPr>
+              <a:t>Match every call to what the Gaydos name promises</a:t>
+            </a:r>
+          </a:p>
+        </p:txBody>
+      </p:sp>
+      <p:sp>
+        <p:nvSpPr>
+          <p:cNvPr id="52" name="Rectangle 51"/>
           <p:cNvSpPr/>
           <p:nvPr/>
         </p:nvSpPr>
         <p:spPr>
           <a:xfrm>
-            <a:off x="7150607" y="2084832"/>
-            <a:ext cx="91440" cy="91440"/>
+            <a:off x="7022592" y="1005840"/>
+            <a:ext cx="2066543" cy="841248"/>
           </a:xfrm>
           <a:prstGeom prst="rect">
             <a:avLst/>
@@ -7910,14 +8466,14 @@
       </p:sp>
       <p:sp>
         <p:nvSpPr>
-          <p:cNvPr id="56" name="TextBox 55"/>
+          <p:cNvPr id="53" name="TextBox 52"/>
           <p:cNvSpPr txBox="1"/>
           <p:nvPr/>
         </p:nvSpPr>
         <p:spPr>
           <a:xfrm>
-            <a:off x="7296912" y="1920240"/>
-            <a:ext cx="1755648" cy="475488"/>
+            <a:off x="7187183" y="1097280"/>
+            <a:ext cx="457200" cy="219456"/>
           </a:xfrm>
           <a:prstGeom prst="rect">
             <a:avLst/>
@@ -7925,38 +8481,110 @@
           <a:noFill/>
         </p:spPr>
         <p:txBody>
-          <a:bodyPr wrap="square"/>
+          <a:bodyPr wrap="square">
+            <a:normAutofit/>
+          </a:bodyPr>
           <a:lstStyle/>
           <a:p>
             <a:pPr algn="l"/>
             <a:r>
-              <a:rPr sz="800" b="0" i="0">
-                <a:solidFill>
-                  <a:srgbClr val="1E293B"/>
+              <a:rPr sz="1300" b="1" i="0">
+                <a:solidFill>
+                  <a:srgbClr val="FFFFFF"/>
                 </a:solidFill>
                 <a:latin typeface="Poppins"/>
               </a:rPr>
-              <a:t>Formalize the leadership your office manager carries</a:t>
-            </a:r>
-          </a:p>
-        </p:txBody>
-      </p:sp>
-      <p:sp>
-        <p:nvSpPr>
-          <p:cNvPr id="57" name="Rectangle 56"/>
+              <a:t>03</a:t>
+            </a:r>
+          </a:p>
+        </p:txBody>
+      </p:sp>
+      <p:sp>
+        <p:nvSpPr>
+          <p:cNvPr id="54" name="TextBox 53"/>
+          <p:cNvSpPr txBox="1"/>
+          <p:nvPr/>
+        </p:nvSpPr>
+        <p:spPr>
+          <a:xfrm>
+            <a:off x="7187183" y="1316736"/>
+            <a:ext cx="1828800" cy="219456"/>
+          </a:xfrm>
+          <a:prstGeom prst="rect">
+            <a:avLst/>
+          </a:prstGeom>
+          <a:noFill/>
+        </p:spPr>
+        <p:txBody>
+          <a:bodyPr wrap="square">
+            <a:normAutofit/>
+          </a:bodyPr>
+          <a:lstStyle/>
+          <a:p>
+            <a:pPr algn="l"/>
+            <a:r>
+              <a:rPr sz="1400" b="1" i="0">
+                <a:solidFill>
+                  <a:srgbClr val="FFFFFF"/>
+                </a:solidFill>
+                <a:latin typeface="Poppins"/>
+              </a:rPr>
+              <a:t>Install Team &amp;</a:t>
+            </a:r>
+          </a:p>
+        </p:txBody>
+      </p:sp>
+      <p:sp>
+        <p:nvSpPr>
+          <p:cNvPr id="55" name="TextBox 54"/>
+          <p:cNvSpPr txBox="1"/>
+          <p:nvPr/>
+        </p:nvSpPr>
+        <p:spPr>
+          <a:xfrm>
+            <a:off x="7187183" y="1536192"/>
+            <a:ext cx="1828800" cy="219456"/>
+          </a:xfrm>
+          <a:prstGeom prst="rect">
+            <a:avLst/>
+          </a:prstGeom>
+          <a:noFill/>
+        </p:spPr>
+        <p:txBody>
+          <a:bodyPr wrap="square">
+            <a:normAutofit/>
+          </a:bodyPr>
+          <a:lstStyle/>
+          <a:p>
+            <a:pPr algn="l"/>
+            <a:r>
+              <a:rPr sz="1400" b="1" i="0">
+                <a:solidFill>
+                  <a:srgbClr val="FFFFFF"/>
+                </a:solidFill>
+                <a:latin typeface="Poppins"/>
+              </a:rPr>
+              <a:t>Profit Systems</a:t>
+            </a:r>
+          </a:p>
+        </p:txBody>
+      </p:sp>
+      <p:sp>
+        <p:nvSpPr>
+          <p:cNvPr id="56" name="Rectangle 55"/>
           <p:cNvSpPr/>
           <p:nvPr/>
         </p:nvSpPr>
         <p:spPr>
           <a:xfrm>
-            <a:off x="7059168" y="2468880"/>
-            <a:ext cx="2048256" cy="566928"/>
-          </a:xfrm>
-          <a:prstGeom prst="rect">
-            <a:avLst/>
-          </a:prstGeom>
-          <a:solidFill>
-            <a:srgbClr val="FFFFFF"/>
+            <a:off x="7022592" y="1865376"/>
+            <a:ext cx="2066543" cy="512064"/>
+          </a:xfrm>
+          <a:prstGeom prst="rect">
+            <a:avLst/>
+          </a:prstGeom>
+          <a:solidFill>
+            <a:srgbClr val="EEF2F5"/>
           </a:solidFill>
           <a:ln>
             <a:solidFill>
@@ -7988,14 +8616,14 @@
       </p:sp>
       <p:sp>
         <p:nvSpPr>
-          <p:cNvPr id="58" name="Rectangle 57"/>
+          <p:cNvPr id="57" name="Rectangle 56"/>
           <p:cNvSpPr/>
           <p:nvPr/>
         </p:nvSpPr>
         <p:spPr>
           <a:xfrm>
-            <a:off x="7150607" y="2688336"/>
-            <a:ext cx="91440" cy="91440"/>
+            <a:off x="7168896" y="2093976"/>
+            <a:ext cx="64008" cy="64008"/>
           </a:xfrm>
           <a:prstGeom prst="rect">
             <a:avLst/>
@@ -8033,14 +8661,14 @@
       </p:sp>
       <p:sp>
         <p:nvSpPr>
-          <p:cNvPr id="59" name="TextBox 58"/>
+          <p:cNvPr id="58" name="TextBox 57"/>
           <p:cNvSpPr txBox="1"/>
           <p:nvPr/>
         </p:nvSpPr>
         <p:spPr>
           <a:xfrm>
-            <a:off x="7296912" y="2523744"/>
-            <a:ext cx="1755648" cy="475488"/>
+            <a:off x="7324344" y="1965960"/>
+            <a:ext cx="1609344" cy="365760"/>
           </a:xfrm>
           <a:prstGeom prst="rect">
             <a:avLst/>
@@ -8048,38 +8676,40 @@
           <a:noFill/>
         </p:spPr>
         <p:txBody>
-          <a:bodyPr wrap="square"/>
+          <a:bodyPr wrap="square">
+            <a:normAutofit/>
+          </a:bodyPr>
           <a:lstStyle/>
           <a:p>
             <a:pPr algn="l"/>
             <a:r>
               <a:rPr sz="800" b="0" i="0">
                 <a:solidFill>
-                  <a:srgbClr val="1E293B"/>
+                  <a:srgbClr val="1B2A38"/>
                 </a:solidFill>
                 <a:latin typeface="Poppins"/>
               </a:rPr>
-              <a:t>Build financial visibility by practice area</a:t>
-            </a:r>
-          </a:p>
-        </p:txBody>
-      </p:sp>
-      <p:sp>
-        <p:nvSpPr>
-          <p:cNvPr id="60" name="Rectangle 59"/>
+              <a:t>Formalize the leadership your office manager carries</a:t>
+            </a:r>
+          </a:p>
+        </p:txBody>
+      </p:sp>
+      <p:sp>
+        <p:nvSpPr>
+          <p:cNvPr id="59" name="Rectangle 58"/>
           <p:cNvSpPr/>
           <p:nvPr/>
         </p:nvSpPr>
         <p:spPr>
           <a:xfrm>
-            <a:off x="7059168" y="3072384"/>
-            <a:ext cx="2048256" cy="566928"/>
-          </a:xfrm>
-          <a:prstGeom prst="rect">
-            <a:avLst/>
-          </a:prstGeom>
-          <a:solidFill>
-            <a:srgbClr val="E0E7EB"/>
+            <a:off x="7022592" y="2423160"/>
+            <a:ext cx="2066543" cy="512064"/>
+          </a:xfrm>
+          <a:prstGeom prst="rect">
+            <a:avLst/>
+          </a:prstGeom>
+          <a:solidFill>
+            <a:srgbClr val="FFFFFF"/>
           </a:solidFill>
           <a:ln>
             <a:solidFill>
@@ -8111,14 +8741,14 @@
       </p:sp>
       <p:sp>
         <p:nvSpPr>
-          <p:cNvPr id="61" name="Rectangle 60"/>
+          <p:cNvPr id="60" name="Rectangle 59"/>
           <p:cNvSpPr/>
           <p:nvPr/>
         </p:nvSpPr>
         <p:spPr>
           <a:xfrm>
-            <a:off x="7150607" y="3291839"/>
-            <a:ext cx="91440" cy="91440"/>
+            <a:off x="7168896" y="2651760"/>
+            <a:ext cx="64008" cy="64008"/>
           </a:xfrm>
           <a:prstGeom prst="rect">
             <a:avLst/>
@@ -8156,14 +8786,14 @@
       </p:sp>
       <p:sp>
         <p:nvSpPr>
-          <p:cNvPr id="62" name="TextBox 61"/>
+          <p:cNvPr id="61" name="TextBox 60"/>
           <p:cNvSpPr txBox="1"/>
           <p:nvPr/>
         </p:nvSpPr>
         <p:spPr>
           <a:xfrm>
-            <a:off x="7296912" y="3127248"/>
-            <a:ext cx="1755648" cy="475488"/>
+            <a:off x="7324344" y="2523744"/>
+            <a:ext cx="1609344" cy="365760"/>
           </a:xfrm>
           <a:prstGeom prst="rect">
             <a:avLst/>
@@ -8171,38 +8801,40 @@
           <a:noFill/>
         </p:spPr>
         <p:txBody>
-          <a:bodyPr wrap="square"/>
+          <a:bodyPr wrap="square">
+            <a:normAutofit/>
+          </a:bodyPr>
           <a:lstStyle/>
           <a:p>
             <a:pPr algn="l"/>
             <a:r>
               <a:rPr sz="800" b="0" i="0">
                 <a:solidFill>
-                  <a:srgbClr val="1E293B"/>
+                  <a:srgbClr val="1B2A38"/>
                 </a:solidFill>
                 <a:latin typeface="Poppins"/>
               </a:rPr>
-              <a:t>Kick off Elite Coach to build that leadership structure</a:t>
-            </a:r>
-          </a:p>
-        </p:txBody>
-      </p:sp>
-      <p:sp>
-        <p:nvSpPr>
-          <p:cNvPr id="63" name="Rectangle 62"/>
+              <a:t>Build financial visibility by practice area</a:t>
+            </a:r>
+          </a:p>
+        </p:txBody>
+      </p:sp>
+      <p:sp>
+        <p:nvSpPr>
+          <p:cNvPr id="62" name="Rectangle 61"/>
           <p:cNvSpPr/>
           <p:nvPr/>
         </p:nvSpPr>
         <p:spPr>
           <a:xfrm>
-            <a:off x="7059168" y="3675887"/>
-            <a:ext cx="2048256" cy="566928"/>
-          </a:xfrm>
-          <a:prstGeom prst="rect">
-            <a:avLst/>
-          </a:prstGeom>
-          <a:solidFill>
-            <a:srgbClr val="FFFFFF"/>
+            <a:off x="7022592" y="2971800"/>
+            <a:ext cx="2066543" cy="512064"/>
+          </a:xfrm>
+          <a:prstGeom prst="rect">
+            <a:avLst/>
+          </a:prstGeom>
+          <a:solidFill>
+            <a:srgbClr val="EEF2F5"/>
           </a:solidFill>
           <a:ln>
             <a:solidFill>
@@ -8234,14 +8866,14 @@
       </p:sp>
       <p:sp>
         <p:nvSpPr>
-          <p:cNvPr id="64" name="Rectangle 63"/>
+          <p:cNvPr id="63" name="Rectangle 62"/>
           <p:cNvSpPr/>
           <p:nvPr/>
         </p:nvSpPr>
         <p:spPr>
           <a:xfrm>
-            <a:off x="7150607" y="3895344"/>
-            <a:ext cx="91440" cy="91440"/>
+            <a:off x="7168896" y="3200400"/>
+            <a:ext cx="64008" cy="64008"/>
           </a:xfrm>
           <a:prstGeom prst="rect">
             <a:avLst/>
@@ -8279,14 +8911,14 @@
       </p:sp>
       <p:sp>
         <p:nvSpPr>
-          <p:cNvPr id="65" name="TextBox 64"/>
+          <p:cNvPr id="64" name="TextBox 63"/>
           <p:cNvSpPr txBox="1"/>
           <p:nvPr/>
         </p:nvSpPr>
         <p:spPr>
           <a:xfrm>
-            <a:off x="7296912" y="3730751"/>
-            <a:ext cx="1755648" cy="475488"/>
+            <a:off x="7324344" y="3072384"/>
+            <a:ext cx="1609344" cy="365760"/>
           </a:xfrm>
           <a:prstGeom prst="rect">
             <a:avLst/>
@@ -8294,38 +8926,40 @@
           <a:noFill/>
         </p:spPr>
         <p:txBody>
-          <a:bodyPr wrap="square"/>
+          <a:bodyPr wrap="square">
+            <a:normAutofit/>
+          </a:bodyPr>
           <a:lstStyle/>
           <a:p>
             <a:pPr algn="l"/>
             <a:r>
               <a:rPr sz="800" b="0" i="0">
                 <a:solidFill>
-                  <a:srgbClr val="1E293B"/>
+                  <a:srgbClr val="1B2A38"/>
                 </a:solidFill>
                 <a:latin typeface="Poppins"/>
               </a:rPr>
-              <a:t>Create a structure that runs without you in the room</a:t>
-            </a:r>
-          </a:p>
-        </p:txBody>
-      </p:sp>
-      <p:sp>
-        <p:nvSpPr>
-          <p:cNvPr id="66" name="Rectangle 65"/>
+              <a:t>Kick off Elite Coach to build that leadership structure</a:t>
+            </a:r>
+          </a:p>
+        </p:txBody>
+      </p:sp>
+      <p:sp>
+        <p:nvSpPr>
+          <p:cNvPr id="65" name="Rectangle 64"/>
           <p:cNvSpPr/>
           <p:nvPr/>
         </p:nvSpPr>
         <p:spPr>
           <a:xfrm>
-            <a:off x="7059168" y="4279392"/>
-            <a:ext cx="2048256" cy="566928"/>
-          </a:xfrm>
-          <a:prstGeom prst="rect">
-            <a:avLst/>
-          </a:prstGeom>
-          <a:solidFill>
-            <a:srgbClr val="E0E7EB"/>
+            <a:off x="7022592" y="3520440"/>
+            <a:ext cx="2066543" cy="512064"/>
+          </a:xfrm>
+          <a:prstGeom prst="rect">
+            <a:avLst/>
+          </a:prstGeom>
+          <a:solidFill>
+            <a:srgbClr val="FFFFFF"/>
           </a:solidFill>
           <a:ln>
             <a:solidFill>
@@ -8357,14 +8991,14 @@
       </p:sp>
       <p:sp>
         <p:nvSpPr>
-          <p:cNvPr id="67" name="Rectangle 66"/>
+          <p:cNvPr id="66" name="Rectangle 65"/>
           <p:cNvSpPr/>
           <p:nvPr/>
         </p:nvSpPr>
         <p:spPr>
           <a:xfrm>
-            <a:off x="7150607" y="4498848"/>
-            <a:ext cx="91440" cy="91440"/>
+            <a:off x="7168896" y="3749039"/>
+            <a:ext cx="64008" cy="64008"/>
           </a:xfrm>
           <a:prstGeom prst="rect">
             <a:avLst/>
@@ -8402,14 +9036,14 @@
       </p:sp>
       <p:sp>
         <p:nvSpPr>
-          <p:cNvPr id="68" name="TextBox 67"/>
+          <p:cNvPr id="67" name="TextBox 66"/>
           <p:cNvSpPr txBox="1"/>
           <p:nvPr/>
         </p:nvSpPr>
         <p:spPr>
           <a:xfrm>
-            <a:off x="7296912" y="4334255"/>
-            <a:ext cx="1755648" cy="475488"/>
+            <a:off x="7324344" y="3621024"/>
+            <a:ext cx="1609344" cy="365760"/>
           </a:xfrm>
           <a:prstGeom prst="rect">
             <a:avLst/>
@@ -8417,38 +9051,40 @@
           <a:noFill/>
         </p:spPr>
         <p:txBody>
-          <a:bodyPr wrap="square"/>
+          <a:bodyPr wrap="square">
+            <a:normAutofit/>
+          </a:bodyPr>
           <a:lstStyle/>
           <a:p>
             <a:pPr algn="l"/>
             <a:r>
               <a:rPr sz="800" b="0" i="0">
                 <a:solidFill>
-                  <a:srgbClr val="1E293B"/>
+                  <a:srgbClr val="1B2A38"/>
                 </a:solidFill>
                 <a:latin typeface="Poppins"/>
               </a:rPr>
-              <a:t>Build a firm your daughter could one day step into</a:t>
-            </a:r>
-          </a:p>
-        </p:txBody>
-      </p:sp>
-      <p:sp>
-        <p:nvSpPr>
-          <p:cNvPr id="69" name="Rectangle 68"/>
+              <a:t>Create a structure that runs without you in the room</a:t>
+            </a:r>
+          </a:p>
+        </p:txBody>
+      </p:sp>
+      <p:sp>
+        <p:nvSpPr>
+          <p:cNvPr id="68" name="Rectangle 67"/>
           <p:cNvSpPr/>
           <p:nvPr/>
         </p:nvSpPr>
         <p:spPr>
           <a:xfrm>
-            <a:off x="0" y="4828032"/>
-            <a:ext cx="9144000" cy="320040"/>
-          </a:xfrm>
-          <a:prstGeom prst="rect">
-            <a:avLst/>
-          </a:prstGeom>
-          <a:solidFill>
-            <a:srgbClr val="003A59"/>
+            <a:off x="7022592" y="4078224"/>
+            <a:ext cx="2066543" cy="512064"/>
+          </a:xfrm>
+          <a:prstGeom prst="rect">
+            <a:avLst/>
+          </a:prstGeom>
+          <a:solidFill>
+            <a:srgbClr val="EEF2F5"/>
           </a:solidFill>
           <a:ln>
             <a:solidFill>
@@ -8478,9 +9114,134 @@
           </a:p>
         </p:txBody>
       </p:sp>
+      <p:sp>
+        <p:nvSpPr>
+          <p:cNvPr id="69" name="Rectangle 68"/>
+          <p:cNvSpPr/>
+          <p:nvPr/>
+        </p:nvSpPr>
+        <p:spPr>
+          <a:xfrm>
+            <a:off x="7168896" y="4306824"/>
+            <a:ext cx="64008" cy="64008"/>
+          </a:xfrm>
+          <a:prstGeom prst="rect">
+            <a:avLst/>
+          </a:prstGeom>
+          <a:solidFill>
+            <a:srgbClr val="003A59"/>
+          </a:solidFill>
+          <a:ln>
+            <a:solidFill>
+              <a:srgbClr val="FFFFFF"/>
+            </a:solidFill>
+          </a:ln>
+        </p:spPr>
+        <p:style>
+          <a:lnRef idx="1">
+            <a:schemeClr val="accent1"/>
+          </a:lnRef>
+          <a:fillRef idx="3">
+            <a:schemeClr val="accent1"/>
+          </a:fillRef>
+          <a:effectRef idx="2">
+            <a:schemeClr val="accent1"/>
+          </a:effectRef>
+          <a:fontRef idx="minor">
+            <a:schemeClr val="lt1"/>
+          </a:fontRef>
+        </p:style>
+        <p:txBody>
+          <a:bodyPr rtlCol="0" anchor="ctr"/>
+          <a:lstStyle/>
+          <a:p>
+            <a:pPr algn="ctr"/>
+          </a:p>
+        </p:txBody>
+      </p:sp>
+      <p:sp>
+        <p:nvSpPr>
+          <p:cNvPr id="70" name="TextBox 69"/>
+          <p:cNvSpPr txBox="1"/>
+          <p:nvPr/>
+        </p:nvSpPr>
+        <p:spPr>
+          <a:xfrm>
+            <a:off x="7324344" y="4178808"/>
+            <a:ext cx="1609344" cy="365760"/>
+          </a:xfrm>
+          <a:prstGeom prst="rect">
+            <a:avLst/>
+          </a:prstGeom>
+          <a:noFill/>
+        </p:spPr>
+        <p:txBody>
+          <a:bodyPr wrap="square">
+            <a:normAutofit/>
+          </a:bodyPr>
+          <a:lstStyle/>
+          <a:p>
+            <a:pPr algn="l"/>
+            <a:r>
+              <a:rPr sz="800" b="0" i="0">
+                <a:solidFill>
+                  <a:srgbClr val="1B2A38"/>
+                </a:solidFill>
+                <a:latin typeface="Poppins"/>
+              </a:rPr>
+              <a:t>Build a firm your daughter could one day step into</a:t>
+            </a:r>
+          </a:p>
+        </p:txBody>
+      </p:sp>
+      <p:sp>
+        <p:nvSpPr>
+          <p:cNvPr id="71" name="Rectangle 70"/>
+          <p:cNvSpPr/>
+          <p:nvPr/>
+        </p:nvSpPr>
+        <p:spPr>
+          <a:xfrm>
+            <a:off x="0" y="4818888"/>
+            <a:ext cx="9144000" cy="320040"/>
+          </a:xfrm>
+          <a:prstGeom prst="rect">
+            <a:avLst/>
+          </a:prstGeom>
+          <a:solidFill>
+            <a:srgbClr val="003A59"/>
+          </a:solidFill>
+          <a:ln>
+            <a:solidFill>
+              <a:srgbClr val="FFFFFF"/>
+            </a:solidFill>
+          </a:ln>
+        </p:spPr>
+        <p:style>
+          <a:lnRef idx="1">
+            <a:schemeClr val="accent1"/>
+          </a:lnRef>
+          <a:fillRef idx="3">
+            <a:schemeClr val="accent1"/>
+          </a:fillRef>
+          <a:effectRef idx="2">
+            <a:schemeClr val="accent1"/>
+          </a:effectRef>
+          <a:fontRef idx="minor">
+            <a:schemeClr val="lt1"/>
+          </a:fontRef>
+        </p:style>
+        <p:txBody>
+          <a:bodyPr rtlCol="0" anchor="ctr"/>
+          <a:lstStyle/>
+          <a:p>
+            <a:pPr algn="ctr"/>
+          </a:p>
+        </p:txBody>
+      </p:sp>
       <p:pic>
         <p:nvPicPr>
-          <p:cNvPr id="70" name="Picture 69" descr="smb_team_logo.png"/>
+          <p:cNvPr id="72" name="Picture 71" descr="smb_team_logo.png"/>
           <p:cNvPicPr>
             <a:picLocks noChangeAspect="1"/>
           </p:cNvPicPr>
@@ -8494,8 +9255,8 @@
         </p:blipFill>
         <p:spPr>
           <a:xfrm>
-            <a:off x="201168" y="4837176"/>
-            <a:ext cx="1170432" cy="237744"/>
+            <a:off x="274320" y="4873752"/>
+            <a:ext cx="941832" cy="192024"/>
           </a:xfrm>
           <a:prstGeom prst="rect">
             <a:avLst/>
@@ -8504,14 +9265,14 @@
       </p:pic>
       <p:sp>
         <p:nvSpPr>
-          <p:cNvPr id="71" name="TextBox 70"/>
+          <p:cNvPr id="73" name="TextBox 72"/>
           <p:cNvSpPr txBox="1"/>
           <p:nvPr/>
         </p:nvSpPr>
         <p:spPr>
           <a:xfrm>
-            <a:off x="1609344" y="4837176"/>
-            <a:ext cx="5303520" cy="274320"/>
+            <a:off x="1417320" y="4892040"/>
+            <a:ext cx="4937760" cy="182880"/>
           </a:xfrm>
           <a:prstGeom prst="rect">
             <a:avLst/>
@@ -8519,32 +9280,34 @@
           <a:noFill/>
         </p:spPr>
         <p:txBody>
-          <a:bodyPr wrap="square"/>
+          <a:bodyPr wrap="square">
+            <a:normAutofit/>
+          </a:bodyPr>
           <a:lstStyle/>
           <a:p>
             <a:pPr algn="l"/>
             <a:r>
-              <a:rPr sz="800" b="0" i="0">
-                <a:solidFill>
-                  <a:srgbClr val="5A7A9A"/>
+              <a:rPr sz="700" b="0" i="0">
+                <a:solidFill>
+                  <a:srgbClr val="8FB2C6"/>
                 </a:solidFill>
                 <a:latin typeface="Poppins"/>
               </a:rPr>
-              <a:t>CONFIDENTIAL  ·  Prepared by Dan Bryant | SMB Team</a:t>
-            </a:r>
-          </a:p>
-        </p:txBody>
-      </p:sp>
-      <p:sp>
-        <p:nvSpPr>
-          <p:cNvPr id="72" name="TextBox 71"/>
+              <a:t>CONFIDENTIAL  ·  PREPARED BY DAN BRYANT | SMB TEAM</a:t>
+            </a:r>
+          </a:p>
+        </p:txBody>
+      </p:sp>
+      <p:sp>
+        <p:nvSpPr>
+          <p:cNvPr id="74" name="TextBox 73"/>
           <p:cNvSpPr txBox="1"/>
           <p:nvPr/>
         </p:nvSpPr>
         <p:spPr>
           <a:xfrm>
-            <a:off x="8138160" y="4837176"/>
-            <a:ext cx="786384" cy="274320"/>
+            <a:off x="7680960" y="4892040"/>
+            <a:ext cx="1188720" cy="182880"/>
           </a:xfrm>
           <a:prstGeom prst="rect">
             <a:avLst/>
@@ -8552,14 +9315,16 @@
           <a:noFill/>
         </p:spPr>
         <p:txBody>
-          <a:bodyPr wrap="square"/>
+          <a:bodyPr wrap="square">
+            <a:normAutofit/>
+          </a:bodyPr>
           <a:lstStyle/>
           <a:p>
             <a:pPr algn="r"/>
             <a:r>
-              <a:rPr sz="800" b="0" i="0">
-                <a:solidFill>
-                  <a:srgbClr val="5A7A9A"/>
+              <a:rPr sz="700" b="0" i="0">
+                <a:solidFill>
+                  <a:srgbClr val="8FB2C6"/>
                 </a:solidFill>
                 <a:latin typeface="Poppins"/>
               </a:rPr>
@@ -8595,13 +9360,13 @@
         <p:spPr>
           <a:xfrm>
             <a:off x="0" y="0"/>
-            <a:ext cx="9144000" cy="960120"/>
-          </a:xfrm>
-          <a:prstGeom prst="rect">
-            <a:avLst/>
-          </a:prstGeom>
-          <a:solidFill>
-            <a:srgbClr val="003A59"/>
+            <a:ext cx="9144000" cy="5143500"/>
+          </a:xfrm>
+          <a:prstGeom prst="rect">
+            <a:avLst/>
+          </a:prstGeom>
+          <a:solidFill>
+            <a:srgbClr val="F4F7F9"/>
           </a:solidFill>
           <a:ln>
             <a:solidFill>
@@ -8633,86 +9398,20 @@
       </p:sp>
       <p:sp>
         <p:nvSpPr>
-          <p:cNvPr id="3" name="TextBox 2"/>
-          <p:cNvSpPr txBox="1"/>
-          <p:nvPr/>
-        </p:nvSpPr>
-        <p:spPr>
-          <a:xfrm>
-            <a:off x="292608" y="91440"/>
-            <a:ext cx="8595360" cy="201168"/>
-          </a:xfrm>
-          <a:prstGeom prst="rect">
-            <a:avLst/>
-          </a:prstGeom>
-          <a:noFill/>
-        </p:spPr>
-        <p:txBody>
-          <a:bodyPr wrap="square"/>
-          <a:lstStyle/>
-          <a:p>
-            <a:pPr algn="l"/>
-            <a:r>
-              <a:rPr sz="800" b="1" i="0">
-                <a:solidFill>
-                  <a:srgbClr val="69CD2B"/>
-                </a:solidFill>
-                <a:latin typeface="Poppins"/>
-              </a:rPr>
-              <a:t>LAW FIRM GROWTH AUDIT  ·  GAYDOS LAW, P.C.</a:t>
-            </a:r>
-          </a:p>
-        </p:txBody>
-      </p:sp>
-      <p:sp>
-        <p:nvSpPr>
-          <p:cNvPr id="4" name="TextBox 3"/>
-          <p:cNvSpPr txBox="1"/>
-          <p:nvPr/>
-        </p:nvSpPr>
-        <p:spPr>
-          <a:xfrm>
-            <a:off x="292608" y="310896"/>
-            <a:ext cx="8595360" cy="548640"/>
-          </a:xfrm>
-          <a:prstGeom prst="rect">
-            <a:avLst/>
-          </a:prstGeom>
-          <a:noFill/>
-        </p:spPr>
-        <p:txBody>
-          <a:bodyPr wrap="square"/>
-          <a:lstStyle/>
-          <a:p>
-            <a:pPr algn="l"/>
-            <a:r>
-              <a:rPr sz="2200" b="1" i="0">
-                <a:solidFill>
-                  <a:srgbClr val="FFFFFF"/>
-                </a:solidFill>
-                <a:latin typeface="Poppins"/>
-              </a:rPr>
-              <a:t>Your Investment &amp; What Happens Next</a:t>
-            </a:r>
-          </a:p>
-        </p:txBody>
-      </p:sp>
-      <p:sp>
-        <p:nvSpPr>
-          <p:cNvPr id="5" name="Rectangle 4"/>
+          <p:cNvPr id="3" name="Rectangle 2"/>
           <p:cNvSpPr/>
           <p:nvPr/>
         </p:nvSpPr>
         <p:spPr>
           <a:xfrm>
-            <a:off x="201168" y="1024128"/>
-            <a:ext cx="4133087" cy="1024128"/>
-          </a:xfrm>
-          <a:prstGeom prst="rect">
-            <a:avLst/>
-          </a:prstGeom>
-          <a:solidFill>
-            <a:srgbClr val="FFFFFF"/>
+            <a:off x="0" y="0"/>
+            <a:ext cx="9144000" cy="841248"/>
+          </a:xfrm>
+          <a:prstGeom prst="rect">
+            <a:avLst/>
+          </a:prstGeom>
+          <a:solidFill>
+            <a:srgbClr val="003A59"/>
           </a:solidFill>
           <a:ln>
             <a:solidFill>
@@ -8744,20 +9443,20 @@
       </p:sp>
       <p:sp>
         <p:nvSpPr>
-          <p:cNvPr id="6" name="Rectangle 5"/>
+          <p:cNvPr id="4" name="Rectangle 3"/>
           <p:cNvSpPr/>
           <p:nvPr/>
         </p:nvSpPr>
         <p:spPr>
           <a:xfrm>
-            <a:off x="201168" y="1024128"/>
-            <a:ext cx="182880" cy="1024128"/>
-          </a:xfrm>
-          <a:prstGeom prst="rect">
-            <a:avLst/>
-          </a:prstGeom>
-          <a:solidFill>
-            <a:srgbClr val="0091C9"/>
+            <a:off x="0" y="841248"/>
+            <a:ext cx="9144000" cy="36576"/>
+          </a:xfrm>
+          <a:prstGeom prst="rect">
+            <a:avLst/>
+          </a:prstGeom>
+          <a:solidFill>
+            <a:srgbClr val="69CD2B"/>
           </a:solidFill>
           <a:ln>
             <a:solidFill>
@@ -8789,14 +9488,14 @@
       </p:sp>
       <p:sp>
         <p:nvSpPr>
-          <p:cNvPr id="7" name="TextBox 6"/>
+          <p:cNvPr id="5" name="TextBox 4"/>
           <p:cNvSpPr txBox="1"/>
           <p:nvPr/>
         </p:nvSpPr>
         <p:spPr>
           <a:xfrm>
-            <a:off x="475488" y="1115568"/>
-            <a:ext cx="3803904" cy="201168"/>
+            <a:off x="292608" y="182880"/>
+            <a:ext cx="5486400" cy="164592"/>
           </a:xfrm>
           <a:prstGeom prst="rect">
             <a:avLst/>
@@ -8804,32 +9503,34 @@
           <a:noFill/>
         </p:spPr>
         <p:txBody>
-          <a:bodyPr wrap="square"/>
+          <a:bodyPr wrap="square">
+            <a:normAutofit/>
+          </a:bodyPr>
           <a:lstStyle/>
           <a:p>
             <a:pPr algn="l"/>
             <a:r>
-              <a:rPr sz="800" b="1" i="0">
-                <a:solidFill>
-                  <a:srgbClr val="0091C9"/>
+              <a:rPr sz="750" b="1" i="0">
+                <a:solidFill>
+                  <a:srgbClr val="69CD2B"/>
                 </a:solidFill>
                 <a:latin typeface="Poppins"/>
               </a:rPr>
-              <a:t>FULL SERVICE MARKETING — STARTER</a:t>
-            </a:r>
-          </a:p>
-        </p:txBody>
-      </p:sp>
-      <p:sp>
-        <p:nvSpPr>
-          <p:cNvPr id="8" name="TextBox 7"/>
+              <a:t>LAW FIRM GROWTH AUDIT  ·  GAYDOS LAW, P.C.</a:t>
+            </a:r>
+          </a:p>
+        </p:txBody>
+      </p:sp>
+      <p:sp>
+        <p:nvSpPr>
+          <p:cNvPr id="6" name="TextBox 5"/>
           <p:cNvSpPr txBox="1"/>
           <p:nvPr/>
         </p:nvSpPr>
         <p:spPr>
           <a:xfrm>
-            <a:off x="475488" y="1298448"/>
-            <a:ext cx="1828800" cy="438912"/>
+            <a:off x="292608" y="365760"/>
+            <a:ext cx="8503920" cy="365760"/>
           </a:xfrm>
           <a:prstGeom prst="rect">
             <a:avLst/>
@@ -8837,104 +9538,40 @@
           <a:noFill/>
         </p:spPr>
         <p:txBody>
-          <a:bodyPr wrap="square"/>
+          <a:bodyPr wrap="square">
+            <a:normAutofit/>
+          </a:bodyPr>
           <a:lstStyle/>
           <a:p>
             <a:pPr algn="l"/>
             <a:r>
-              <a:rPr sz="3200" b="1" i="0">
-                <a:solidFill>
-                  <a:srgbClr val="003A59"/>
+              <a:rPr sz="2000" b="1" i="0">
+                <a:solidFill>
+                  <a:srgbClr val="FFFFFF"/>
                 </a:solidFill>
                 <a:latin typeface="Poppins"/>
               </a:rPr>
-              <a:t>$4,997</a:t>
-            </a:r>
-          </a:p>
-        </p:txBody>
-      </p:sp>
-      <p:sp>
-        <p:nvSpPr>
-          <p:cNvPr id="9" name="TextBox 8"/>
-          <p:cNvSpPr txBox="1"/>
-          <p:nvPr/>
-        </p:nvSpPr>
-        <p:spPr>
-          <a:xfrm>
-            <a:off x="1865376" y="1408176"/>
-            <a:ext cx="420624" cy="256032"/>
-          </a:xfrm>
-          <a:prstGeom prst="rect">
-            <a:avLst/>
-          </a:prstGeom>
-          <a:noFill/>
-        </p:spPr>
-        <p:txBody>
-          <a:bodyPr wrap="square"/>
-          <a:lstStyle/>
-          <a:p>
-            <a:pPr algn="l"/>
-            <a:r>
-              <a:rPr sz="1100" b="0" i="0">
-                <a:solidFill>
-                  <a:srgbClr val="64748B"/>
-                </a:solidFill>
-                <a:latin typeface="Poppins"/>
-              </a:rPr>
-              <a:t>/mo</a:t>
-            </a:r>
-          </a:p>
-        </p:txBody>
-      </p:sp>
-      <p:sp>
-        <p:nvSpPr>
-          <p:cNvPr id="10" name="TextBox 9"/>
-          <p:cNvSpPr txBox="1"/>
-          <p:nvPr/>
-        </p:nvSpPr>
-        <p:spPr>
-          <a:xfrm>
-            <a:off x="2322576" y="1426464"/>
-            <a:ext cx="914400" cy="237744"/>
-          </a:xfrm>
-          <a:prstGeom prst="rect">
-            <a:avLst/>
-          </a:prstGeom>
-          <a:noFill/>
-        </p:spPr>
-        <p:txBody>
-          <a:bodyPr wrap="square"/>
-          <a:lstStyle/>
-          <a:p>
-            <a:pPr algn="l"/>
-            <a:r>
-              <a:rPr sz="1100" b="0" i="0">
-                <a:solidFill>
-                  <a:srgbClr val="334155"/>
-                </a:solidFill>
-                <a:latin typeface="Poppins"/>
-              </a:rPr>
-              <a:t>$5,697/mo</a:t>
-            </a:r>
-          </a:p>
-        </p:txBody>
-      </p:sp>
-      <p:sp>
-        <p:nvSpPr>
-          <p:cNvPr id="11" name="Rectangle 10"/>
+              <a:t>Your Investment &amp; What Happens Next</a:t>
+            </a:r>
+          </a:p>
+        </p:txBody>
+      </p:sp>
+      <p:sp>
+        <p:nvSpPr>
+          <p:cNvPr id="7" name="Rectangle 6"/>
           <p:cNvSpPr/>
           <p:nvPr/>
         </p:nvSpPr>
         <p:spPr>
           <a:xfrm>
-            <a:off x="2322576" y="1527048"/>
-            <a:ext cx="804672" cy="9144"/>
-          </a:xfrm>
-          <a:prstGeom prst="rect">
-            <a:avLst/>
-          </a:prstGeom>
-          <a:solidFill>
-            <a:srgbClr val="334155"/>
+            <a:off x="274320" y="1005840"/>
+            <a:ext cx="4041648" cy="960120"/>
+          </a:xfrm>
+          <a:prstGeom prst="rect">
+            <a:avLst/>
+          </a:prstGeom>
+          <a:solidFill>
+            <a:srgbClr val="FFFFFF"/>
           </a:solidFill>
           <a:ln>
             <a:solidFill>
@@ -8966,53 +9603,20 @@
       </p:sp>
       <p:sp>
         <p:nvSpPr>
-          <p:cNvPr id="12" name="TextBox 11"/>
-          <p:cNvSpPr txBox="1"/>
-          <p:nvPr/>
-        </p:nvSpPr>
-        <p:spPr>
-          <a:xfrm>
-            <a:off x="475488" y="1792224"/>
-            <a:ext cx="3803904" cy="201168"/>
-          </a:xfrm>
-          <a:prstGeom prst="rect">
-            <a:avLst/>
-          </a:prstGeom>
-          <a:noFill/>
-        </p:spPr>
-        <p:txBody>
-          <a:bodyPr wrap="square"/>
-          <a:lstStyle/>
-          <a:p>
-            <a:pPr algn="l"/>
-            <a:r>
-              <a:rPr sz="800" b="0" i="0">
-                <a:solidFill>
-                  <a:srgbClr val="64748B"/>
-                </a:solidFill>
-                <a:latin typeface="Poppins"/>
-              </a:rPr>
-              <a:t>LSA for Family Law &amp; Probate · SEO fixes · Landing pages</a:t>
-            </a:r>
-          </a:p>
-        </p:txBody>
-      </p:sp>
-      <p:sp>
-        <p:nvSpPr>
-          <p:cNvPr id="13" name="Rectangle 12"/>
+          <p:cNvPr id="8" name="Rectangle 7"/>
           <p:cNvSpPr/>
           <p:nvPr/>
         </p:nvSpPr>
         <p:spPr>
           <a:xfrm>
-            <a:off x="201168" y="2139696"/>
-            <a:ext cx="4133087" cy="1024128"/>
-          </a:xfrm>
-          <a:prstGeom prst="rect">
-            <a:avLst/>
-          </a:prstGeom>
-          <a:solidFill>
-            <a:srgbClr val="FFFFFF"/>
+            <a:off x="274320" y="1005840"/>
+            <a:ext cx="36576" cy="960120"/>
+          </a:xfrm>
+          <a:prstGeom prst="rect">
+            <a:avLst/>
+          </a:prstGeom>
+          <a:solidFill>
+            <a:srgbClr val="0091C9"/>
           </a:solidFill>
           <a:ln>
             <a:solidFill>
@@ -9044,20 +9648,195 @@
       </p:sp>
       <p:sp>
         <p:nvSpPr>
+          <p:cNvPr id="9" name="TextBox 8"/>
+          <p:cNvSpPr txBox="1"/>
+          <p:nvPr/>
+        </p:nvSpPr>
+        <p:spPr>
+          <a:xfrm>
+            <a:off x="512064" y="1143000"/>
+            <a:ext cx="3584448" cy="146304"/>
+          </a:xfrm>
+          <a:prstGeom prst="rect">
+            <a:avLst/>
+          </a:prstGeom>
+          <a:noFill/>
+        </p:spPr>
+        <p:txBody>
+          <a:bodyPr wrap="square">
+            <a:normAutofit/>
+          </a:bodyPr>
+          <a:lstStyle/>
+          <a:p>
+            <a:pPr algn="l"/>
+            <a:r>
+              <a:rPr sz="750" b="1" i="0">
+                <a:solidFill>
+                  <a:srgbClr val="0091C9"/>
+                </a:solidFill>
+                <a:latin typeface="Poppins"/>
+              </a:rPr>
+              <a:t>FULL SERVICE MARKETING — STARTER</a:t>
+            </a:r>
+          </a:p>
+        </p:txBody>
+      </p:sp>
+      <p:sp>
+        <p:nvSpPr>
+          <p:cNvPr id="10" name="TextBox 9"/>
+          <p:cNvSpPr txBox="1"/>
+          <p:nvPr/>
+        </p:nvSpPr>
+        <p:spPr>
+          <a:xfrm>
+            <a:off x="512064" y="1335024"/>
+            <a:ext cx="1737360" cy="402336"/>
+          </a:xfrm>
+          <a:prstGeom prst="rect">
+            <a:avLst/>
+          </a:prstGeom>
+          <a:noFill/>
+        </p:spPr>
+        <p:txBody>
+          <a:bodyPr wrap="square">
+            <a:normAutofit/>
+          </a:bodyPr>
+          <a:lstStyle/>
+          <a:p>
+            <a:pPr algn="l"/>
+            <a:r>
+              <a:rPr sz="3000" b="1" i="0">
+                <a:solidFill>
+                  <a:srgbClr val="003A59"/>
+                </a:solidFill>
+                <a:latin typeface="Poppins"/>
+              </a:rPr>
+              <a:t>$4,997</a:t>
+            </a:r>
+          </a:p>
+        </p:txBody>
+      </p:sp>
+      <p:sp>
+        <p:nvSpPr>
+          <p:cNvPr id="11" name="TextBox 10"/>
+          <p:cNvSpPr txBox="1"/>
+          <p:nvPr/>
+        </p:nvSpPr>
+        <p:spPr>
+          <a:xfrm>
+            <a:off x="1920240" y="1536192"/>
+            <a:ext cx="365760" cy="182880"/>
+          </a:xfrm>
+          <a:prstGeom prst="rect">
+            <a:avLst/>
+          </a:prstGeom>
+          <a:noFill/>
+        </p:spPr>
+        <p:txBody>
+          <a:bodyPr wrap="square">
+            <a:normAutofit/>
+          </a:bodyPr>
+          <a:lstStyle/>
+          <a:p>
+            <a:pPr algn="l"/>
+            <a:r>
+              <a:rPr sz="1000" b="0" i="0">
+                <a:solidFill>
+                  <a:srgbClr val="7C8D9B"/>
+                </a:solidFill>
+                <a:latin typeface="Poppins"/>
+              </a:rPr>
+              <a:t>/mo</a:t>
+            </a:r>
+          </a:p>
+        </p:txBody>
+      </p:sp>
+      <p:sp>
+        <p:nvSpPr>
+          <p:cNvPr id="12" name="TextBox 11"/>
+          <p:cNvSpPr txBox="1"/>
+          <p:nvPr/>
+        </p:nvSpPr>
+        <p:spPr>
+          <a:xfrm>
+            <a:off x="2926080" y="1536192"/>
+            <a:ext cx="1005840" cy="182880"/>
+          </a:xfrm>
+          <a:prstGeom prst="rect">
+            <a:avLst/>
+          </a:prstGeom>
+          <a:noFill/>
+        </p:spPr>
+        <p:txBody>
+          <a:bodyPr wrap="square">
+            <a:normAutofit/>
+          </a:bodyPr>
+          <a:lstStyle/>
+          <a:p>
+            <a:pPr algn="r"/>
+            <a:r>
+              <a:rPr sz="1000" b="0" i="0">
+                <a:solidFill>
+                  <a:srgbClr val="7C8D9B"/>
+                </a:solidFill>
+                <a:latin typeface="Poppins"/>
+              </a:rPr>
+              <a:t>$5,697/mo</a:t>
+            </a:r>
+          </a:p>
+        </p:txBody>
+      </p:sp>
+      <p:sp>
+        <p:nvSpPr>
+          <p:cNvPr id="13" name="TextBox 12"/>
+          <p:cNvSpPr txBox="1"/>
+          <p:nvPr/>
+        </p:nvSpPr>
+        <p:spPr>
+          <a:xfrm>
+            <a:off x="512064" y="1783080"/>
+            <a:ext cx="3584448" cy="164592"/>
+          </a:xfrm>
+          <a:prstGeom prst="rect">
+            <a:avLst/>
+          </a:prstGeom>
+          <a:noFill/>
+        </p:spPr>
+        <p:txBody>
+          <a:bodyPr wrap="square">
+            <a:normAutofit/>
+          </a:bodyPr>
+          <a:lstStyle/>
+          <a:p>
+            <a:pPr algn="l"/>
+            <a:r>
+              <a:rPr sz="850" b="0" i="0">
+                <a:solidFill>
+                  <a:srgbClr val="7C8D9B"/>
+                </a:solidFill>
+                <a:latin typeface="Poppins"/>
+              </a:rPr>
+              <a:t>LSA for Family Law &amp; Probate · SEO fixes · Landing pages</a:t>
+            </a:r>
+          </a:p>
+        </p:txBody>
+      </p:sp>
+      <p:sp>
+        <p:nvSpPr>
           <p:cNvPr id="14" name="Rectangle 13"/>
           <p:cNvSpPr/>
           <p:nvPr/>
         </p:nvSpPr>
         <p:spPr>
           <a:xfrm>
-            <a:off x="201168" y="2139696"/>
-            <a:ext cx="182880" cy="1024128"/>
-          </a:xfrm>
-          <a:prstGeom prst="rect">
-            <a:avLst/>
-          </a:prstGeom>
-          <a:solidFill>
-            <a:srgbClr val="69CD2B"/>
+            <a:off x="274320" y="2057400"/>
+            <a:ext cx="4041648" cy="960120"/>
+          </a:xfrm>
+          <a:prstGeom prst="rect">
+            <a:avLst/>
+          </a:prstGeom>
+          <a:solidFill>
+            <a:srgbClr val="FFFFFF"/>
           </a:solidFill>
           <a:ln>
             <a:solidFill>
@@ -9089,152 +9868,20 @@
       </p:sp>
       <p:sp>
         <p:nvSpPr>
-          <p:cNvPr id="15" name="TextBox 14"/>
-          <p:cNvSpPr txBox="1"/>
-          <p:nvPr/>
-        </p:nvSpPr>
-        <p:spPr>
-          <a:xfrm>
-            <a:off x="475488" y="2231136"/>
-            <a:ext cx="3803904" cy="201168"/>
-          </a:xfrm>
-          <a:prstGeom prst="rect">
-            <a:avLst/>
-          </a:prstGeom>
-          <a:noFill/>
-        </p:spPr>
-        <p:txBody>
-          <a:bodyPr wrap="square"/>
-          <a:lstStyle/>
-          <a:p>
-            <a:pPr algn="l"/>
-            <a:r>
-              <a:rPr sz="800" b="1" i="0">
-                <a:solidFill>
-                  <a:srgbClr val="69CD2B"/>
-                </a:solidFill>
-                <a:latin typeface="Poppins"/>
-              </a:rPr>
-              <a:t>ELITE COACH</a:t>
-            </a:r>
-          </a:p>
-        </p:txBody>
-      </p:sp>
-      <p:sp>
-        <p:nvSpPr>
-          <p:cNvPr id="16" name="TextBox 15"/>
-          <p:cNvSpPr txBox="1"/>
-          <p:nvPr/>
-        </p:nvSpPr>
-        <p:spPr>
-          <a:xfrm>
-            <a:off x="475488" y="2414015"/>
-            <a:ext cx="1828800" cy="438912"/>
-          </a:xfrm>
-          <a:prstGeom prst="rect">
-            <a:avLst/>
-          </a:prstGeom>
-          <a:noFill/>
-        </p:spPr>
-        <p:txBody>
-          <a:bodyPr wrap="square"/>
-          <a:lstStyle/>
-          <a:p>
-            <a:pPr algn="l"/>
-            <a:r>
-              <a:rPr sz="3200" b="1" i="0">
-                <a:solidFill>
-                  <a:srgbClr val="003A59"/>
-                </a:solidFill>
-                <a:latin typeface="Poppins"/>
-              </a:rPr>
-              <a:t>$2,600</a:t>
-            </a:r>
-          </a:p>
-        </p:txBody>
-      </p:sp>
-      <p:sp>
-        <p:nvSpPr>
-          <p:cNvPr id="17" name="TextBox 16"/>
-          <p:cNvSpPr txBox="1"/>
-          <p:nvPr/>
-        </p:nvSpPr>
-        <p:spPr>
-          <a:xfrm>
-            <a:off x="1865376" y="2523744"/>
-            <a:ext cx="420624" cy="256032"/>
-          </a:xfrm>
-          <a:prstGeom prst="rect">
-            <a:avLst/>
-          </a:prstGeom>
-          <a:noFill/>
-        </p:spPr>
-        <p:txBody>
-          <a:bodyPr wrap="square"/>
-          <a:lstStyle/>
-          <a:p>
-            <a:pPr algn="l"/>
-            <a:r>
-              <a:rPr sz="1100" b="0" i="0">
-                <a:solidFill>
-                  <a:srgbClr val="64748B"/>
-                </a:solidFill>
-                <a:latin typeface="Poppins"/>
-              </a:rPr>
-              <a:t>/mo</a:t>
-            </a:r>
-          </a:p>
-        </p:txBody>
-      </p:sp>
-      <p:sp>
-        <p:nvSpPr>
-          <p:cNvPr id="18" name="TextBox 17"/>
-          <p:cNvSpPr txBox="1"/>
-          <p:nvPr/>
-        </p:nvSpPr>
-        <p:spPr>
-          <a:xfrm>
-            <a:off x="2322576" y="2542032"/>
-            <a:ext cx="914400" cy="237744"/>
-          </a:xfrm>
-          <a:prstGeom prst="rect">
-            <a:avLst/>
-          </a:prstGeom>
-          <a:noFill/>
-        </p:spPr>
-        <p:txBody>
-          <a:bodyPr wrap="square"/>
-          <a:lstStyle/>
-          <a:p>
-            <a:pPr algn="l"/>
-            <a:r>
-              <a:rPr sz="1100" b="0" i="0">
-                <a:solidFill>
-                  <a:srgbClr val="334155"/>
-                </a:solidFill>
-                <a:latin typeface="Poppins"/>
-              </a:rPr>
-              <a:t>$3,497/mo</a:t>
-            </a:r>
-          </a:p>
-        </p:txBody>
-      </p:sp>
-      <p:sp>
-        <p:nvSpPr>
-          <p:cNvPr id="19" name="Rectangle 18"/>
+          <p:cNvPr id="15" name="Rectangle 14"/>
           <p:cNvSpPr/>
           <p:nvPr/>
         </p:nvSpPr>
         <p:spPr>
           <a:xfrm>
-            <a:off x="2322576" y="2642615"/>
-            <a:ext cx="804672" cy="9144"/>
-          </a:xfrm>
-          <a:prstGeom prst="rect">
-            <a:avLst/>
-          </a:prstGeom>
-          <a:solidFill>
-            <a:srgbClr val="334155"/>
+            <a:off x="274320" y="2057400"/>
+            <a:ext cx="36576" cy="960120"/>
+          </a:xfrm>
+          <a:prstGeom prst="rect">
+            <a:avLst/>
+          </a:prstGeom>
+          <a:solidFill>
+            <a:srgbClr val="69CD2B"/>
           </a:solidFill>
           <a:ln>
             <a:solidFill>
@@ -9266,14 +9913,154 @@
       </p:sp>
       <p:sp>
         <p:nvSpPr>
+          <p:cNvPr id="16" name="TextBox 15"/>
+          <p:cNvSpPr txBox="1"/>
+          <p:nvPr/>
+        </p:nvSpPr>
+        <p:spPr>
+          <a:xfrm>
+            <a:off x="512064" y="2194560"/>
+            <a:ext cx="3584448" cy="146304"/>
+          </a:xfrm>
+          <a:prstGeom prst="rect">
+            <a:avLst/>
+          </a:prstGeom>
+          <a:noFill/>
+        </p:spPr>
+        <p:txBody>
+          <a:bodyPr wrap="square">
+            <a:normAutofit/>
+          </a:bodyPr>
+          <a:lstStyle/>
+          <a:p>
+            <a:pPr algn="l"/>
+            <a:r>
+              <a:rPr sz="750" b="1" i="0">
+                <a:solidFill>
+                  <a:srgbClr val="69CD2B"/>
+                </a:solidFill>
+                <a:latin typeface="Poppins"/>
+              </a:rPr>
+              <a:t>ELITE COACH</a:t>
+            </a:r>
+          </a:p>
+        </p:txBody>
+      </p:sp>
+      <p:sp>
+        <p:nvSpPr>
+          <p:cNvPr id="17" name="TextBox 16"/>
+          <p:cNvSpPr txBox="1"/>
+          <p:nvPr/>
+        </p:nvSpPr>
+        <p:spPr>
+          <a:xfrm>
+            <a:off x="512064" y="2386584"/>
+            <a:ext cx="1737360" cy="402336"/>
+          </a:xfrm>
+          <a:prstGeom prst="rect">
+            <a:avLst/>
+          </a:prstGeom>
+          <a:noFill/>
+        </p:spPr>
+        <p:txBody>
+          <a:bodyPr wrap="square">
+            <a:normAutofit/>
+          </a:bodyPr>
+          <a:lstStyle/>
+          <a:p>
+            <a:pPr algn="l"/>
+            <a:r>
+              <a:rPr sz="3000" b="1" i="0">
+                <a:solidFill>
+                  <a:srgbClr val="003A59"/>
+                </a:solidFill>
+                <a:latin typeface="Poppins"/>
+              </a:rPr>
+              <a:t>$2,600</a:t>
+            </a:r>
+          </a:p>
+        </p:txBody>
+      </p:sp>
+      <p:sp>
+        <p:nvSpPr>
+          <p:cNvPr id="18" name="TextBox 17"/>
+          <p:cNvSpPr txBox="1"/>
+          <p:nvPr/>
+        </p:nvSpPr>
+        <p:spPr>
+          <a:xfrm>
+            <a:off x="1920240" y="2587752"/>
+            <a:ext cx="365760" cy="182880"/>
+          </a:xfrm>
+          <a:prstGeom prst="rect">
+            <a:avLst/>
+          </a:prstGeom>
+          <a:noFill/>
+        </p:spPr>
+        <p:txBody>
+          <a:bodyPr wrap="square">
+            <a:normAutofit/>
+          </a:bodyPr>
+          <a:lstStyle/>
+          <a:p>
+            <a:pPr algn="l"/>
+            <a:r>
+              <a:rPr sz="1000" b="0" i="0">
+                <a:solidFill>
+                  <a:srgbClr val="7C8D9B"/>
+                </a:solidFill>
+                <a:latin typeface="Poppins"/>
+              </a:rPr>
+              <a:t>/mo</a:t>
+            </a:r>
+          </a:p>
+        </p:txBody>
+      </p:sp>
+      <p:sp>
+        <p:nvSpPr>
+          <p:cNvPr id="19" name="TextBox 18"/>
+          <p:cNvSpPr txBox="1"/>
+          <p:nvPr/>
+        </p:nvSpPr>
+        <p:spPr>
+          <a:xfrm>
+            <a:off x="2926080" y="2587752"/>
+            <a:ext cx="1005840" cy="182880"/>
+          </a:xfrm>
+          <a:prstGeom prst="rect">
+            <a:avLst/>
+          </a:prstGeom>
+          <a:noFill/>
+        </p:spPr>
+        <p:txBody>
+          <a:bodyPr wrap="square">
+            <a:normAutofit/>
+          </a:bodyPr>
+          <a:lstStyle/>
+          <a:p>
+            <a:pPr algn="r"/>
+            <a:r>
+              <a:rPr sz="1000" b="0" i="0">
+                <a:solidFill>
+                  <a:srgbClr val="7C8D9B"/>
+                </a:solidFill>
+                <a:latin typeface="Poppins"/>
+              </a:rPr>
+              <a:t>$3,497/mo</a:t>
+            </a:r>
+          </a:p>
+        </p:txBody>
+      </p:sp>
+      <p:sp>
+        <p:nvSpPr>
           <p:cNvPr id="20" name="TextBox 19"/>
           <p:cNvSpPr txBox="1"/>
           <p:nvPr/>
         </p:nvSpPr>
         <p:spPr>
           <a:xfrm>
-            <a:off x="475488" y="2907791"/>
-            <a:ext cx="3803904" cy="201168"/>
+            <a:off x="512064" y="2834640"/>
+            <a:ext cx="3584448" cy="164592"/>
           </a:xfrm>
           <a:prstGeom prst="rect">
             <a:avLst/>
@@ -9281,14 +10068,16 @@
           <a:noFill/>
         </p:spPr>
         <p:txBody>
-          <a:bodyPr wrap="square"/>
+          <a:bodyPr wrap="square">
+            <a:normAutofit/>
+          </a:bodyPr>
           <a:lstStyle/>
           <a:p>
             <a:pPr algn="l"/>
             <a:r>
-              <a:rPr sz="800" b="0" i="0">
-                <a:solidFill>
-                  <a:srgbClr val="64748B"/>
+              <a:rPr sz="850" b="0" i="0">
+                <a:solidFill>
+                  <a:srgbClr val="7C8D9B"/>
                 </a:solidFill>
                 <a:latin typeface="Poppins"/>
               </a:rPr>
@@ -9305,8 +10094,8 @@
         </p:nvSpPr>
         <p:spPr>
           <a:xfrm>
-            <a:off x="201168" y="3255264"/>
-            <a:ext cx="4133087" cy="658368"/>
+            <a:off x="274320" y="3108960"/>
+            <a:ext cx="4041648" cy="658368"/>
           </a:xfrm>
           <a:prstGeom prst="rect">
             <a:avLst/>
@@ -9344,119 +10133,20 @@
       </p:sp>
       <p:sp>
         <p:nvSpPr>
-          <p:cNvPr id="22" name="TextBox 21"/>
-          <p:cNvSpPr txBox="1"/>
-          <p:nvPr/>
-        </p:nvSpPr>
-        <p:spPr>
-          <a:xfrm>
-            <a:off x="384048" y="3291840"/>
-            <a:ext cx="1645920" cy="237744"/>
-          </a:xfrm>
-          <a:prstGeom prst="rect">
-            <a:avLst/>
-          </a:prstGeom>
-          <a:noFill/>
-        </p:spPr>
-        <p:txBody>
-          <a:bodyPr wrap="square"/>
-          <a:lstStyle/>
-          <a:p>
-            <a:pPr algn="l"/>
-            <a:r>
-              <a:rPr sz="800" b="1" i="0">
-                <a:solidFill>
-                  <a:srgbClr val="7CA0C0"/>
-                </a:solidFill>
-                <a:latin typeface="Poppins"/>
-              </a:rPr>
-              <a:t>BUNDLE TOTAL</a:t>
-            </a:r>
-          </a:p>
-        </p:txBody>
-      </p:sp>
-      <p:sp>
-        <p:nvSpPr>
-          <p:cNvPr id="23" name="TextBox 22"/>
-          <p:cNvSpPr txBox="1"/>
-          <p:nvPr/>
-        </p:nvSpPr>
-        <p:spPr>
-          <a:xfrm>
-            <a:off x="384048" y="3493008"/>
-            <a:ext cx="2194560" cy="347472"/>
-          </a:xfrm>
-          <a:prstGeom prst="rect">
-            <a:avLst/>
-          </a:prstGeom>
-          <a:noFill/>
-        </p:spPr>
-        <p:txBody>
-          <a:bodyPr wrap="square"/>
-          <a:lstStyle/>
-          <a:p>
-            <a:pPr algn="l"/>
-            <a:r>
-              <a:rPr sz="2200" b="1" i="0">
-                <a:solidFill>
-                  <a:srgbClr val="0091C9"/>
-                </a:solidFill>
-                <a:latin typeface="Poppins"/>
-              </a:rPr>
-              <a:t>$7,597 / mo</a:t>
-            </a:r>
-          </a:p>
-        </p:txBody>
-      </p:sp>
-      <p:sp>
-        <p:nvSpPr>
-          <p:cNvPr id="24" name="TextBox 23"/>
-          <p:cNvSpPr txBox="1"/>
-          <p:nvPr/>
-        </p:nvSpPr>
-        <p:spPr>
-          <a:xfrm>
-            <a:off x="2670048" y="3493008"/>
-            <a:ext cx="1737360" cy="347472"/>
-          </a:xfrm>
-          <a:prstGeom prst="rect">
-            <a:avLst/>
-          </a:prstGeom>
-          <a:noFill/>
-        </p:spPr>
-        <p:txBody>
-          <a:bodyPr wrap="square"/>
-          <a:lstStyle/>
-          <a:p>
-            <a:pPr algn="l"/>
-            <a:r>
-              <a:rPr sz="800" b="0" i="0">
-                <a:solidFill>
-                  <a:srgbClr val="7CA0C0"/>
-                </a:solidFill>
-                <a:latin typeface="Poppins"/>
-              </a:rPr>
-              <a:t>You save $1,597/month by bundling</a:t>
-            </a:r>
-          </a:p>
-        </p:txBody>
-      </p:sp>
-      <p:sp>
-        <p:nvSpPr>
-          <p:cNvPr id="25" name="Rectangle 24"/>
+          <p:cNvPr id="22" name="Rectangle 21"/>
           <p:cNvSpPr/>
           <p:nvPr/>
         </p:nvSpPr>
         <p:spPr>
           <a:xfrm>
-            <a:off x="201168" y="3968496"/>
-            <a:ext cx="4133087" cy="402336"/>
-          </a:xfrm>
-          <a:prstGeom prst="rect">
-            <a:avLst/>
-          </a:prstGeom>
-          <a:solidFill>
-            <a:srgbClr val="EEF2F8"/>
+            <a:off x="274320" y="3108960"/>
+            <a:ext cx="36576" cy="658368"/>
+          </a:xfrm>
+          <a:prstGeom prst="rect">
+            <a:avLst/>
+          </a:prstGeom>
+          <a:solidFill>
+            <a:srgbClr val="69CD2B"/>
           </a:solidFill>
           <a:ln>
             <a:solidFill>
@@ -9488,14 +10178,14 @@
       </p:sp>
       <p:sp>
         <p:nvSpPr>
-          <p:cNvPr id="26" name="TextBox 25"/>
+          <p:cNvPr id="23" name="TextBox 22"/>
           <p:cNvSpPr txBox="1"/>
           <p:nvPr/>
         </p:nvSpPr>
         <p:spPr>
           <a:xfrm>
-            <a:off x="329184" y="3995928"/>
-            <a:ext cx="3931920" cy="347472"/>
+            <a:off x="512064" y="3246120"/>
+            <a:ext cx="1554480" cy="146304"/>
           </a:xfrm>
           <a:prstGeom prst="rect">
             <a:avLst/>
@@ -9503,38 +10193,110 @@
           <a:noFill/>
         </p:spPr>
         <p:txBody>
-          <a:bodyPr wrap="square"/>
+          <a:bodyPr wrap="square">
+            <a:normAutofit/>
+          </a:bodyPr>
           <a:lstStyle/>
           <a:p>
             <a:pPr algn="l"/>
             <a:r>
-              <a:rPr sz="800" b="0" i="0">
-                <a:solidFill>
-                  <a:srgbClr val="64748B"/>
+              <a:rPr sz="750" b="1" i="0">
+                <a:solidFill>
+                  <a:srgbClr val="69CD2B"/>
                 </a:solidFill>
                 <a:latin typeface="Poppins"/>
               </a:rPr>
-              <a:t>+ Recommended ad spend: $3,000–$5,000/mo, ramping to $7,500/mo at month 3</a:t>
-            </a:r>
-          </a:p>
-        </p:txBody>
-      </p:sp>
-      <p:sp>
-        <p:nvSpPr>
-          <p:cNvPr id="27" name="Rectangle 26"/>
+              <a:t>BUNDLE TOTAL</a:t>
+            </a:r>
+          </a:p>
+        </p:txBody>
+      </p:sp>
+      <p:sp>
+        <p:nvSpPr>
+          <p:cNvPr id="24" name="TextBox 23"/>
+          <p:cNvSpPr txBox="1"/>
+          <p:nvPr/>
+        </p:nvSpPr>
+        <p:spPr>
+          <a:xfrm>
+            <a:off x="512064" y="3429000"/>
+            <a:ext cx="2011680" cy="274320"/>
+          </a:xfrm>
+          <a:prstGeom prst="rect">
+            <a:avLst/>
+          </a:prstGeom>
+          <a:noFill/>
+        </p:spPr>
+        <p:txBody>
+          <a:bodyPr wrap="square">
+            <a:normAutofit/>
+          </a:bodyPr>
+          <a:lstStyle/>
+          <a:p>
+            <a:pPr algn="l"/>
+            <a:r>
+              <a:rPr sz="1700" b="1" i="0">
+                <a:solidFill>
+                  <a:srgbClr val="FFFFFF"/>
+                </a:solidFill>
+                <a:latin typeface="Poppins"/>
+              </a:rPr>
+              <a:t>$7,597 / mo</a:t>
+            </a:r>
+          </a:p>
+        </p:txBody>
+      </p:sp>
+      <p:sp>
+        <p:nvSpPr>
+          <p:cNvPr id="25" name="TextBox 24"/>
+          <p:cNvSpPr txBox="1"/>
+          <p:nvPr/>
+        </p:nvSpPr>
+        <p:spPr>
+          <a:xfrm>
+            <a:off x="2651760" y="3493008"/>
+            <a:ext cx="1463040" cy="182880"/>
+          </a:xfrm>
+          <a:prstGeom prst="rect">
+            <a:avLst/>
+          </a:prstGeom>
+          <a:noFill/>
+        </p:spPr>
+        <p:txBody>
+          <a:bodyPr wrap="square">
+            <a:normAutofit/>
+          </a:bodyPr>
+          <a:lstStyle/>
+          <a:p>
+            <a:pPr algn="r"/>
+            <a:r>
+              <a:rPr sz="850" b="0" i="0">
+                <a:solidFill>
+                  <a:srgbClr val="A9D68C"/>
+                </a:solidFill>
+                <a:latin typeface="Poppins"/>
+              </a:rPr>
+              <a:t>Save $1,597/mo by bundling</a:t>
+            </a:r>
+          </a:p>
+        </p:txBody>
+      </p:sp>
+      <p:sp>
+        <p:nvSpPr>
+          <p:cNvPr id="26" name="Rectangle 25"/>
           <p:cNvSpPr/>
           <p:nvPr/>
         </p:nvSpPr>
         <p:spPr>
           <a:xfrm>
-            <a:off x="4535424" y="1024128"/>
-            <a:ext cx="4407408" cy="1316736"/>
-          </a:xfrm>
-          <a:prstGeom prst="rect">
-            <a:avLst/>
-          </a:prstGeom>
-          <a:solidFill>
-            <a:srgbClr val="ECFDF5"/>
+            <a:off x="274320" y="3858768"/>
+            <a:ext cx="4041648" cy="384048"/>
+          </a:xfrm>
+          <a:prstGeom prst="rect">
+            <a:avLst/>
+          </a:prstGeom>
+          <a:solidFill>
+            <a:srgbClr val="EEF2F5"/>
           </a:solidFill>
           <a:ln>
             <a:solidFill>
@@ -9566,14 +10328,14 @@
       </p:sp>
       <p:sp>
         <p:nvSpPr>
-          <p:cNvPr id="28" name="TextBox 27"/>
+          <p:cNvPr id="27" name="TextBox 26"/>
           <p:cNvSpPr txBox="1"/>
           <p:nvPr/>
         </p:nvSpPr>
         <p:spPr>
           <a:xfrm>
-            <a:off x="4700016" y="1078992"/>
-            <a:ext cx="4133087" cy="219456"/>
+            <a:off x="457200" y="3858768"/>
+            <a:ext cx="3675887" cy="384048"/>
           </a:xfrm>
           <a:prstGeom prst="rect">
             <a:avLst/>
@@ -9581,104 +10343,40 @@
           <a:noFill/>
         </p:spPr>
         <p:txBody>
-          <a:bodyPr wrap="square"/>
+          <a:bodyPr wrap="square">
+            <a:normAutofit/>
+          </a:bodyPr>
           <a:lstStyle/>
           <a:p>
             <a:pPr algn="l"/>
             <a:r>
-              <a:rPr sz="800" b="1" i="0">
-                <a:solidFill>
-                  <a:srgbClr val="065F46"/>
+              <a:rPr sz="800" b="0" i="0">
+                <a:solidFill>
+                  <a:srgbClr val="4A5C6B"/>
                 </a:solidFill>
                 <a:latin typeface="Poppins"/>
               </a:rPr>
-              <a:t>PROJECTED RETURN ON AD SPEND</a:t>
-            </a:r>
-          </a:p>
-        </p:txBody>
-      </p:sp>
-      <p:sp>
-        <p:nvSpPr>
-          <p:cNvPr id="29" name="TextBox 28"/>
-          <p:cNvSpPr txBox="1"/>
-          <p:nvPr/>
-        </p:nvSpPr>
-        <p:spPr>
-          <a:xfrm>
-            <a:off x="4700016" y="1335024"/>
-            <a:ext cx="1920240" cy="256032"/>
-          </a:xfrm>
-          <a:prstGeom prst="rect">
-            <a:avLst/>
-          </a:prstGeom>
-          <a:noFill/>
-        </p:spPr>
-        <p:txBody>
-          <a:bodyPr wrap="square"/>
-          <a:lstStyle/>
-          <a:p>
-            <a:pPr algn="l"/>
-            <a:r>
-              <a:rPr sz="900" b="1" i="0">
-                <a:solidFill>
-                  <a:srgbClr val="1E293B"/>
-                </a:solidFill>
-                <a:latin typeface="Poppins"/>
-              </a:rPr>
-              <a:t>Average case value:</a:t>
-            </a:r>
-          </a:p>
-        </p:txBody>
-      </p:sp>
-      <p:sp>
-        <p:nvSpPr>
-          <p:cNvPr id="30" name="TextBox 29"/>
-          <p:cNvSpPr txBox="1"/>
-          <p:nvPr/>
-        </p:nvSpPr>
-        <p:spPr>
-          <a:xfrm>
-            <a:off x="6729984" y="1335024"/>
-            <a:ext cx="2103120" cy="256032"/>
-          </a:xfrm>
-          <a:prstGeom prst="rect">
-            <a:avLst/>
-          </a:prstGeom>
-          <a:noFill/>
-        </p:spPr>
-        <p:txBody>
-          <a:bodyPr wrap="square"/>
-          <a:lstStyle/>
-          <a:p>
-            <a:pPr algn="l"/>
-            <a:r>
-              <a:rPr sz="900" b="0" i="0">
-                <a:solidFill>
-                  <a:srgbClr val="065F46"/>
-                </a:solidFill>
-                <a:latin typeface="Poppins"/>
-              </a:rPr>
-              <a:t>FL $5K · Probate $20K</a:t>
-            </a:r>
-          </a:p>
-        </p:txBody>
-      </p:sp>
-      <p:sp>
-        <p:nvSpPr>
-          <p:cNvPr id="31" name="Rectangle 30"/>
+              <a:t>+ Recommended ad spend: $3,000–$5,000/mo, ramping to $7,500/mo at month 3</a:t>
+            </a:r>
+          </a:p>
+        </p:txBody>
+      </p:sp>
+      <p:sp>
+        <p:nvSpPr>
+          <p:cNvPr id="28" name="Rectangle 27"/>
           <p:cNvSpPr/>
           <p:nvPr/>
         </p:nvSpPr>
         <p:spPr>
           <a:xfrm>
-            <a:off x="4645152" y="1609344"/>
-            <a:ext cx="4187952" cy="310896"/>
-          </a:xfrm>
-          <a:prstGeom prst="rect">
-            <a:avLst/>
-          </a:prstGeom>
-          <a:solidFill>
-            <a:srgbClr val="D1FAE5"/>
+            <a:off x="4572000" y="1005840"/>
+            <a:ext cx="4297680" cy="1298448"/>
+          </a:xfrm>
+          <a:prstGeom prst="rect">
+            <a:avLst/>
+          </a:prstGeom>
+          <a:solidFill>
+            <a:srgbClr val="F0FAF4"/>
           </a:solidFill>
           <a:ln>
             <a:solidFill>
@@ -9710,14 +10408,14 @@
       </p:sp>
       <p:sp>
         <p:nvSpPr>
-          <p:cNvPr id="32" name="TextBox 31"/>
+          <p:cNvPr id="29" name="TextBox 28"/>
           <p:cNvSpPr txBox="1"/>
           <p:nvPr/>
         </p:nvSpPr>
         <p:spPr>
           <a:xfrm>
-            <a:off x="4700016" y="1645920"/>
-            <a:ext cx="1920240" cy="256032"/>
+            <a:off x="4773168" y="1152144"/>
+            <a:ext cx="3895344" cy="146304"/>
           </a:xfrm>
           <a:prstGeom prst="rect">
             <a:avLst/>
@@ -9725,32 +10423,34 @@
           <a:noFill/>
         </p:spPr>
         <p:txBody>
-          <a:bodyPr wrap="square"/>
+          <a:bodyPr wrap="square">
+            <a:normAutofit/>
+          </a:bodyPr>
           <a:lstStyle/>
           <a:p>
             <a:pPr algn="l"/>
             <a:r>
-              <a:rPr sz="900" b="1" i="0">
-                <a:solidFill>
-                  <a:srgbClr val="1E293B"/>
+              <a:rPr sz="750" b="1" i="0">
+                <a:solidFill>
+                  <a:srgbClr val="0B6B4A"/>
                 </a:solidFill>
                 <a:latin typeface="Poppins"/>
               </a:rPr>
-              <a:t>Phase 1 — LSA  (~7 cases/mo):</a:t>
-            </a:r>
-          </a:p>
-        </p:txBody>
-      </p:sp>
-      <p:sp>
-        <p:nvSpPr>
-          <p:cNvPr id="33" name="TextBox 32"/>
+              <a:t>PROJECTED RETURN ON AD SPEND</a:t>
+            </a:r>
+          </a:p>
+        </p:txBody>
+      </p:sp>
+      <p:sp>
+        <p:nvSpPr>
+          <p:cNvPr id="30" name="TextBox 29"/>
           <p:cNvSpPr txBox="1"/>
           <p:nvPr/>
         </p:nvSpPr>
         <p:spPr>
           <a:xfrm>
-            <a:off x="6729984" y="1645920"/>
-            <a:ext cx="2103120" cy="256032"/>
+            <a:off x="4773168" y="1444752"/>
+            <a:ext cx="1783080" cy="164592"/>
           </a:xfrm>
           <a:prstGeom prst="rect">
             <a:avLst/>
@@ -9758,32 +10458,34 @@
           <a:noFill/>
         </p:spPr>
         <p:txBody>
-          <a:bodyPr wrap="square"/>
+          <a:bodyPr wrap="square">
+            <a:normAutofit/>
+          </a:bodyPr>
           <a:lstStyle/>
           <a:p>
             <a:pPr algn="l"/>
             <a:r>
-              <a:rPr sz="900" b="1" i="0">
-                <a:solidFill>
-                  <a:srgbClr val="065F46"/>
+              <a:rPr sz="850" b="1" i="0">
+                <a:solidFill>
+                  <a:srgbClr val="1B2A38"/>
                 </a:solidFill>
                 <a:latin typeface="Poppins"/>
               </a:rPr>
-              <a:t>~$95,000 value · 23.8× return</a:t>
-            </a:r>
-          </a:p>
-        </p:txBody>
-      </p:sp>
-      <p:sp>
-        <p:nvSpPr>
-          <p:cNvPr id="34" name="TextBox 33"/>
+              <a:t>Average case value:</a:t>
+            </a:r>
+          </a:p>
+        </p:txBody>
+      </p:sp>
+      <p:sp>
+        <p:nvSpPr>
+          <p:cNvPr id="31" name="TextBox 30"/>
           <p:cNvSpPr txBox="1"/>
           <p:nvPr/>
         </p:nvSpPr>
         <p:spPr>
           <a:xfrm>
-            <a:off x="4700016" y="1956816"/>
-            <a:ext cx="1920240" cy="256032"/>
+            <a:off x="6629400" y="1444752"/>
+            <a:ext cx="2103120" cy="164592"/>
           </a:xfrm>
           <a:prstGeom prst="rect">
             <a:avLst/>
@@ -9791,104 +10493,40 @@
           <a:noFill/>
         </p:spPr>
         <p:txBody>
-          <a:bodyPr wrap="square"/>
+          <a:bodyPr wrap="square">
+            <a:normAutofit/>
+          </a:bodyPr>
           <a:lstStyle/>
           <a:p>
             <a:pPr algn="l"/>
             <a:r>
-              <a:rPr sz="900" b="1" i="0">
-                <a:solidFill>
-                  <a:srgbClr val="1E293B"/>
+              <a:rPr sz="850" b="0" i="0">
+                <a:solidFill>
+                  <a:srgbClr val="0B6B4A"/>
                 </a:solidFill>
                 <a:latin typeface="Poppins"/>
               </a:rPr>
-              <a:t>Phase 2 — LSA+PPC  (~13 cases/mo):</a:t>
-            </a:r>
-          </a:p>
-        </p:txBody>
-      </p:sp>
-      <p:sp>
-        <p:nvSpPr>
-          <p:cNvPr id="35" name="TextBox 34"/>
-          <p:cNvSpPr txBox="1"/>
-          <p:nvPr/>
-        </p:nvSpPr>
-        <p:spPr>
-          <a:xfrm>
-            <a:off x="6729984" y="1956816"/>
-            <a:ext cx="2103120" cy="256032"/>
-          </a:xfrm>
-          <a:prstGeom prst="rect">
-            <a:avLst/>
-          </a:prstGeom>
-          <a:noFill/>
-        </p:spPr>
-        <p:txBody>
-          <a:bodyPr wrap="square"/>
-          <a:lstStyle/>
-          <a:p>
-            <a:pPr algn="l"/>
-            <a:r>
-              <a:rPr sz="900" b="1" i="0">
-                <a:solidFill>
-                  <a:srgbClr val="065F46"/>
-                </a:solidFill>
-                <a:latin typeface="Poppins"/>
-              </a:rPr>
-              <a:t>~$170,000 value · 22.7× return</a:t>
-            </a:r>
-          </a:p>
-        </p:txBody>
-      </p:sp>
-      <p:sp>
-        <p:nvSpPr>
-          <p:cNvPr id="36" name="TextBox 35"/>
-          <p:cNvSpPr txBox="1"/>
-          <p:nvPr/>
-        </p:nvSpPr>
-        <p:spPr>
-          <a:xfrm>
-            <a:off x="4535424" y="2468880"/>
-            <a:ext cx="4407408" cy="237744"/>
-          </a:xfrm>
-          <a:prstGeom prst="rect">
-            <a:avLst/>
-          </a:prstGeom>
-          <a:noFill/>
-        </p:spPr>
-        <p:txBody>
-          <a:bodyPr wrap="square"/>
-          <a:lstStyle/>
-          <a:p>
-            <a:pPr algn="l"/>
-            <a:r>
-              <a:rPr sz="800" b="1" i="0">
-                <a:solidFill>
-                  <a:srgbClr val="003A59"/>
-                </a:solidFill>
-                <a:latin typeface="Poppins"/>
-              </a:rPr>
-              <a:t>WHAT HAPPENS IN THE FIRST 90 DAYS</a:t>
-            </a:r>
-          </a:p>
-        </p:txBody>
-      </p:sp>
-      <p:sp>
-        <p:nvSpPr>
-          <p:cNvPr id="37" name="Rectangle 36"/>
+              <a:t>FL $5K · Probate $20K</a:t>
+            </a:r>
+          </a:p>
+        </p:txBody>
+      </p:sp>
+      <p:sp>
+        <p:nvSpPr>
+          <p:cNvPr id="32" name="Rectangle 31"/>
           <p:cNvSpPr/>
           <p:nvPr/>
         </p:nvSpPr>
         <p:spPr>
           <a:xfrm>
-            <a:off x="4590288" y="2724912"/>
-            <a:ext cx="256032" cy="256032"/>
-          </a:xfrm>
-          <a:prstGeom prst="rect">
-            <a:avLst/>
-          </a:prstGeom>
-          <a:solidFill>
-            <a:srgbClr val="003A59"/>
+            <a:off x="4700016" y="1673352"/>
+            <a:ext cx="4041648" cy="256032"/>
+          </a:xfrm>
+          <a:prstGeom prst="rect">
+            <a:avLst/>
+          </a:prstGeom>
+          <a:solidFill>
+            <a:srgbClr val="E2F3E9"/>
           </a:solidFill>
           <a:ln>
             <a:solidFill>
@@ -9920,14 +10558,14 @@
       </p:sp>
       <p:sp>
         <p:nvSpPr>
-          <p:cNvPr id="38" name="TextBox 37"/>
+          <p:cNvPr id="33" name="TextBox 32"/>
           <p:cNvSpPr txBox="1"/>
           <p:nvPr/>
         </p:nvSpPr>
         <p:spPr>
           <a:xfrm>
-            <a:off x="4937760" y="2734056"/>
-            <a:ext cx="804672" cy="256032"/>
+            <a:off x="4773168" y="1737360"/>
+            <a:ext cx="1783080" cy="164592"/>
           </a:xfrm>
           <a:prstGeom prst="rect">
             <a:avLst/>
@@ -9935,32 +10573,34 @@
           <a:noFill/>
         </p:spPr>
         <p:txBody>
-          <a:bodyPr wrap="square"/>
+          <a:bodyPr wrap="square">
+            <a:normAutofit/>
+          </a:bodyPr>
           <a:lstStyle/>
           <a:p>
             <a:pPr algn="l"/>
             <a:r>
-              <a:rPr sz="800" b="1" i="0">
-                <a:solidFill>
-                  <a:srgbClr val="003A59"/>
+              <a:rPr sz="850" b="1" i="0">
+                <a:solidFill>
+                  <a:srgbClr val="1B2A38"/>
                 </a:solidFill>
                 <a:latin typeface="Poppins"/>
               </a:rPr>
-              <a:t>Day 1</a:t>
-            </a:r>
-          </a:p>
-        </p:txBody>
-      </p:sp>
-      <p:sp>
-        <p:nvSpPr>
-          <p:cNvPr id="39" name="TextBox 38"/>
+              <a:t>Phase 1 — LSA  (~7 cases/mo):</a:t>
+            </a:r>
+          </a:p>
+        </p:txBody>
+      </p:sp>
+      <p:sp>
+        <p:nvSpPr>
+          <p:cNvPr id="34" name="TextBox 33"/>
           <p:cNvSpPr txBox="1"/>
           <p:nvPr/>
         </p:nvSpPr>
         <p:spPr>
           <a:xfrm>
-            <a:off x="5815584" y="2734056"/>
-            <a:ext cx="3054096" cy="256032"/>
+            <a:off x="6629400" y="1737360"/>
+            <a:ext cx="2103120" cy="164592"/>
           </a:xfrm>
           <a:prstGeom prst="rect">
             <a:avLst/>
@@ -9968,38 +10608,145 @@
           <a:noFill/>
         </p:spPr>
         <p:txBody>
-          <a:bodyPr wrap="square"/>
+          <a:bodyPr wrap="square">
+            <a:normAutofit/>
+          </a:bodyPr>
           <a:lstStyle/>
           <a:p>
             <a:pPr algn="l"/>
             <a:r>
-              <a:rPr sz="800" b="0" i="0">
-                <a:solidFill>
-                  <a:srgbClr val="1E293B"/>
+              <a:rPr sz="850" b="1" i="0">
+                <a:solidFill>
+                  <a:srgbClr val="0B6B4A"/>
                 </a:solidFill>
                 <a:latin typeface="Poppins"/>
               </a:rPr>
-              <a:t>Launch LSA for Family Law and Probate</a:t>
-            </a:r>
-          </a:p>
-        </p:txBody>
-      </p:sp>
-      <p:sp>
-        <p:nvSpPr>
-          <p:cNvPr id="40" name="Rectangle 39"/>
+              <a:t>~$95,000 value · 23.8× return</a:t>
+            </a:r>
+          </a:p>
+        </p:txBody>
+      </p:sp>
+      <p:sp>
+        <p:nvSpPr>
+          <p:cNvPr id="35" name="TextBox 34"/>
+          <p:cNvSpPr txBox="1"/>
+          <p:nvPr/>
+        </p:nvSpPr>
+        <p:spPr>
+          <a:xfrm>
+            <a:off x="4773168" y="2020824"/>
+            <a:ext cx="1783080" cy="164592"/>
+          </a:xfrm>
+          <a:prstGeom prst="rect">
+            <a:avLst/>
+          </a:prstGeom>
+          <a:noFill/>
+        </p:spPr>
+        <p:txBody>
+          <a:bodyPr wrap="square">
+            <a:normAutofit/>
+          </a:bodyPr>
+          <a:lstStyle/>
+          <a:p>
+            <a:pPr algn="l"/>
+            <a:r>
+              <a:rPr sz="850" b="1" i="0">
+                <a:solidFill>
+                  <a:srgbClr val="1B2A38"/>
+                </a:solidFill>
+                <a:latin typeface="Poppins"/>
+              </a:rPr>
+              <a:t>Phase 2 — LSA+PPC  (~13 cases/mo):</a:t>
+            </a:r>
+          </a:p>
+        </p:txBody>
+      </p:sp>
+      <p:sp>
+        <p:nvSpPr>
+          <p:cNvPr id="36" name="TextBox 35"/>
+          <p:cNvSpPr txBox="1"/>
+          <p:nvPr/>
+        </p:nvSpPr>
+        <p:spPr>
+          <a:xfrm>
+            <a:off x="6629400" y="2020824"/>
+            <a:ext cx="2103120" cy="164592"/>
+          </a:xfrm>
+          <a:prstGeom prst="rect">
+            <a:avLst/>
+          </a:prstGeom>
+          <a:noFill/>
+        </p:spPr>
+        <p:txBody>
+          <a:bodyPr wrap="square">
+            <a:normAutofit/>
+          </a:bodyPr>
+          <a:lstStyle/>
+          <a:p>
+            <a:pPr algn="l"/>
+            <a:r>
+              <a:rPr sz="850" b="1" i="0">
+                <a:solidFill>
+                  <a:srgbClr val="0B6B4A"/>
+                </a:solidFill>
+                <a:latin typeface="Poppins"/>
+              </a:rPr>
+              <a:t>~$170,000 value · 22.7× return</a:t>
+            </a:r>
+          </a:p>
+        </p:txBody>
+      </p:sp>
+      <p:sp>
+        <p:nvSpPr>
+          <p:cNvPr id="37" name="TextBox 36"/>
+          <p:cNvSpPr txBox="1"/>
+          <p:nvPr/>
+        </p:nvSpPr>
+        <p:spPr>
+          <a:xfrm>
+            <a:off x="4572000" y="2487168"/>
+            <a:ext cx="4297680" cy="164592"/>
+          </a:xfrm>
+          <a:prstGeom prst="rect">
+            <a:avLst/>
+          </a:prstGeom>
+          <a:noFill/>
+        </p:spPr>
+        <p:txBody>
+          <a:bodyPr wrap="square">
+            <a:normAutofit/>
+          </a:bodyPr>
+          <a:lstStyle/>
+          <a:p>
+            <a:pPr algn="l"/>
+            <a:r>
+              <a:rPr sz="750" b="1" i="0">
+                <a:solidFill>
+                  <a:srgbClr val="003A59"/>
+                </a:solidFill>
+                <a:latin typeface="Poppins"/>
+              </a:rPr>
+              <a:t>WHAT HAPPENS IN THE FIRST 90 DAYS</a:t>
+            </a:r>
+          </a:p>
+        </p:txBody>
+      </p:sp>
+      <p:sp>
+        <p:nvSpPr>
+          <p:cNvPr id="38" name="Rectangle 37"/>
           <p:cNvSpPr/>
           <p:nvPr/>
         </p:nvSpPr>
         <p:spPr>
           <a:xfrm>
-            <a:off x="4590288" y="3081528"/>
-            <a:ext cx="256032" cy="256032"/>
-          </a:xfrm>
-          <a:prstGeom prst="rect">
-            <a:avLst/>
-          </a:prstGeom>
-          <a:solidFill>
-            <a:srgbClr val="003A59"/>
+            <a:off x="4572000" y="2734056"/>
+            <a:ext cx="4297680" cy="265176"/>
+          </a:xfrm>
+          <a:prstGeom prst="rect">
+            <a:avLst/>
+          </a:prstGeom>
+          <a:solidFill>
+            <a:srgbClr val="EEF2F5"/>
           </a:solidFill>
           <a:ln>
             <a:solidFill>
@@ -10031,86 +10778,20 @@
       </p:sp>
       <p:sp>
         <p:nvSpPr>
-          <p:cNvPr id="41" name="TextBox 40"/>
-          <p:cNvSpPr txBox="1"/>
-          <p:nvPr/>
-        </p:nvSpPr>
-        <p:spPr>
-          <a:xfrm>
-            <a:off x="4937760" y="3090672"/>
-            <a:ext cx="804672" cy="256032"/>
-          </a:xfrm>
-          <a:prstGeom prst="rect">
-            <a:avLst/>
-          </a:prstGeom>
-          <a:noFill/>
-        </p:spPr>
-        <p:txBody>
-          <a:bodyPr wrap="square"/>
-          <a:lstStyle/>
-          <a:p>
-            <a:pPr algn="l"/>
-            <a:r>
-              <a:rPr sz="800" b="1" i="0">
-                <a:solidFill>
-                  <a:srgbClr val="003A59"/>
-                </a:solidFill>
-                <a:latin typeface="Poppins"/>
-              </a:rPr>
-              <a:t>Day 14</a:t>
-            </a:r>
-          </a:p>
-        </p:txBody>
-      </p:sp>
-      <p:sp>
-        <p:nvSpPr>
-          <p:cNvPr id="42" name="TextBox 41"/>
-          <p:cNvSpPr txBox="1"/>
-          <p:nvPr/>
-        </p:nvSpPr>
-        <p:spPr>
-          <a:xfrm>
-            <a:off x="5815584" y="3090672"/>
-            <a:ext cx="3054096" cy="256032"/>
-          </a:xfrm>
-          <a:prstGeom prst="rect">
-            <a:avLst/>
-          </a:prstGeom>
-          <a:noFill/>
-        </p:spPr>
-        <p:txBody>
-          <a:bodyPr wrap="square"/>
-          <a:lstStyle/>
-          <a:p>
-            <a:pPr algn="l"/>
-            <a:r>
-              <a:rPr sz="800" b="0" i="0">
-                <a:solidFill>
-                  <a:srgbClr val="1E293B"/>
-                </a:solidFill>
-                <a:latin typeface="Poppins"/>
-              </a:rPr>
-              <a:t>Fix on-page SEO title tag and H1 issues</a:t>
-            </a:r>
-          </a:p>
-        </p:txBody>
-      </p:sp>
-      <p:sp>
-        <p:nvSpPr>
-          <p:cNvPr id="43" name="Rectangle 42"/>
+          <p:cNvPr id="39" name="Rectangle 38"/>
           <p:cNvSpPr/>
           <p:nvPr/>
         </p:nvSpPr>
         <p:spPr>
           <a:xfrm>
-            <a:off x="4590288" y="3438144"/>
-            <a:ext cx="256032" cy="256032"/>
-          </a:xfrm>
-          <a:prstGeom prst="rect">
-            <a:avLst/>
-          </a:prstGeom>
-          <a:solidFill>
-            <a:srgbClr val="003A59"/>
+            <a:off x="4700016" y="2816352"/>
+            <a:ext cx="91440" cy="91440"/>
+          </a:xfrm>
+          <a:prstGeom prst="rect">
+            <a:avLst/>
+          </a:prstGeom>
+          <a:solidFill>
+            <a:srgbClr val="69CD2B"/>
           </a:solidFill>
           <a:ln>
             <a:solidFill>
@@ -10142,14 +10823,14 @@
       </p:sp>
       <p:sp>
         <p:nvSpPr>
-          <p:cNvPr id="44" name="TextBox 43"/>
+          <p:cNvPr id="40" name="TextBox 39"/>
           <p:cNvSpPr txBox="1"/>
           <p:nvPr/>
         </p:nvSpPr>
         <p:spPr>
           <a:xfrm>
-            <a:off x="4937760" y="3447287"/>
-            <a:ext cx="804672" cy="256032"/>
+            <a:off x="4901184" y="2784348"/>
+            <a:ext cx="685800" cy="164592"/>
           </a:xfrm>
           <a:prstGeom prst="rect">
             <a:avLst/>
@@ -10157,7 +10838,9 @@
           <a:noFill/>
         </p:spPr>
         <p:txBody>
-          <a:bodyPr wrap="square"/>
+          <a:bodyPr wrap="square">
+            <a:normAutofit/>
+          </a:bodyPr>
           <a:lstStyle/>
           <a:p>
             <a:pPr algn="l"/>
@@ -10168,21 +10851,21 @@
                 </a:solidFill>
                 <a:latin typeface="Poppins"/>
               </a:rPr>
-              <a:t>Week 2</a:t>
-            </a:r>
-          </a:p>
-        </p:txBody>
-      </p:sp>
-      <p:sp>
-        <p:nvSpPr>
-          <p:cNvPr id="45" name="TextBox 44"/>
+              <a:t>Day 1</a:t>
+            </a:r>
+          </a:p>
+        </p:txBody>
+      </p:sp>
+      <p:sp>
+        <p:nvSpPr>
+          <p:cNvPr id="41" name="TextBox 40"/>
           <p:cNvSpPr txBox="1"/>
           <p:nvPr/>
         </p:nvSpPr>
         <p:spPr>
           <a:xfrm>
-            <a:off x="5815584" y="3447287"/>
-            <a:ext cx="3054096" cy="256032"/>
+            <a:off x="5650992" y="2784348"/>
+            <a:ext cx="3063240" cy="164592"/>
           </a:xfrm>
           <a:prstGeom prst="rect">
             <a:avLst/>
@@ -10190,38 +10873,40 @@
           <a:noFill/>
         </p:spPr>
         <p:txBody>
-          <a:bodyPr wrap="square"/>
+          <a:bodyPr wrap="square">
+            <a:normAutofit/>
+          </a:bodyPr>
           <a:lstStyle/>
           <a:p>
             <a:pPr algn="l"/>
             <a:r>
               <a:rPr sz="800" b="0" i="0">
                 <a:solidFill>
-                  <a:srgbClr val="1E293B"/>
+                  <a:srgbClr val="4A5C6B"/>
                 </a:solidFill>
                 <a:latin typeface="Poppins"/>
               </a:rPr>
-              <a:t>Begin Family Law and Probate landing pages</a:t>
-            </a:r>
-          </a:p>
-        </p:txBody>
-      </p:sp>
-      <p:sp>
-        <p:nvSpPr>
-          <p:cNvPr id="46" name="Rectangle 45"/>
+              <a:t>Launch LSA for Family Law and Probate</a:t>
+            </a:r>
+          </a:p>
+        </p:txBody>
+      </p:sp>
+      <p:sp>
+        <p:nvSpPr>
+          <p:cNvPr id="42" name="Rectangle 41"/>
           <p:cNvSpPr/>
           <p:nvPr/>
         </p:nvSpPr>
         <p:spPr>
           <a:xfrm>
-            <a:off x="4590288" y="3794760"/>
-            <a:ext cx="256032" cy="256032"/>
-          </a:xfrm>
-          <a:prstGeom prst="rect">
-            <a:avLst/>
-          </a:prstGeom>
-          <a:solidFill>
-            <a:srgbClr val="003A59"/>
+            <a:off x="4572000" y="3026664"/>
+            <a:ext cx="4297680" cy="265176"/>
+          </a:xfrm>
+          <a:prstGeom prst="rect">
+            <a:avLst/>
+          </a:prstGeom>
+          <a:solidFill>
+            <a:srgbClr val="FFFFFF"/>
           </a:solidFill>
           <a:ln>
             <a:solidFill>
@@ -10253,86 +10938,20 @@
       </p:sp>
       <p:sp>
         <p:nvSpPr>
-          <p:cNvPr id="47" name="TextBox 46"/>
-          <p:cNvSpPr txBox="1"/>
-          <p:nvPr/>
-        </p:nvSpPr>
-        <p:spPr>
-          <a:xfrm>
-            <a:off x="4937760" y="3803904"/>
-            <a:ext cx="804672" cy="256032"/>
-          </a:xfrm>
-          <a:prstGeom prst="rect">
-            <a:avLst/>
-          </a:prstGeom>
-          <a:noFill/>
-        </p:spPr>
-        <p:txBody>
-          <a:bodyPr wrap="square"/>
-          <a:lstStyle/>
-          <a:p>
-            <a:pPr algn="l"/>
-            <a:r>
-              <a:rPr sz="800" b="1" i="0">
-                <a:solidFill>
-                  <a:srgbClr val="003A59"/>
-                </a:solidFill>
-                <a:latin typeface="Poppins"/>
-              </a:rPr>
-              <a:t>Week 3</a:t>
-            </a:r>
-          </a:p>
-        </p:txBody>
-      </p:sp>
-      <p:sp>
-        <p:nvSpPr>
-          <p:cNvPr id="48" name="TextBox 47"/>
-          <p:cNvSpPr txBox="1"/>
-          <p:nvPr/>
-        </p:nvSpPr>
-        <p:spPr>
-          <a:xfrm>
-            <a:off x="5815584" y="3803904"/>
-            <a:ext cx="3054096" cy="256032"/>
-          </a:xfrm>
-          <a:prstGeom prst="rect">
-            <a:avLst/>
-          </a:prstGeom>
-          <a:noFill/>
-        </p:spPr>
-        <p:txBody>
-          <a:bodyPr wrap="square"/>
-          <a:lstStyle/>
-          <a:p>
-            <a:pPr algn="l"/>
-            <a:r>
-              <a:rPr sz="800" b="0" i="0">
-                <a:solidFill>
-                  <a:srgbClr val="1E293B"/>
-                </a:solidFill>
-                <a:latin typeface="Poppins"/>
-              </a:rPr>
-              <a:t>Stand up lead tracking across referrals and ads</a:t>
-            </a:r>
-          </a:p>
-        </p:txBody>
-      </p:sp>
-      <p:sp>
-        <p:nvSpPr>
-          <p:cNvPr id="49" name="Rectangle 48"/>
+          <p:cNvPr id="43" name="Rectangle 42"/>
           <p:cNvSpPr/>
           <p:nvPr/>
         </p:nvSpPr>
         <p:spPr>
           <a:xfrm>
-            <a:off x="4590288" y="4151376"/>
-            <a:ext cx="256032" cy="256032"/>
-          </a:xfrm>
-          <a:prstGeom prst="rect">
-            <a:avLst/>
-          </a:prstGeom>
-          <a:solidFill>
-            <a:srgbClr val="003A59"/>
+            <a:off x="4700016" y="3108960"/>
+            <a:ext cx="91440" cy="91440"/>
+          </a:xfrm>
+          <a:prstGeom prst="rect">
+            <a:avLst/>
+          </a:prstGeom>
+          <a:solidFill>
+            <a:srgbClr val="0091C9"/>
           </a:solidFill>
           <a:ln>
             <a:solidFill>
@@ -10364,14 +10983,14 @@
       </p:sp>
       <p:sp>
         <p:nvSpPr>
-          <p:cNvPr id="50" name="TextBox 49"/>
+          <p:cNvPr id="44" name="TextBox 43"/>
           <p:cNvSpPr txBox="1"/>
           <p:nvPr/>
         </p:nvSpPr>
         <p:spPr>
           <a:xfrm>
-            <a:off x="4937760" y="4160520"/>
-            <a:ext cx="804672" cy="256032"/>
+            <a:off x="4901184" y="3076956"/>
+            <a:ext cx="685800" cy="164592"/>
           </a:xfrm>
           <a:prstGeom prst="rect">
             <a:avLst/>
@@ -10379,7 +10998,9 @@
           <a:noFill/>
         </p:spPr>
         <p:txBody>
-          <a:bodyPr wrap="square"/>
+          <a:bodyPr wrap="square">
+            <a:normAutofit/>
+          </a:bodyPr>
           <a:lstStyle/>
           <a:p>
             <a:pPr algn="l"/>
@@ -10390,21 +11011,21 @@
                 </a:solidFill>
                 <a:latin typeface="Poppins"/>
               </a:rPr>
-              <a:t>Month 3</a:t>
-            </a:r>
-          </a:p>
-        </p:txBody>
-      </p:sp>
-      <p:sp>
-        <p:nvSpPr>
-          <p:cNvPr id="51" name="TextBox 50"/>
+              <a:t>Day 14</a:t>
+            </a:r>
+          </a:p>
+        </p:txBody>
+      </p:sp>
+      <p:sp>
+        <p:nvSpPr>
+          <p:cNvPr id="45" name="TextBox 44"/>
           <p:cNvSpPr txBox="1"/>
           <p:nvPr/>
         </p:nvSpPr>
         <p:spPr>
           <a:xfrm>
-            <a:off x="5815584" y="4160520"/>
-            <a:ext cx="3054096" cy="256032"/>
+            <a:off x="5650992" y="3076956"/>
+            <a:ext cx="3063240" cy="164592"/>
           </a:xfrm>
           <a:prstGeom prst="rect">
             <a:avLst/>
@@ -10412,38 +11033,40 @@
           <a:noFill/>
         </p:spPr>
         <p:txBody>
-          <a:bodyPr wrap="square"/>
+          <a:bodyPr wrap="square">
+            <a:normAutofit/>
+          </a:bodyPr>
           <a:lstStyle/>
           <a:p>
             <a:pPr algn="l"/>
             <a:r>
               <a:rPr sz="800" b="0" i="0">
                 <a:solidFill>
-                  <a:srgbClr val="1E293B"/>
+                  <a:srgbClr val="4A5C6B"/>
                 </a:solidFill>
                 <a:latin typeface="Poppins"/>
               </a:rPr>
-              <a:t>Add PPC, scaling total ad spend to $7,500/mo</a:t>
-            </a:r>
-          </a:p>
-        </p:txBody>
-      </p:sp>
-      <p:sp>
-        <p:nvSpPr>
-          <p:cNvPr id="52" name="Rectangle 51"/>
+              <a:t>Fix on-page SEO title tag and H1 issues</a:t>
+            </a:r>
+          </a:p>
+        </p:txBody>
+      </p:sp>
+      <p:sp>
+        <p:nvSpPr>
+          <p:cNvPr id="46" name="Rectangle 45"/>
           <p:cNvSpPr/>
           <p:nvPr/>
         </p:nvSpPr>
         <p:spPr>
           <a:xfrm>
-            <a:off x="0" y="4425696"/>
-            <a:ext cx="9144000" cy="402336"/>
-          </a:xfrm>
-          <a:prstGeom prst="rect">
-            <a:avLst/>
-          </a:prstGeom>
-          <a:solidFill>
-            <a:srgbClr val="003A59"/>
+            <a:off x="4572000" y="3310128"/>
+            <a:ext cx="4297680" cy="265176"/>
+          </a:xfrm>
+          <a:prstGeom prst="rect">
+            <a:avLst/>
+          </a:prstGeom>
+          <a:solidFill>
+            <a:srgbClr val="EEF2F5"/>
           </a:solidFill>
           <a:ln>
             <a:solidFill>
@@ -10475,53 +11098,20 @@
       </p:sp>
       <p:sp>
         <p:nvSpPr>
-          <p:cNvPr id="53" name="TextBox 52"/>
-          <p:cNvSpPr txBox="1"/>
-          <p:nvPr/>
-        </p:nvSpPr>
-        <p:spPr>
-          <a:xfrm>
-            <a:off x="274320" y="4425696"/>
-            <a:ext cx="8595360" cy="402336"/>
-          </a:xfrm>
-          <a:prstGeom prst="rect">
-            <a:avLst/>
-          </a:prstGeom>
-          <a:noFill/>
-        </p:spPr>
-        <p:txBody>
-          <a:bodyPr wrap="square"/>
-          <a:lstStyle/>
-          <a:p>
-            <a:pPr algn="ctr"/>
-            <a:r>
-              <a:rPr sz="900" b="0" i="1">
-                <a:solidFill>
-                  <a:srgbClr val="8BADD0"/>
-                </a:solidFill>
-                <a:latin typeface="Poppins"/>
-              </a:rPr>
-              <a:t>"Your father built a name that has carried this firm for 35 years — now build the system that lets it carry the next generation, too."</a:t>
-            </a:r>
-          </a:p>
-        </p:txBody>
-      </p:sp>
-      <p:sp>
-        <p:nvSpPr>
-          <p:cNvPr id="54" name="Rectangle 53"/>
+          <p:cNvPr id="47" name="Rectangle 46"/>
           <p:cNvSpPr/>
           <p:nvPr/>
         </p:nvSpPr>
         <p:spPr>
           <a:xfrm>
-            <a:off x="0" y="4828032"/>
-            <a:ext cx="9144000" cy="320040"/>
-          </a:xfrm>
-          <a:prstGeom prst="rect">
-            <a:avLst/>
-          </a:prstGeom>
-          <a:solidFill>
-            <a:srgbClr val="003A59"/>
+            <a:off x="4700016" y="3392424"/>
+            <a:ext cx="91440" cy="91440"/>
+          </a:xfrm>
+          <a:prstGeom prst="rect">
+            <a:avLst/>
+          </a:prstGeom>
+          <a:solidFill>
+            <a:srgbClr val="0091C9"/>
           </a:solidFill>
           <a:ln>
             <a:solidFill>
@@ -10551,9 +11141,569 @@
           </a:p>
         </p:txBody>
       </p:sp>
+      <p:sp>
+        <p:nvSpPr>
+          <p:cNvPr id="48" name="TextBox 47"/>
+          <p:cNvSpPr txBox="1"/>
+          <p:nvPr/>
+        </p:nvSpPr>
+        <p:spPr>
+          <a:xfrm>
+            <a:off x="4901184" y="3360420"/>
+            <a:ext cx="685800" cy="164592"/>
+          </a:xfrm>
+          <a:prstGeom prst="rect">
+            <a:avLst/>
+          </a:prstGeom>
+          <a:noFill/>
+        </p:spPr>
+        <p:txBody>
+          <a:bodyPr wrap="square">
+            <a:normAutofit/>
+          </a:bodyPr>
+          <a:lstStyle/>
+          <a:p>
+            <a:pPr algn="l"/>
+            <a:r>
+              <a:rPr sz="800" b="1" i="0">
+                <a:solidFill>
+                  <a:srgbClr val="003A59"/>
+                </a:solidFill>
+                <a:latin typeface="Poppins"/>
+              </a:rPr>
+              <a:t>Week 2</a:t>
+            </a:r>
+          </a:p>
+        </p:txBody>
+      </p:sp>
+      <p:sp>
+        <p:nvSpPr>
+          <p:cNvPr id="49" name="TextBox 48"/>
+          <p:cNvSpPr txBox="1"/>
+          <p:nvPr/>
+        </p:nvSpPr>
+        <p:spPr>
+          <a:xfrm>
+            <a:off x="5650992" y="3360420"/>
+            <a:ext cx="3063240" cy="164592"/>
+          </a:xfrm>
+          <a:prstGeom prst="rect">
+            <a:avLst/>
+          </a:prstGeom>
+          <a:noFill/>
+        </p:spPr>
+        <p:txBody>
+          <a:bodyPr wrap="square">
+            <a:normAutofit/>
+          </a:bodyPr>
+          <a:lstStyle/>
+          <a:p>
+            <a:pPr algn="l"/>
+            <a:r>
+              <a:rPr sz="800" b="0" i="0">
+                <a:solidFill>
+                  <a:srgbClr val="4A5C6B"/>
+                </a:solidFill>
+                <a:latin typeface="Poppins"/>
+              </a:rPr>
+              <a:t>Begin Family Law and Probate landing pages</a:t>
+            </a:r>
+          </a:p>
+        </p:txBody>
+      </p:sp>
+      <p:sp>
+        <p:nvSpPr>
+          <p:cNvPr id="50" name="Rectangle 49"/>
+          <p:cNvSpPr/>
+          <p:nvPr/>
+        </p:nvSpPr>
+        <p:spPr>
+          <a:xfrm>
+            <a:off x="4572000" y="3602736"/>
+            <a:ext cx="4297680" cy="265176"/>
+          </a:xfrm>
+          <a:prstGeom prst="rect">
+            <a:avLst/>
+          </a:prstGeom>
+          <a:solidFill>
+            <a:srgbClr val="FFFFFF"/>
+          </a:solidFill>
+          <a:ln>
+            <a:solidFill>
+              <a:srgbClr val="FFFFFF"/>
+            </a:solidFill>
+          </a:ln>
+        </p:spPr>
+        <p:style>
+          <a:lnRef idx="1">
+            <a:schemeClr val="accent1"/>
+          </a:lnRef>
+          <a:fillRef idx="3">
+            <a:schemeClr val="accent1"/>
+          </a:fillRef>
+          <a:effectRef idx="2">
+            <a:schemeClr val="accent1"/>
+          </a:effectRef>
+          <a:fontRef idx="minor">
+            <a:schemeClr val="lt1"/>
+          </a:fontRef>
+        </p:style>
+        <p:txBody>
+          <a:bodyPr rtlCol="0" anchor="ctr"/>
+          <a:lstStyle/>
+          <a:p>
+            <a:pPr algn="ctr"/>
+          </a:p>
+        </p:txBody>
+      </p:sp>
+      <p:sp>
+        <p:nvSpPr>
+          <p:cNvPr id="51" name="Rectangle 50"/>
+          <p:cNvSpPr/>
+          <p:nvPr/>
+        </p:nvSpPr>
+        <p:spPr>
+          <a:xfrm>
+            <a:off x="4700016" y="3685032"/>
+            <a:ext cx="91440" cy="91440"/>
+          </a:xfrm>
+          <a:prstGeom prst="rect">
+            <a:avLst/>
+          </a:prstGeom>
+          <a:solidFill>
+            <a:srgbClr val="0091C9"/>
+          </a:solidFill>
+          <a:ln>
+            <a:solidFill>
+              <a:srgbClr val="FFFFFF"/>
+            </a:solidFill>
+          </a:ln>
+        </p:spPr>
+        <p:style>
+          <a:lnRef idx="1">
+            <a:schemeClr val="accent1"/>
+          </a:lnRef>
+          <a:fillRef idx="3">
+            <a:schemeClr val="accent1"/>
+          </a:fillRef>
+          <a:effectRef idx="2">
+            <a:schemeClr val="accent1"/>
+          </a:effectRef>
+          <a:fontRef idx="minor">
+            <a:schemeClr val="lt1"/>
+          </a:fontRef>
+        </p:style>
+        <p:txBody>
+          <a:bodyPr rtlCol="0" anchor="ctr"/>
+          <a:lstStyle/>
+          <a:p>
+            <a:pPr algn="ctr"/>
+          </a:p>
+        </p:txBody>
+      </p:sp>
+      <p:sp>
+        <p:nvSpPr>
+          <p:cNvPr id="52" name="TextBox 51"/>
+          <p:cNvSpPr txBox="1"/>
+          <p:nvPr/>
+        </p:nvSpPr>
+        <p:spPr>
+          <a:xfrm>
+            <a:off x="4901184" y="3653028"/>
+            <a:ext cx="685800" cy="164592"/>
+          </a:xfrm>
+          <a:prstGeom prst="rect">
+            <a:avLst/>
+          </a:prstGeom>
+          <a:noFill/>
+        </p:spPr>
+        <p:txBody>
+          <a:bodyPr wrap="square">
+            <a:normAutofit/>
+          </a:bodyPr>
+          <a:lstStyle/>
+          <a:p>
+            <a:pPr algn="l"/>
+            <a:r>
+              <a:rPr sz="800" b="1" i="0">
+                <a:solidFill>
+                  <a:srgbClr val="003A59"/>
+                </a:solidFill>
+                <a:latin typeface="Poppins"/>
+              </a:rPr>
+              <a:t>Week 3</a:t>
+            </a:r>
+          </a:p>
+        </p:txBody>
+      </p:sp>
+      <p:sp>
+        <p:nvSpPr>
+          <p:cNvPr id="53" name="TextBox 52"/>
+          <p:cNvSpPr txBox="1"/>
+          <p:nvPr/>
+        </p:nvSpPr>
+        <p:spPr>
+          <a:xfrm>
+            <a:off x="5650992" y="3653028"/>
+            <a:ext cx="3063240" cy="164592"/>
+          </a:xfrm>
+          <a:prstGeom prst="rect">
+            <a:avLst/>
+          </a:prstGeom>
+          <a:noFill/>
+        </p:spPr>
+        <p:txBody>
+          <a:bodyPr wrap="square">
+            <a:normAutofit/>
+          </a:bodyPr>
+          <a:lstStyle/>
+          <a:p>
+            <a:pPr algn="l"/>
+            <a:r>
+              <a:rPr sz="800" b="0" i="0">
+                <a:solidFill>
+                  <a:srgbClr val="4A5C6B"/>
+                </a:solidFill>
+                <a:latin typeface="Poppins"/>
+              </a:rPr>
+              <a:t>Stand up lead tracking across referrals and ads</a:t>
+            </a:r>
+          </a:p>
+        </p:txBody>
+      </p:sp>
+      <p:sp>
+        <p:nvSpPr>
+          <p:cNvPr id="54" name="Rectangle 53"/>
+          <p:cNvSpPr/>
+          <p:nvPr/>
+        </p:nvSpPr>
+        <p:spPr>
+          <a:xfrm>
+            <a:off x="4572000" y="3886200"/>
+            <a:ext cx="4297680" cy="265176"/>
+          </a:xfrm>
+          <a:prstGeom prst="rect">
+            <a:avLst/>
+          </a:prstGeom>
+          <a:solidFill>
+            <a:srgbClr val="EEF2F5"/>
+          </a:solidFill>
+          <a:ln>
+            <a:solidFill>
+              <a:srgbClr val="FFFFFF"/>
+            </a:solidFill>
+          </a:ln>
+        </p:spPr>
+        <p:style>
+          <a:lnRef idx="1">
+            <a:schemeClr val="accent1"/>
+          </a:lnRef>
+          <a:fillRef idx="3">
+            <a:schemeClr val="accent1"/>
+          </a:fillRef>
+          <a:effectRef idx="2">
+            <a:schemeClr val="accent1"/>
+          </a:effectRef>
+          <a:fontRef idx="minor">
+            <a:schemeClr val="lt1"/>
+          </a:fontRef>
+        </p:style>
+        <p:txBody>
+          <a:bodyPr rtlCol="0" anchor="ctr"/>
+          <a:lstStyle/>
+          <a:p>
+            <a:pPr algn="ctr"/>
+          </a:p>
+        </p:txBody>
+      </p:sp>
+      <p:sp>
+        <p:nvSpPr>
+          <p:cNvPr id="55" name="Rectangle 54"/>
+          <p:cNvSpPr/>
+          <p:nvPr/>
+        </p:nvSpPr>
+        <p:spPr>
+          <a:xfrm>
+            <a:off x="4700016" y="3968496"/>
+            <a:ext cx="91440" cy="91440"/>
+          </a:xfrm>
+          <a:prstGeom prst="rect">
+            <a:avLst/>
+          </a:prstGeom>
+          <a:solidFill>
+            <a:srgbClr val="0091C9"/>
+          </a:solidFill>
+          <a:ln>
+            <a:solidFill>
+              <a:srgbClr val="FFFFFF"/>
+            </a:solidFill>
+          </a:ln>
+        </p:spPr>
+        <p:style>
+          <a:lnRef idx="1">
+            <a:schemeClr val="accent1"/>
+          </a:lnRef>
+          <a:fillRef idx="3">
+            <a:schemeClr val="accent1"/>
+          </a:fillRef>
+          <a:effectRef idx="2">
+            <a:schemeClr val="accent1"/>
+          </a:effectRef>
+          <a:fontRef idx="minor">
+            <a:schemeClr val="lt1"/>
+          </a:fontRef>
+        </p:style>
+        <p:txBody>
+          <a:bodyPr rtlCol="0" anchor="ctr"/>
+          <a:lstStyle/>
+          <a:p>
+            <a:pPr algn="ctr"/>
+          </a:p>
+        </p:txBody>
+      </p:sp>
+      <p:sp>
+        <p:nvSpPr>
+          <p:cNvPr id="56" name="TextBox 55"/>
+          <p:cNvSpPr txBox="1"/>
+          <p:nvPr/>
+        </p:nvSpPr>
+        <p:spPr>
+          <a:xfrm>
+            <a:off x="4901184" y="3936491"/>
+            <a:ext cx="685800" cy="164592"/>
+          </a:xfrm>
+          <a:prstGeom prst="rect">
+            <a:avLst/>
+          </a:prstGeom>
+          <a:noFill/>
+        </p:spPr>
+        <p:txBody>
+          <a:bodyPr wrap="square">
+            <a:normAutofit/>
+          </a:bodyPr>
+          <a:lstStyle/>
+          <a:p>
+            <a:pPr algn="l"/>
+            <a:r>
+              <a:rPr sz="800" b="1" i="0">
+                <a:solidFill>
+                  <a:srgbClr val="003A59"/>
+                </a:solidFill>
+                <a:latin typeface="Poppins"/>
+              </a:rPr>
+              <a:t>Month 3</a:t>
+            </a:r>
+          </a:p>
+        </p:txBody>
+      </p:sp>
+      <p:sp>
+        <p:nvSpPr>
+          <p:cNvPr id="57" name="TextBox 56"/>
+          <p:cNvSpPr txBox="1"/>
+          <p:nvPr/>
+        </p:nvSpPr>
+        <p:spPr>
+          <a:xfrm>
+            <a:off x="5650992" y="3936491"/>
+            <a:ext cx="3063240" cy="164592"/>
+          </a:xfrm>
+          <a:prstGeom prst="rect">
+            <a:avLst/>
+          </a:prstGeom>
+          <a:noFill/>
+        </p:spPr>
+        <p:txBody>
+          <a:bodyPr wrap="square">
+            <a:normAutofit/>
+          </a:bodyPr>
+          <a:lstStyle/>
+          <a:p>
+            <a:pPr algn="l"/>
+            <a:r>
+              <a:rPr sz="800" b="0" i="0">
+                <a:solidFill>
+                  <a:srgbClr val="4A5C6B"/>
+                </a:solidFill>
+                <a:latin typeface="Poppins"/>
+              </a:rPr>
+              <a:t>Add PPC, scaling total ad spend to $7,500/mo</a:t>
+            </a:r>
+          </a:p>
+        </p:txBody>
+      </p:sp>
+      <p:sp>
+        <p:nvSpPr>
+          <p:cNvPr id="58" name="Rectangle 57"/>
+          <p:cNvSpPr/>
+          <p:nvPr/>
+        </p:nvSpPr>
+        <p:spPr>
+          <a:xfrm>
+            <a:off x="0" y="4261104"/>
+            <a:ext cx="9144000" cy="557784"/>
+          </a:xfrm>
+          <a:prstGeom prst="rect">
+            <a:avLst/>
+          </a:prstGeom>
+          <a:solidFill>
+            <a:srgbClr val="002A41"/>
+          </a:solidFill>
+          <a:ln>
+            <a:solidFill>
+              <a:srgbClr val="FFFFFF"/>
+            </a:solidFill>
+          </a:ln>
+        </p:spPr>
+        <p:style>
+          <a:lnRef idx="1">
+            <a:schemeClr val="accent1"/>
+          </a:lnRef>
+          <a:fillRef idx="3">
+            <a:schemeClr val="accent1"/>
+          </a:fillRef>
+          <a:effectRef idx="2">
+            <a:schemeClr val="accent1"/>
+          </a:effectRef>
+          <a:fontRef idx="minor">
+            <a:schemeClr val="lt1"/>
+          </a:fontRef>
+        </p:style>
+        <p:txBody>
+          <a:bodyPr rtlCol="0" anchor="ctr"/>
+          <a:lstStyle/>
+          <a:p>
+            <a:pPr algn="ctr"/>
+          </a:p>
+        </p:txBody>
+      </p:sp>
+      <p:sp>
+        <p:nvSpPr>
+          <p:cNvPr id="59" name="Rectangle 58"/>
+          <p:cNvSpPr/>
+          <p:nvPr/>
+        </p:nvSpPr>
+        <p:spPr>
+          <a:xfrm>
+            <a:off x="0" y="4261104"/>
+            <a:ext cx="9144000" cy="18288"/>
+          </a:xfrm>
+          <a:prstGeom prst="rect">
+            <a:avLst/>
+          </a:prstGeom>
+          <a:solidFill>
+            <a:srgbClr val="69CD2B"/>
+          </a:solidFill>
+          <a:ln>
+            <a:solidFill>
+              <a:srgbClr val="FFFFFF"/>
+            </a:solidFill>
+          </a:ln>
+        </p:spPr>
+        <p:style>
+          <a:lnRef idx="1">
+            <a:schemeClr val="accent1"/>
+          </a:lnRef>
+          <a:fillRef idx="3">
+            <a:schemeClr val="accent1"/>
+          </a:fillRef>
+          <a:effectRef idx="2">
+            <a:schemeClr val="accent1"/>
+          </a:effectRef>
+          <a:fontRef idx="minor">
+            <a:schemeClr val="lt1"/>
+          </a:fontRef>
+        </p:style>
+        <p:txBody>
+          <a:bodyPr rtlCol="0" anchor="ctr"/>
+          <a:lstStyle/>
+          <a:p>
+            <a:pPr algn="ctr"/>
+          </a:p>
+        </p:txBody>
+      </p:sp>
+      <p:sp>
+        <p:nvSpPr>
+          <p:cNvPr id="60" name="TextBox 59"/>
+          <p:cNvSpPr txBox="1"/>
+          <p:nvPr/>
+        </p:nvSpPr>
+        <p:spPr>
+          <a:xfrm>
+            <a:off x="640080" y="4407408"/>
+            <a:ext cx="7863840" cy="310896"/>
+          </a:xfrm>
+          <a:prstGeom prst="rect">
+            <a:avLst/>
+          </a:prstGeom>
+          <a:noFill/>
+        </p:spPr>
+        <p:txBody>
+          <a:bodyPr wrap="square">
+            <a:normAutofit/>
+          </a:bodyPr>
+          <a:lstStyle/>
+          <a:p>
+            <a:pPr algn="ctr"/>
+            <a:r>
+              <a:rPr sz="950" b="0" i="0">
+                <a:solidFill>
+                  <a:srgbClr val="C2D8E6"/>
+                </a:solidFill>
+                <a:latin typeface="Poppins"/>
+              </a:rPr>
+              <a:t>"Your father built a name that has carried this firm for 35 years — now build the system that lets it carry the next generation, too."</a:t>
+            </a:r>
+          </a:p>
+        </p:txBody>
+      </p:sp>
+      <p:sp>
+        <p:nvSpPr>
+          <p:cNvPr id="61" name="Rectangle 60"/>
+          <p:cNvSpPr/>
+          <p:nvPr/>
+        </p:nvSpPr>
+        <p:spPr>
+          <a:xfrm>
+            <a:off x="0" y="4818888"/>
+            <a:ext cx="9144000" cy="320040"/>
+          </a:xfrm>
+          <a:prstGeom prst="rect">
+            <a:avLst/>
+          </a:prstGeom>
+          <a:solidFill>
+            <a:srgbClr val="003A59"/>
+          </a:solidFill>
+          <a:ln>
+            <a:solidFill>
+              <a:srgbClr val="FFFFFF"/>
+            </a:solidFill>
+          </a:ln>
+        </p:spPr>
+        <p:style>
+          <a:lnRef idx="1">
+            <a:schemeClr val="accent1"/>
+          </a:lnRef>
+          <a:fillRef idx="3">
+            <a:schemeClr val="accent1"/>
+          </a:fillRef>
+          <a:effectRef idx="2">
+            <a:schemeClr val="accent1"/>
+          </a:effectRef>
+          <a:fontRef idx="minor">
+            <a:schemeClr val="lt1"/>
+          </a:fontRef>
+        </p:style>
+        <p:txBody>
+          <a:bodyPr rtlCol="0" anchor="ctr"/>
+          <a:lstStyle/>
+          <a:p>
+            <a:pPr algn="ctr"/>
+          </a:p>
+        </p:txBody>
+      </p:sp>
       <p:pic>
         <p:nvPicPr>
-          <p:cNvPr id="55" name="Picture 54" descr="smb_team_logo.png"/>
+          <p:cNvPr id="62" name="Picture 61" descr="smb_team_logo.png"/>
           <p:cNvPicPr>
             <a:picLocks noChangeAspect="1"/>
           </p:cNvPicPr>
@@ -10567,8 +11717,8 @@
         </p:blipFill>
         <p:spPr>
           <a:xfrm>
-            <a:off x="201168" y="4837176"/>
-            <a:ext cx="1170432" cy="237744"/>
+            <a:off x="274320" y="4873752"/>
+            <a:ext cx="941832" cy="192024"/>
           </a:xfrm>
           <a:prstGeom prst="rect">
             <a:avLst/>
@@ -10577,14 +11727,14 @@
       </p:pic>
       <p:sp>
         <p:nvSpPr>
-          <p:cNvPr id="56" name="TextBox 55"/>
+          <p:cNvPr id="63" name="TextBox 62"/>
           <p:cNvSpPr txBox="1"/>
           <p:nvPr/>
         </p:nvSpPr>
         <p:spPr>
           <a:xfrm>
-            <a:off x="1609344" y="4837176"/>
-            <a:ext cx="5303520" cy="274320"/>
+            <a:off x="1417320" y="4892040"/>
+            <a:ext cx="4937760" cy="182880"/>
           </a:xfrm>
           <a:prstGeom prst="rect">
             <a:avLst/>
@@ -10592,32 +11742,34 @@
           <a:noFill/>
         </p:spPr>
         <p:txBody>
-          <a:bodyPr wrap="square"/>
+          <a:bodyPr wrap="square">
+            <a:normAutofit/>
+          </a:bodyPr>
           <a:lstStyle/>
           <a:p>
             <a:pPr algn="l"/>
             <a:r>
-              <a:rPr sz="800" b="0" i="0">
-                <a:solidFill>
-                  <a:srgbClr val="5A7A9A"/>
+              <a:rPr sz="700" b="0" i="0">
+                <a:solidFill>
+                  <a:srgbClr val="8FB2C6"/>
                 </a:solidFill>
                 <a:latin typeface="Poppins"/>
               </a:rPr>
-              <a:t>CONFIDENTIAL  ·  Prepared by Dan Bryant | SMB Team</a:t>
-            </a:r>
-          </a:p>
-        </p:txBody>
-      </p:sp>
-      <p:sp>
-        <p:nvSpPr>
-          <p:cNvPr id="57" name="TextBox 56"/>
+              <a:t>CONFIDENTIAL  ·  PREPARED BY DAN BRYANT | SMB TEAM</a:t>
+            </a:r>
+          </a:p>
+        </p:txBody>
+      </p:sp>
+      <p:sp>
+        <p:nvSpPr>
+          <p:cNvPr id="64" name="TextBox 63"/>
           <p:cNvSpPr txBox="1"/>
           <p:nvPr/>
         </p:nvSpPr>
         <p:spPr>
           <a:xfrm>
-            <a:off x="8138160" y="4837176"/>
-            <a:ext cx="786384" cy="274320"/>
+            <a:off x="7680960" y="4892040"/>
+            <a:ext cx="1188720" cy="182880"/>
           </a:xfrm>
           <a:prstGeom prst="rect">
             <a:avLst/>
@@ -10625,14 +11777,16 @@
           <a:noFill/>
         </p:spPr>
         <p:txBody>
-          <a:bodyPr wrap="square"/>
+          <a:bodyPr wrap="square">
+            <a:normAutofit/>
+          </a:bodyPr>
           <a:lstStyle/>
           <a:p>
             <a:pPr algn="r"/>
             <a:r>
-              <a:rPr sz="800" b="0" i="0">
-                <a:solidFill>
-                  <a:srgbClr val="5A7A9A"/>
+              <a:rPr sz="700" b="0" i="0">
+                <a:solidFill>
+                  <a:srgbClr val="8FB2C6"/>
                 </a:solidFill>
                 <a:latin typeface="Poppins"/>
               </a:rPr>
